--- a/dist/weeks-대학원/컨셉트와프로세스_07주차_프로포절쓰기.pptx
+++ b/dist/weeks-대학원/컨셉트와프로세스_07주차_프로포절쓰기.pptx
@@ -1611,7 +1611,7 @@
 반대도 있어요. 방법은 촘촘한데 그걸로 그 질문에 답이 안 되는 경우.
 오늘 마지막에 이걸 확인하겠습니다.
 [운영 메모]
-②와 ⑤가 맞물려야 한다는 것을 여기서 한 번, 마지막 확인에서 또 한 번 말할 것. '질문이 크고 방법이 작다'가 가장 흔한 실패다.</a:t>
+교수님이 주신 문장을 sub 에 그대로 넣었다(2026-10-06). 이 회차의 과제 문구이자 어투 기준이다. ②와 ⑤가 맞물려야 한다는 것을 여기서 한 번, 마지막 확인에서 또 한 번 말할 것 — '질문이 크고 방법이 작다'가 가장 흔한 실패다.</a:t>
             </a:r>
             <a:endParaRPr lang="en-US" dirty="0"/>
           </a:p>
@@ -2893,7 +2893,7 @@
                 <a:ea typeface="Pretendard SemiBold" pitchFamily="34" charset="-122"/>
                 <a:cs typeface="Pretendard SemiBold" pitchFamily="34" charset="-120"/>
               </a:rPr>
-              <a:t>프로포절 쓰기 — 여섯 절을 채운다</a:t>
+              <a:t>프로포절 쓰기 — 6개 가이드를 채운다</a:t>
             </a:r>
             <a:endParaRPr lang="en-US" sz="4000" dirty="0"/>
           </a:p>
@@ -2935,7 +2935,7 @@
                 <a:ea typeface="Pretendard Light" pitchFamily="34" charset="-122"/>
                 <a:cs typeface="Pretendard Light" pitchFamily="34" charset="-120"/>
               </a:rPr>
-              <a:t>프로포절의 여섯 절이 각각 무엇에 답하는 자리인지 알고,</a:t>
+              <a:t>6개의 프로포절 작성 가이드에 맞춰</a:t>
             </a:r>
             <a:endParaRPr lang="en-US" sz="1600" dirty="0"/>
           </a:p>
@@ -2955,7 +2955,7 @@
                 <a:ea typeface="Pretendard Light" pitchFamily="34" charset="-122"/>
                 <a:cs typeface="Pretendard Light" pitchFamily="34" charset="-120"/>
               </a:rPr>
-              <a:t>내 주제로 한 문장씩 실제로 써 봅니다.</a:t>
+              <a:t>앞으로 쓸 논문의 주제와 관련하여 한 문장씩 써 봅니다.</a:t>
             </a:r>
             <a:endParaRPr lang="en-US" sz="1600" dirty="0"/>
           </a:p>
@@ -3136,7 +3136,7 @@
                 <a:ea typeface="Pretendard" pitchFamily="34" charset="-122"/>
                 <a:cs typeface="Pretendard" pitchFamily="34" charset="-120"/>
               </a:rPr>
-              <a:t>프로포절 드래프트 — 여섯 절</a:t>
+              <a:t>프로포절 드래프트 — 6개 절</a:t>
             </a:r>
             <a:endParaRPr lang="en-US" sz="1200" dirty="0"/>
           </a:p>
@@ -3491,7 +3491,7 @@
                 <a:ea typeface="Pretendard" pitchFamily="34" charset="-122"/>
                 <a:cs typeface="Pretendard" pitchFamily="34" charset="-120"/>
               </a:rPr>
-              <a:t>10분. 질문 하나와 가설 하나.</a:t>
+              <a:t>앞으로 쓸 논문의 주제와 관련하여 질문 하나와 가설 하나를 써 봅니다. 10분.</a:t>
             </a:r>
             <a:endParaRPr lang="en-US" sz="1150" dirty="0"/>
           </a:p>
@@ -3905,7 +3905,7 @@
                 <a:ea typeface="Pretendard" pitchFamily="34" charset="-122"/>
                 <a:cs typeface="Pretendard" pitchFamily="34" charset="-120"/>
               </a:rPr>
-              <a:t>'왜냐하면' 뒤가 비면 찍은 것입니다</a:t>
+              <a:t>'왜냐하면' 뒤가 비어 있으면 찍은 것입니다</a:t>
             </a:r>
             <a:endParaRPr lang="en-US" sz="1200" dirty="0"/>
           </a:p>
@@ -3992,7 +3992,7 @@
                 <a:ea typeface="Pretendard" pitchFamily="34" charset="-122"/>
                 <a:cs typeface="Pretendard" pitchFamily="34" charset="-120"/>
               </a:rPr>
-              <a:t>질문과 가설을 나란히 놓고 읽어 보세요. 가설이 질문에 대한 답의 모양이어야 합니다.</a:t>
+              <a:t>질문과 가설을 나란히 놓고 읽어 봅니다. 가설은 질문에 대한 답의 모양입니다.</a:t>
             </a:r>
             <a:endParaRPr lang="en-US" sz="1200" dirty="0"/>
           </a:p>
@@ -4056,7 +4056,7 @@
                 <a:ea typeface="Pretendard" pitchFamily="34" charset="-122"/>
                 <a:cs typeface="Pretendard" pitchFamily="34" charset="-120"/>
               </a:rPr>
-              <a:t>컨셉트와 프로세스 · 7주차 프로포절 쓰기 — 여섯 절을 채운다</a:t>
+              <a:t>컨셉트와 프로세스 · 7주차 프로포절 쓰기 — 6개 가이드를 채운다</a:t>
             </a:r>
             <a:endParaRPr lang="en-US" sz="850" dirty="0"/>
           </a:p>
@@ -5845,7 +5845,7 @@
                 <a:ea typeface="Pretendard" pitchFamily="34" charset="-122"/>
                 <a:cs typeface="Pretendard" pitchFamily="34" charset="-120"/>
               </a:rPr>
-              <a:t>셋째 줄이 없으면 선행연구 절이 떠 있게 됩니다. '그래서 이 연구는'으로 끝내십시오.</a:t>
+              <a:t>셋째 줄이 없으면 선행연구 절이 떠 있게 됩니다. '그래서 이 연구는'으로 끝냅니다.</a:t>
             </a:r>
             <a:endParaRPr lang="en-US" sz="1300" dirty="0"/>
           </a:p>
@@ -5909,7 +5909,7 @@
                 <a:ea typeface="Pretendard" pitchFamily="34" charset="-122"/>
                 <a:cs typeface="Pretendard" pitchFamily="34" charset="-120"/>
               </a:rPr>
-              <a:t>컨셉트와 프로세스 · 7주차 프로포절 쓰기 — 여섯 절을 채운다</a:t>
+              <a:t>컨셉트와 프로세스 · 7주차 프로포절 쓰기 — 6개 가이드를 채운다</a:t>
             </a:r>
             <a:endParaRPr lang="en-US" sz="850" dirty="0"/>
           </a:p>
@@ -7762,7 +7762,7 @@
                 <a:ea typeface="Pretendard" pitchFamily="34" charset="-122"/>
                 <a:cs typeface="Pretendard" pitchFamily="34" charset="-120"/>
               </a:rPr>
-              <a:t>컨셉트와 프로세스 · 7주차 프로포절 쓰기 — 여섯 절을 채운다</a:t>
+              <a:t>컨셉트와 프로세스 · 7주차 프로포절 쓰기 — 6개 가이드를 채운다</a:t>
             </a:r>
             <a:endParaRPr lang="en-US" sz="850" dirty="0"/>
           </a:p>
@@ -8092,7 +8092,7 @@
                 <a:ea typeface="Pretendard" pitchFamily="34" charset="-122"/>
                 <a:cs typeface="Pretendard" pitchFamily="34" charset="-120"/>
               </a:rPr>
-              <a:t>10분. 방법 네 칸을 채우고 기여 한 문장.</a:t>
+              <a:t>방법 네 칸을 채우고 기여를 한 문장으로 써 봅니다. 10분.</a:t>
             </a:r>
             <a:endParaRPr lang="en-US" sz="1150" dirty="0"/>
           </a:p>
@@ -8506,7 +8506,7 @@
                 <a:ea typeface="Pretendard" pitchFamily="34" charset="-122"/>
                 <a:cs typeface="Pretendard" pitchFamily="34" charset="-120"/>
               </a:rPr>
-              <a:t>크게 쓰지 마십시오 — '전통시장을 살린다'는 안 됩니다</a:t>
+              <a:t>크게 쓰지 않습니다 — '전통시장을 살린다'는 안 됩니다</a:t>
             </a:r>
             <a:endParaRPr lang="en-US" sz="1200" dirty="0"/>
           </a:p>
@@ -8545,7 +8545,7 @@
                 <a:ea typeface="Pretendard" pitchFamily="34" charset="-122"/>
                 <a:cs typeface="Pretendard" pitchFamily="34" charset="-120"/>
               </a:rPr>
-              <a:t>기여가 안 써지면 질문으로 돌아가십시오. 둘은 같은 것을 앞뒤로 말한 것입니다.</a:t>
+              <a:t>기여가 써지지 않으면 질문으로 돌아갑니다. 둘은 같은 것을 앞뒤로 말한 것입니다.</a:t>
             </a:r>
             <a:endParaRPr lang="en-US" sz="1200" dirty="0"/>
           </a:p>
@@ -8609,7 +8609,7 @@
                 <a:ea typeface="Pretendard" pitchFamily="34" charset="-122"/>
                 <a:cs typeface="Pretendard" pitchFamily="34" charset="-120"/>
               </a:rPr>
-              <a:t>컨셉트와 프로세스 · 7주차 프로포절 쓰기 — 여섯 절을 채운다</a:t>
+              <a:t>컨셉트와 프로세스 · 7주차 프로포절 쓰기 — 6개 가이드를 채운다</a:t>
             </a:r>
             <a:endParaRPr lang="en-US" sz="850" dirty="0"/>
           </a:p>
@@ -9432,7 +9432,7 @@
                 <a:ea typeface="Pretendard" pitchFamily="34" charset="-122"/>
                 <a:cs typeface="Pretendard" pitchFamily="34" charset="-120"/>
               </a:rPr>
-              <a:t>컨셉트와 프로세스 · 7주차 프로포절 쓰기 — 여섯 절을 채운다</a:t>
+              <a:t>컨셉트와 프로세스 · 7주차 프로포절 쓰기 — 6개 가이드를 채운다</a:t>
             </a:r>
             <a:endParaRPr lang="en-US" sz="850" dirty="0"/>
           </a:p>
@@ -9723,7 +9723,7 @@
                 <a:ea typeface="Pretendard SemiBold" pitchFamily="34" charset="-122"/>
                 <a:cs typeface="Pretendard SemiBold" pitchFamily="34" charset="-120"/>
               </a:rPr>
-              <a:t>여섯 문장이 맞물리는가</a:t>
+              <a:t>6개의 문장이 맞물리는가</a:t>
             </a:r>
             <a:endParaRPr lang="en-US" sz="3000" dirty="0"/>
           </a:p>
@@ -9762,7 +9762,7 @@
                 <a:ea typeface="Pretendard" pitchFamily="34" charset="-122"/>
                 <a:cs typeface="Pretendard" pitchFamily="34" charset="-120"/>
               </a:rPr>
-              <a:t>여섯 문장을 나란히 놓고 위에서 아래로 읽어 보세요.</a:t>
+              <a:t>6개의 문장을 나란히 놓고 위에서 아래로 읽어 봅니다.</a:t>
             </a:r>
             <a:endParaRPr lang="en-US" sz="1150" dirty="0"/>
           </a:p>
@@ -11362,7 +11362,7 @@
                 <a:ea typeface="Pretendard" pitchFamily="34" charset="-122"/>
                 <a:cs typeface="Pretendard" pitchFamily="34" charset="-120"/>
               </a:rPr>
-              <a:t>여섯째 항목이 가장 자주 걸립니다. 질문이 크고 방법이 작으면 질문을 줄이십시오 — 방법을 키우는 쪽은 삼 년으로 안 됩니다.</a:t>
+              <a:t>여섯째 항목이 가장 자주 걸립니다. 질문이 크고 방법이 작으면 질문을 줄입니다. 방법을 키우는 쪽은 삼 년으로 되지 않습니다.</a:t>
             </a:r>
             <a:endParaRPr lang="en-US" sz="1250" dirty="0"/>
           </a:p>
@@ -11426,7 +11426,7 @@
                 <a:ea typeface="Pretendard" pitchFamily="34" charset="-122"/>
                 <a:cs typeface="Pretendard" pitchFamily="34" charset="-120"/>
               </a:rPr>
-              <a:t>컨셉트와 프로세스 · 7주차 프로포절 쓰기 — 여섯 절을 채운다</a:t>
+              <a:t>컨셉트와 프로세스 · 7주차 프로포절 쓰기 — 6개 가이드를 채운다</a:t>
             </a:r>
             <a:endParaRPr lang="en-US" sz="850" dirty="0"/>
           </a:p>
@@ -11756,7 +11756,7 @@
                 <a:ea typeface="Pretendard" pitchFamily="34" charset="-122"/>
                 <a:cs typeface="Pretendard" pitchFamily="34" charset="-120"/>
               </a:rPr>
-              <a:t>다음이 마지막 회차입니다. 오늘 쓴 여섯 문장에 살을 붙이면 됩니다.</a:t>
+              <a:t>다음이 마지막 회차입니다. 오늘 쓴 6개의 문장에 살을 붙입니다.</a:t>
             </a:r>
             <a:endParaRPr lang="en-US" sz="1150" dirty="0"/>
           </a:p>
@@ -11884,7 +11884,7 @@
                 <a:ea typeface="Pretendard SemiBold" pitchFamily="34" charset="-122"/>
                 <a:cs typeface="Pretendard SemiBold" pitchFamily="34" charset="-120"/>
               </a:rPr>
-              <a:t>프로포절 드래프트 — 여섯 절</a:t>
+              <a:t>프로포절 드래프트 — 6개 절</a:t>
             </a:r>
             <a:endParaRPr lang="en-US" sz="1400" dirty="0"/>
           </a:p>
@@ -11926,7 +11926,7 @@
                 <a:ea typeface="Pretendard" pitchFamily="34" charset="-122"/>
                 <a:cs typeface="Pretendard" pitchFamily="34" charset="-120"/>
               </a:rPr>
-              <a:t>오늘 쓴 여섯 문장이 각 절의 첫 문장입니다. 그 아래에 설명을 붙여 절마다 한두 쪽으로 만듭니다. 분량보다 여섯 절이 서로 맞물리는지가 중요합니다.</a:t>
+              <a:t>오늘 쓴 6개의 문장이 각 절의 첫 문장입니다. 그 아래에 설명을 붙여 절마다 한두 쪽으로 만듭니다. 분량보다 6개 절이 서로 맞물리는지가 중요합니다.</a:t>
             </a:r>
             <a:endParaRPr lang="en-US" sz="1100" dirty="0"/>
           </a:p>
@@ -12424,7 +12424,7 @@
                 <a:ea typeface="Pretendard" pitchFamily="34" charset="-122"/>
                 <a:cs typeface="Pretendard" pitchFamily="34" charset="-120"/>
               </a:rPr>
-              <a:t>여섯 절이 맞물리는지 함께 보기</a:t>
+              <a:t>6개 절이 맞물리는지 함께 보기</a:t>
             </a:r>
             <a:endParaRPr lang="en-US" sz="1150" dirty="0"/>
           </a:p>
@@ -12618,7 +12618,7 @@
                 <a:ea typeface="Pretendard" pitchFamily="34" charset="-122"/>
                 <a:cs typeface="Pretendard" pitchFamily="34" charset="-120"/>
               </a:rPr>
-              <a:t>컨셉트와 프로세스 · 7주차 프로포절 쓰기 — 여섯 절을 채운다</a:t>
+              <a:t>컨셉트와 프로세스 · 7주차 프로포절 쓰기 — 6개 가이드를 채운다</a:t>
             </a:r>
             <a:endParaRPr lang="en-US" sz="850" dirty="0"/>
           </a:p>
@@ -13377,7 +13377,7 @@
                 <a:ea typeface="Pretendard" pitchFamily="34" charset="-122"/>
                 <a:cs typeface="Pretendard" pitchFamily="34" charset="-120"/>
               </a:rPr>
-              <a:t>오늘은 완성하는 자리가 아니라 여섯 문장을 꺼내 놓는 자리입니다.</a:t>
+              <a:t>오늘은 완성하는 자리가 아니라 6개의 문장을 꺼내 놓는 자리입니다.</a:t>
             </a:r>
             <a:endParaRPr lang="en-US" sz="1200" dirty="0"/>
           </a:p>
@@ -13441,7 +13441,7 @@
                 <a:ea typeface="Pretendard" pitchFamily="34" charset="-122"/>
                 <a:cs typeface="Pretendard" pitchFamily="34" charset="-120"/>
               </a:rPr>
-              <a:t>컨셉트와 프로세스 · 7주차 프로포절 쓰기 — 여섯 절을 채운다</a:t>
+              <a:t>컨셉트와 프로세스 · 7주차 프로포절 쓰기 — 6개 가이드를 채운다</a:t>
             </a:r>
             <a:endParaRPr lang="en-US" sz="850" dirty="0"/>
           </a:p>
@@ -13693,7 +13693,7 @@
                 <a:ea typeface="Pretendard" pitchFamily="34" charset="-122"/>
                 <a:cs typeface="Pretendard" pitchFamily="34" charset="-120"/>
               </a:rPr>
-              <a:t>SIX</a:t>
+              <a:t>GUIDE</a:t>
             </a:r>
             <a:endParaRPr lang="en-US" sz="950" dirty="0"/>
           </a:p>
@@ -13732,7 +13732,7 @@
                 <a:ea typeface="Pretendard SemiBold" pitchFamily="34" charset="-122"/>
                 <a:cs typeface="Pretendard SemiBold" pitchFamily="34" charset="-120"/>
               </a:rPr>
-              <a:t>여섯 절이 답하는 여섯 질문</a:t>
+              <a:t>프로포절 작성 가이드 6개</a:t>
             </a:r>
             <a:endParaRPr lang="en-US" sz="3000" dirty="0"/>
           </a:p>
@@ -13771,7 +13771,7 @@
                 <a:ea typeface="Pretendard" pitchFamily="34" charset="-122"/>
                 <a:cs typeface="Pretendard" pitchFamily="34" charset="-120"/>
               </a:rPr>
-              <a:t>절 이름은 학교마다 다릅니다. 하는 일이 같습니다.</a:t>
+              <a:t>6개의 프로포절 작성 가이드에 맞춰 앞으로 쓸 논문의 주제와 관련하여 한 문장씩 써 봅니다.</a:t>
             </a:r>
             <a:endParaRPr lang="en-US" sz="1150" dirty="0"/>
           </a:p>
@@ -13786,7 +13786,7 @@
         <p:spPr>
           <a:xfrm>
             <a:off x="640080" y="1719072"/>
-            <a:ext cx="10911535" cy="536448"/>
+            <a:ext cx="10911535" cy="469392"/>
           </a:xfrm>
           <a:prstGeom prst="rect">
             <a:avLst/>
@@ -13811,7 +13811,7 @@
         <p:spPr>
           <a:xfrm>
             <a:off x="1097280" y="1810512"/>
-            <a:ext cx="3291840" cy="353568"/>
+            <a:ext cx="3291840" cy="286512"/>
           </a:xfrm>
           <a:prstGeom prst="rect">
             <a:avLst/>
@@ -13835,7 +13835,7 @@
                 <a:ea typeface="Pretendard SemiBold" pitchFamily="34" charset="-122"/>
                 <a:cs typeface="Pretendard SemiBold" pitchFamily="34" charset="-120"/>
               </a:rPr>
-              <a:t>무엇이 문제인가</a:t>
+              <a:t>① 무엇이 문제인가</a:t>
             </a:r>
             <a:endParaRPr lang="en-US" sz="1450" dirty="0"/>
           </a:p>
@@ -13850,7 +13850,7 @@
         <p:spPr>
           <a:xfrm>
             <a:off x="4480560" y="1810512"/>
-            <a:ext cx="6705295" cy="353568"/>
+            <a:ext cx="6705295" cy="286512"/>
           </a:xfrm>
           <a:prstGeom prst="rect">
             <a:avLst/>
@@ -13891,8 +13891,8 @@
         </p:nvSpPr>
         <p:spPr>
           <a:xfrm>
-            <a:off x="640080" y="2401824"/>
-            <a:ext cx="10911535" cy="536448"/>
+            <a:off x="640080" y="2334768"/>
+            <a:ext cx="10911535" cy="469392"/>
           </a:xfrm>
           <a:prstGeom prst="rect">
             <a:avLst/>
@@ -13916,8 +13916,8 @@
         </p:nvSpPr>
         <p:spPr>
           <a:xfrm>
-            <a:off x="1097280" y="2493264"/>
-            <a:ext cx="3291840" cy="353568"/>
+            <a:off x="1097280" y="2426208"/>
+            <a:ext cx="3291840" cy="286512"/>
           </a:xfrm>
           <a:prstGeom prst="rect">
             <a:avLst/>
@@ -13941,7 +13941,7 @@
                 <a:ea typeface="Pretendard SemiBold" pitchFamily="34" charset="-122"/>
                 <a:cs typeface="Pretendard SemiBold" pitchFamily="34" charset="-120"/>
               </a:rPr>
-              <a:t>무엇을 묻는가</a:t>
+              <a:t>② 무엇을 묻는가</a:t>
             </a:r>
             <a:endParaRPr lang="en-US" sz="1450" dirty="0"/>
           </a:p>
@@ -13955,8 +13955,8 @@
         </p:nvSpPr>
         <p:spPr>
           <a:xfrm>
-            <a:off x="4480560" y="2493264"/>
-            <a:ext cx="6705295" cy="353568"/>
+            <a:off x="4480560" y="2426208"/>
+            <a:ext cx="6705295" cy="286512"/>
           </a:xfrm>
           <a:prstGeom prst="rect">
             <a:avLst/>
@@ -13997,8 +13997,8 @@
         </p:nvSpPr>
         <p:spPr>
           <a:xfrm>
-            <a:off x="640080" y="3084576"/>
-            <a:ext cx="10911535" cy="536448"/>
+            <a:off x="640080" y="2950464"/>
+            <a:ext cx="10911535" cy="469392"/>
           </a:xfrm>
           <a:prstGeom prst="rect">
             <a:avLst/>
@@ -14022,8 +14022,8 @@
         </p:nvSpPr>
         <p:spPr>
           <a:xfrm>
-            <a:off x="1097280" y="3176016"/>
-            <a:ext cx="3291840" cy="353568"/>
+            <a:off x="1097280" y="3041904"/>
+            <a:ext cx="3291840" cy="286512"/>
           </a:xfrm>
           <a:prstGeom prst="rect">
             <a:avLst/>
@@ -14047,7 +14047,7 @@
                 <a:ea typeface="Pretendard SemiBold" pitchFamily="34" charset="-122"/>
                 <a:cs typeface="Pretendard SemiBold" pitchFamily="34" charset="-120"/>
               </a:rPr>
-              <a:t>무엇을 예상하는가</a:t>
+              <a:t>③ 무엇을 예상하는가</a:t>
             </a:r>
             <a:endParaRPr lang="en-US" sz="1450" dirty="0"/>
           </a:p>
@@ -14061,8 +14061,8 @@
         </p:nvSpPr>
         <p:spPr>
           <a:xfrm>
-            <a:off x="4480560" y="3176016"/>
-            <a:ext cx="6705295" cy="353568"/>
+            <a:off x="4480560" y="3041904"/>
+            <a:ext cx="6705295" cy="286512"/>
           </a:xfrm>
           <a:prstGeom prst="rect">
             <a:avLst/>
@@ -14103,8 +14103,8 @@
         </p:nvSpPr>
         <p:spPr>
           <a:xfrm>
-            <a:off x="640080" y="3767328"/>
-            <a:ext cx="10911535" cy="536448"/>
+            <a:off x="640080" y="3566160"/>
+            <a:ext cx="10911535" cy="469392"/>
           </a:xfrm>
           <a:prstGeom prst="rect">
             <a:avLst/>
@@ -14128,8 +14128,8 @@
         </p:nvSpPr>
         <p:spPr>
           <a:xfrm>
-            <a:off x="1097280" y="3858768"/>
-            <a:ext cx="3291840" cy="353568"/>
+            <a:off x="1097280" y="3657600"/>
+            <a:ext cx="3291840" cy="286512"/>
           </a:xfrm>
           <a:prstGeom prst="rect">
             <a:avLst/>
@@ -14153,7 +14153,7 @@
                 <a:ea typeface="Pretendard SemiBold" pitchFamily="34" charset="-122"/>
                 <a:cs typeface="Pretendard SemiBold" pitchFamily="34" charset="-120"/>
               </a:rPr>
-              <a:t>남들은 어디까지 갔는가</a:t>
+              <a:t>④ 남들은 어디까지 갔는가</a:t>
             </a:r>
             <a:endParaRPr lang="en-US" sz="1450" dirty="0"/>
           </a:p>
@@ -14167,8 +14167,8 @@
         </p:nvSpPr>
         <p:spPr>
           <a:xfrm>
-            <a:off x="4480560" y="3858768"/>
-            <a:ext cx="6705295" cy="353568"/>
+            <a:off x="4480560" y="3657600"/>
+            <a:ext cx="6705295" cy="286512"/>
           </a:xfrm>
           <a:prstGeom prst="rect">
             <a:avLst/>
@@ -14209,8 +14209,8 @@
         </p:nvSpPr>
         <p:spPr>
           <a:xfrm>
-            <a:off x="640080" y="4450080"/>
-            <a:ext cx="10911535" cy="536448"/>
+            <a:off x="640080" y="4181856"/>
+            <a:ext cx="10911535" cy="469392"/>
           </a:xfrm>
           <a:prstGeom prst="rect">
             <a:avLst/>
@@ -14234,8 +14234,8 @@
         </p:nvSpPr>
         <p:spPr>
           <a:xfrm>
-            <a:off x="1097280" y="4541520"/>
-            <a:ext cx="3291840" cy="353568"/>
+            <a:off x="1097280" y="4273296"/>
+            <a:ext cx="3291840" cy="286512"/>
           </a:xfrm>
           <a:prstGeom prst="rect">
             <a:avLst/>
@@ -14259,7 +14259,7 @@
                 <a:ea typeface="Pretendard SemiBold" pitchFamily="34" charset="-122"/>
                 <a:cs typeface="Pretendard SemiBold" pitchFamily="34" charset="-120"/>
               </a:rPr>
-              <a:t>나는 무엇을 할 것인가</a:t>
+              <a:t>⑤ 나는 무엇을 할 것인가</a:t>
             </a:r>
             <a:endParaRPr lang="en-US" sz="1450" dirty="0"/>
           </a:p>
@@ -14273,8 +14273,8 @@
         </p:nvSpPr>
         <p:spPr>
           <a:xfrm>
-            <a:off x="4480560" y="4541520"/>
-            <a:ext cx="6705295" cy="353568"/>
+            <a:off x="4480560" y="4273296"/>
+            <a:ext cx="6705295" cy="286512"/>
           </a:xfrm>
           <a:prstGeom prst="rect">
             <a:avLst/>
@@ -14315,8 +14315,8 @@
         </p:nvSpPr>
         <p:spPr>
           <a:xfrm>
-            <a:off x="640080" y="5132832"/>
-            <a:ext cx="10911535" cy="536448"/>
+            <a:off x="640080" y="4797552"/>
+            <a:ext cx="10911535" cy="469392"/>
           </a:xfrm>
           <a:prstGeom prst="rect">
             <a:avLst/>
@@ -14340,8 +14340,8 @@
         </p:nvSpPr>
         <p:spPr>
           <a:xfrm>
-            <a:off x="1097280" y="5224272"/>
-            <a:ext cx="3291840" cy="353568"/>
+            <a:off x="1097280" y="4888992"/>
+            <a:ext cx="3291840" cy="286512"/>
           </a:xfrm>
           <a:prstGeom prst="rect">
             <a:avLst/>
@@ -14365,7 +14365,7 @@
                 <a:ea typeface="Pretendard SemiBold" pitchFamily="34" charset="-122"/>
                 <a:cs typeface="Pretendard SemiBold" pitchFamily="34" charset="-120"/>
               </a:rPr>
-              <a:t>그래서 무엇이 남는가</a:t>
+              <a:t>⑥ 그래서 무엇이 남는가</a:t>
             </a:r>
             <a:endParaRPr lang="en-US" sz="1450" dirty="0"/>
           </a:p>
@@ -14379,8 +14379,8 @@
         </p:nvSpPr>
         <p:spPr>
           <a:xfrm>
-            <a:off x="4480560" y="5224272"/>
-            <a:ext cx="6705295" cy="353568"/>
+            <a:off x="4480560" y="4888992"/>
+            <a:ext cx="6705295" cy="286512"/>
           </a:xfrm>
           <a:prstGeom prst="rect">
             <a:avLst/>
@@ -14416,6 +14416,73 @@
       <p:sp>
         <p:nvSpPr>
           <p:cNvPr id="27" name="Shape 25"/>
+          <p:cNvSpPr/>
+          <p:nvPr/>
+        </p:nvSpPr>
+        <p:spPr>
+          <a:xfrm>
+            <a:off x="640080" y="5577840"/>
+            <a:ext cx="10911535" cy="7315"/>
+          </a:xfrm>
+          <a:prstGeom prst="rect">
+            <a:avLst/>
+          </a:prstGeom>
+          <a:solidFill>
+            <a:srgbClr val="111111"/>
+          </a:solidFill>
+          <a:ln w="12700">
+            <a:solidFill>
+              <a:srgbClr val="111111"/>
+            </a:solidFill>
+            <a:prstDash val="solid"/>
+          </a:ln>
+        </p:spPr>
+      </p:sp>
+      <p:sp>
+        <p:nvSpPr>
+          <p:cNvPr id="28" name="Text 26"/>
+          <p:cNvSpPr/>
+          <p:nvPr/>
+        </p:nvSpPr>
+        <p:spPr>
+          <a:xfrm>
+            <a:off x="640080" y="5687568"/>
+            <a:ext cx="10911535" cy="402336"/>
+          </a:xfrm>
+          <a:prstGeom prst="rect">
+            <a:avLst/>
+          </a:prstGeom>
+          <a:noFill/>
+          <a:ln/>
+        </p:spPr>
+        <p:txBody>
+          <a:bodyPr wrap="square" lIns="0" tIns="0" rIns="0" bIns="0" rtlCol="0" anchor="t"/>
+          <a:lstStyle/>
+          <a:p>
+            <a:pPr indent="0" marL="0">
+              <a:lnSpc>
+                <a:spcPct val="120000"/>
+              </a:lnSpc>
+              <a:buNone/>
+            </a:pPr>
+            <a:r>
+              <a:rPr lang="en-US" sz="1300" b="1" dirty="0">
+                <a:solidFill>
+                  <a:srgbClr val="111111"/>
+                </a:solidFill>
+                <a:latin typeface="Pretendard" pitchFamily="34" charset="0"/>
+                <a:ea typeface="Pretendard" pitchFamily="34" charset="-122"/>
+                <a:cs typeface="Pretendard" pitchFamily="34" charset="-120"/>
+              </a:rPr>
+              <a:t>절 이름은 학교마다 다릅니다. 하는 일이 같습니다. ②와 ⑤가 맞물리는지가 오늘 볼 것입니다.</a:t>
+            </a:r>
+            <a:endParaRPr lang="en-US" sz="1300" dirty="0"/>
+          </a:p>
+        </p:txBody>
+      </p:sp>
+      <p:sp>
+        <p:nvSpPr>
+          <p:cNvPr id="29" name="Shape 27"/>
           <p:cNvSpPr/>
           <p:nvPr/>
         </p:nvSpPr>
@@ -14440,7 +14507,7 @@
       </p:sp>
       <p:sp>
         <p:nvSpPr>
-          <p:cNvPr id="28" name="Text 26"/>
+          <p:cNvPr id="30" name="Text 28"/>
           <p:cNvSpPr/>
           <p:nvPr/>
         </p:nvSpPr>
@@ -14471,7 +14538,7 @@
                 <a:ea typeface="Pretendard" pitchFamily="34" charset="-122"/>
                 <a:cs typeface="Pretendard" pitchFamily="34" charset="-120"/>
               </a:rPr>
-              <a:t>컨셉트와 프로세스 · 7주차 프로포절 쓰기 — 여섯 절을 채운다</a:t>
+              <a:t>컨셉트와 프로세스 · 7주차 프로포절 쓰기 — 6개 가이드를 채운다</a:t>
             </a:r>
             <a:endParaRPr lang="en-US" sz="850" dirty="0"/>
           </a:p>
@@ -14479,7 +14546,7 @@
       </p:sp>
       <p:sp>
         <p:nvSpPr>
-          <p:cNvPr id="29" name="Text 27"/>
+          <p:cNvPr id="31" name="Text 29"/>
           <p:cNvSpPr/>
           <p:nvPr/>
         </p:nvSpPr>
@@ -16260,7 +16327,7 @@
                 <a:ea typeface="Pretendard" pitchFamily="34" charset="-122"/>
                 <a:cs typeface="Pretendard" pitchFamily="34" charset="-120"/>
               </a:rPr>
-              <a:t>네 줄 다 같은 이야기입니다. 내 머릿속 말고 밖에서 확인할 수 있는 것을 쓰십시오.</a:t>
+              <a:t>네 줄 다 같은 이야기입니다. 머릿속이 아니라 밖에서 확인할 수 있는 것을 씁니다.</a:t>
             </a:r>
             <a:endParaRPr lang="en-US" sz="1300" dirty="0"/>
           </a:p>
@@ -16324,7 +16391,7 @@
                 <a:ea typeface="Pretendard" pitchFamily="34" charset="-122"/>
                 <a:cs typeface="Pretendard" pitchFamily="34" charset="-120"/>
               </a:rPr>
-              <a:t>컨셉트와 프로세스 · 7주차 프로포절 쓰기 — 여섯 절을 채운다</a:t>
+              <a:t>컨셉트와 프로세스 · 7주차 프로포절 쓰기 — 6개 가이드를 채운다</a:t>
             </a:r>
             <a:endParaRPr lang="en-US" sz="850" dirty="0"/>
           </a:p>
@@ -16654,7 +16721,7 @@
                 <a:ea typeface="Pretendard" pitchFamily="34" charset="-122"/>
                 <a:cs typeface="Pretendard" pitchFamily="34" charset="-120"/>
               </a:rPr>
-              <a:t>5분. 칸을 채우고 한 문장으로 잇습니다.</a:t>
+              <a:t>앞으로 쓸 논문의 주제와 관련하여 첫 문장을 써 봅니다. 5분.</a:t>
             </a:r>
             <a:endParaRPr lang="en-US" sz="1150" dirty="0"/>
           </a:p>
@@ -16861,7 +16928,7 @@
                 <a:ea typeface="Pretendard" pitchFamily="34" charset="-122"/>
                 <a:cs typeface="Pretendard" pitchFamily="34" charset="-120"/>
               </a:rPr>
-              <a:t>→ 세 칸을 한 문장으로 이으면 첫 절의 첫 문장입니다</a:t>
+              <a:t>→ 세 칸을 한 문장으로 이으면 ① 의 첫 문장이 됩니다</a:t>
             </a:r>
             <a:endParaRPr lang="en-US" sz="1200" dirty="0"/>
           </a:p>
@@ -17107,7 +17174,7 @@
                 <a:ea typeface="Pretendard" pitchFamily="34" charset="-122"/>
                 <a:cs typeface="Pretendard" pitchFamily="34" charset="-120"/>
               </a:rPr>
-              <a:t>다 쓰신 분은 소리 내어 한 번 읽어 보세요. 읽다가 어색한 곳이 고칠 곳입니다.</a:t>
+              <a:t>쓴 문장을 소리 내어 읽어 봅니다. 어색한 곳이 고칠 곳입니다.</a:t>
             </a:r>
             <a:endParaRPr lang="en-US" sz="1200" dirty="0"/>
           </a:p>
@@ -17171,7 +17238,7 @@
                 <a:ea typeface="Pretendard" pitchFamily="34" charset="-122"/>
                 <a:cs typeface="Pretendard" pitchFamily="34" charset="-120"/>
               </a:rPr>
-              <a:t>컨셉트와 프로세스 · 7주차 프로포절 쓰기 — 여섯 절을 채운다</a:t>
+              <a:t>컨셉트와 프로세스 · 7주차 프로포절 쓰기 — 6개 가이드를 채운다</a:t>
             </a:r>
             <a:endParaRPr lang="en-US" sz="850" dirty="0"/>
           </a:p>
@@ -18960,7 +19027,7 @@
                 <a:ea typeface="Pretendard" pitchFamily="34" charset="-122"/>
                 <a:cs typeface="Pretendard" pitchFamily="34" charset="-120"/>
               </a:rPr>
-              <a:t>자기 질문을 소리 내어 읽고 '그래서 어떻게 확인하지?'를 물어보세요. 답이 안 나오면 아직 질문이 아닙니다.</a:t>
+              <a:t>질문을 소리 내어 읽고 '그래서 어떻게 확인하는가'를 물어봅니다. 답이 없으면 아직 질문이 아닙니다.</a:t>
             </a:r>
             <a:endParaRPr lang="en-US" sz="1300" dirty="0"/>
           </a:p>
@@ -19024,7 +19091,7 @@
                 <a:ea typeface="Pretendard" pitchFamily="34" charset="-122"/>
                 <a:cs typeface="Pretendard" pitchFamily="34" charset="-120"/>
               </a:rPr>
-              <a:t>컨셉트와 프로세스 · 7주차 프로포절 쓰기 — 여섯 절을 채운다</a:t>
+              <a:t>컨셉트와 프로세스 · 7주차 프로포절 쓰기 — 6개 가이드를 채운다</a:t>
             </a:r>
             <a:endParaRPr lang="en-US" sz="850" dirty="0"/>
           </a:p>
@@ -20135,7 +20202,7 @@
                 <a:ea typeface="Pretendard" pitchFamily="34" charset="-122"/>
                 <a:cs typeface="Pretendard" pitchFamily="34" charset="-120"/>
               </a:rPr>
-              <a:t>틀 하나를 드립니다 — 'A가 B보다 C할 것이다. 왜냐하면 D 때문이다.' 여기에 넣어 보세요.</a:t>
+              <a:t>틀에 넣어 봅니다 — 'A가 B보다 C할 것이다. 왜냐하면 D 때문이다.'</a:t>
             </a:r>
             <a:endParaRPr lang="en-US" sz="1300" dirty="0"/>
           </a:p>
@@ -20199,7 +20266,7 @@
                 <a:ea typeface="Pretendard" pitchFamily="34" charset="-122"/>
                 <a:cs typeface="Pretendard" pitchFamily="34" charset="-120"/>
               </a:rPr>
-              <a:t>컨셉트와 프로세스 · 7주차 프로포절 쓰기 — 여섯 절을 채운다</a:t>
+              <a:t>컨셉트와 프로세스 · 7주차 프로포절 쓰기 — 6개 가이드를 채운다</a:t>
             </a:r>
             <a:endParaRPr lang="en-US" sz="850" dirty="0"/>
           </a:p>

--- a/dist/weeks-대학원/컨셉트와프로세스_07주차_프로포절쓰기.pptx
+++ b/dist/weeks-대학원/컨셉트와프로세스_07주차_프로포절쓰기.pptx
@@ -2893,7 +2893,7 @@
                 <a:ea typeface="Pretendard SemiBold" pitchFamily="34" charset="-122"/>
                 <a:cs typeface="Pretendard SemiBold" pitchFamily="34" charset="-120"/>
               </a:rPr>
-              <a:t>프로포절 쓰기 — 6개 가이드를 채운다</a:t>
+              <a:t>프로포절 쓰기 — 여섯 절로 구성한다</a:t>
             </a:r>
             <a:endParaRPr lang="en-US" sz="4000" dirty="0"/>
           </a:p>
@@ -3136,7 +3136,7 @@
                 <a:ea typeface="Pretendard" pitchFamily="34" charset="-122"/>
                 <a:cs typeface="Pretendard" pitchFamily="34" charset="-120"/>
               </a:rPr>
-              <a:t>프로포절 드래프트 — 6개 절</a:t>
+              <a:t>프로포절 드래프트 — 여섯 절</a:t>
             </a:r>
             <a:endParaRPr lang="en-US" sz="1200" dirty="0"/>
           </a:p>
@@ -3698,7 +3698,7 @@
                 <a:ea typeface="Pretendard" pitchFamily="34" charset="-122"/>
                 <a:cs typeface="Pretendard" pitchFamily="34" charset="-120"/>
               </a:rPr>
-              <a:t>확인 — 삼 년 안에 답할 크기인가</a:t>
+              <a:t>확인 — 연구 기간 안에 답할 수 있는가</a:t>
             </a:r>
             <a:endParaRPr lang="en-US" sz="1200" dirty="0"/>
           </a:p>
@@ -3722,7 +3722,7 @@
                 <a:ea typeface="Pretendard" pitchFamily="34" charset="-122"/>
                 <a:cs typeface="Pretendard" pitchFamily="34" charset="-120"/>
               </a:rPr>
-              <a:t>확인 — 답이 뻔하지 않은가</a:t>
+              <a:t>확인 — 답이 자명하지 않은가</a:t>
             </a:r>
             <a:endParaRPr lang="en-US" sz="1200" dirty="0"/>
           </a:p>
@@ -3746,7 +3746,7 @@
                 <a:ea typeface="Pretendard" pitchFamily="34" charset="-122"/>
                 <a:cs typeface="Pretendard" pitchFamily="34" charset="-120"/>
               </a:rPr>
-              <a:t>확인 — 어떻게 알아볼지 보이는가</a:t>
+              <a:t>확인 — 무엇으로 확인할지 드러나는가</a:t>
             </a:r>
             <a:endParaRPr lang="en-US" sz="1200" dirty="0"/>
           </a:p>
@@ -3905,7 +3905,7 @@
                 <a:ea typeface="Pretendard" pitchFamily="34" charset="-122"/>
                 <a:cs typeface="Pretendard" pitchFamily="34" charset="-120"/>
               </a:rPr>
-              <a:t>'왜냐하면' 뒤가 비어 있으면 찍은 것입니다</a:t>
+              <a:t>'왜냐하면' 뒤가 비어 있으면 근거 없는 추측이다</a:t>
             </a:r>
             <a:endParaRPr lang="en-US" sz="1200" dirty="0"/>
           </a:p>
@@ -3929,7 +3929,7 @@
                 <a:ea typeface="Pretendard" pitchFamily="34" charset="-122"/>
                 <a:cs typeface="Pretendard" pitchFamily="34" charset="-120"/>
               </a:rPr>
-              <a:t>근거는 선행연구에서 가져와도 되고 내 관찰이어도 됩니다</a:t>
+              <a:t>근거는 선행연구에서 가져오거나 직접 관찰한 것으로 한다</a:t>
             </a:r>
             <a:endParaRPr lang="en-US" sz="1200" dirty="0"/>
           </a:p>
@@ -3953,7 +3953,7 @@
                 <a:ea typeface="Pretendard" pitchFamily="34" charset="-122"/>
                 <a:cs typeface="Pretendard" pitchFamily="34" charset="-120"/>
               </a:rPr>
-              <a:t>가설이 둘셋이어도 됩니다 — 각각 확인할 수 있으면</a:t>
+              <a:t>가설이 둘셋이어도 된다 — 각각 확인할 수 있으면</a:t>
             </a:r>
             <a:endParaRPr lang="en-US" sz="1200" dirty="0"/>
           </a:p>
@@ -4056,7 +4056,7 @@
                 <a:ea typeface="Pretendard" pitchFamily="34" charset="-122"/>
                 <a:cs typeface="Pretendard" pitchFamily="34" charset="-120"/>
               </a:rPr>
-              <a:t>컨셉트와 프로세스 · 7주차 프로포절 쓰기 — 6개 가이드를 채운다</a:t>
+              <a:t>컨셉트와 프로세스 · 7주차 프로포절 쓰기 — 여섯 절로 구성한다</a:t>
             </a:r>
             <a:endParaRPr lang="en-US" sz="850" dirty="0"/>
           </a:p>
@@ -4852,7 +4852,7 @@
                 <a:ea typeface="Pretendard" pitchFamily="34" charset="-122"/>
                 <a:cs typeface="Pretendard" pitchFamily="34" charset="-120"/>
               </a:rPr>
-              <a:t>다섯 편을 소개하는 것이 아니라 하나의 흐름으로 묶고 빈 자리를 가리킵니다.</a:t>
+              <a:t>다섯 편을 각각 소개하지 않고 하나의 흐름으로 묶어, 다루어지지 않은 내용을 밝힙니다.</a:t>
             </a:r>
             <a:endParaRPr lang="en-US" sz="1150" dirty="0"/>
           </a:p>
@@ -5909,7 +5909,7 @@
                 <a:ea typeface="Pretendard" pitchFamily="34" charset="-122"/>
                 <a:cs typeface="Pretendard" pitchFamily="34" charset="-120"/>
               </a:rPr>
-              <a:t>컨셉트와 프로세스 · 7주차 프로포절 쓰기 — 6개 가이드를 채운다</a:t>
+              <a:t>컨셉트와 프로세스 · 7주차 프로포절 쓰기 — 여섯 절로 구성한다</a:t>
             </a:r>
             <a:endParaRPr lang="en-US" sz="850" dirty="0"/>
           </a:p>
@@ -6705,7 +6705,7 @@
                 <a:ea typeface="Pretendard" pitchFamily="34" charset="-122"/>
                 <a:cs typeface="Pretendard" pitchFamily="34" charset="-120"/>
               </a:rPr>
-              <a:t>남이 읽고 그대로 해 볼 수 있으면 됩니다.</a:t>
+              <a:t>다른 연구자가 읽고 동일하게 수행할 수 있을 만큼 기술합니다.</a:t>
             </a:r>
             <a:endParaRPr lang="en-US" sz="1150" dirty="0"/>
           </a:p>
@@ -7762,7 +7762,7 @@
                 <a:ea typeface="Pretendard" pitchFamily="34" charset="-122"/>
                 <a:cs typeface="Pretendard" pitchFamily="34" charset="-120"/>
               </a:rPr>
-              <a:t>컨셉트와 프로세스 · 7주차 프로포절 쓰기 — 6개 가이드를 채운다</a:t>
+              <a:t>컨셉트와 프로세스 · 7주차 프로포절 쓰기 — 여섯 절로 구성한다</a:t>
             </a:r>
             <a:endParaRPr lang="en-US" sz="850" dirty="0"/>
           </a:p>
@@ -8227,7 +8227,7 @@
                 <a:ea typeface="Pretendard" pitchFamily="34" charset="-122"/>
                 <a:cs typeface="Pretendard" pitchFamily="34" charset="-120"/>
               </a:rPr>
-              <a:t>누구에게 — 몇 명, 어떤 사람</a:t>
+              <a:t>대상 — 몇 명, 어떤 사람인가</a:t>
             </a:r>
             <a:endParaRPr lang="en-US" sz="1200" dirty="0"/>
           </a:p>
@@ -8251,7 +8251,7 @@
                 <a:ea typeface="Pretendard" pitchFamily="34" charset="-122"/>
                 <a:cs typeface="Pretendard" pitchFamily="34" charset="-120"/>
               </a:rPr>
-              <a:t>무엇을 — 무엇을 보여 주거나 묻는가</a:t>
+              <a:t>자료 — 무엇을 보여 주거나 묻는가</a:t>
             </a:r>
             <a:endParaRPr lang="en-US" sz="1200" dirty="0"/>
           </a:p>
@@ -8275,7 +8275,7 @@
                 <a:ea typeface="Pretendard" pitchFamily="34" charset="-122"/>
                 <a:cs typeface="Pretendard" pitchFamily="34" charset="-120"/>
               </a:rPr>
-              <a:t>어떻게 — 어디서 얼마 동안, 몇 번</a:t>
+              <a:t>절차 — 어디서 얼마 동안, 몇 회 수행하는가</a:t>
             </a:r>
             <a:endParaRPr lang="en-US" sz="1200" dirty="0"/>
           </a:p>
@@ -8299,7 +8299,7 @@
                 <a:ea typeface="Pretendard" pitchFamily="34" charset="-122"/>
                 <a:cs typeface="Pretendard" pitchFamily="34" charset="-120"/>
               </a:rPr>
-              <a:t>어떻게 판단하는가 — 무엇을 비교하고 무엇을 세는가</a:t>
+              <a:t>판단 기준 — 무엇을 비교하고 무엇을 세는가</a:t>
             </a:r>
             <a:endParaRPr lang="en-US" sz="1200" dirty="0"/>
           </a:p>
@@ -8458,7 +8458,7 @@
                 <a:ea typeface="Pretendard" pitchFamily="34" charset="-122"/>
                 <a:cs typeface="Pretendard" pitchFamily="34" charset="-120"/>
               </a:rPr>
-              <a:t>연구 질문의 답 모양을 넣으면 됩니다</a:t>
+              <a:t>연구 질문의 답에 해당하는 내용을 적는다</a:t>
             </a:r>
             <a:endParaRPr lang="en-US" sz="1200" dirty="0"/>
           </a:p>
@@ -8482,7 +8482,7 @@
                 <a:ea typeface="Pretendard" pitchFamily="34" charset="-122"/>
                 <a:cs typeface="Pretendard" pitchFamily="34" charset="-120"/>
               </a:rPr>
-              <a:t>기여를 못 쓰겠으면 질문이 흐린 것입니다</a:t>
+              <a:t>기여를 쓰지 못하면 질문이 분명하지 않은 것이다</a:t>
             </a:r>
             <a:endParaRPr lang="en-US" sz="1200" dirty="0"/>
           </a:p>
@@ -8506,7 +8506,7 @@
                 <a:ea typeface="Pretendard" pitchFamily="34" charset="-122"/>
                 <a:cs typeface="Pretendard" pitchFamily="34" charset="-120"/>
               </a:rPr>
-              <a:t>크게 쓰지 않습니다 — '전통시장을 살린다'는 안 됩니다</a:t>
+              <a:t>범위를 넘겨 적지 않는다 — '전통시장을 살린다'는 성립하지 않는다</a:t>
             </a:r>
             <a:endParaRPr lang="en-US" sz="1200" dirty="0"/>
           </a:p>
@@ -8609,7 +8609,7 @@
                 <a:ea typeface="Pretendard" pitchFamily="34" charset="-122"/>
                 <a:cs typeface="Pretendard" pitchFamily="34" charset="-120"/>
               </a:rPr>
-              <a:t>컨셉트와 프로세스 · 7주차 프로포절 쓰기 — 6개 가이드를 채운다</a:t>
+              <a:t>컨셉트와 프로세스 · 7주차 프로포절 쓰기 — 여섯 절로 구성한다</a:t>
             </a:r>
             <a:endParaRPr lang="en-US" sz="850" dirty="0"/>
           </a:p>
@@ -9432,7 +9432,7 @@
                 <a:ea typeface="Pretendard" pitchFamily="34" charset="-122"/>
                 <a:cs typeface="Pretendard" pitchFamily="34" charset="-120"/>
               </a:rPr>
-              <a:t>컨셉트와 프로세스 · 7주차 프로포절 쓰기 — 6개 가이드를 채운다</a:t>
+              <a:t>컨셉트와 프로세스 · 7주차 프로포절 쓰기 — 여섯 절로 구성한다</a:t>
             </a:r>
             <a:endParaRPr lang="en-US" sz="850" dirty="0"/>
           </a:p>
@@ -9723,7 +9723,7 @@
                 <a:ea typeface="Pretendard SemiBold" pitchFamily="34" charset="-122"/>
                 <a:cs typeface="Pretendard SemiBold" pitchFamily="34" charset="-120"/>
               </a:rPr>
-              <a:t>6개의 문장이 맞물리는가</a:t>
+              <a:t>여섯 문장이 맞물리는가</a:t>
             </a:r>
             <a:endParaRPr lang="en-US" sz="3000" dirty="0"/>
           </a:p>
@@ -9762,7 +9762,7 @@
                 <a:ea typeface="Pretendard" pitchFamily="34" charset="-122"/>
                 <a:cs typeface="Pretendard" pitchFamily="34" charset="-120"/>
               </a:rPr>
-              <a:t>6개의 문장을 나란히 놓고 위에서 아래로 읽어 봅니다.</a:t>
+              <a:t>여섯 문장을 나란히 놓고 위에서 아래로 읽어 봅니다.</a:t>
             </a:r>
             <a:endParaRPr lang="en-US" sz="1150" dirty="0"/>
           </a:p>
@@ -11426,7 +11426,7 @@
                 <a:ea typeface="Pretendard" pitchFamily="34" charset="-122"/>
                 <a:cs typeface="Pretendard" pitchFamily="34" charset="-120"/>
               </a:rPr>
-              <a:t>컨셉트와 프로세스 · 7주차 프로포절 쓰기 — 6개 가이드를 채운다</a:t>
+              <a:t>컨셉트와 프로세스 · 7주차 프로포절 쓰기 — 여섯 절로 구성한다</a:t>
             </a:r>
             <a:endParaRPr lang="en-US" sz="850" dirty="0"/>
           </a:p>
@@ -11756,7 +11756,7 @@
                 <a:ea typeface="Pretendard" pitchFamily="34" charset="-122"/>
                 <a:cs typeface="Pretendard" pitchFamily="34" charset="-120"/>
               </a:rPr>
-              <a:t>다음이 마지막 회차입니다. 오늘 쓴 6개의 문장에 살을 붙입니다.</a:t>
+              <a:t>다음이 마지막 회차입니다. 오늘 쓴 여섯 문장에 살을 붙입니다.</a:t>
             </a:r>
             <a:endParaRPr lang="en-US" sz="1150" dirty="0"/>
           </a:p>
@@ -11884,7 +11884,7 @@
                 <a:ea typeface="Pretendard SemiBold" pitchFamily="34" charset="-122"/>
                 <a:cs typeface="Pretendard SemiBold" pitchFamily="34" charset="-120"/>
               </a:rPr>
-              <a:t>프로포절 드래프트 — 6개 절</a:t>
+              <a:t>프로포절 드래프트 — 여섯 절</a:t>
             </a:r>
             <a:endParaRPr lang="en-US" sz="1400" dirty="0"/>
           </a:p>
@@ -11926,7 +11926,7 @@
                 <a:ea typeface="Pretendard" pitchFamily="34" charset="-122"/>
                 <a:cs typeface="Pretendard" pitchFamily="34" charset="-120"/>
               </a:rPr>
-              <a:t>오늘 쓴 6개의 문장이 각 절의 첫 문장입니다. 그 아래에 설명을 붙여 절마다 한두 쪽으로 만듭니다. 분량보다 6개 절이 서로 맞물리는지가 중요합니다.</a:t>
+              <a:t>오늘 쓴 여섯 문장이 각 절의 첫 문장입니다. 그 아래에 설명을 붙여 절마다 한두 쪽으로 만듭니다. 분량보다 여섯 절이 서로 맞물리는지가 중요합니다.</a:t>
             </a:r>
             <a:endParaRPr lang="en-US" sz="1100" dirty="0"/>
           </a:p>
@@ -12424,7 +12424,7 @@
                 <a:ea typeface="Pretendard" pitchFamily="34" charset="-122"/>
                 <a:cs typeface="Pretendard" pitchFamily="34" charset="-120"/>
               </a:rPr>
-              <a:t>6개 절이 맞물리는지 함께 보기</a:t>
+              <a:t>여섯 절이 맞물리는지 함께 보기</a:t>
             </a:r>
             <a:endParaRPr lang="en-US" sz="1150" dirty="0"/>
           </a:p>
@@ -12618,7 +12618,7 @@
                 <a:ea typeface="Pretendard" pitchFamily="34" charset="-122"/>
                 <a:cs typeface="Pretendard" pitchFamily="34" charset="-120"/>
               </a:rPr>
-              <a:t>컨셉트와 프로세스 · 7주차 프로포절 쓰기 — 6개 가이드를 채운다</a:t>
+              <a:t>컨셉트와 프로세스 · 7주차 프로포절 쓰기 — 여섯 절로 구성한다</a:t>
             </a:r>
             <a:endParaRPr lang="en-US" sz="850" dirty="0"/>
           </a:p>
@@ -12948,7 +12948,7 @@
                 <a:ea typeface="Pretendard" pitchFamily="34" charset="-122"/>
                 <a:cs typeface="Pretendard" pitchFamily="34" charset="-120"/>
               </a:rPr>
-              <a:t>아직 하지 않은 연구를 설명하는 글입니다. 결과가 없는 채로 설득해야 합니다.</a:t>
+              <a:t>결과에 대한 예상과 예상되는 연구 주제를 설명하는 글입니다.</a:t>
             </a:r>
             <a:endParaRPr lang="en-US" sz="1150" dirty="0"/>
           </a:p>
@@ -13083,7 +13083,7 @@
                 <a:ea typeface="Pretendard" pitchFamily="34" charset="-122"/>
                 <a:cs typeface="Pretendard" pitchFamily="34" charset="-120"/>
               </a:rPr>
-              <a:t>문제가 진짜 있다 — 내가 답답한 것이 아니라 남도 겪는 일이다</a:t>
+              <a:t>누구나 문제라고 인식한다 — 남도 인식하는 문제이다</a:t>
             </a:r>
             <a:endParaRPr lang="en-US" sz="1200" dirty="0"/>
           </a:p>
@@ -13107,7 +13107,7 @@
                 <a:ea typeface="Pretendard" pitchFamily="34" charset="-122"/>
                 <a:cs typeface="Pretendard" pitchFamily="34" charset="-120"/>
               </a:rPr>
-              <a:t>남들이 아직 안 풀었다 — 비슷한 연구는 있지만 이 자리는 비어 있다</a:t>
+              <a:t>남들이 풀지 않은 주제 — 비슷한 연구는 있지만 아직은 누구도 연구하지 않은 내용을 선정한다</a:t>
             </a:r>
             <a:endParaRPr lang="en-US" sz="1200" dirty="0"/>
           </a:p>
@@ -13131,7 +13131,7 @@
                 <a:ea typeface="Pretendard" pitchFamily="34" charset="-122"/>
                 <a:cs typeface="Pretendard" pitchFamily="34" charset="-120"/>
               </a:rPr>
-              <a:t>내 방법으로 풀 수 있다 — 삼 년 안에 할 수 있는 크기다</a:t>
+              <a:t>이러한 문제와 연구범위에 대해 방법을 제시 — 연구의 기간을 제시하며, 그 시간 내에 연구를 끝낸다</a:t>
             </a:r>
             <a:endParaRPr lang="en-US" sz="1200" dirty="0"/>
           </a:p>
@@ -13377,7 +13377,7 @@
                 <a:ea typeface="Pretendard" pitchFamily="34" charset="-122"/>
                 <a:cs typeface="Pretendard" pitchFamily="34" charset="-120"/>
               </a:rPr>
-              <a:t>오늘은 완성하는 자리가 아니라 6개의 문장을 꺼내 놓는 자리입니다.</a:t>
+              <a:t>오늘은 완성하는 자리가 아니라 여섯 문장을 꺼내 놓는 자리입니다.</a:t>
             </a:r>
             <a:endParaRPr lang="en-US" sz="1200" dirty="0"/>
           </a:p>
@@ -13441,7 +13441,7 @@
                 <a:ea typeface="Pretendard" pitchFamily="34" charset="-122"/>
                 <a:cs typeface="Pretendard" pitchFamily="34" charset="-120"/>
               </a:rPr>
-              <a:t>컨셉트와 프로세스 · 7주차 프로포절 쓰기 — 6개 가이드를 채운다</a:t>
+              <a:t>컨셉트와 프로세스 · 7주차 프로포절 쓰기 — 여섯 절로 구성한다</a:t>
             </a:r>
             <a:endParaRPr lang="en-US" sz="850" dirty="0"/>
           </a:p>
@@ -13732,7 +13732,7 @@
                 <a:ea typeface="Pretendard SemiBold" pitchFamily="34" charset="-122"/>
                 <a:cs typeface="Pretendard SemiBold" pitchFamily="34" charset="-120"/>
               </a:rPr>
-              <a:t>프로포절 작성 가이드 6개</a:t>
+              <a:t>여섯 절이 답하는 여섯 질문</a:t>
             </a:r>
             <a:endParaRPr lang="en-US" sz="3000" dirty="0"/>
           </a:p>
@@ -13877,7 +13877,7 @@
                 <a:ea typeface="Pretendard" pitchFamily="34" charset="-122"/>
                 <a:cs typeface="Pretendard" pitchFamily="34" charset="-120"/>
               </a:rPr>
-              <a:t>연구 배경 · 문제 제기. 남도 겪는 일임을 보여 줍니다.</a:t>
+              <a:t>연구 배경 · 문제 제기. 누구나 문제로 인식하는 일임을 밝힌다.</a:t>
             </a:r>
             <a:endParaRPr lang="en-US" sz="1150" dirty="0"/>
           </a:p>
@@ -13983,7 +13983,7 @@
                 <a:ea typeface="Pretendard" pitchFamily="34" charset="-122"/>
                 <a:cs typeface="Pretendard" pitchFamily="34" charset="-120"/>
               </a:rPr>
-              <a:t>연구 질문. 물음표로 끝나는 한 문장. 여기가 제일 중요합니다.</a:t>
+              <a:t>연구 질문. 물음표로 끝나는 한 문장으로 쓴다. 여섯 절의 중심이 된다.</a:t>
             </a:r>
             <a:endParaRPr lang="en-US" sz="1150" dirty="0"/>
           </a:p>
@@ -14089,7 +14089,7 @@
                 <a:ea typeface="Pretendard" pitchFamily="34" charset="-122"/>
                 <a:cs typeface="Pretendard" pitchFamily="34" charset="-120"/>
               </a:rPr>
-              <a:t>가설. 질문에 대한 내 짐작. 틀려도 됩니다.</a:t>
+              <a:t>가설. 질문에 대한 예상을 미리 밝힌다. 결과가 달라도 된다.</a:t>
             </a:r>
             <a:endParaRPr lang="en-US" sz="1150" dirty="0"/>
           </a:p>
@@ -14195,7 +14195,7 @@
                 <a:ea typeface="Pretendard" pitchFamily="34" charset="-122"/>
                 <a:cs typeface="Pretendard" pitchFamily="34" charset="-120"/>
               </a:rPr>
-              <a:t>선행연구 · 이론적 배경. 2회차에 찾은 다섯 편이 여기 들어갑니다.</a:t>
+              <a:t>선행연구 · 이론적 배경. 2회차에 찾은 다섯 편을 여기에 쓴다.</a:t>
             </a:r>
             <a:endParaRPr lang="en-US" sz="1150" dirty="0"/>
           </a:p>
@@ -14301,7 +14301,7 @@
                 <a:ea typeface="Pretendard" pitchFamily="34" charset="-122"/>
                 <a:cs typeface="Pretendard" pitchFamily="34" charset="-120"/>
               </a:rPr>
-              <a:t>연구 방법. 누구에게 무엇을 어떻게.</a:t>
+              <a:t>연구 방법. 대상과 절차와 판단 기준을 제시한다.</a:t>
             </a:r>
             <a:endParaRPr lang="en-US" sz="1150" dirty="0"/>
           </a:p>
@@ -14407,7 +14407,7 @@
                 <a:ea typeface="Pretendard" pitchFamily="34" charset="-122"/>
                 <a:cs typeface="Pretendard" pitchFamily="34" charset="-120"/>
               </a:rPr>
-              <a:t>예상 기여. 이 연구가 끝나면 무엇을 알게 되는가.</a:t>
+              <a:t>예상 기여. 연구가 끝난 뒤 무엇을 알게 되는지 밝힌다.</a:t>
             </a:r>
             <a:endParaRPr lang="en-US" sz="1150" dirty="0"/>
           </a:p>
@@ -14538,7 +14538,7 @@
                 <a:ea typeface="Pretendard" pitchFamily="34" charset="-122"/>
                 <a:cs typeface="Pretendard" pitchFamily="34" charset="-120"/>
               </a:rPr>
-              <a:t>컨셉트와 프로세스 · 7주차 프로포절 쓰기 — 6개 가이드를 채운다</a:t>
+              <a:t>컨셉트와 프로세스 · 7주차 프로포절 쓰기 — 여섯 절로 구성한다</a:t>
             </a:r>
             <a:endParaRPr lang="en-US" sz="850" dirty="0"/>
           </a:p>
@@ -15004,7 +15004,7 @@
                 <a:ea typeface="Pretendard Light" pitchFamily="34" charset="-122"/>
                 <a:cs typeface="Pretendard Light" pitchFamily="34" charset="-120"/>
               </a:rPr>
-              <a:t>첫째 절입니다. 무엇이 문제인가. 내가 답답한 것과 연구 문제는 다릅니다.</a:t>
+              <a:t>첫째 절입니다. 무엇이 문제인가. 연구자의 관심과 연구 문제는 구분한다.</a:t>
             </a:r>
             <a:endParaRPr lang="en-US" sz="1350" dirty="0"/>
           </a:p>
@@ -15334,7 +15334,7 @@
                 <a:ea typeface="Pretendard" pitchFamily="34" charset="-122"/>
                 <a:cs typeface="Pretendard" pitchFamily="34" charset="-120"/>
               </a:rPr>
-              <a:t>크게 쓰면 아무도 믿지 않고, 좁게 쓰면 확인할 수 있습니다.</a:t>
+              <a:t>문제를 넓게 적으면 검증할 수 없고, 좁게 적으면 확인할 수 있습니다.</a:t>
             </a:r>
             <a:endParaRPr lang="en-US" sz="1150" dirty="0"/>
           </a:p>
@@ -16327,7 +16327,7 @@
                 <a:ea typeface="Pretendard" pitchFamily="34" charset="-122"/>
                 <a:cs typeface="Pretendard" pitchFamily="34" charset="-120"/>
               </a:rPr>
-              <a:t>네 줄 다 같은 이야기입니다. 머릿속이 아니라 밖에서 확인할 수 있는 것을 씁니다.</a:t>
+              <a:t>네 줄 다 같은 이야기입니다. 연구자의 판단이 아니라 외부에서 확인되는 것을 기술한다.</a:t>
             </a:r>
             <a:endParaRPr lang="en-US" sz="1300" dirty="0"/>
           </a:p>
@@ -16391,7 +16391,7 @@
                 <a:ea typeface="Pretendard" pitchFamily="34" charset="-122"/>
                 <a:cs typeface="Pretendard" pitchFamily="34" charset="-120"/>
               </a:rPr>
-              <a:t>컨셉트와 프로세스 · 7주차 프로포절 쓰기 — 6개 가이드를 채운다</a:t>
+              <a:t>컨셉트와 프로세스 · 7주차 프로포절 쓰기 — 여섯 절로 구성한다</a:t>
             </a:r>
             <a:endParaRPr lang="en-US" sz="850" dirty="0"/>
           </a:p>
@@ -16856,7 +16856,7 @@
                 <a:ea typeface="Pretendard" pitchFamily="34" charset="-122"/>
                 <a:cs typeface="Pretendard" pitchFamily="34" charset="-120"/>
               </a:rPr>
-              <a:t>누가 — 어떤 사람이 겪습니까</a:t>
+              <a:t>누가 — 어떤 사람이 겪는가</a:t>
             </a:r>
             <a:endParaRPr lang="en-US" sz="1200" dirty="0"/>
           </a:p>
@@ -16880,7 +16880,7 @@
                 <a:ea typeface="Pretendard" pitchFamily="34" charset="-122"/>
                 <a:cs typeface="Pretendard" pitchFamily="34" charset="-120"/>
               </a:rPr>
-              <a:t>언제 — 어떤 상황에서 생깁니까</a:t>
+              <a:t>언제 — 어떤 상황에서 발생하는가</a:t>
             </a:r>
             <a:endParaRPr lang="en-US" sz="1200" dirty="0"/>
           </a:p>
@@ -16904,7 +16904,7 @@
                 <a:ea typeface="Pretendard" pitchFamily="34" charset="-122"/>
                 <a:cs typeface="Pretendard" pitchFamily="34" charset="-120"/>
               </a:rPr>
-              <a:t>무엇이 안 됩니까 — '잘 안 된다'는 답이 아닙니다</a:t>
+              <a:t>무엇이 되지 않는가 — '잘 안 된다'는 답이 아니다</a:t>
             </a:r>
             <a:endParaRPr lang="en-US" sz="1200" dirty="0"/>
           </a:p>
@@ -17238,7 +17238,7 @@
                 <a:ea typeface="Pretendard" pitchFamily="34" charset="-122"/>
                 <a:cs typeface="Pretendard" pitchFamily="34" charset="-120"/>
               </a:rPr>
-              <a:t>컨셉트와 프로세스 · 7주차 프로포절 쓰기 — 6개 가이드를 채운다</a:t>
+              <a:t>컨셉트와 프로세스 · 7주차 프로포절 쓰기 — 여섯 절로 구성한다</a:t>
             </a:r>
             <a:endParaRPr lang="en-US" sz="850" dirty="0"/>
           </a:p>
@@ -18034,7 +18034,7 @@
                 <a:ea typeface="Pretendard" pitchFamily="34" charset="-122"/>
                 <a:cs typeface="Pretendard" pitchFamily="34" charset="-120"/>
               </a:rPr>
-              <a:t>물음표로 끝나고 · 답할 수 있고 · 뻔하지 않고 · 확인할 방법이 보여야 합니다.</a:t>
+              <a:t>물음표로 끝나고 · 기간 안에 답할 수 있고 · 답이 자명하지 않고 · 확인할 방법이 드러나야 합니다.</a:t>
             </a:r>
             <a:endParaRPr lang="en-US" sz="1150" dirty="0"/>
           </a:p>
@@ -19027,7 +19027,7 @@
                 <a:ea typeface="Pretendard" pitchFamily="34" charset="-122"/>
                 <a:cs typeface="Pretendard" pitchFamily="34" charset="-120"/>
               </a:rPr>
-              <a:t>질문을 소리 내어 읽고 '그래서 어떻게 확인하는가'를 물어봅니다. 답이 없으면 아직 질문이 아닙니다.</a:t>
+              <a:t>질문을 소리 내어 읽고 '무엇으로 확인하는가'를 물어봅니다. 답이 없으면 아직 연구 질문이 아닙니다.</a:t>
             </a:r>
             <a:endParaRPr lang="en-US" sz="1300" dirty="0"/>
           </a:p>
@@ -19091,7 +19091,7 @@
                 <a:ea typeface="Pretendard" pitchFamily="34" charset="-122"/>
                 <a:cs typeface="Pretendard" pitchFamily="34" charset="-120"/>
               </a:rPr>
-              <a:t>컨셉트와 프로세스 · 7주차 프로포절 쓰기 — 6개 가이드를 채운다</a:t>
+              <a:t>컨셉트와 프로세스 · 7주차 프로포절 쓰기 — 여섯 절로 구성한다</a:t>
             </a:r>
             <a:endParaRPr lang="en-US" sz="850" dirty="0"/>
           </a:p>
@@ -19421,7 +19421,7 @@
                 <a:ea typeface="Pretendard" pitchFamily="34" charset="-122"/>
                 <a:cs typeface="Pretendard" pitchFamily="34" charset="-120"/>
               </a:rPr>
-              <a:t>맞히는 것이 아닙니다. 틀렸다는 것도 결과입니다.</a:t>
+              <a:t>결과를 맞히는 것이 아니라 예상을 미리 밝혀 두는 것입니다. 예상과 다른 결과도 결과입니다.</a:t>
             </a:r>
             <a:endParaRPr lang="en-US" sz="1150" dirty="0"/>
           </a:p>
@@ -20266,7 +20266,7 @@
                 <a:ea typeface="Pretendard" pitchFamily="34" charset="-122"/>
                 <a:cs typeface="Pretendard" pitchFamily="34" charset="-120"/>
               </a:rPr>
-              <a:t>컨셉트와 프로세스 · 7주차 프로포절 쓰기 — 6개 가이드를 채운다</a:t>
+              <a:t>컨셉트와 프로세스 · 7주차 프로포절 쓰기 — 여섯 절로 구성한다</a:t>
             </a:r>
             <a:endParaRPr lang="en-US" sz="850" dirty="0"/>
           </a:p>

--- a/dist/weeks-대학원/컨셉트와프로세스_07주차_프로포절쓰기.pptx
+++ b/dist/weeks-대학원/컨셉트와프로세스_07주차_프로포절쓰기.pptx
@@ -3755,7 +3755,7 @@
             <a:r>
               <a:rPr lang="en-US" sz="1700" dirty="0">
                 <a:solidFill>
-                  <a:srgbClr val="111111"/>
+                  <a:srgbClr val="9B9B9B"/>
                 </a:solidFill>
                 <a:latin typeface="Pretendard SemiBold" pitchFamily="34" charset="0"/>
                 <a:ea typeface="Pretendard SemiBold" pitchFamily="34" charset="-122"/>
@@ -3783,6 +3783,257 @@
           </a:prstGeom>
           <a:solidFill>
             <a:srgbClr val="FFFFFF"/>
+          </a:solidFill>
+          <a:ln w="12700">
+            <a:solidFill>
+              <a:srgbClr val="111111"/>
+            </a:solidFill>
+            <a:prstDash val="solid"/>
+          </a:ln>
+        </p:spPr>
+      </p:sp>
+      <p:sp>
+        <p:nvSpPr>
+          <p:cNvPr id="12" name="Shape 10"/>
+          <p:cNvSpPr/>
+          <p:nvPr/>
+        </p:nvSpPr>
+        <p:spPr>
+          <a:xfrm>
+            <a:off x="6297016" y="1627632"/>
+            <a:ext cx="5254600" cy="64008"/>
+          </a:xfrm>
+          <a:prstGeom prst="rect">
+            <a:avLst/>
+          </a:prstGeom>
+          <a:solidFill>
+            <a:srgbClr val="111111"/>
+          </a:solidFill>
+          <a:ln w="12700">
+            <a:solidFill>
+              <a:srgbClr val="111111"/>
+            </a:solidFill>
+            <a:prstDash val="solid"/>
+          </a:ln>
+        </p:spPr>
+      </p:sp>
+      <p:sp>
+        <p:nvSpPr>
+          <p:cNvPr id="13" name="Text 11"/>
+          <p:cNvSpPr/>
+          <p:nvPr/>
+        </p:nvSpPr>
+        <p:spPr>
+          <a:xfrm>
+            <a:off x="6699352" y="1901952"/>
+            <a:ext cx="4449928" cy="365760"/>
+          </a:xfrm>
+          <a:prstGeom prst="rect">
+            <a:avLst/>
+          </a:prstGeom>
+          <a:noFill/>
+          <a:ln/>
+        </p:spPr>
+        <p:txBody>
+          <a:bodyPr wrap="square" lIns="0" tIns="0" rIns="0" bIns="0" rtlCol="0" anchor="ctr"/>
+          <a:lstStyle/>
+          <a:p>
+            <a:pPr indent="0" marL="0">
+              <a:buNone/>
+            </a:pPr>
+            <a:r>
+              <a:rPr lang="en-US" sz="1700" dirty="0">
+                <a:solidFill>
+                  <a:srgbClr val="111111"/>
+                </a:solidFill>
+                <a:latin typeface="Pretendard SemiBold" pitchFamily="34" charset="0"/>
+                <a:ea typeface="Pretendard SemiBold" pitchFamily="34" charset="-122"/>
+                <a:cs typeface="Pretendard SemiBold" pitchFamily="34" charset="-120"/>
+              </a:rPr>
+              <a:t>질문인 것</a:t>
+            </a:r>
+            <a:endParaRPr lang="en-US" sz="1700" dirty="0"/>
+          </a:p>
+        </p:txBody>
+      </p:sp>
+      <p:sp>
+        <p:nvSpPr>
+          <p:cNvPr id="14" name="Text 12"/>
+          <p:cNvSpPr/>
+          <p:nvPr/>
+        </p:nvSpPr>
+        <p:spPr>
+          <a:xfrm>
+            <a:off x="1042416" y="2450592"/>
+            <a:ext cx="2011680" cy="274320"/>
+          </a:xfrm>
+          <a:prstGeom prst="rect">
+            <a:avLst/>
+          </a:prstGeom>
+          <a:noFill/>
+          <a:ln/>
+        </p:spPr>
+        <p:txBody>
+          <a:bodyPr wrap="square" lIns="0" tIns="0" rIns="0" bIns="0" rtlCol="0" anchor="ctr"/>
+          <a:lstStyle/>
+          <a:p>
+            <a:pPr indent="0" marL="0">
+              <a:buNone/>
+            </a:pPr>
+            <a:r>
+              <a:rPr lang="en-US" sz="900" b="1" spc="160" kern="0" dirty="0">
+                <a:solidFill>
+                  <a:srgbClr val="9B9B9B"/>
+                </a:solidFill>
+                <a:latin typeface="Pretendard" pitchFamily="34" charset="0"/>
+                <a:ea typeface="Pretendard" pitchFamily="34" charset="-122"/>
+                <a:cs typeface="Pretendard" pitchFamily="34" charset="-120"/>
+              </a:rPr>
+              <a:t>할 일을 적음</a:t>
+            </a:r>
+            <a:endParaRPr lang="en-US" sz="900" dirty="0"/>
+          </a:p>
+        </p:txBody>
+      </p:sp>
+      <p:sp>
+        <p:nvSpPr>
+          <p:cNvPr id="15" name="Text 13"/>
+          <p:cNvSpPr/>
+          <p:nvPr/>
+        </p:nvSpPr>
+        <p:spPr>
+          <a:xfrm>
+            <a:off x="1042416" y="2688336"/>
+            <a:ext cx="4449928" cy="329184"/>
+          </a:xfrm>
+          <a:prstGeom prst="rect">
+            <a:avLst/>
+          </a:prstGeom>
+          <a:noFill/>
+          <a:ln/>
+        </p:spPr>
+        <p:txBody>
+          <a:bodyPr wrap="square" lIns="0" tIns="0" rIns="0" bIns="0" rtlCol="0" anchor="t"/>
+          <a:lstStyle/>
+          <a:p>
+            <a:pPr indent="0" marL="0">
+              <a:lnSpc>
+                <a:spcPct val="120000"/>
+              </a:lnSpc>
+              <a:buNone/>
+            </a:pPr>
+            <a:r>
+              <a:rPr lang="en-US" sz="1150" dirty="0">
+                <a:solidFill>
+                  <a:srgbClr val="6E6E6E"/>
+                </a:solidFill>
+                <a:latin typeface="Pretendard" pitchFamily="34" charset="0"/>
+                <a:ea typeface="Pretendard" pitchFamily="34" charset="-122"/>
+                <a:cs typeface="Pretendard" pitchFamily="34" charset="-120"/>
+              </a:rPr>
+              <a:t>간판 디자인 방안을 연구한다</a:t>
+            </a:r>
+            <a:endParaRPr lang="en-US" sz="1150" dirty="0"/>
+          </a:p>
+        </p:txBody>
+      </p:sp>
+      <p:sp>
+        <p:nvSpPr>
+          <p:cNvPr id="16" name="Text 14"/>
+          <p:cNvSpPr/>
+          <p:nvPr/>
+        </p:nvSpPr>
+        <p:spPr>
+          <a:xfrm>
+            <a:off x="6699352" y="2450592"/>
+            <a:ext cx="2011680" cy="274320"/>
+          </a:xfrm>
+          <a:prstGeom prst="rect">
+            <a:avLst/>
+          </a:prstGeom>
+          <a:noFill/>
+          <a:ln/>
+        </p:spPr>
+        <p:txBody>
+          <a:bodyPr wrap="square" lIns="0" tIns="0" rIns="0" bIns="0" rtlCol="0" anchor="ctr"/>
+          <a:lstStyle/>
+          <a:p>
+            <a:pPr indent="0" marL="0">
+              <a:buNone/>
+            </a:pPr>
+            <a:r>
+              <a:rPr lang="en-US" sz="900" b="1" spc="160" kern="0" dirty="0">
+                <a:solidFill>
+                  <a:srgbClr val="111111"/>
+                </a:solidFill>
+                <a:latin typeface="Pretendard" pitchFamily="34" charset="0"/>
+                <a:ea typeface="Pretendard" pitchFamily="34" charset="-122"/>
+                <a:cs typeface="Pretendard" pitchFamily="34" charset="-120"/>
+              </a:rPr>
+              <a:t>할 일을 적음</a:t>
+            </a:r>
+            <a:endParaRPr lang="en-US" sz="900" dirty="0"/>
+          </a:p>
+        </p:txBody>
+      </p:sp>
+      <p:sp>
+        <p:nvSpPr>
+          <p:cNvPr id="17" name="Text 15"/>
+          <p:cNvSpPr/>
+          <p:nvPr/>
+        </p:nvSpPr>
+        <p:spPr>
+          <a:xfrm>
+            <a:off x="6699352" y="2688336"/>
+            <a:ext cx="4449928" cy="329184"/>
+          </a:xfrm>
+          <a:prstGeom prst="rect">
+            <a:avLst/>
+          </a:prstGeom>
+          <a:noFill/>
+          <a:ln/>
+        </p:spPr>
+        <p:txBody>
+          <a:bodyPr wrap="square" lIns="0" tIns="0" rIns="0" bIns="0" rtlCol="0" anchor="t"/>
+          <a:lstStyle/>
+          <a:p>
+            <a:pPr indent="0" marL="0">
+              <a:lnSpc>
+                <a:spcPct val="120000"/>
+              </a:lnSpc>
+              <a:buNone/>
+            </a:pPr>
+            <a:r>
+              <a:rPr lang="en-US" sz="1150" b="1" dirty="0">
+                <a:solidFill>
+                  <a:srgbClr val="1F1F1F"/>
+                </a:solidFill>
+                <a:latin typeface="Pretendard" pitchFamily="34" charset="0"/>
+                <a:ea typeface="Pretendard" pitchFamily="34" charset="-122"/>
+                <a:cs typeface="Pretendard" pitchFamily="34" charset="-120"/>
+              </a:rPr>
+              <a:t>색 간판은 글자 간판보다 업종을 빨리 알게 하는가?</a:t>
+            </a:r>
+            <a:endParaRPr lang="en-US" sz="1150" dirty="0"/>
+          </a:p>
+        </p:txBody>
+      </p:sp>
+      <p:sp>
+        <p:nvSpPr>
+          <p:cNvPr id="18" name="Shape 16"/>
+          <p:cNvSpPr/>
+          <p:nvPr/>
+        </p:nvSpPr>
+        <p:spPr>
+          <a:xfrm>
+            <a:off x="1042416" y="2980944"/>
+            <a:ext cx="4449928" cy="7315"/>
+          </a:xfrm>
+          <a:prstGeom prst="rect">
+            <a:avLst/>
+          </a:prstGeom>
+          <a:solidFill>
+            <a:srgbClr val="DCDCDC"/>
           </a:solidFill>
           <a:ln w="12700">
             <a:solidFill>
@@ -3794,214 +4045,13 @@
       </p:sp>
       <p:sp>
         <p:nvSpPr>
-          <p:cNvPr id="12" name="Text 10"/>
-          <p:cNvSpPr/>
-          <p:nvPr/>
-        </p:nvSpPr>
-        <p:spPr>
-          <a:xfrm>
-            <a:off x="6699352" y="1901952"/>
-            <a:ext cx="4449928" cy="365760"/>
-          </a:xfrm>
-          <a:prstGeom prst="rect">
-            <a:avLst/>
-          </a:prstGeom>
-          <a:noFill/>
-          <a:ln/>
-        </p:spPr>
-        <p:txBody>
-          <a:bodyPr wrap="square" lIns="0" tIns="0" rIns="0" bIns="0" rtlCol="0" anchor="ctr"/>
-          <a:lstStyle/>
-          <a:p>
-            <a:pPr indent="0" marL="0">
-              <a:buNone/>
-            </a:pPr>
-            <a:r>
-              <a:rPr lang="en-US" sz="1700" dirty="0">
-                <a:solidFill>
-                  <a:srgbClr val="9B9B9B"/>
-                </a:solidFill>
-                <a:latin typeface="Pretendard SemiBold" pitchFamily="34" charset="0"/>
-                <a:ea typeface="Pretendard SemiBold" pitchFamily="34" charset="-122"/>
-                <a:cs typeface="Pretendard SemiBold" pitchFamily="34" charset="-120"/>
-              </a:rPr>
-              <a:t>질문인 것</a:t>
-            </a:r>
-            <a:endParaRPr lang="en-US" sz="1700" dirty="0"/>
-          </a:p>
-        </p:txBody>
-      </p:sp>
-      <p:sp>
-        <p:nvSpPr>
-          <p:cNvPr id="13" name="Text 11"/>
-          <p:cNvSpPr/>
-          <p:nvPr/>
-        </p:nvSpPr>
-        <p:spPr>
-          <a:xfrm>
-            <a:off x="1042416" y="2450592"/>
-            <a:ext cx="2011680" cy="274320"/>
-          </a:xfrm>
-          <a:prstGeom prst="rect">
-            <a:avLst/>
-          </a:prstGeom>
-          <a:noFill/>
-          <a:ln/>
-        </p:spPr>
-        <p:txBody>
-          <a:bodyPr wrap="square" lIns="0" tIns="0" rIns="0" bIns="0" rtlCol="0" anchor="ctr"/>
-          <a:lstStyle/>
-          <a:p>
-            <a:pPr indent="0" marL="0">
-              <a:buNone/>
-            </a:pPr>
-            <a:r>
-              <a:rPr lang="en-US" sz="900" b="1" spc="160" kern="0" dirty="0">
-                <a:solidFill>
-                  <a:srgbClr val="111111"/>
-                </a:solidFill>
-                <a:latin typeface="Pretendard" pitchFamily="34" charset="0"/>
-                <a:ea typeface="Pretendard" pitchFamily="34" charset="-122"/>
-                <a:cs typeface="Pretendard" pitchFamily="34" charset="-120"/>
-              </a:rPr>
-              <a:t>할 일을 적음</a:t>
-            </a:r>
-            <a:endParaRPr lang="en-US" sz="900" dirty="0"/>
-          </a:p>
-        </p:txBody>
-      </p:sp>
-      <p:sp>
-        <p:nvSpPr>
-          <p:cNvPr id="14" name="Text 12"/>
-          <p:cNvSpPr/>
-          <p:nvPr/>
-        </p:nvSpPr>
-        <p:spPr>
-          <a:xfrm>
-            <a:off x="1042416" y="2688336"/>
-            <a:ext cx="4449928" cy="329184"/>
-          </a:xfrm>
-          <a:prstGeom prst="rect">
-            <a:avLst/>
-          </a:prstGeom>
-          <a:noFill/>
-          <a:ln/>
-        </p:spPr>
-        <p:txBody>
-          <a:bodyPr wrap="square" lIns="0" tIns="0" rIns="0" bIns="0" rtlCol="0" anchor="t"/>
-          <a:lstStyle/>
-          <a:p>
-            <a:pPr indent="0" marL="0">
-              <a:lnSpc>
-                <a:spcPct val="120000"/>
-              </a:lnSpc>
-              <a:buNone/>
-            </a:pPr>
-            <a:r>
-              <a:rPr lang="en-US" sz="1150" dirty="0">
-                <a:solidFill>
-                  <a:srgbClr val="1F1F1F"/>
-                </a:solidFill>
-                <a:latin typeface="Pretendard" pitchFamily="34" charset="0"/>
-                <a:ea typeface="Pretendard" pitchFamily="34" charset="-122"/>
-                <a:cs typeface="Pretendard" pitchFamily="34" charset="-120"/>
-              </a:rPr>
-              <a:t>간판 디자인 방안을 연구한다</a:t>
-            </a:r>
-            <a:endParaRPr lang="en-US" sz="1150" dirty="0"/>
-          </a:p>
-        </p:txBody>
-      </p:sp>
-      <p:sp>
-        <p:nvSpPr>
-          <p:cNvPr id="15" name="Text 13"/>
-          <p:cNvSpPr/>
-          <p:nvPr/>
-        </p:nvSpPr>
-        <p:spPr>
-          <a:xfrm>
-            <a:off x="6699352" y="2450592"/>
-            <a:ext cx="2011680" cy="274320"/>
-          </a:xfrm>
-          <a:prstGeom prst="rect">
-            <a:avLst/>
-          </a:prstGeom>
-          <a:noFill/>
-          <a:ln/>
-        </p:spPr>
-        <p:txBody>
-          <a:bodyPr wrap="square" lIns="0" tIns="0" rIns="0" bIns="0" rtlCol="0" anchor="ctr"/>
-          <a:lstStyle/>
-          <a:p>
-            <a:pPr indent="0" marL="0">
-              <a:buNone/>
-            </a:pPr>
-            <a:r>
-              <a:rPr lang="en-US" sz="900" b="1" spc="160" kern="0" dirty="0">
-                <a:solidFill>
-                  <a:srgbClr val="9B9B9B"/>
-                </a:solidFill>
-                <a:latin typeface="Pretendard" pitchFamily="34" charset="0"/>
-                <a:ea typeface="Pretendard" pitchFamily="34" charset="-122"/>
-                <a:cs typeface="Pretendard" pitchFamily="34" charset="-120"/>
-              </a:rPr>
-              <a:t>할 일을 적음</a:t>
-            </a:r>
-            <a:endParaRPr lang="en-US" sz="900" dirty="0"/>
-          </a:p>
-        </p:txBody>
-      </p:sp>
-      <p:sp>
-        <p:nvSpPr>
-          <p:cNvPr id="16" name="Text 14"/>
-          <p:cNvSpPr/>
-          <p:nvPr/>
-        </p:nvSpPr>
-        <p:spPr>
-          <a:xfrm>
-            <a:off x="6699352" y="2688336"/>
-            <a:ext cx="4449928" cy="329184"/>
-          </a:xfrm>
-          <a:prstGeom prst="rect">
-            <a:avLst/>
-          </a:prstGeom>
-          <a:noFill/>
-          <a:ln/>
-        </p:spPr>
-        <p:txBody>
-          <a:bodyPr wrap="square" lIns="0" tIns="0" rIns="0" bIns="0" rtlCol="0" anchor="t"/>
-          <a:lstStyle/>
-          <a:p>
-            <a:pPr indent="0" marL="0">
-              <a:lnSpc>
-                <a:spcPct val="120000"/>
-              </a:lnSpc>
-              <a:buNone/>
-            </a:pPr>
-            <a:r>
-              <a:rPr lang="en-US" sz="1150" dirty="0">
-                <a:solidFill>
-                  <a:srgbClr val="6E6E6E"/>
-                </a:solidFill>
-                <a:latin typeface="Pretendard" pitchFamily="34" charset="0"/>
-                <a:ea typeface="Pretendard" pitchFamily="34" charset="-122"/>
-                <a:cs typeface="Pretendard" pitchFamily="34" charset="-120"/>
-              </a:rPr>
-              <a:t>색 간판은 글자 간판보다 업종을 빨리 알게 하는가?</a:t>
-            </a:r>
-            <a:endParaRPr lang="en-US" sz="1150" dirty="0"/>
-          </a:p>
-        </p:txBody>
-      </p:sp>
-      <p:sp>
-        <p:nvSpPr>
-          <p:cNvPr id="17" name="Shape 15"/>
-          <p:cNvSpPr/>
-          <p:nvPr/>
-        </p:nvSpPr>
-        <p:spPr>
-          <a:xfrm>
-            <a:off x="1042416" y="2980944"/>
+          <p:cNvPr id="19" name="Shape 17"/>
+          <p:cNvSpPr/>
+          <p:nvPr/>
+        </p:nvSpPr>
+        <p:spPr>
+          <a:xfrm>
+            <a:off x="6699352" y="2980944"/>
             <a:ext cx="4449928" cy="7315"/>
           </a:xfrm>
           <a:prstGeom prst="rect">
@@ -4020,13 +4070,175 @@
       </p:sp>
       <p:sp>
         <p:nvSpPr>
-          <p:cNvPr id="18" name="Shape 16"/>
-          <p:cNvSpPr/>
-          <p:nvPr/>
-        </p:nvSpPr>
-        <p:spPr>
-          <a:xfrm>
-            <a:off x="6699352" y="2980944"/>
+          <p:cNvPr id="20" name="Text 18"/>
+          <p:cNvSpPr/>
+          <p:nvPr/>
+        </p:nvSpPr>
+        <p:spPr>
+          <a:xfrm>
+            <a:off x="1042416" y="3035808"/>
+            <a:ext cx="2011680" cy="274320"/>
+          </a:xfrm>
+          <a:prstGeom prst="rect">
+            <a:avLst/>
+          </a:prstGeom>
+          <a:noFill/>
+          <a:ln/>
+        </p:spPr>
+        <p:txBody>
+          <a:bodyPr wrap="square" lIns="0" tIns="0" rIns="0" bIns="0" rtlCol="0" anchor="ctr"/>
+          <a:lstStyle/>
+          <a:p>
+            <a:pPr indent="0" marL="0">
+              <a:buNone/>
+            </a:pPr>
+            <a:r>
+              <a:rPr lang="en-US" sz="900" b="1" spc="160" kern="0" dirty="0">
+                <a:solidFill>
+                  <a:srgbClr val="9B9B9B"/>
+                </a:solidFill>
+                <a:latin typeface="Pretendard" pitchFamily="34" charset="0"/>
+                <a:ea typeface="Pretendard" pitchFamily="34" charset="-122"/>
+                <a:cs typeface="Pretendard" pitchFamily="34" charset="-120"/>
+              </a:rPr>
+              <a:t>너무 큼</a:t>
+            </a:r>
+            <a:endParaRPr lang="en-US" sz="900" dirty="0"/>
+          </a:p>
+        </p:txBody>
+      </p:sp>
+      <p:sp>
+        <p:nvSpPr>
+          <p:cNvPr id="21" name="Text 19"/>
+          <p:cNvSpPr/>
+          <p:nvPr/>
+        </p:nvSpPr>
+        <p:spPr>
+          <a:xfrm>
+            <a:off x="1042416" y="3273552"/>
+            <a:ext cx="4449928" cy="329184"/>
+          </a:xfrm>
+          <a:prstGeom prst="rect">
+            <a:avLst/>
+          </a:prstGeom>
+          <a:noFill/>
+          <a:ln/>
+        </p:spPr>
+        <p:txBody>
+          <a:bodyPr wrap="square" lIns="0" tIns="0" rIns="0" bIns="0" rtlCol="0" anchor="t"/>
+          <a:lstStyle/>
+          <a:p>
+            <a:pPr indent="0" marL="0">
+              <a:lnSpc>
+                <a:spcPct val="120000"/>
+              </a:lnSpc>
+              <a:buNone/>
+            </a:pPr>
+            <a:r>
+              <a:rPr lang="en-US" sz="1150" dirty="0">
+                <a:solidFill>
+                  <a:srgbClr val="6E6E6E"/>
+                </a:solidFill>
+                <a:latin typeface="Pretendard" pitchFamily="34" charset="0"/>
+                <a:ea typeface="Pretendard" pitchFamily="34" charset="-122"/>
+                <a:cs typeface="Pretendard" pitchFamily="34" charset="-120"/>
+              </a:rPr>
+              <a:t>전통시장 활성화 방안은 무엇인가?</a:t>
+            </a:r>
+            <a:endParaRPr lang="en-US" sz="1150" dirty="0"/>
+          </a:p>
+        </p:txBody>
+      </p:sp>
+      <p:sp>
+        <p:nvSpPr>
+          <p:cNvPr id="22" name="Text 20"/>
+          <p:cNvSpPr/>
+          <p:nvPr/>
+        </p:nvSpPr>
+        <p:spPr>
+          <a:xfrm>
+            <a:off x="6699352" y="3035808"/>
+            <a:ext cx="2011680" cy="274320"/>
+          </a:xfrm>
+          <a:prstGeom prst="rect">
+            <a:avLst/>
+          </a:prstGeom>
+          <a:noFill/>
+          <a:ln/>
+        </p:spPr>
+        <p:txBody>
+          <a:bodyPr wrap="square" lIns="0" tIns="0" rIns="0" bIns="0" rtlCol="0" anchor="ctr"/>
+          <a:lstStyle/>
+          <a:p>
+            <a:pPr indent="0" marL="0">
+              <a:buNone/>
+            </a:pPr>
+            <a:r>
+              <a:rPr lang="en-US" sz="900" b="1" spc="160" kern="0" dirty="0">
+                <a:solidFill>
+                  <a:srgbClr val="111111"/>
+                </a:solidFill>
+                <a:latin typeface="Pretendard" pitchFamily="34" charset="0"/>
+                <a:ea typeface="Pretendard" pitchFamily="34" charset="-122"/>
+                <a:cs typeface="Pretendard" pitchFamily="34" charset="-120"/>
+              </a:rPr>
+              <a:t>너무 큼</a:t>
+            </a:r>
+            <a:endParaRPr lang="en-US" sz="900" dirty="0"/>
+          </a:p>
+        </p:txBody>
+      </p:sp>
+      <p:sp>
+        <p:nvSpPr>
+          <p:cNvPr id="23" name="Text 21"/>
+          <p:cNvSpPr/>
+          <p:nvPr/>
+        </p:nvSpPr>
+        <p:spPr>
+          <a:xfrm>
+            <a:off x="6699352" y="3273552"/>
+            <a:ext cx="4449928" cy="329184"/>
+          </a:xfrm>
+          <a:prstGeom prst="rect">
+            <a:avLst/>
+          </a:prstGeom>
+          <a:noFill/>
+          <a:ln/>
+        </p:spPr>
+        <p:txBody>
+          <a:bodyPr wrap="square" lIns="0" tIns="0" rIns="0" bIns="0" rtlCol="0" anchor="t"/>
+          <a:lstStyle/>
+          <a:p>
+            <a:pPr indent="0" marL="0">
+              <a:lnSpc>
+                <a:spcPct val="120000"/>
+              </a:lnSpc>
+              <a:buNone/>
+            </a:pPr>
+            <a:r>
+              <a:rPr lang="en-US" sz="1150" b="1" dirty="0">
+                <a:solidFill>
+                  <a:srgbClr val="1F1F1F"/>
+                </a:solidFill>
+                <a:latin typeface="Pretendard" pitchFamily="34" charset="0"/>
+                <a:ea typeface="Pretendard" pitchFamily="34" charset="-122"/>
+                <a:cs typeface="Pretendard" pitchFamily="34" charset="-120"/>
+              </a:rPr>
+              <a:t>처음 온 방문객은 간판의 무엇을 보고 업종을 판단하는가?</a:t>
+            </a:r>
+            <a:endParaRPr lang="en-US" sz="1150" dirty="0"/>
+          </a:p>
+        </p:txBody>
+      </p:sp>
+      <p:sp>
+        <p:nvSpPr>
+          <p:cNvPr id="24" name="Shape 22"/>
+          <p:cNvSpPr/>
+          <p:nvPr/>
+        </p:nvSpPr>
+        <p:spPr>
+          <a:xfrm>
+            <a:off x="1042416" y="3566160"/>
             <a:ext cx="4449928" cy="7315"/>
           </a:xfrm>
           <a:prstGeom prst="rect">
@@ -4045,175 +4257,13 @@
       </p:sp>
       <p:sp>
         <p:nvSpPr>
-          <p:cNvPr id="19" name="Text 17"/>
-          <p:cNvSpPr/>
-          <p:nvPr/>
-        </p:nvSpPr>
-        <p:spPr>
-          <a:xfrm>
-            <a:off x="1042416" y="3035808"/>
-            <a:ext cx="2011680" cy="274320"/>
-          </a:xfrm>
-          <a:prstGeom prst="rect">
-            <a:avLst/>
-          </a:prstGeom>
-          <a:noFill/>
-          <a:ln/>
-        </p:spPr>
-        <p:txBody>
-          <a:bodyPr wrap="square" lIns="0" tIns="0" rIns="0" bIns="0" rtlCol="0" anchor="ctr"/>
-          <a:lstStyle/>
-          <a:p>
-            <a:pPr indent="0" marL="0">
-              <a:buNone/>
-            </a:pPr>
-            <a:r>
-              <a:rPr lang="en-US" sz="900" b="1" spc="160" kern="0" dirty="0">
-                <a:solidFill>
-                  <a:srgbClr val="111111"/>
-                </a:solidFill>
-                <a:latin typeface="Pretendard" pitchFamily="34" charset="0"/>
-                <a:ea typeface="Pretendard" pitchFamily="34" charset="-122"/>
-                <a:cs typeface="Pretendard" pitchFamily="34" charset="-120"/>
-              </a:rPr>
-              <a:t>너무 큼</a:t>
-            </a:r>
-            <a:endParaRPr lang="en-US" sz="900" dirty="0"/>
-          </a:p>
-        </p:txBody>
-      </p:sp>
-      <p:sp>
-        <p:nvSpPr>
-          <p:cNvPr id="20" name="Text 18"/>
-          <p:cNvSpPr/>
-          <p:nvPr/>
-        </p:nvSpPr>
-        <p:spPr>
-          <a:xfrm>
-            <a:off x="1042416" y="3273552"/>
-            <a:ext cx="4449928" cy="329184"/>
-          </a:xfrm>
-          <a:prstGeom prst="rect">
-            <a:avLst/>
-          </a:prstGeom>
-          <a:noFill/>
-          <a:ln/>
-        </p:spPr>
-        <p:txBody>
-          <a:bodyPr wrap="square" lIns="0" tIns="0" rIns="0" bIns="0" rtlCol="0" anchor="t"/>
-          <a:lstStyle/>
-          <a:p>
-            <a:pPr indent="0" marL="0">
-              <a:lnSpc>
-                <a:spcPct val="120000"/>
-              </a:lnSpc>
-              <a:buNone/>
-            </a:pPr>
-            <a:r>
-              <a:rPr lang="en-US" sz="1150" dirty="0">
-                <a:solidFill>
-                  <a:srgbClr val="1F1F1F"/>
-                </a:solidFill>
-                <a:latin typeface="Pretendard" pitchFamily="34" charset="0"/>
-                <a:ea typeface="Pretendard" pitchFamily="34" charset="-122"/>
-                <a:cs typeface="Pretendard" pitchFamily="34" charset="-120"/>
-              </a:rPr>
-              <a:t>전통시장 활성화 방안은 무엇인가?</a:t>
-            </a:r>
-            <a:endParaRPr lang="en-US" sz="1150" dirty="0"/>
-          </a:p>
-        </p:txBody>
-      </p:sp>
-      <p:sp>
-        <p:nvSpPr>
-          <p:cNvPr id="21" name="Text 19"/>
-          <p:cNvSpPr/>
-          <p:nvPr/>
-        </p:nvSpPr>
-        <p:spPr>
-          <a:xfrm>
-            <a:off x="6699352" y="3035808"/>
-            <a:ext cx="2011680" cy="274320"/>
-          </a:xfrm>
-          <a:prstGeom prst="rect">
-            <a:avLst/>
-          </a:prstGeom>
-          <a:noFill/>
-          <a:ln/>
-        </p:spPr>
-        <p:txBody>
-          <a:bodyPr wrap="square" lIns="0" tIns="0" rIns="0" bIns="0" rtlCol="0" anchor="ctr"/>
-          <a:lstStyle/>
-          <a:p>
-            <a:pPr indent="0" marL="0">
-              <a:buNone/>
-            </a:pPr>
-            <a:r>
-              <a:rPr lang="en-US" sz="900" b="1" spc="160" kern="0" dirty="0">
-                <a:solidFill>
-                  <a:srgbClr val="9B9B9B"/>
-                </a:solidFill>
-                <a:latin typeface="Pretendard" pitchFamily="34" charset="0"/>
-                <a:ea typeface="Pretendard" pitchFamily="34" charset="-122"/>
-                <a:cs typeface="Pretendard" pitchFamily="34" charset="-120"/>
-              </a:rPr>
-              <a:t>너무 큼</a:t>
-            </a:r>
-            <a:endParaRPr lang="en-US" sz="900" dirty="0"/>
-          </a:p>
-        </p:txBody>
-      </p:sp>
-      <p:sp>
-        <p:nvSpPr>
-          <p:cNvPr id="22" name="Text 20"/>
-          <p:cNvSpPr/>
-          <p:nvPr/>
-        </p:nvSpPr>
-        <p:spPr>
-          <a:xfrm>
-            <a:off x="6699352" y="3273552"/>
-            <a:ext cx="4449928" cy="329184"/>
-          </a:xfrm>
-          <a:prstGeom prst="rect">
-            <a:avLst/>
-          </a:prstGeom>
-          <a:noFill/>
-          <a:ln/>
-        </p:spPr>
-        <p:txBody>
-          <a:bodyPr wrap="square" lIns="0" tIns="0" rIns="0" bIns="0" rtlCol="0" anchor="t"/>
-          <a:lstStyle/>
-          <a:p>
-            <a:pPr indent="0" marL="0">
-              <a:lnSpc>
-                <a:spcPct val="120000"/>
-              </a:lnSpc>
-              <a:buNone/>
-            </a:pPr>
-            <a:r>
-              <a:rPr lang="en-US" sz="1150" dirty="0">
-                <a:solidFill>
-                  <a:srgbClr val="6E6E6E"/>
-                </a:solidFill>
-                <a:latin typeface="Pretendard" pitchFamily="34" charset="0"/>
-                <a:ea typeface="Pretendard" pitchFamily="34" charset="-122"/>
-                <a:cs typeface="Pretendard" pitchFamily="34" charset="-120"/>
-              </a:rPr>
-              <a:t>처음 온 방문객은 간판의 무엇을 보고 업종을 판단하는가?</a:t>
-            </a:r>
-            <a:endParaRPr lang="en-US" sz="1150" dirty="0"/>
-          </a:p>
-        </p:txBody>
-      </p:sp>
-      <p:sp>
-        <p:nvSpPr>
-          <p:cNvPr id="23" name="Shape 21"/>
-          <p:cNvSpPr/>
-          <p:nvPr/>
-        </p:nvSpPr>
-        <p:spPr>
-          <a:xfrm>
-            <a:off x="1042416" y="3566160"/>
+          <p:cNvPr id="25" name="Shape 23"/>
+          <p:cNvSpPr/>
+          <p:nvPr/>
+        </p:nvSpPr>
+        <p:spPr>
+          <a:xfrm>
+            <a:off x="6699352" y="3566160"/>
             <a:ext cx="4449928" cy="7315"/>
           </a:xfrm>
           <a:prstGeom prst="rect">
@@ -4232,13 +4282,175 @@
       </p:sp>
       <p:sp>
         <p:nvSpPr>
-          <p:cNvPr id="24" name="Shape 22"/>
-          <p:cNvSpPr/>
-          <p:nvPr/>
-        </p:nvSpPr>
-        <p:spPr>
-          <a:xfrm>
-            <a:off x="6699352" y="3566160"/>
+          <p:cNvPr id="26" name="Text 24"/>
+          <p:cNvSpPr/>
+          <p:nvPr/>
+        </p:nvSpPr>
+        <p:spPr>
+          <a:xfrm>
+            <a:off x="1042416" y="3621024"/>
+            <a:ext cx="2011680" cy="274320"/>
+          </a:xfrm>
+          <a:prstGeom prst="rect">
+            <a:avLst/>
+          </a:prstGeom>
+          <a:noFill/>
+          <a:ln/>
+        </p:spPr>
+        <p:txBody>
+          <a:bodyPr wrap="square" lIns="0" tIns="0" rIns="0" bIns="0" rtlCol="0" anchor="ctr"/>
+          <a:lstStyle/>
+          <a:p>
+            <a:pPr indent="0" marL="0">
+              <a:buNone/>
+            </a:pPr>
+            <a:r>
+              <a:rPr lang="en-US" sz="900" b="1" spc="160" kern="0" dirty="0">
+                <a:solidFill>
+                  <a:srgbClr val="9B9B9B"/>
+                </a:solidFill>
+                <a:latin typeface="Pretendard" pitchFamily="34" charset="0"/>
+                <a:ea typeface="Pretendard" pitchFamily="34" charset="-122"/>
+                <a:cs typeface="Pretendard" pitchFamily="34" charset="-120"/>
+              </a:rPr>
+              <a:t>답이 뻔함</a:t>
+            </a:r>
+            <a:endParaRPr lang="en-US" sz="900" dirty="0"/>
+          </a:p>
+        </p:txBody>
+      </p:sp>
+      <p:sp>
+        <p:nvSpPr>
+          <p:cNvPr id="27" name="Text 25"/>
+          <p:cNvSpPr/>
+          <p:nvPr/>
+        </p:nvSpPr>
+        <p:spPr>
+          <a:xfrm>
+            <a:off x="1042416" y="3858768"/>
+            <a:ext cx="4449928" cy="329184"/>
+          </a:xfrm>
+          <a:prstGeom prst="rect">
+            <a:avLst/>
+          </a:prstGeom>
+          <a:noFill/>
+          <a:ln/>
+        </p:spPr>
+        <p:txBody>
+          <a:bodyPr wrap="square" lIns="0" tIns="0" rIns="0" bIns="0" rtlCol="0" anchor="t"/>
+          <a:lstStyle/>
+          <a:p>
+            <a:pPr indent="0" marL="0">
+              <a:lnSpc>
+                <a:spcPct val="120000"/>
+              </a:lnSpc>
+              <a:buNone/>
+            </a:pPr>
+            <a:r>
+              <a:rPr lang="en-US" sz="1150" dirty="0">
+                <a:solidFill>
+                  <a:srgbClr val="6E6E6E"/>
+                </a:solidFill>
+                <a:latin typeface="Pretendard" pitchFamily="34" charset="0"/>
+                <a:ea typeface="Pretendard" pitchFamily="34" charset="-122"/>
+                <a:cs typeface="Pretendard" pitchFamily="34" charset="-120"/>
+              </a:rPr>
+              <a:t>간판은 중요한가?</a:t>
+            </a:r>
+            <a:endParaRPr lang="en-US" sz="1150" dirty="0"/>
+          </a:p>
+        </p:txBody>
+      </p:sp>
+      <p:sp>
+        <p:nvSpPr>
+          <p:cNvPr id="28" name="Text 26"/>
+          <p:cNvSpPr/>
+          <p:nvPr/>
+        </p:nvSpPr>
+        <p:spPr>
+          <a:xfrm>
+            <a:off x="6699352" y="3621024"/>
+            <a:ext cx="2011680" cy="274320"/>
+          </a:xfrm>
+          <a:prstGeom prst="rect">
+            <a:avLst/>
+          </a:prstGeom>
+          <a:noFill/>
+          <a:ln/>
+        </p:spPr>
+        <p:txBody>
+          <a:bodyPr wrap="square" lIns="0" tIns="0" rIns="0" bIns="0" rtlCol="0" anchor="ctr"/>
+          <a:lstStyle/>
+          <a:p>
+            <a:pPr indent="0" marL="0">
+              <a:buNone/>
+            </a:pPr>
+            <a:r>
+              <a:rPr lang="en-US" sz="900" b="1" spc="160" kern="0" dirty="0">
+                <a:solidFill>
+                  <a:srgbClr val="111111"/>
+                </a:solidFill>
+                <a:latin typeface="Pretendard" pitchFamily="34" charset="0"/>
+                <a:ea typeface="Pretendard" pitchFamily="34" charset="-122"/>
+                <a:cs typeface="Pretendard" pitchFamily="34" charset="-120"/>
+              </a:rPr>
+              <a:t>답이 뻔함</a:t>
+            </a:r>
+            <a:endParaRPr lang="en-US" sz="900" dirty="0"/>
+          </a:p>
+        </p:txBody>
+      </p:sp>
+      <p:sp>
+        <p:nvSpPr>
+          <p:cNvPr id="29" name="Text 27"/>
+          <p:cNvSpPr/>
+          <p:nvPr/>
+        </p:nvSpPr>
+        <p:spPr>
+          <a:xfrm>
+            <a:off x="6699352" y="3858768"/>
+            <a:ext cx="4449928" cy="329184"/>
+          </a:xfrm>
+          <a:prstGeom prst="rect">
+            <a:avLst/>
+          </a:prstGeom>
+          <a:noFill/>
+          <a:ln/>
+        </p:spPr>
+        <p:txBody>
+          <a:bodyPr wrap="square" lIns="0" tIns="0" rIns="0" bIns="0" rtlCol="0" anchor="t"/>
+          <a:lstStyle/>
+          <a:p>
+            <a:pPr indent="0" marL="0">
+              <a:lnSpc>
+                <a:spcPct val="120000"/>
+              </a:lnSpc>
+              <a:buNone/>
+            </a:pPr>
+            <a:r>
+              <a:rPr lang="en-US" sz="1150" b="1" dirty="0">
+                <a:solidFill>
+                  <a:srgbClr val="1F1F1F"/>
+                </a:solidFill>
+                <a:latin typeface="Pretendard" pitchFamily="34" charset="0"/>
+                <a:ea typeface="Pretendard" pitchFamily="34" charset="-122"/>
+                <a:cs typeface="Pretendard" pitchFamily="34" charset="-120"/>
+              </a:rPr>
+              <a:t>업종 표시를 색과 글자 중 어느 쪽으로 할 때 더 빨리 찾는가?</a:t>
+            </a:r>
+            <a:endParaRPr lang="en-US" sz="1150" dirty="0"/>
+          </a:p>
+        </p:txBody>
+      </p:sp>
+      <p:sp>
+        <p:nvSpPr>
+          <p:cNvPr id="30" name="Shape 28"/>
+          <p:cNvSpPr/>
+          <p:nvPr/>
+        </p:nvSpPr>
+        <p:spPr>
+          <a:xfrm>
+            <a:off x="1042416" y="4151376"/>
             <a:ext cx="4449928" cy="7315"/>
           </a:xfrm>
           <a:prstGeom prst="rect">
@@ -4257,175 +4469,13 @@
       </p:sp>
       <p:sp>
         <p:nvSpPr>
-          <p:cNvPr id="25" name="Text 23"/>
-          <p:cNvSpPr/>
-          <p:nvPr/>
-        </p:nvSpPr>
-        <p:spPr>
-          <a:xfrm>
-            <a:off x="1042416" y="3621024"/>
-            <a:ext cx="2011680" cy="274320"/>
-          </a:xfrm>
-          <a:prstGeom prst="rect">
-            <a:avLst/>
-          </a:prstGeom>
-          <a:noFill/>
-          <a:ln/>
-        </p:spPr>
-        <p:txBody>
-          <a:bodyPr wrap="square" lIns="0" tIns="0" rIns="0" bIns="0" rtlCol="0" anchor="ctr"/>
-          <a:lstStyle/>
-          <a:p>
-            <a:pPr indent="0" marL="0">
-              <a:buNone/>
-            </a:pPr>
-            <a:r>
-              <a:rPr lang="en-US" sz="900" b="1" spc="160" kern="0" dirty="0">
-                <a:solidFill>
-                  <a:srgbClr val="111111"/>
-                </a:solidFill>
-                <a:latin typeface="Pretendard" pitchFamily="34" charset="0"/>
-                <a:ea typeface="Pretendard" pitchFamily="34" charset="-122"/>
-                <a:cs typeface="Pretendard" pitchFamily="34" charset="-120"/>
-              </a:rPr>
-              <a:t>답이 뻔함</a:t>
-            </a:r>
-            <a:endParaRPr lang="en-US" sz="900" dirty="0"/>
-          </a:p>
-        </p:txBody>
-      </p:sp>
-      <p:sp>
-        <p:nvSpPr>
-          <p:cNvPr id="26" name="Text 24"/>
-          <p:cNvSpPr/>
-          <p:nvPr/>
-        </p:nvSpPr>
-        <p:spPr>
-          <a:xfrm>
-            <a:off x="1042416" y="3858768"/>
-            <a:ext cx="4449928" cy="329184"/>
-          </a:xfrm>
-          <a:prstGeom prst="rect">
-            <a:avLst/>
-          </a:prstGeom>
-          <a:noFill/>
-          <a:ln/>
-        </p:spPr>
-        <p:txBody>
-          <a:bodyPr wrap="square" lIns="0" tIns="0" rIns="0" bIns="0" rtlCol="0" anchor="t"/>
-          <a:lstStyle/>
-          <a:p>
-            <a:pPr indent="0" marL="0">
-              <a:lnSpc>
-                <a:spcPct val="120000"/>
-              </a:lnSpc>
-              <a:buNone/>
-            </a:pPr>
-            <a:r>
-              <a:rPr lang="en-US" sz="1150" dirty="0">
-                <a:solidFill>
-                  <a:srgbClr val="1F1F1F"/>
-                </a:solidFill>
-                <a:latin typeface="Pretendard" pitchFamily="34" charset="0"/>
-                <a:ea typeface="Pretendard" pitchFamily="34" charset="-122"/>
-                <a:cs typeface="Pretendard" pitchFamily="34" charset="-120"/>
-              </a:rPr>
-              <a:t>간판은 중요한가?</a:t>
-            </a:r>
-            <a:endParaRPr lang="en-US" sz="1150" dirty="0"/>
-          </a:p>
-        </p:txBody>
-      </p:sp>
-      <p:sp>
-        <p:nvSpPr>
-          <p:cNvPr id="27" name="Text 25"/>
-          <p:cNvSpPr/>
-          <p:nvPr/>
-        </p:nvSpPr>
-        <p:spPr>
-          <a:xfrm>
-            <a:off x="6699352" y="3621024"/>
-            <a:ext cx="2011680" cy="274320"/>
-          </a:xfrm>
-          <a:prstGeom prst="rect">
-            <a:avLst/>
-          </a:prstGeom>
-          <a:noFill/>
-          <a:ln/>
-        </p:spPr>
-        <p:txBody>
-          <a:bodyPr wrap="square" lIns="0" tIns="0" rIns="0" bIns="0" rtlCol="0" anchor="ctr"/>
-          <a:lstStyle/>
-          <a:p>
-            <a:pPr indent="0" marL="0">
-              <a:buNone/>
-            </a:pPr>
-            <a:r>
-              <a:rPr lang="en-US" sz="900" b="1" spc="160" kern="0" dirty="0">
-                <a:solidFill>
-                  <a:srgbClr val="9B9B9B"/>
-                </a:solidFill>
-                <a:latin typeface="Pretendard" pitchFamily="34" charset="0"/>
-                <a:ea typeface="Pretendard" pitchFamily="34" charset="-122"/>
-                <a:cs typeface="Pretendard" pitchFamily="34" charset="-120"/>
-              </a:rPr>
-              <a:t>답이 뻔함</a:t>
-            </a:r>
-            <a:endParaRPr lang="en-US" sz="900" dirty="0"/>
-          </a:p>
-        </p:txBody>
-      </p:sp>
-      <p:sp>
-        <p:nvSpPr>
-          <p:cNvPr id="28" name="Text 26"/>
-          <p:cNvSpPr/>
-          <p:nvPr/>
-        </p:nvSpPr>
-        <p:spPr>
-          <a:xfrm>
-            <a:off x="6699352" y="3858768"/>
-            <a:ext cx="4449928" cy="329184"/>
-          </a:xfrm>
-          <a:prstGeom prst="rect">
-            <a:avLst/>
-          </a:prstGeom>
-          <a:noFill/>
-          <a:ln/>
-        </p:spPr>
-        <p:txBody>
-          <a:bodyPr wrap="square" lIns="0" tIns="0" rIns="0" bIns="0" rtlCol="0" anchor="t"/>
-          <a:lstStyle/>
-          <a:p>
-            <a:pPr indent="0" marL="0">
-              <a:lnSpc>
-                <a:spcPct val="120000"/>
-              </a:lnSpc>
-              <a:buNone/>
-            </a:pPr>
-            <a:r>
-              <a:rPr lang="en-US" sz="1150" dirty="0">
-                <a:solidFill>
-                  <a:srgbClr val="6E6E6E"/>
-                </a:solidFill>
-                <a:latin typeface="Pretendard" pitchFamily="34" charset="0"/>
-                <a:ea typeface="Pretendard" pitchFamily="34" charset="-122"/>
-                <a:cs typeface="Pretendard" pitchFamily="34" charset="-120"/>
-              </a:rPr>
-              <a:t>업종 표시를 색과 글자 중 어느 쪽으로 할 때 더 빨리 찾는가?</a:t>
-            </a:r>
-            <a:endParaRPr lang="en-US" sz="1150" dirty="0"/>
-          </a:p>
-        </p:txBody>
-      </p:sp>
-      <p:sp>
-        <p:nvSpPr>
-          <p:cNvPr id="29" name="Shape 27"/>
-          <p:cNvSpPr/>
-          <p:nvPr/>
-        </p:nvSpPr>
-        <p:spPr>
-          <a:xfrm>
-            <a:off x="1042416" y="4151376"/>
+          <p:cNvPr id="31" name="Shape 29"/>
+          <p:cNvSpPr/>
+          <p:nvPr/>
+        </p:nvSpPr>
+        <p:spPr>
+          <a:xfrm>
+            <a:off x="6699352" y="4151376"/>
             <a:ext cx="4449928" cy="7315"/>
           </a:xfrm>
           <a:prstGeom prst="rect">
@@ -4444,14 +4494,243 @@
       </p:sp>
       <p:sp>
         <p:nvSpPr>
-          <p:cNvPr id="30" name="Shape 28"/>
-          <p:cNvSpPr/>
-          <p:nvPr/>
-        </p:nvSpPr>
-        <p:spPr>
-          <a:xfrm>
-            <a:off x="6699352" y="4151376"/>
-            <a:ext cx="4449928" cy="7315"/>
+          <p:cNvPr id="32" name="Text 30"/>
+          <p:cNvSpPr/>
+          <p:nvPr/>
+        </p:nvSpPr>
+        <p:spPr>
+          <a:xfrm>
+            <a:off x="1042416" y="4206240"/>
+            <a:ext cx="2011680" cy="274320"/>
+          </a:xfrm>
+          <a:prstGeom prst="rect">
+            <a:avLst/>
+          </a:prstGeom>
+          <a:noFill/>
+          <a:ln/>
+        </p:spPr>
+        <p:txBody>
+          <a:bodyPr wrap="square" lIns="0" tIns="0" rIns="0" bIns="0" rtlCol="0" anchor="ctr"/>
+          <a:lstStyle/>
+          <a:p>
+            <a:pPr indent="0" marL="0">
+              <a:buNone/>
+            </a:pPr>
+            <a:r>
+              <a:rPr lang="en-US" sz="900" b="1" spc="160" kern="0" dirty="0">
+                <a:solidFill>
+                  <a:srgbClr val="9B9B9B"/>
+                </a:solidFill>
+                <a:latin typeface="Pretendard" pitchFamily="34" charset="0"/>
+                <a:ea typeface="Pretendard" pitchFamily="34" charset="-122"/>
+                <a:cs typeface="Pretendard" pitchFamily="34" charset="-120"/>
+              </a:rPr>
+              <a:t>잴 수 없음</a:t>
+            </a:r>
+            <a:endParaRPr lang="en-US" sz="900" dirty="0"/>
+          </a:p>
+        </p:txBody>
+      </p:sp>
+      <p:sp>
+        <p:nvSpPr>
+          <p:cNvPr id="33" name="Text 31"/>
+          <p:cNvSpPr/>
+          <p:nvPr/>
+        </p:nvSpPr>
+        <p:spPr>
+          <a:xfrm>
+            <a:off x="1042416" y="4443984"/>
+            <a:ext cx="4449928" cy="329184"/>
+          </a:xfrm>
+          <a:prstGeom prst="rect">
+            <a:avLst/>
+          </a:prstGeom>
+          <a:noFill/>
+          <a:ln/>
+        </p:spPr>
+        <p:txBody>
+          <a:bodyPr wrap="square" lIns="0" tIns="0" rIns="0" bIns="0" rtlCol="0" anchor="t"/>
+          <a:lstStyle/>
+          <a:p>
+            <a:pPr indent="0" marL="0">
+              <a:lnSpc>
+                <a:spcPct val="120000"/>
+              </a:lnSpc>
+              <a:buNone/>
+            </a:pPr>
+            <a:r>
+              <a:rPr lang="en-US" sz="1150" dirty="0">
+                <a:solidFill>
+                  <a:srgbClr val="6E6E6E"/>
+                </a:solidFill>
+                <a:latin typeface="Pretendard" pitchFamily="34" charset="0"/>
+                <a:ea typeface="Pretendard" pitchFamily="34" charset="-122"/>
+                <a:cs typeface="Pretendard" pitchFamily="34" charset="-120"/>
+              </a:rPr>
+              <a:t>방문객은 간판을 어떻게 생각하는가?</a:t>
+            </a:r>
+            <a:endParaRPr lang="en-US" sz="1150" dirty="0"/>
+          </a:p>
+        </p:txBody>
+      </p:sp>
+      <p:sp>
+        <p:nvSpPr>
+          <p:cNvPr id="34" name="Text 32"/>
+          <p:cNvSpPr/>
+          <p:nvPr/>
+        </p:nvSpPr>
+        <p:spPr>
+          <a:xfrm>
+            <a:off x="6699352" y="4206240"/>
+            <a:ext cx="2011680" cy="274320"/>
+          </a:xfrm>
+          <a:prstGeom prst="rect">
+            <a:avLst/>
+          </a:prstGeom>
+          <a:noFill/>
+          <a:ln/>
+        </p:spPr>
+        <p:txBody>
+          <a:bodyPr wrap="square" lIns="0" tIns="0" rIns="0" bIns="0" rtlCol="0" anchor="ctr"/>
+          <a:lstStyle/>
+          <a:p>
+            <a:pPr indent="0" marL="0">
+              <a:buNone/>
+            </a:pPr>
+            <a:r>
+              <a:rPr lang="en-US" sz="900" b="1" spc="160" kern="0" dirty="0">
+                <a:solidFill>
+                  <a:srgbClr val="111111"/>
+                </a:solidFill>
+                <a:latin typeface="Pretendard" pitchFamily="34" charset="0"/>
+                <a:ea typeface="Pretendard" pitchFamily="34" charset="-122"/>
+                <a:cs typeface="Pretendard" pitchFamily="34" charset="-120"/>
+              </a:rPr>
+              <a:t>잴 수 없음</a:t>
+            </a:r>
+            <a:endParaRPr lang="en-US" sz="900" dirty="0"/>
+          </a:p>
+        </p:txBody>
+      </p:sp>
+      <p:sp>
+        <p:nvSpPr>
+          <p:cNvPr id="35" name="Text 33"/>
+          <p:cNvSpPr/>
+          <p:nvPr/>
+        </p:nvSpPr>
+        <p:spPr>
+          <a:xfrm>
+            <a:off x="6699352" y="4443984"/>
+            <a:ext cx="4449928" cy="329184"/>
+          </a:xfrm>
+          <a:prstGeom prst="rect">
+            <a:avLst/>
+          </a:prstGeom>
+          <a:noFill/>
+          <a:ln/>
+        </p:spPr>
+        <p:txBody>
+          <a:bodyPr wrap="square" lIns="0" tIns="0" rIns="0" bIns="0" rtlCol="0" anchor="t"/>
+          <a:lstStyle/>
+          <a:p>
+            <a:pPr indent="0" marL="0">
+              <a:lnSpc>
+                <a:spcPct val="120000"/>
+              </a:lnSpc>
+              <a:buNone/>
+            </a:pPr>
+            <a:r>
+              <a:rPr lang="en-US" sz="1150" b="1" dirty="0">
+                <a:solidFill>
+                  <a:srgbClr val="1F1F1F"/>
+                </a:solidFill>
+                <a:latin typeface="Pretendard" pitchFamily="34" charset="0"/>
+                <a:ea typeface="Pretendard" pitchFamily="34" charset="-122"/>
+                <a:cs typeface="Pretendard" pitchFamily="34" charset="-120"/>
+              </a:rPr>
+              <a:t>간판으로 업종을 판단하는 데 몇 초가 걸리는가?</a:t>
+            </a:r>
+            <a:endParaRPr lang="en-US" sz="1150" dirty="0"/>
+          </a:p>
+        </p:txBody>
+      </p:sp>
+      <p:sp>
+        <p:nvSpPr>
+          <p:cNvPr id="36" name="Shape 34"/>
+          <p:cNvSpPr/>
+          <p:nvPr/>
+        </p:nvSpPr>
+        <p:spPr>
+          <a:xfrm>
+            <a:off x="640080" y="5010912"/>
+            <a:ext cx="10911535" cy="7315"/>
+          </a:xfrm>
+          <a:prstGeom prst="rect">
+            <a:avLst/>
+          </a:prstGeom>
+          <a:solidFill>
+            <a:srgbClr val="111111"/>
+          </a:solidFill>
+          <a:ln w="12700">
+            <a:solidFill>
+              <a:srgbClr val="111111"/>
+            </a:solidFill>
+            <a:prstDash val="solid"/>
+          </a:ln>
+        </p:spPr>
+      </p:sp>
+      <p:sp>
+        <p:nvSpPr>
+          <p:cNvPr id="37" name="Text 35"/>
+          <p:cNvSpPr/>
+          <p:nvPr/>
+        </p:nvSpPr>
+        <p:spPr>
+          <a:xfrm>
+            <a:off x="640080" y="5120640"/>
+            <a:ext cx="10911535" cy="402336"/>
+          </a:xfrm>
+          <a:prstGeom prst="rect">
+            <a:avLst/>
+          </a:prstGeom>
+          <a:noFill/>
+          <a:ln/>
+        </p:spPr>
+        <p:txBody>
+          <a:bodyPr wrap="square" lIns="0" tIns="0" rIns="0" bIns="0" rtlCol="0" anchor="t"/>
+          <a:lstStyle/>
+          <a:p>
+            <a:pPr indent="0" marL="0">
+              <a:lnSpc>
+                <a:spcPct val="120000"/>
+              </a:lnSpc>
+              <a:buNone/>
+            </a:pPr>
+            <a:r>
+              <a:rPr lang="en-US" sz="1300" b="1" dirty="0">
+                <a:solidFill>
+                  <a:srgbClr val="111111"/>
+                </a:solidFill>
+                <a:latin typeface="Pretendard" pitchFamily="34" charset="0"/>
+                <a:ea typeface="Pretendard" pitchFamily="34" charset="-122"/>
+                <a:cs typeface="Pretendard" pitchFamily="34" charset="-120"/>
+              </a:rPr>
+              <a:t>질문을 소리 내어 읽고 '무엇으로 확인하는가'를 물어봅니다. 답이 없으면 아직 연구 질문이 아닙니다.</a:t>
+            </a:r>
+            <a:endParaRPr lang="en-US" sz="1300" dirty="0"/>
+          </a:p>
+        </p:txBody>
+      </p:sp>
+      <p:sp>
+        <p:nvSpPr>
+          <p:cNvPr id="38" name="Shape 36"/>
+          <p:cNvSpPr/>
+          <p:nvPr/>
+        </p:nvSpPr>
+        <p:spPr>
+          <a:xfrm>
+            <a:off x="640080" y="6291072"/>
+            <a:ext cx="10911535" cy="7315"/>
           </a:xfrm>
           <a:prstGeom prst="rect">
             <a:avLst/>
@@ -4469,261 +4748,7 @@
       </p:sp>
       <p:sp>
         <p:nvSpPr>
-          <p:cNvPr id="31" name="Text 29"/>
-          <p:cNvSpPr/>
-          <p:nvPr/>
-        </p:nvSpPr>
-        <p:spPr>
-          <a:xfrm>
-            <a:off x="1042416" y="4206240"/>
-            <a:ext cx="2011680" cy="274320"/>
-          </a:xfrm>
-          <a:prstGeom prst="rect">
-            <a:avLst/>
-          </a:prstGeom>
-          <a:noFill/>
-          <a:ln/>
-        </p:spPr>
-        <p:txBody>
-          <a:bodyPr wrap="square" lIns="0" tIns="0" rIns="0" bIns="0" rtlCol="0" anchor="ctr"/>
-          <a:lstStyle/>
-          <a:p>
-            <a:pPr indent="0" marL="0">
-              <a:buNone/>
-            </a:pPr>
-            <a:r>
-              <a:rPr lang="en-US" sz="900" b="1" spc="160" kern="0" dirty="0">
-                <a:solidFill>
-                  <a:srgbClr val="111111"/>
-                </a:solidFill>
-                <a:latin typeface="Pretendard" pitchFamily="34" charset="0"/>
-                <a:ea typeface="Pretendard" pitchFamily="34" charset="-122"/>
-                <a:cs typeface="Pretendard" pitchFamily="34" charset="-120"/>
-              </a:rPr>
-              <a:t>잴 수 없음</a:t>
-            </a:r>
-            <a:endParaRPr lang="en-US" sz="900" dirty="0"/>
-          </a:p>
-        </p:txBody>
-      </p:sp>
-      <p:sp>
-        <p:nvSpPr>
-          <p:cNvPr id="32" name="Text 30"/>
-          <p:cNvSpPr/>
-          <p:nvPr/>
-        </p:nvSpPr>
-        <p:spPr>
-          <a:xfrm>
-            <a:off x="1042416" y="4443984"/>
-            <a:ext cx="4449928" cy="329184"/>
-          </a:xfrm>
-          <a:prstGeom prst="rect">
-            <a:avLst/>
-          </a:prstGeom>
-          <a:noFill/>
-          <a:ln/>
-        </p:spPr>
-        <p:txBody>
-          <a:bodyPr wrap="square" lIns="0" tIns="0" rIns="0" bIns="0" rtlCol="0" anchor="t"/>
-          <a:lstStyle/>
-          <a:p>
-            <a:pPr indent="0" marL="0">
-              <a:lnSpc>
-                <a:spcPct val="120000"/>
-              </a:lnSpc>
-              <a:buNone/>
-            </a:pPr>
-            <a:r>
-              <a:rPr lang="en-US" sz="1150" dirty="0">
-                <a:solidFill>
-                  <a:srgbClr val="1F1F1F"/>
-                </a:solidFill>
-                <a:latin typeface="Pretendard" pitchFamily="34" charset="0"/>
-                <a:ea typeface="Pretendard" pitchFamily="34" charset="-122"/>
-                <a:cs typeface="Pretendard" pitchFamily="34" charset="-120"/>
-              </a:rPr>
-              <a:t>방문객은 간판을 어떻게 생각하는가?</a:t>
-            </a:r>
-            <a:endParaRPr lang="en-US" sz="1150" dirty="0"/>
-          </a:p>
-        </p:txBody>
-      </p:sp>
-      <p:sp>
-        <p:nvSpPr>
-          <p:cNvPr id="33" name="Text 31"/>
-          <p:cNvSpPr/>
-          <p:nvPr/>
-        </p:nvSpPr>
-        <p:spPr>
-          <a:xfrm>
-            <a:off x="6699352" y="4206240"/>
-            <a:ext cx="2011680" cy="274320"/>
-          </a:xfrm>
-          <a:prstGeom prst="rect">
-            <a:avLst/>
-          </a:prstGeom>
-          <a:noFill/>
-          <a:ln/>
-        </p:spPr>
-        <p:txBody>
-          <a:bodyPr wrap="square" lIns="0" tIns="0" rIns="0" bIns="0" rtlCol="0" anchor="ctr"/>
-          <a:lstStyle/>
-          <a:p>
-            <a:pPr indent="0" marL="0">
-              <a:buNone/>
-            </a:pPr>
-            <a:r>
-              <a:rPr lang="en-US" sz="900" b="1" spc="160" kern="0" dirty="0">
-                <a:solidFill>
-                  <a:srgbClr val="9B9B9B"/>
-                </a:solidFill>
-                <a:latin typeface="Pretendard" pitchFamily="34" charset="0"/>
-                <a:ea typeface="Pretendard" pitchFamily="34" charset="-122"/>
-                <a:cs typeface="Pretendard" pitchFamily="34" charset="-120"/>
-              </a:rPr>
-              <a:t>잴 수 없음</a:t>
-            </a:r>
-            <a:endParaRPr lang="en-US" sz="900" dirty="0"/>
-          </a:p>
-        </p:txBody>
-      </p:sp>
-      <p:sp>
-        <p:nvSpPr>
-          <p:cNvPr id="34" name="Text 32"/>
-          <p:cNvSpPr/>
-          <p:nvPr/>
-        </p:nvSpPr>
-        <p:spPr>
-          <a:xfrm>
-            <a:off x="6699352" y="4443984"/>
-            <a:ext cx="4449928" cy="329184"/>
-          </a:xfrm>
-          <a:prstGeom prst="rect">
-            <a:avLst/>
-          </a:prstGeom>
-          <a:noFill/>
-          <a:ln/>
-        </p:spPr>
-        <p:txBody>
-          <a:bodyPr wrap="square" lIns="0" tIns="0" rIns="0" bIns="0" rtlCol="0" anchor="t"/>
-          <a:lstStyle/>
-          <a:p>
-            <a:pPr indent="0" marL="0">
-              <a:lnSpc>
-                <a:spcPct val="120000"/>
-              </a:lnSpc>
-              <a:buNone/>
-            </a:pPr>
-            <a:r>
-              <a:rPr lang="en-US" sz="1150" dirty="0">
-                <a:solidFill>
-                  <a:srgbClr val="6E6E6E"/>
-                </a:solidFill>
-                <a:latin typeface="Pretendard" pitchFamily="34" charset="0"/>
-                <a:ea typeface="Pretendard" pitchFamily="34" charset="-122"/>
-                <a:cs typeface="Pretendard" pitchFamily="34" charset="-120"/>
-              </a:rPr>
-              <a:t>간판으로 업종을 판단하는 데 몇 초가 걸리는가?</a:t>
-            </a:r>
-            <a:endParaRPr lang="en-US" sz="1150" dirty="0"/>
-          </a:p>
-        </p:txBody>
-      </p:sp>
-      <p:sp>
-        <p:nvSpPr>
-          <p:cNvPr id="35" name="Shape 33"/>
-          <p:cNvSpPr/>
-          <p:nvPr/>
-        </p:nvSpPr>
-        <p:spPr>
-          <a:xfrm>
-            <a:off x="640080" y="5010912"/>
-            <a:ext cx="10911535" cy="7315"/>
-          </a:xfrm>
-          <a:prstGeom prst="rect">
-            <a:avLst/>
-          </a:prstGeom>
-          <a:solidFill>
-            <a:srgbClr val="111111"/>
-          </a:solidFill>
-          <a:ln w="12700">
-            <a:solidFill>
-              <a:srgbClr val="111111"/>
-            </a:solidFill>
-            <a:prstDash val="solid"/>
-          </a:ln>
-        </p:spPr>
-      </p:sp>
-      <p:sp>
-        <p:nvSpPr>
-          <p:cNvPr id="36" name="Text 34"/>
-          <p:cNvSpPr/>
-          <p:nvPr/>
-        </p:nvSpPr>
-        <p:spPr>
-          <a:xfrm>
-            <a:off x="640080" y="5120640"/>
-            <a:ext cx="10911535" cy="402336"/>
-          </a:xfrm>
-          <a:prstGeom prst="rect">
-            <a:avLst/>
-          </a:prstGeom>
-          <a:noFill/>
-          <a:ln/>
-        </p:spPr>
-        <p:txBody>
-          <a:bodyPr wrap="square" lIns="0" tIns="0" rIns="0" bIns="0" rtlCol="0" anchor="t"/>
-          <a:lstStyle/>
-          <a:p>
-            <a:pPr indent="0" marL="0">
-              <a:lnSpc>
-                <a:spcPct val="120000"/>
-              </a:lnSpc>
-              <a:buNone/>
-            </a:pPr>
-            <a:r>
-              <a:rPr lang="en-US" sz="1300" b="1" dirty="0">
-                <a:solidFill>
-                  <a:srgbClr val="111111"/>
-                </a:solidFill>
-                <a:latin typeface="Pretendard" pitchFamily="34" charset="0"/>
-                <a:ea typeface="Pretendard" pitchFamily="34" charset="-122"/>
-                <a:cs typeface="Pretendard" pitchFamily="34" charset="-120"/>
-              </a:rPr>
-              <a:t>질문을 소리 내어 읽고 '무엇으로 확인하는가'를 물어봅니다. 답이 없으면 아직 연구 질문이 아닙니다.</a:t>
-            </a:r>
-            <a:endParaRPr lang="en-US" sz="1300" dirty="0"/>
-          </a:p>
-        </p:txBody>
-      </p:sp>
-      <p:sp>
-        <p:nvSpPr>
-          <p:cNvPr id="37" name="Shape 35"/>
-          <p:cNvSpPr/>
-          <p:nvPr/>
-        </p:nvSpPr>
-        <p:spPr>
-          <a:xfrm>
-            <a:off x="640080" y="6291072"/>
-            <a:ext cx="10911535" cy="7315"/>
-          </a:xfrm>
-          <a:prstGeom prst="rect">
-            <a:avLst/>
-          </a:prstGeom>
-          <a:solidFill>
-            <a:srgbClr val="DCDCDC"/>
-          </a:solidFill>
-          <a:ln w="12700">
-            <a:solidFill>
-              <a:srgbClr val="DCDCDC"/>
-            </a:solidFill>
-            <a:prstDash val="solid"/>
-          </a:ln>
-        </p:spPr>
-      </p:sp>
-      <p:sp>
-        <p:nvSpPr>
-          <p:cNvPr id="38" name="Text 36"/>
+          <p:cNvPr id="39" name="Text 37"/>
           <p:cNvSpPr/>
           <p:nvPr/>
         </p:nvSpPr>
@@ -4762,7 +4787,7 @@
       </p:sp>
       <p:sp>
         <p:nvSpPr>
-          <p:cNvPr id="39" name="Text 37"/>
+          <p:cNvPr id="40" name="Text 38"/>
           <p:cNvSpPr/>
           <p:nvPr/>
         </p:nvSpPr>
@@ -5142,7 +5167,7 @@
             <a:r>
               <a:rPr lang="en-US" sz="1700" dirty="0">
                 <a:solidFill>
-                  <a:srgbClr val="111111"/>
+                  <a:srgbClr val="9B9B9B"/>
                 </a:solidFill>
                 <a:latin typeface="Pretendard SemiBold" pitchFamily="34" charset="0"/>
                 <a:ea typeface="Pretendard SemiBold" pitchFamily="34" charset="-122"/>
@@ -5170,6 +5195,257 @@
           </a:prstGeom>
           <a:solidFill>
             <a:srgbClr val="FFFFFF"/>
+          </a:solidFill>
+          <a:ln w="12700">
+            <a:solidFill>
+              <a:srgbClr val="111111"/>
+            </a:solidFill>
+            <a:prstDash val="solid"/>
+          </a:ln>
+        </p:spPr>
+      </p:sp>
+      <p:sp>
+        <p:nvSpPr>
+          <p:cNvPr id="12" name="Shape 10"/>
+          <p:cNvSpPr/>
+          <p:nvPr/>
+        </p:nvSpPr>
+        <p:spPr>
+          <a:xfrm>
+            <a:off x="6297016" y="1627632"/>
+            <a:ext cx="5254600" cy="64008"/>
+          </a:xfrm>
+          <a:prstGeom prst="rect">
+            <a:avLst/>
+          </a:prstGeom>
+          <a:solidFill>
+            <a:srgbClr val="111111"/>
+          </a:solidFill>
+          <a:ln w="12700">
+            <a:solidFill>
+              <a:srgbClr val="111111"/>
+            </a:solidFill>
+            <a:prstDash val="solid"/>
+          </a:ln>
+        </p:spPr>
+      </p:sp>
+      <p:sp>
+        <p:nvSpPr>
+          <p:cNvPr id="13" name="Text 11"/>
+          <p:cNvSpPr/>
+          <p:nvPr/>
+        </p:nvSpPr>
+        <p:spPr>
+          <a:xfrm>
+            <a:off x="6699352" y="1901952"/>
+            <a:ext cx="4449928" cy="365760"/>
+          </a:xfrm>
+          <a:prstGeom prst="rect">
+            <a:avLst/>
+          </a:prstGeom>
+          <a:noFill/>
+          <a:ln/>
+        </p:spPr>
+        <p:txBody>
+          <a:bodyPr wrap="square" lIns="0" tIns="0" rIns="0" bIns="0" rtlCol="0" anchor="ctr"/>
+          <a:lstStyle/>
+          <a:p>
+            <a:pPr indent="0" marL="0">
+              <a:buNone/>
+            </a:pPr>
+            <a:r>
+              <a:rPr lang="en-US" sz="1700" dirty="0">
+                <a:solidFill>
+                  <a:srgbClr val="111111"/>
+                </a:solidFill>
+                <a:latin typeface="Pretendard SemiBold" pitchFamily="34" charset="0"/>
+                <a:ea typeface="Pretendard SemiBold" pitchFamily="34" charset="-122"/>
+                <a:cs typeface="Pretendard SemiBold" pitchFamily="34" charset="-120"/>
+              </a:rPr>
+              <a:t>가설인 것</a:t>
+            </a:r>
+            <a:endParaRPr lang="en-US" sz="1700" dirty="0"/>
+          </a:p>
+        </p:txBody>
+      </p:sp>
+      <p:sp>
+        <p:nvSpPr>
+          <p:cNvPr id="14" name="Text 12"/>
+          <p:cNvSpPr/>
+          <p:nvPr/>
+        </p:nvSpPr>
+        <p:spPr>
+          <a:xfrm>
+            <a:off x="1042416" y="2450592"/>
+            <a:ext cx="2011680" cy="274320"/>
+          </a:xfrm>
+          <a:prstGeom prst="rect">
+            <a:avLst/>
+          </a:prstGeom>
+          <a:noFill/>
+          <a:ln/>
+        </p:spPr>
+        <p:txBody>
+          <a:bodyPr wrap="square" lIns="0" tIns="0" rIns="0" bIns="0" rtlCol="0" anchor="ctr"/>
+          <a:lstStyle/>
+          <a:p>
+            <a:pPr indent="0" marL="0">
+              <a:buNone/>
+            </a:pPr>
+            <a:r>
+              <a:rPr lang="en-US" sz="900" b="1" spc="160" kern="0" dirty="0">
+                <a:solidFill>
+                  <a:srgbClr val="9B9B9B"/>
+                </a:solidFill>
+                <a:latin typeface="Pretendard" pitchFamily="34" charset="0"/>
+                <a:ea typeface="Pretendard" pitchFamily="34" charset="-122"/>
+                <a:cs typeface="Pretendard" pitchFamily="34" charset="-120"/>
+              </a:rPr>
+              <a:t>감상</a:t>
+            </a:r>
+            <a:endParaRPr lang="en-US" sz="900" dirty="0"/>
+          </a:p>
+        </p:txBody>
+      </p:sp>
+      <p:sp>
+        <p:nvSpPr>
+          <p:cNvPr id="15" name="Text 13"/>
+          <p:cNvSpPr/>
+          <p:nvPr/>
+        </p:nvSpPr>
+        <p:spPr>
+          <a:xfrm>
+            <a:off x="1042416" y="2688336"/>
+            <a:ext cx="4449928" cy="329184"/>
+          </a:xfrm>
+          <a:prstGeom prst="rect">
+            <a:avLst/>
+          </a:prstGeom>
+          <a:noFill/>
+          <a:ln/>
+        </p:spPr>
+        <p:txBody>
+          <a:bodyPr wrap="square" lIns="0" tIns="0" rIns="0" bIns="0" rtlCol="0" anchor="t"/>
+          <a:lstStyle/>
+          <a:p>
+            <a:pPr indent="0" marL="0">
+              <a:lnSpc>
+                <a:spcPct val="120000"/>
+              </a:lnSpc>
+              <a:buNone/>
+            </a:pPr>
+            <a:r>
+              <a:rPr lang="en-US" sz="1150" dirty="0">
+                <a:solidFill>
+                  <a:srgbClr val="6E6E6E"/>
+                </a:solidFill>
+                <a:latin typeface="Pretendard" pitchFamily="34" charset="0"/>
+                <a:ea typeface="Pretendard" pitchFamily="34" charset="-122"/>
+                <a:cs typeface="Pretendard" pitchFamily="34" charset="-120"/>
+              </a:rPr>
+              <a:t>간판이 중요할 것이다</a:t>
+            </a:r>
+            <a:endParaRPr lang="en-US" sz="1150" dirty="0"/>
+          </a:p>
+        </p:txBody>
+      </p:sp>
+      <p:sp>
+        <p:nvSpPr>
+          <p:cNvPr id="16" name="Text 14"/>
+          <p:cNvSpPr/>
+          <p:nvPr/>
+        </p:nvSpPr>
+        <p:spPr>
+          <a:xfrm>
+            <a:off x="6699352" y="2450592"/>
+            <a:ext cx="2011680" cy="274320"/>
+          </a:xfrm>
+          <a:prstGeom prst="rect">
+            <a:avLst/>
+          </a:prstGeom>
+          <a:noFill/>
+          <a:ln/>
+        </p:spPr>
+        <p:txBody>
+          <a:bodyPr wrap="square" lIns="0" tIns="0" rIns="0" bIns="0" rtlCol="0" anchor="ctr"/>
+          <a:lstStyle/>
+          <a:p>
+            <a:pPr indent="0" marL="0">
+              <a:buNone/>
+            </a:pPr>
+            <a:r>
+              <a:rPr lang="en-US" sz="900" b="1" spc="160" kern="0" dirty="0">
+                <a:solidFill>
+                  <a:srgbClr val="111111"/>
+                </a:solidFill>
+                <a:latin typeface="Pretendard" pitchFamily="34" charset="0"/>
+                <a:ea typeface="Pretendard" pitchFamily="34" charset="-122"/>
+                <a:cs typeface="Pretendard" pitchFamily="34" charset="-120"/>
+              </a:rPr>
+              <a:t>감상</a:t>
+            </a:r>
+            <a:endParaRPr lang="en-US" sz="900" dirty="0"/>
+          </a:p>
+        </p:txBody>
+      </p:sp>
+      <p:sp>
+        <p:nvSpPr>
+          <p:cNvPr id="17" name="Text 15"/>
+          <p:cNvSpPr/>
+          <p:nvPr/>
+        </p:nvSpPr>
+        <p:spPr>
+          <a:xfrm>
+            <a:off x="6699352" y="2688336"/>
+            <a:ext cx="4449928" cy="329184"/>
+          </a:xfrm>
+          <a:prstGeom prst="rect">
+            <a:avLst/>
+          </a:prstGeom>
+          <a:noFill/>
+          <a:ln/>
+        </p:spPr>
+        <p:txBody>
+          <a:bodyPr wrap="square" lIns="0" tIns="0" rIns="0" bIns="0" rtlCol="0" anchor="t"/>
+          <a:lstStyle/>
+          <a:p>
+            <a:pPr indent="0" marL="0">
+              <a:lnSpc>
+                <a:spcPct val="120000"/>
+              </a:lnSpc>
+              <a:buNone/>
+            </a:pPr>
+            <a:r>
+              <a:rPr lang="en-US" sz="1150" b="1" dirty="0">
+                <a:solidFill>
+                  <a:srgbClr val="1F1F1F"/>
+                </a:solidFill>
+                <a:latin typeface="Pretendard" pitchFamily="34" charset="0"/>
+                <a:ea typeface="Pretendard" pitchFamily="34" charset="-122"/>
+                <a:cs typeface="Pretendard" pitchFamily="34" charset="-120"/>
+              </a:rPr>
+              <a:t>색 간판이 글자 간판보다 업종 판단 시간을 줄일 것이다</a:t>
+            </a:r>
+            <a:endParaRPr lang="en-US" sz="1150" dirty="0"/>
+          </a:p>
+        </p:txBody>
+      </p:sp>
+      <p:sp>
+        <p:nvSpPr>
+          <p:cNvPr id="18" name="Shape 16"/>
+          <p:cNvSpPr/>
+          <p:nvPr/>
+        </p:nvSpPr>
+        <p:spPr>
+          <a:xfrm>
+            <a:off x="1042416" y="2980944"/>
+            <a:ext cx="4449928" cy="7315"/>
+          </a:xfrm>
+          <a:prstGeom prst="rect">
+            <a:avLst/>
+          </a:prstGeom>
+          <a:solidFill>
+            <a:srgbClr val="DCDCDC"/>
           </a:solidFill>
           <a:ln w="12700">
             <a:solidFill>
@@ -5181,214 +5457,13 @@
       </p:sp>
       <p:sp>
         <p:nvSpPr>
-          <p:cNvPr id="12" name="Text 10"/>
-          <p:cNvSpPr/>
-          <p:nvPr/>
-        </p:nvSpPr>
-        <p:spPr>
-          <a:xfrm>
-            <a:off x="6699352" y="1901952"/>
-            <a:ext cx="4449928" cy="365760"/>
-          </a:xfrm>
-          <a:prstGeom prst="rect">
-            <a:avLst/>
-          </a:prstGeom>
-          <a:noFill/>
-          <a:ln/>
-        </p:spPr>
-        <p:txBody>
-          <a:bodyPr wrap="square" lIns="0" tIns="0" rIns="0" bIns="0" rtlCol="0" anchor="ctr"/>
-          <a:lstStyle/>
-          <a:p>
-            <a:pPr indent="0" marL="0">
-              <a:buNone/>
-            </a:pPr>
-            <a:r>
-              <a:rPr lang="en-US" sz="1700" dirty="0">
-                <a:solidFill>
-                  <a:srgbClr val="9B9B9B"/>
-                </a:solidFill>
-                <a:latin typeface="Pretendard SemiBold" pitchFamily="34" charset="0"/>
-                <a:ea typeface="Pretendard SemiBold" pitchFamily="34" charset="-122"/>
-                <a:cs typeface="Pretendard SemiBold" pitchFamily="34" charset="-120"/>
-              </a:rPr>
-              <a:t>가설인 것</a:t>
-            </a:r>
-            <a:endParaRPr lang="en-US" sz="1700" dirty="0"/>
-          </a:p>
-        </p:txBody>
-      </p:sp>
-      <p:sp>
-        <p:nvSpPr>
-          <p:cNvPr id="13" name="Text 11"/>
-          <p:cNvSpPr/>
-          <p:nvPr/>
-        </p:nvSpPr>
-        <p:spPr>
-          <a:xfrm>
-            <a:off x="1042416" y="2450592"/>
-            <a:ext cx="2011680" cy="274320"/>
-          </a:xfrm>
-          <a:prstGeom prst="rect">
-            <a:avLst/>
-          </a:prstGeom>
-          <a:noFill/>
-          <a:ln/>
-        </p:spPr>
-        <p:txBody>
-          <a:bodyPr wrap="square" lIns="0" tIns="0" rIns="0" bIns="0" rtlCol="0" anchor="ctr"/>
-          <a:lstStyle/>
-          <a:p>
-            <a:pPr indent="0" marL="0">
-              <a:buNone/>
-            </a:pPr>
-            <a:r>
-              <a:rPr lang="en-US" sz="900" b="1" spc="160" kern="0" dirty="0">
-                <a:solidFill>
-                  <a:srgbClr val="111111"/>
-                </a:solidFill>
-                <a:latin typeface="Pretendard" pitchFamily="34" charset="0"/>
-                <a:ea typeface="Pretendard" pitchFamily="34" charset="-122"/>
-                <a:cs typeface="Pretendard" pitchFamily="34" charset="-120"/>
-              </a:rPr>
-              <a:t>감상</a:t>
-            </a:r>
-            <a:endParaRPr lang="en-US" sz="900" dirty="0"/>
-          </a:p>
-        </p:txBody>
-      </p:sp>
-      <p:sp>
-        <p:nvSpPr>
-          <p:cNvPr id="14" name="Text 12"/>
-          <p:cNvSpPr/>
-          <p:nvPr/>
-        </p:nvSpPr>
-        <p:spPr>
-          <a:xfrm>
-            <a:off x="1042416" y="2688336"/>
-            <a:ext cx="4449928" cy="329184"/>
-          </a:xfrm>
-          <a:prstGeom prst="rect">
-            <a:avLst/>
-          </a:prstGeom>
-          <a:noFill/>
-          <a:ln/>
-        </p:spPr>
-        <p:txBody>
-          <a:bodyPr wrap="square" lIns="0" tIns="0" rIns="0" bIns="0" rtlCol="0" anchor="t"/>
-          <a:lstStyle/>
-          <a:p>
-            <a:pPr indent="0" marL="0">
-              <a:lnSpc>
-                <a:spcPct val="120000"/>
-              </a:lnSpc>
-              <a:buNone/>
-            </a:pPr>
-            <a:r>
-              <a:rPr lang="en-US" sz="1150" dirty="0">
-                <a:solidFill>
-                  <a:srgbClr val="1F1F1F"/>
-                </a:solidFill>
-                <a:latin typeface="Pretendard" pitchFamily="34" charset="0"/>
-                <a:ea typeface="Pretendard" pitchFamily="34" charset="-122"/>
-                <a:cs typeface="Pretendard" pitchFamily="34" charset="-120"/>
-              </a:rPr>
-              <a:t>간판이 중요할 것이다</a:t>
-            </a:r>
-            <a:endParaRPr lang="en-US" sz="1150" dirty="0"/>
-          </a:p>
-        </p:txBody>
-      </p:sp>
-      <p:sp>
-        <p:nvSpPr>
-          <p:cNvPr id="15" name="Text 13"/>
-          <p:cNvSpPr/>
-          <p:nvPr/>
-        </p:nvSpPr>
-        <p:spPr>
-          <a:xfrm>
-            <a:off x="6699352" y="2450592"/>
-            <a:ext cx="2011680" cy="274320"/>
-          </a:xfrm>
-          <a:prstGeom prst="rect">
-            <a:avLst/>
-          </a:prstGeom>
-          <a:noFill/>
-          <a:ln/>
-        </p:spPr>
-        <p:txBody>
-          <a:bodyPr wrap="square" lIns="0" tIns="0" rIns="0" bIns="0" rtlCol="0" anchor="ctr"/>
-          <a:lstStyle/>
-          <a:p>
-            <a:pPr indent="0" marL="0">
-              <a:buNone/>
-            </a:pPr>
-            <a:r>
-              <a:rPr lang="en-US" sz="900" b="1" spc="160" kern="0" dirty="0">
-                <a:solidFill>
-                  <a:srgbClr val="9B9B9B"/>
-                </a:solidFill>
-                <a:latin typeface="Pretendard" pitchFamily="34" charset="0"/>
-                <a:ea typeface="Pretendard" pitchFamily="34" charset="-122"/>
-                <a:cs typeface="Pretendard" pitchFamily="34" charset="-120"/>
-              </a:rPr>
-              <a:t>감상</a:t>
-            </a:r>
-            <a:endParaRPr lang="en-US" sz="900" dirty="0"/>
-          </a:p>
-        </p:txBody>
-      </p:sp>
-      <p:sp>
-        <p:nvSpPr>
-          <p:cNvPr id="16" name="Text 14"/>
-          <p:cNvSpPr/>
-          <p:nvPr/>
-        </p:nvSpPr>
-        <p:spPr>
-          <a:xfrm>
-            <a:off x="6699352" y="2688336"/>
-            <a:ext cx="4449928" cy="329184"/>
-          </a:xfrm>
-          <a:prstGeom prst="rect">
-            <a:avLst/>
-          </a:prstGeom>
-          <a:noFill/>
-          <a:ln/>
-        </p:spPr>
-        <p:txBody>
-          <a:bodyPr wrap="square" lIns="0" tIns="0" rIns="0" bIns="0" rtlCol="0" anchor="t"/>
-          <a:lstStyle/>
-          <a:p>
-            <a:pPr indent="0" marL="0">
-              <a:lnSpc>
-                <a:spcPct val="120000"/>
-              </a:lnSpc>
-              <a:buNone/>
-            </a:pPr>
-            <a:r>
-              <a:rPr lang="en-US" sz="1150" dirty="0">
-                <a:solidFill>
-                  <a:srgbClr val="6E6E6E"/>
-                </a:solidFill>
-                <a:latin typeface="Pretendard" pitchFamily="34" charset="0"/>
-                <a:ea typeface="Pretendard" pitchFamily="34" charset="-122"/>
-                <a:cs typeface="Pretendard" pitchFamily="34" charset="-120"/>
-              </a:rPr>
-              <a:t>색 간판이 글자 간판보다 업종 판단 시간을 줄일 것이다</a:t>
-            </a:r>
-            <a:endParaRPr lang="en-US" sz="1150" dirty="0"/>
-          </a:p>
-        </p:txBody>
-      </p:sp>
-      <p:sp>
-        <p:nvSpPr>
-          <p:cNvPr id="17" name="Shape 15"/>
-          <p:cNvSpPr/>
-          <p:nvPr/>
-        </p:nvSpPr>
-        <p:spPr>
-          <a:xfrm>
-            <a:off x="1042416" y="2980944"/>
+          <p:cNvPr id="19" name="Shape 17"/>
+          <p:cNvSpPr/>
+          <p:nvPr/>
+        </p:nvSpPr>
+        <p:spPr>
+          <a:xfrm>
+            <a:off x="6699352" y="2980944"/>
             <a:ext cx="4449928" cy="7315"/>
           </a:xfrm>
           <a:prstGeom prst="rect">
@@ -5407,13 +5482,175 @@
       </p:sp>
       <p:sp>
         <p:nvSpPr>
-          <p:cNvPr id="18" name="Shape 16"/>
-          <p:cNvSpPr/>
-          <p:nvPr/>
-        </p:nvSpPr>
-        <p:spPr>
-          <a:xfrm>
-            <a:off x="6699352" y="2980944"/>
+          <p:cNvPr id="20" name="Text 18"/>
+          <p:cNvSpPr/>
+          <p:nvPr/>
+        </p:nvSpPr>
+        <p:spPr>
+          <a:xfrm>
+            <a:off x="1042416" y="3035808"/>
+            <a:ext cx="2011680" cy="274320"/>
+          </a:xfrm>
+          <a:prstGeom prst="rect">
+            <a:avLst/>
+          </a:prstGeom>
+          <a:noFill/>
+          <a:ln/>
+        </p:spPr>
+        <p:txBody>
+          <a:bodyPr wrap="square" lIns="0" tIns="0" rIns="0" bIns="0" rtlCol="0" anchor="ctr"/>
+          <a:lstStyle/>
+          <a:p>
+            <a:pPr indent="0" marL="0">
+              <a:buNone/>
+            </a:pPr>
+            <a:r>
+              <a:rPr lang="en-US" sz="900" b="1" spc="160" kern="0" dirty="0">
+                <a:solidFill>
+                  <a:srgbClr val="9B9B9B"/>
+                </a:solidFill>
+                <a:latin typeface="Pretendard" pitchFamily="34" charset="0"/>
+                <a:ea typeface="Pretendard" pitchFamily="34" charset="-122"/>
+                <a:cs typeface="Pretendard" pitchFamily="34" charset="-120"/>
+              </a:rPr>
+              <a:t>방향이 없음</a:t>
+            </a:r>
+            <a:endParaRPr lang="en-US" sz="900" dirty="0"/>
+          </a:p>
+        </p:txBody>
+      </p:sp>
+      <p:sp>
+        <p:nvSpPr>
+          <p:cNvPr id="21" name="Text 19"/>
+          <p:cNvSpPr/>
+          <p:nvPr/>
+        </p:nvSpPr>
+        <p:spPr>
+          <a:xfrm>
+            <a:off x="1042416" y="3273552"/>
+            <a:ext cx="4449928" cy="329184"/>
+          </a:xfrm>
+          <a:prstGeom prst="rect">
+            <a:avLst/>
+          </a:prstGeom>
+          <a:noFill/>
+          <a:ln/>
+        </p:spPr>
+        <p:txBody>
+          <a:bodyPr wrap="square" lIns="0" tIns="0" rIns="0" bIns="0" rtlCol="0" anchor="t"/>
+          <a:lstStyle/>
+          <a:p>
+            <a:pPr indent="0" marL="0">
+              <a:lnSpc>
+                <a:spcPct val="120000"/>
+              </a:lnSpc>
+              <a:buNone/>
+            </a:pPr>
+            <a:r>
+              <a:rPr lang="en-US" sz="1150" dirty="0">
+                <a:solidFill>
+                  <a:srgbClr val="6E6E6E"/>
+                </a:solidFill>
+                <a:latin typeface="Pretendard" pitchFamily="34" charset="0"/>
+                <a:ea typeface="Pretendard" pitchFamily="34" charset="-122"/>
+                <a:cs typeface="Pretendard" pitchFamily="34" charset="-120"/>
+              </a:rPr>
+              <a:t>디자인을 개선하면 좋아질 것이다</a:t>
+            </a:r>
+            <a:endParaRPr lang="en-US" sz="1150" dirty="0"/>
+          </a:p>
+        </p:txBody>
+      </p:sp>
+      <p:sp>
+        <p:nvSpPr>
+          <p:cNvPr id="22" name="Text 20"/>
+          <p:cNvSpPr/>
+          <p:nvPr/>
+        </p:nvSpPr>
+        <p:spPr>
+          <a:xfrm>
+            <a:off x="6699352" y="3035808"/>
+            <a:ext cx="2011680" cy="274320"/>
+          </a:xfrm>
+          <a:prstGeom prst="rect">
+            <a:avLst/>
+          </a:prstGeom>
+          <a:noFill/>
+          <a:ln/>
+        </p:spPr>
+        <p:txBody>
+          <a:bodyPr wrap="square" lIns="0" tIns="0" rIns="0" bIns="0" rtlCol="0" anchor="ctr"/>
+          <a:lstStyle/>
+          <a:p>
+            <a:pPr indent="0" marL="0">
+              <a:buNone/>
+            </a:pPr>
+            <a:r>
+              <a:rPr lang="en-US" sz="900" b="1" spc="160" kern="0" dirty="0">
+                <a:solidFill>
+                  <a:srgbClr val="111111"/>
+                </a:solidFill>
+                <a:latin typeface="Pretendard" pitchFamily="34" charset="0"/>
+                <a:ea typeface="Pretendard" pitchFamily="34" charset="-122"/>
+                <a:cs typeface="Pretendard" pitchFamily="34" charset="-120"/>
+              </a:rPr>
+              <a:t>방향이 없음</a:t>
+            </a:r>
+            <a:endParaRPr lang="en-US" sz="900" dirty="0"/>
+          </a:p>
+        </p:txBody>
+      </p:sp>
+      <p:sp>
+        <p:nvSpPr>
+          <p:cNvPr id="23" name="Text 21"/>
+          <p:cNvSpPr/>
+          <p:nvPr/>
+        </p:nvSpPr>
+        <p:spPr>
+          <a:xfrm>
+            <a:off x="6699352" y="3273552"/>
+            <a:ext cx="4449928" cy="329184"/>
+          </a:xfrm>
+          <a:prstGeom prst="rect">
+            <a:avLst/>
+          </a:prstGeom>
+          <a:noFill/>
+          <a:ln/>
+        </p:spPr>
+        <p:txBody>
+          <a:bodyPr wrap="square" lIns="0" tIns="0" rIns="0" bIns="0" rtlCol="0" anchor="t"/>
+          <a:lstStyle/>
+          <a:p>
+            <a:pPr indent="0" marL="0">
+              <a:lnSpc>
+                <a:spcPct val="120000"/>
+              </a:lnSpc>
+              <a:buNone/>
+            </a:pPr>
+            <a:r>
+              <a:rPr lang="en-US" sz="1150" b="1" dirty="0">
+                <a:solidFill>
+                  <a:srgbClr val="1F1F1F"/>
+                </a:solidFill>
+                <a:latin typeface="Pretendard" pitchFamily="34" charset="0"/>
+                <a:ea typeface="Pretendard" pitchFamily="34" charset="-122"/>
+                <a:cs typeface="Pretendard" pitchFamily="34" charset="-120"/>
+              </a:rPr>
+              <a:t>다만 이름을 기억하는 데는 글자 쪽이 나을 것이다</a:t>
+            </a:r>
+            <a:endParaRPr lang="en-US" sz="1150" dirty="0"/>
+          </a:p>
+        </p:txBody>
+      </p:sp>
+      <p:sp>
+        <p:nvSpPr>
+          <p:cNvPr id="24" name="Shape 22"/>
+          <p:cNvSpPr/>
+          <p:nvPr/>
+        </p:nvSpPr>
+        <p:spPr>
+          <a:xfrm>
+            <a:off x="1042416" y="3566160"/>
             <a:ext cx="4449928" cy="7315"/>
           </a:xfrm>
           <a:prstGeom prst="rect">
@@ -5432,175 +5669,13 @@
       </p:sp>
       <p:sp>
         <p:nvSpPr>
-          <p:cNvPr id="19" name="Text 17"/>
-          <p:cNvSpPr/>
-          <p:nvPr/>
-        </p:nvSpPr>
-        <p:spPr>
-          <a:xfrm>
-            <a:off x="1042416" y="3035808"/>
-            <a:ext cx="2011680" cy="274320"/>
-          </a:xfrm>
-          <a:prstGeom prst="rect">
-            <a:avLst/>
-          </a:prstGeom>
-          <a:noFill/>
-          <a:ln/>
-        </p:spPr>
-        <p:txBody>
-          <a:bodyPr wrap="square" lIns="0" tIns="0" rIns="0" bIns="0" rtlCol="0" anchor="ctr"/>
-          <a:lstStyle/>
-          <a:p>
-            <a:pPr indent="0" marL="0">
-              <a:buNone/>
-            </a:pPr>
-            <a:r>
-              <a:rPr lang="en-US" sz="900" b="1" spc="160" kern="0" dirty="0">
-                <a:solidFill>
-                  <a:srgbClr val="111111"/>
-                </a:solidFill>
-                <a:latin typeface="Pretendard" pitchFamily="34" charset="0"/>
-                <a:ea typeface="Pretendard" pitchFamily="34" charset="-122"/>
-                <a:cs typeface="Pretendard" pitchFamily="34" charset="-120"/>
-              </a:rPr>
-              <a:t>방향이 없음</a:t>
-            </a:r>
-            <a:endParaRPr lang="en-US" sz="900" dirty="0"/>
-          </a:p>
-        </p:txBody>
-      </p:sp>
-      <p:sp>
-        <p:nvSpPr>
-          <p:cNvPr id="20" name="Text 18"/>
-          <p:cNvSpPr/>
-          <p:nvPr/>
-        </p:nvSpPr>
-        <p:spPr>
-          <a:xfrm>
-            <a:off x="1042416" y="3273552"/>
-            <a:ext cx="4449928" cy="329184"/>
-          </a:xfrm>
-          <a:prstGeom prst="rect">
-            <a:avLst/>
-          </a:prstGeom>
-          <a:noFill/>
-          <a:ln/>
-        </p:spPr>
-        <p:txBody>
-          <a:bodyPr wrap="square" lIns="0" tIns="0" rIns="0" bIns="0" rtlCol="0" anchor="t"/>
-          <a:lstStyle/>
-          <a:p>
-            <a:pPr indent="0" marL="0">
-              <a:lnSpc>
-                <a:spcPct val="120000"/>
-              </a:lnSpc>
-              <a:buNone/>
-            </a:pPr>
-            <a:r>
-              <a:rPr lang="en-US" sz="1150" dirty="0">
-                <a:solidFill>
-                  <a:srgbClr val="1F1F1F"/>
-                </a:solidFill>
-                <a:latin typeface="Pretendard" pitchFamily="34" charset="0"/>
-                <a:ea typeface="Pretendard" pitchFamily="34" charset="-122"/>
-                <a:cs typeface="Pretendard" pitchFamily="34" charset="-120"/>
-              </a:rPr>
-              <a:t>디자인을 개선하면 좋아질 것이다</a:t>
-            </a:r>
-            <a:endParaRPr lang="en-US" sz="1150" dirty="0"/>
-          </a:p>
-        </p:txBody>
-      </p:sp>
-      <p:sp>
-        <p:nvSpPr>
-          <p:cNvPr id="21" name="Text 19"/>
-          <p:cNvSpPr/>
-          <p:nvPr/>
-        </p:nvSpPr>
-        <p:spPr>
-          <a:xfrm>
-            <a:off x="6699352" y="3035808"/>
-            <a:ext cx="2011680" cy="274320"/>
-          </a:xfrm>
-          <a:prstGeom prst="rect">
-            <a:avLst/>
-          </a:prstGeom>
-          <a:noFill/>
-          <a:ln/>
-        </p:spPr>
-        <p:txBody>
-          <a:bodyPr wrap="square" lIns="0" tIns="0" rIns="0" bIns="0" rtlCol="0" anchor="ctr"/>
-          <a:lstStyle/>
-          <a:p>
-            <a:pPr indent="0" marL="0">
-              <a:buNone/>
-            </a:pPr>
-            <a:r>
-              <a:rPr lang="en-US" sz="900" b="1" spc="160" kern="0" dirty="0">
-                <a:solidFill>
-                  <a:srgbClr val="9B9B9B"/>
-                </a:solidFill>
-                <a:latin typeface="Pretendard" pitchFamily="34" charset="0"/>
-                <a:ea typeface="Pretendard" pitchFamily="34" charset="-122"/>
-                <a:cs typeface="Pretendard" pitchFamily="34" charset="-120"/>
-              </a:rPr>
-              <a:t>방향이 없음</a:t>
-            </a:r>
-            <a:endParaRPr lang="en-US" sz="900" dirty="0"/>
-          </a:p>
-        </p:txBody>
-      </p:sp>
-      <p:sp>
-        <p:nvSpPr>
-          <p:cNvPr id="22" name="Text 20"/>
-          <p:cNvSpPr/>
-          <p:nvPr/>
-        </p:nvSpPr>
-        <p:spPr>
-          <a:xfrm>
-            <a:off x="6699352" y="3273552"/>
-            <a:ext cx="4449928" cy="329184"/>
-          </a:xfrm>
-          <a:prstGeom prst="rect">
-            <a:avLst/>
-          </a:prstGeom>
-          <a:noFill/>
-          <a:ln/>
-        </p:spPr>
-        <p:txBody>
-          <a:bodyPr wrap="square" lIns="0" tIns="0" rIns="0" bIns="0" rtlCol="0" anchor="t"/>
-          <a:lstStyle/>
-          <a:p>
-            <a:pPr indent="0" marL="0">
-              <a:lnSpc>
-                <a:spcPct val="120000"/>
-              </a:lnSpc>
-              <a:buNone/>
-            </a:pPr>
-            <a:r>
-              <a:rPr lang="en-US" sz="1150" dirty="0">
-                <a:solidFill>
-                  <a:srgbClr val="6E6E6E"/>
-                </a:solidFill>
-                <a:latin typeface="Pretendard" pitchFamily="34" charset="0"/>
-                <a:ea typeface="Pretendard" pitchFamily="34" charset="-122"/>
-                <a:cs typeface="Pretendard" pitchFamily="34" charset="-120"/>
-              </a:rPr>
-              <a:t>다만 이름을 기억하는 데는 글자 쪽이 나을 것이다</a:t>
-            </a:r>
-            <a:endParaRPr lang="en-US" sz="1150" dirty="0"/>
-          </a:p>
-        </p:txBody>
-      </p:sp>
-      <p:sp>
-        <p:nvSpPr>
-          <p:cNvPr id="23" name="Shape 21"/>
-          <p:cNvSpPr/>
-          <p:nvPr/>
-        </p:nvSpPr>
-        <p:spPr>
-          <a:xfrm>
-            <a:off x="1042416" y="3566160"/>
+          <p:cNvPr id="25" name="Shape 23"/>
+          <p:cNvSpPr/>
+          <p:nvPr/>
+        </p:nvSpPr>
+        <p:spPr>
+          <a:xfrm>
+            <a:off x="6699352" y="3566160"/>
             <a:ext cx="4449928" cy="7315"/>
           </a:xfrm>
           <a:prstGeom prst="rect">
@@ -5619,14 +5694,243 @@
       </p:sp>
       <p:sp>
         <p:nvSpPr>
-          <p:cNvPr id="24" name="Shape 22"/>
-          <p:cNvSpPr/>
-          <p:nvPr/>
-        </p:nvSpPr>
-        <p:spPr>
-          <a:xfrm>
-            <a:off x="6699352" y="3566160"/>
-            <a:ext cx="4449928" cy="7315"/>
+          <p:cNvPr id="26" name="Text 24"/>
+          <p:cNvSpPr/>
+          <p:nvPr/>
+        </p:nvSpPr>
+        <p:spPr>
+          <a:xfrm>
+            <a:off x="1042416" y="3621024"/>
+            <a:ext cx="2011680" cy="274320"/>
+          </a:xfrm>
+          <a:prstGeom prst="rect">
+            <a:avLst/>
+          </a:prstGeom>
+          <a:noFill/>
+          <a:ln/>
+        </p:spPr>
+        <p:txBody>
+          <a:bodyPr wrap="square" lIns="0" tIns="0" rIns="0" bIns="0" rtlCol="0" anchor="ctr"/>
+          <a:lstStyle/>
+          <a:p>
+            <a:pPr indent="0" marL="0">
+              <a:buNone/>
+            </a:pPr>
+            <a:r>
+              <a:rPr lang="en-US" sz="900" b="1" spc="160" kern="0" dirty="0">
+                <a:solidFill>
+                  <a:srgbClr val="9B9B9B"/>
+                </a:solidFill>
+                <a:latin typeface="Pretendard" pitchFamily="34" charset="0"/>
+                <a:ea typeface="Pretendard" pitchFamily="34" charset="-122"/>
+                <a:cs typeface="Pretendard" pitchFamily="34" charset="-120"/>
+              </a:rPr>
+              <a:t>무엇과 무엇인지 없음</a:t>
+            </a:r>
+            <a:endParaRPr lang="en-US" sz="900" dirty="0"/>
+          </a:p>
+        </p:txBody>
+      </p:sp>
+      <p:sp>
+        <p:nvSpPr>
+          <p:cNvPr id="27" name="Text 25"/>
+          <p:cNvSpPr/>
+          <p:nvPr/>
+        </p:nvSpPr>
+        <p:spPr>
+          <a:xfrm>
+            <a:off x="1042416" y="3858768"/>
+            <a:ext cx="4449928" cy="329184"/>
+          </a:xfrm>
+          <a:prstGeom prst="rect">
+            <a:avLst/>
+          </a:prstGeom>
+          <a:noFill/>
+          <a:ln/>
+        </p:spPr>
+        <p:txBody>
+          <a:bodyPr wrap="square" lIns="0" tIns="0" rIns="0" bIns="0" rtlCol="0" anchor="t"/>
+          <a:lstStyle/>
+          <a:p>
+            <a:pPr indent="0" marL="0">
+              <a:lnSpc>
+                <a:spcPct val="120000"/>
+              </a:lnSpc>
+              <a:buNone/>
+            </a:pPr>
+            <a:r>
+              <a:rPr lang="en-US" sz="1150" dirty="0">
+                <a:solidFill>
+                  <a:srgbClr val="6E6E6E"/>
+                </a:solidFill>
+                <a:latin typeface="Pretendard" pitchFamily="34" charset="0"/>
+                <a:ea typeface="Pretendard" pitchFamily="34" charset="-122"/>
+                <a:cs typeface="Pretendard" pitchFamily="34" charset="-120"/>
+              </a:rPr>
+              <a:t>관계가 있을 것이다</a:t>
+            </a:r>
+            <a:endParaRPr lang="en-US" sz="1150" dirty="0"/>
+          </a:p>
+        </p:txBody>
+      </p:sp>
+      <p:sp>
+        <p:nvSpPr>
+          <p:cNvPr id="28" name="Text 26"/>
+          <p:cNvSpPr/>
+          <p:nvPr/>
+        </p:nvSpPr>
+        <p:spPr>
+          <a:xfrm>
+            <a:off x="6699352" y="3621024"/>
+            <a:ext cx="2011680" cy="274320"/>
+          </a:xfrm>
+          <a:prstGeom prst="rect">
+            <a:avLst/>
+          </a:prstGeom>
+          <a:noFill/>
+          <a:ln/>
+        </p:spPr>
+        <p:txBody>
+          <a:bodyPr wrap="square" lIns="0" tIns="0" rIns="0" bIns="0" rtlCol="0" anchor="ctr"/>
+          <a:lstStyle/>
+          <a:p>
+            <a:pPr indent="0" marL="0">
+              <a:buNone/>
+            </a:pPr>
+            <a:r>
+              <a:rPr lang="en-US" sz="900" b="1" spc="160" kern="0" dirty="0">
+                <a:solidFill>
+                  <a:srgbClr val="111111"/>
+                </a:solidFill>
+                <a:latin typeface="Pretendard" pitchFamily="34" charset="0"/>
+                <a:ea typeface="Pretendard" pitchFamily="34" charset="-122"/>
+                <a:cs typeface="Pretendard" pitchFamily="34" charset="-120"/>
+              </a:rPr>
+              <a:t>무엇과 무엇인지 없음</a:t>
+            </a:r>
+            <a:endParaRPr lang="en-US" sz="900" dirty="0"/>
+          </a:p>
+        </p:txBody>
+      </p:sp>
+      <p:sp>
+        <p:nvSpPr>
+          <p:cNvPr id="29" name="Text 27"/>
+          <p:cNvSpPr/>
+          <p:nvPr/>
+        </p:nvSpPr>
+        <p:spPr>
+          <a:xfrm>
+            <a:off x="6699352" y="3858768"/>
+            <a:ext cx="4449928" cy="329184"/>
+          </a:xfrm>
+          <a:prstGeom prst="rect">
+            <a:avLst/>
+          </a:prstGeom>
+          <a:noFill/>
+          <a:ln/>
+        </p:spPr>
+        <p:txBody>
+          <a:bodyPr wrap="square" lIns="0" tIns="0" rIns="0" bIns="0" rtlCol="0" anchor="t"/>
+          <a:lstStyle/>
+          <a:p>
+            <a:pPr indent="0" marL="0">
+              <a:lnSpc>
+                <a:spcPct val="120000"/>
+              </a:lnSpc>
+              <a:buNone/>
+            </a:pPr>
+            <a:r>
+              <a:rPr lang="en-US" sz="1150" b="1" dirty="0">
+                <a:solidFill>
+                  <a:srgbClr val="1F1F1F"/>
+                </a:solidFill>
+                <a:latin typeface="Pretendard" pitchFamily="34" charset="0"/>
+                <a:ea typeface="Pretendard" pitchFamily="34" charset="-122"/>
+                <a:cs typeface="Pretendard" pitchFamily="34" charset="-120"/>
+              </a:rPr>
+              <a:t>상인이 만든 간판은 통일감은 낮아도 시장다움을 더 줄 것이다</a:t>
+            </a:r>
+            <a:endParaRPr lang="en-US" sz="1150" dirty="0"/>
+          </a:p>
+        </p:txBody>
+      </p:sp>
+      <p:sp>
+        <p:nvSpPr>
+          <p:cNvPr id="30" name="Shape 28"/>
+          <p:cNvSpPr/>
+          <p:nvPr/>
+        </p:nvSpPr>
+        <p:spPr>
+          <a:xfrm>
+            <a:off x="640080" y="4425696"/>
+            <a:ext cx="10911535" cy="7315"/>
+          </a:xfrm>
+          <a:prstGeom prst="rect">
+            <a:avLst/>
+          </a:prstGeom>
+          <a:solidFill>
+            <a:srgbClr val="111111"/>
+          </a:solidFill>
+          <a:ln w="12700">
+            <a:solidFill>
+              <a:srgbClr val="111111"/>
+            </a:solidFill>
+            <a:prstDash val="solid"/>
+          </a:ln>
+        </p:spPr>
+      </p:sp>
+      <p:sp>
+        <p:nvSpPr>
+          <p:cNvPr id="31" name="Text 29"/>
+          <p:cNvSpPr/>
+          <p:nvPr/>
+        </p:nvSpPr>
+        <p:spPr>
+          <a:xfrm>
+            <a:off x="640080" y="4535424"/>
+            <a:ext cx="10911535" cy="402336"/>
+          </a:xfrm>
+          <a:prstGeom prst="rect">
+            <a:avLst/>
+          </a:prstGeom>
+          <a:noFill/>
+          <a:ln/>
+        </p:spPr>
+        <p:txBody>
+          <a:bodyPr wrap="square" lIns="0" tIns="0" rIns="0" bIns="0" rtlCol="0" anchor="t"/>
+          <a:lstStyle/>
+          <a:p>
+            <a:pPr indent="0" marL="0">
+              <a:lnSpc>
+                <a:spcPct val="120000"/>
+              </a:lnSpc>
+              <a:buNone/>
+            </a:pPr>
+            <a:r>
+              <a:rPr lang="en-US" sz="1300" b="1" dirty="0">
+                <a:solidFill>
+                  <a:srgbClr val="111111"/>
+                </a:solidFill>
+                <a:latin typeface="Pretendard" pitchFamily="34" charset="0"/>
+                <a:ea typeface="Pretendard" pitchFamily="34" charset="-122"/>
+                <a:cs typeface="Pretendard" pitchFamily="34" charset="-120"/>
+              </a:rPr>
+              <a:t>틀에 넣어 봅니다 — 'A가 B보다 C할 것이다. 왜냐하면 D 때문이다.'</a:t>
+            </a:r>
+            <a:endParaRPr lang="en-US" sz="1300" dirty="0"/>
+          </a:p>
+        </p:txBody>
+      </p:sp>
+      <p:sp>
+        <p:nvSpPr>
+          <p:cNvPr id="32" name="Shape 30"/>
+          <p:cNvSpPr/>
+          <p:nvPr/>
+        </p:nvSpPr>
+        <p:spPr>
+          <a:xfrm>
+            <a:off x="640080" y="6291072"/>
+            <a:ext cx="10911535" cy="7315"/>
           </a:xfrm>
           <a:prstGeom prst="rect">
             <a:avLst/>
@@ -5644,261 +5948,7 @@
       </p:sp>
       <p:sp>
         <p:nvSpPr>
-          <p:cNvPr id="25" name="Text 23"/>
-          <p:cNvSpPr/>
-          <p:nvPr/>
-        </p:nvSpPr>
-        <p:spPr>
-          <a:xfrm>
-            <a:off x="1042416" y="3621024"/>
-            <a:ext cx="2011680" cy="274320"/>
-          </a:xfrm>
-          <a:prstGeom prst="rect">
-            <a:avLst/>
-          </a:prstGeom>
-          <a:noFill/>
-          <a:ln/>
-        </p:spPr>
-        <p:txBody>
-          <a:bodyPr wrap="square" lIns="0" tIns="0" rIns="0" bIns="0" rtlCol="0" anchor="ctr"/>
-          <a:lstStyle/>
-          <a:p>
-            <a:pPr indent="0" marL="0">
-              <a:buNone/>
-            </a:pPr>
-            <a:r>
-              <a:rPr lang="en-US" sz="900" b="1" spc="160" kern="0" dirty="0">
-                <a:solidFill>
-                  <a:srgbClr val="111111"/>
-                </a:solidFill>
-                <a:latin typeface="Pretendard" pitchFamily="34" charset="0"/>
-                <a:ea typeface="Pretendard" pitchFamily="34" charset="-122"/>
-                <a:cs typeface="Pretendard" pitchFamily="34" charset="-120"/>
-              </a:rPr>
-              <a:t>무엇과 무엇인지 없음</a:t>
-            </a:r>
-            <a:endParaRPr lang="en-US" sz="900" dirty="0"/>
-          </a:p>
-        </p:txBody>
-      </p:sp>
-      <p:sp>
-        <p:nvSpPr>
-          <p:cNvPr id="26" name="Text 24"/>
-          <p:cNvSpPr/>
-          <p:nvPr/>
-        </p:nvSpPr>
-        <p:spPr>
-          <a:xfrm>
-            <a:off x="1042416" y="3858768"/>
-            <a:ext cx="4449928" cy="329184"/>
-          </a:xfrm>
-          <a:prstGeom prst="rect">
-            <a:avLst/>
-          </a:prstGeom>
-          <a:noFill/>
-          <a:ln/>
-        </p:spPr>
-        <p:txBody>
-          <a:bodyPr wrap="square" lIns="0" tIns="0" rIns="0" bIns="0" rtlCol="0" anchor="t"/>
-          <a:lstStyle/>
-          <a:p>
-            <a:pPr indent="0" marL="0">
-              <a:lnSpc>
-                <a:spcPct val="120000"/>
-              </a:lnSpc>
-              <a:buNone/>
-            </a:pPr>
-            <a:r>
-              <a:rPr lang="en-US" sz="1150" dirty="0">
-                <a:solidFill>
-                  <a:srgbClr val="1F1F1F"/>
-                </a:solidFill>
-                <a:latin typeface="Pretendard" pitchFamily="34" charset="0"/>
-                <a:ea typeface="Pretendard" pitchFamily="34" charset="-122"/>
-                <a:cs typeface="Pretendard" pitchFamily="34" charset="-120"/>
-              </a:rPr>
-              <a:t>관계가 있을 것이다</a:t>
-            </a:r>
-            <a:endParaRPr lang="en-US" sz="1150" dirty="0"/>
-          </a:p>
-        </p:txBody>
-      </p:sp>
-      <p:sp>
-        <p:nvSpPr>
-          <p:cNvPr id="27" name="Text 25"/>
-          <p:cNvSpPr/>
-          <p:nvPr/>
-        </p:nvSpPr>
-        <p:spPr>
-          <a:xfrm>
-            <a:off x="6699352" y="3621024"/>
-            <a:ext cx="2011680" cy="274320"/>
-          </a:xfrm>
-          <a:prstGeom prst="rect">
-            <a:avLst/>
-          </a:prstGeom>
-          <a:noFill/>
-          <a:ln/>
-        </p:spPr>
-        <p:txBody>
-          <a:bodyPr wrap="square" lIns="0" tIns="0" rIns="0" bIns="0" rtlCol="0" anchor="ctr"/>
-          <a:lstStyle/>
-          <a:p>
-            <a:pPr indent="0" marL="0">
-              <a:buNone/>
-            </a:pPr>
-            <a:r>
-              <a:rPr lang="en-US" sz="900" b="1" spc="160" kern="0" dirty="0">
-                <a:solidFill>
-                  <a:srgbClr val="9B9B9B"/>
-                </a:solidFill>
-                <a:latin typeface="Pretendard" pitchFamily="34" charset="0"/>
-                <a:ea typeface="Pretendard" pitchFamily="34" charset="-122"/>
-                <a:cs typeface="Pretendard" pitchFamily="34" charset="-120"/>
-              </a:rPr>
-              <a:t>무엇과 무엇인지 없음</a:t>
-            </a:r>
-            <a:endParaRPr lang="en-US" sz="900" dirty="0"/>
-          </a:p>
-        </p:txBody>
-      </p:sp>
-      <p:sp>
-        <p:nvSpPr>
-          <p:cNvPr id="28" name="Text 26"/>
-          <p:cNvSpPr/>
-          <p:nvPr/>
-        </p:nvSpPr>
-        <p:spPr>
-          <a:xfrm>
-            <a:off x="6699352" y="3858768"/>
-            <a:ext cx="4449928" cy="329184"/>
-          </a:xfrm>
-          <a:prstGeom prst="rect">
-            <a:avLst/>
-          </a:prstGeom>
-          <a:noFill/>
-          <a:ln/>
-        </p:spPr>
-        <p:txBody>
-          <a:bodyPr wrap="square" lIns="0" tIns="0" rIns="0" bIns="0" rtlCol="0" anchor="t"/>
-          <a:lstStyle/>
-          <a:p>
-            <a:pPr indent="0" marL="0">
-              <a:lnSpc>
-                <a:spcPct val="120000"/>
-              </a:lnSpc>
-              <a:buNone/>
-            </a:pPr>
-            <a:r>
-              <a:rPr lang="en-US" sz="1150" dirty="0">
-                <a:solidFill>
-                  <a:srgbClr val="6E6E6E"/>
-                </a:solidFill>
-                <a:latin typeface="Pretendard" pitchFamily="34" charset="0"/>
-                <a:ea typeface="Pretendard" pitchFamily="34" charset="-122"/>
-                <a:cs typeface="Pretendard" pitchFamily="34" charset="-120"/>
-              </a:rPr>
-              <a:t>상인이 만든 간판은 통일감은 낮아도 시장다움을 더 줄 것이다</a:t>
-            </a:r>
-            <a:endParaRPr lang="en-US" sz="1150" dirty="0"/>
-          </a:p>
-        </p:txBody>
-      </p:sp>
-      <p:sp>
-        <p:nvSpPr>
-          <p:cNvPr id="29" name="Shape 27"/>
-          <p:cNvSpPr/>
-          <p:nvPr/>
-        </p:nvSpPr>
-        <p:spPr>
-          <a:xfrm>
-            <a:off x="640080" y="4425696"/>
-            <a:ext cx="10911535" cy="7315"/>
-          </a:xfrm>
-          <a:prstGeom prst="rect">
-            <a:avLst/>
-          </a:prstGeom>
-          <a:solidFill>
-            <a:srgbClr val="111111"/>
-          </a:solidFill>
-          <a:ln w="12700">
-            <a:solidFill>
-              <a:srgbClr val="111111"/>
-            </a:solidFill>
-            <a:prstDash val="solid"/>
-          </a:ln>
-        </p:spPr>
-      </p:sp>
-      <p:sp>
-        <p:nvSpPr>
-          <p:cNvPr id="30" name="Text 28"/>
-          <p:cNvSpPr/>
-          <p:nvPr/>
-        </p:nvSpPr>
-        <p:spPr>
-          <a:xfrm>
-            <a:off x="640080" y="4535424"/>
-            <a:ext cx="10911535" cy="402336"/>
-          </a:xfrm>
-          <a:prstGeom prst="rect">
-            <a:avLst/>
-          </a:prstGeom>
-          <a:noFill/>
-          <a:ln/>
-        </p:spPr>
-        <p:txBody>
-          <a:bodyPr wrap="square" lIns="0" tIns="0" rIns="0" bIns="0" rtlCol="0" anchor="t"/>
-          <a:lstStyle/>
-          <a:p>
-            <a:pPr indent="0" marL="0">
-              <a:lnSpc>
-                <a:spcPct val="120000"/>
-              </a:lnSpc>
-              <a:buNone/>
-            </a:pPr>
-            <a:r>
-              <a:rPr lang="en-US" sz="1300" b="1" dirty="0">
-                <a:solidFill>
-                  <a:srgbClr val="111111"/>
-                </a:solidFill>
-                <a:latin typeface="Pretendard" pitchFamily="34" charset="0"/>
-                <a:ea typeface="Pretendard" pitchFamily="34" charset="-122"/>
-                <a:cs typeface="Pretendard" pitchFamily="34" charset="-120"/>
-              </a:rPr>
-              <a:t>틀에 넣어 봅니다 — 'A가 B보다 C할 것이다. 왜냐하면 D 때문이다.'</a:t>
-            </a:r>
-            <a:endParaRPr lang="en-US" sz="1300" dirty="0"/>
-          </a:p>
-        </p:txBody>
-      </p:sp>
-      <p:sp>
-        <p:nvSpPr>
-          <p:cNvPr id="31" name="Shape 29"/>
-          <p:cNvSpPr/>
-          <p:nvPr/>
-        </p:nvSpPr>
-        <p:spPr>
-          <a:xfrm>
-            <a:off x="640080" y="6291072"/>
-            <a:ext cx="10911535" cy="7315"/>
-          </a:xfrm>
-          <a:prstGeom prst="rect">
-            <a:avLst/>
-          </a:prstGeom>
-          <a:solidFill>
-            <a:srgbClr val="DCDCDC"/>
-          </a:solidFill>
-          <a:ln w="12700">
-            <a:solidFill>
-              <a:srgbClr val="DCDCDC"/>
-            </a:solidFill>
-            <a:prstDash val="solid"/>
-          </a:ln>
-        </p:spPr>
-      </p:sp>
-      <p:sp>
-        <p:nvSpPr>
-          <p:cNvPr id="32" name="Text 30"/>
+          <p:cNvPr id="33" name="Text 31"/>
           <p:cNvSpPr/>
           <p:nvPr/>
         </p:nvSpPr>
@@ -5937,7 +5987,7 @@
       </p:sp>
       <p:sp>
         <p:nvSpPr>
-          <p:cNvPr id="33" name="Text 31"/>
+          <p:cNvPr id="34" name="Text 32"/>
           <p:cNvSpPr/>
           <p:nvPr/>
         </p:nvSpPr>
@@ -7678,7 +7728,7 @@
             <a:r>
               <a:rPr lang="en-US" sz="1700" dirty="0">
                 <a:solidFill>
-                  <a:srgbClr val="111111"/>
+                  <a:srgbClr val="9B9B9B"/>
                 </a:solidFill>
                 <a:latin typeface="Pretendard SemiBold" pitchFamily="34" charset="0"/>
                 <a:ea typeface="Pretendard SemiBold" pitchFamily="34" charset="-122"/>
@@ -7706,6 +7756,257 @@
           </a:prstGeom>
           <a:solidFill>
             <a:srgbClr val="FFFFFF"/>
+          </a:solidFill>
+          <a:ln w="12700">
+            <a:solidFill>
+              <a:srgbClr val="111111"/>
+            </a:solidFill>
+            <a:prstDash val="solid"/>
+          </a:ln>
+        </p:spPr>
+      </p:sp>
+      <p:sp>
+        <p:nvSpPr>
+          <p:cNvPr id="12" name="Shape 10"/>
+          <p:cNvSpPr/>
+          <p:nvPr/>
+        </p:nvSpPr>
+        <p:spPr>
+          <a:xfrm>
+            <a:off x="6297016" y="1627632"/>
+            <a:ext cx="5254600" cy="64008"/>
+          </a:xfrm>
+          <a:prstGeom prst="rect">
+            <a:avLst/>
+          </a:prstGeom>
+          <a:solidFill>
+            <a:srgbClr val="111111"/>
+          </a:solidFill>
+          <a:ln w="12700">
+            <a:solidFill>
+              <a:srgbClr val="111111"/>
+            </a:solidFill>
+            <a:prstDash val="solid"/>
+          </a:ln>
+        </p:spPr>
+      </p:sp>
+      <p:sp>
+        <p:nvSpPr>
+          <p:cNvPr id="13" name="Text 11"/>
+          <p:cNvSpPr/>
+          <p:nvPr/>
+        </p:nvSpPr>
+        <p:spPr>
+          <a:xfrm>
+            <a:off x="6699352" y="1901952"/>
+            <a:ext cx="4449928" cy="365760"/>
+          </a:xfrm>
+          <a:prstGeom prst="rect">
+            <a:avLst/>
+          </a:prstGeom>
+          <a:noFill/>
+          <a:ln/>
+        </p:spPr>
+        <p:txBody>
+          <a:bodyPr wrap="square" lIns="0" tIns="0" rIns="0" bIns="0" rtlCol="0" anchor="ctr"/>
+          <a:lstStyle/>
+          <a:p>
+            <a:pPr indent="0" marL="0">
+              <a:buNone/>
+            </a:pPr>
+            <a:r>
+              <a:rPr lang="en-US" sz="1700" dirty="0">
+                <a:solidFill>
+                  <a:srgbClr val="111111"/>
+                </a:solidFill>
+                <a:latin typeface="Pretendard SemiBold" pitchFamily="34" charset="0"/>
+                <a:ea typeface="Pretendard SemiBold" pitchFamily="34" charset="-122"/>
+                <a:cs typeface="Pretendard SemiBold" pitchFamily="34" charset="-120"/>
+              </a:rPr>
+              <a:t>쓰기</a:t>
+            </a:r>
+            <a:endParaRPr lang="en-US" sz="1700" dirty="0"/>
+          </a:p>
+        </p:txBody>
+      </p:sp>
+      <p:sp>
+        <p:nvSpPr>
+          <p:cNvPr id="14" name="Text 12"/>
+          <p:cNvSpPr/>
+          <p:nvPr/>
+        </p:nvSpPr>
+        <p:spPr>
+          <a:xfrm>
+            <a:off x="1042416" y="2450592"/>
+            <a:ext cx="2011680" cy="274320"/>
+          </a:xfrm>
+          <a:prstGeom prst="rect">
+            <a:avLst/>
+          </a:prstGeom>
+          <a:noFill/>
+          <a:ln/>
+        </p:spPr>
+        <p:txBody>
+          <a:bodyPr wrap="square" lIns="0" tIns="0" rIns="0" bIns="0" rtlCol="0" anchor="ctr"/>
+          <a:lstStyle/>
+          <a:p>
+            <a:pPr indent="0" marL="0">
+              <a:buNone/>
+            </a:pPr>
+            <a:r>
+              <a:rPr lang="en-US" sz="900" b="1" spc="160" kern="0" dirty="0">
+                <a:solidFill>
+                  <a:srgbClr val="9B9B9B"/>
+                </a:solidFill>
+                <a:latin typeface="Pretendard" pitchFamily="34" charset="0"/>
+                <a:ea typeface="Pretendard" pitchFamily="34" charset="-122"/>
+                <a:cs typeface="Pretendard" pitchFamily="34" charset="-120"/>
+              </a:rPr>
+              <a:t>한 편씩 소개</a:t>
+            </a:r>
+            <a:endParaRPr lang="en-US" sz="900" dirty="0"/>
+          </a:p>
+        </p:txBody>
+      </p:sp>
+      <p:sp>
+        <p:nvSpPr>
+          <p:cNvPr id="15" name="Text 13"/>
+          <p:cNvSpPr/>
+          <p:nvPr/>
+        </p:nvSpPr>
+        <p:spPr>
+          <a:xfrm>
+            <a:off x="1042416" y="2688336"/>
+            <a:ext cx="4449928" cy="329184"/>
+          </a:xfrm>
+          <a:prstGeom prst="rect">
+            <a:avLst/>
+          </a:prstGeom>
+          <a:noFill/>
+          <a:ln/>
+        </p:spPr>
+        <p:txBody>
+          <a:bodyPr wrap="square" lIns="0" tIns="0" rIns="0" bIns="0" rtlCol="0" anchor="t"/>
+          <a:lstStyle/>
+          <a:p>
+            <a:pPr indent="0" marL="0">
+              <a:lnSpc>
+                <a:spcPct val="120000"/>
+              </a:lnSpc>
+              <a:buNone/>
+            </a:pPr>
+            <a:r>
+              <a:rPr lang="en-US" sz="1150" dirty="0">
+                <a:solidFill>
+                  <a:srgbClr val="6E6E6E"/>
+                </a:solidFill>
+                <a:latin typeface="Pretendard" pitchFamily="34" charset="0"/>
+                <a:ea typeface="Pretendard" pitchFamily="34" charset="-122"/>
+                <a:cs typeface="Pretendard" pitchFamily="34" charset="-120"/>
+              </a:rPr>
+              <a:t>김○○(2019)은 가독성을, 이○○(2021)은 시장 환경을 다뤘다</a:t>
+            </a:r>
+            <a:endParaRPr lang="en-US" sz="1150" dirty="0"/>
+          </a:p>
+        </p:txBody>
+      </p:sp>
+      <p:sp>
+        <p:nvSpPr>
+          <p:cNvPr id="16" name="Text 14"/>
+          <p:cNvSpPr/>
+          <p:nvPr/>
+        </p:nvSpPr>
+        <p:spPr>
+          <a:xfrm>
+            <a:off x="6699352" y="2450592"/>
+            <a:ext cx="2011680" cy="274320"/>
+          </a:xfrm>
+          <a:prstGeom prst="rect">
+            <a:avLst/>
+          </a:prstGeom>
+          <a:noFill/>
+          <a:ln/>
+        </p:spPr>
+        <p:txBody>
+          <a:bodyPr wrap="square" lIns="0" tIns="0" rIns="0" bIns="0" rtlCol="0" anchor="ctr"/>
+          <a:lstStyle/>
+          <a:p>
+            <a:pPr indent="0" marL="0">
+              <a:buNone/>
+            </a:pPr>
+            <a:r>
+              <a:rPr lang="en-US" sz="900" b="1" spc="160" kern="0" dirty="0">
+                <a:solidFill>
+                  <a:srgbClr val="111111"/>
+                </a:solidFill>
+                <a:latin typeface="Pretendard" pitchFamily="34" charset="0"/>
+                <a:ea typeface="Pretendard" pitchFamily="34" charset="-122"/>
+                <a:cs typeface="Pretendard" pitchFamily="34" charset="-120"/>
+              </a:rPr>
+              <a:t>한 편씩 소개</a:t>
+            </a:r>
+            <a:endParaRPr lang="en-US" sz="900" dirty="0"/>
+          </a:p>
+        </p:txBody>
+      </p:sp>
+      <p:sp>
+        <p:nvSpPr>
+          <p:cNvPr id="17" name="Text 15"/>
+          <p:cNvSpPr/>
+          <p:nvPr/>
+        </p:nvSpPr>
+        <p:spPr>
+          <a:xfrm>
+            <a:off x="6699352" y="2688336"/>
+            <a:ext cx="4449928" cy="329184"/>
+          </a:xfrm>
+          <a:prstGeom prst="rect">
+            <a:avLst/>
+          </a:prstGeom>
+          <a:noFill/>
+          <a:ln/>
+        </p:spPr>
+        <p:txBody>
+          <a:bodyPr wrap="square" lIns="0" tIns="0" rIns="0" bIns="0" rtlCol="0" anchor="t"/>
+          <a:lstStyle/>
+          <a:p>
+            <a:pPr indent="0" marL="0">
+              <a:lnSpc>
+                <a:spcPct val="120000"/>
+              </a:lnSpc>
+              <a:buNone/>
+            </a:pPr>
+            <a:r>
+              <a:rPr lang="en-US" sz="1150" b="1" dirty="0">
+                <a:solidFill>
+                  <a:srgbClr val="1F1F1F"/>
+                </a:solidFill>
+                <a:latin typeface="Pretendard" pitchFamily="34" charset="0"/>
+                <a:ea typeface="Pretendard" pitchFamily="34" charset="-122"/>
+                <a:cs typeface="Pretendard" pitchFamily="34" charset="-120"/>
+              </a:rPr>
+              <a:t>간판 연구는 가독성에 몰려 있고 업종 구별은 비어 있다</a:t>
+            </a:r>
+            <a:endParaRPr lang="en-US" sz="1150" dirty="0"/>
+          </a:p>
+        </p:txBody>
+      </p:sp>
+      <p:sp>
+        <p:nvSpPr>
+          <p:cNvPr id="18" name="Shape 16"/>
+          <p:cNvSpPr/>
+          <p:nvPr/>
+        </p:nvSpPr>
+        <p:spPr>
+          <a:xfrm>
+            <a:off x="1042416" y="2980944"/>
+            <a:ext cx="4449928" cy="7315"/>
+          </a:xfrm>
+          <a:prstGeom prst="rect">
+            <a:avLst/>
+          </a:prstGeom>
+          <a:solidFill>
+            <a:srgbClr val="DCDCDC"/>
           </a:solidFill>
           <a:ln w="12700">
             <a:solidFill>
@@ -7717,214 +8018,13 @@
       </p:sp>
       <p:sp>
         <p:nvSpPr>
-          <p:cNvPr id="12" name="Text 10"/>
-          <p:cNvSpPr/>
-          <p:nvPr/>
-        </p:nvSpPr>
-        <p:spPr>
-          <a:xfrm>
-            <a:off x="6699352" y="1901952"/>
-            <a:ext cx="4449928" cy="365760"/>
-          </a:xfrm>
-          <a:prstGeom prst="rect">
-            <a:avLst/>
-          </a:prstGeom>
-          <a:noFill/>
-          <a:ln/>
-        </p:spPr>
-        <p:txBody>
-          <a:bodyPr wrap="square" lIns="0" tIns="0" rIns="0" bIns="0" rtlCol="0" anchor="ctr"/>
-          <a:lstStyle/>
-          <a:p>
-            <a:pPr indent="0" marL="0">
-              <a:buNone/>
-            </a:pPr>
-            <a:r>
-              <a:rPr lang="en-US" sz="1700" dirty="0">
-                <a:solidFill>
-                  <a:srgbClr val="9B9B9B"/>
-                </a:solidFill>
-                <a:latin typeface="Pretendard SemiBold" pitchFamily="34" charset="0"/>
-                <a:ea typeface="Pretendard SemiBold" pitchFamily="34" charset="-122"/>
-                <a:cs typeface="Pretendard SemiBold" pitchFamily="34" charset="-120"/>
-              </a:rPr>
-              <a:t>쓰기</a:t>
-            </a:r>
-            <a:endParaRPr lang="en-US" sz="1700" dirty="0"/>
-          </a:p>
-        </p:txBody>
-      </p:sp>
-      <p:sp>
-        <p:nvSpPr>
-          <p:cNvPr id="13" name="Text 11"/>
-          <p:cNvSpPr/>
-          <p:nvPr/>
-        </p:nvSpPr>
-        <p:spPr>
-          <a:xfrm>
-            <a:off x="1042416" y="2450592"/>
-            <a:ext cx="2011680" cy="274320"/>
-          </a:xfrm>
-          <a:prstGeom prst="rect">
-            <a:avLst/>
-          </a:prstGeom>
-          <a:noFill/>
-          <a:ln/>
-        </p:spPr>
-        <p:txBody>
-          <a:bodyPr wrap="square" lIns="0" tIns="0" rIns="0" bIns="0" rtlCol="0" anchor="ctr"/>
-          <a:lstStyle/>
-          <a:p>
-            <a:pPr indent="0" marL="0">
-              <a:buNone/>
-            </a:pPr>
-            <a:r>
-              <a:rPr lang="en-US" sz="900" b="1" spc="160" kern="0" dirty="0">
-                <a:solidFill>
-                  <a:srgbClr val="111111"/>
-                </a:solidFill>
-                <a:latin typeface="Pretendard" pitchFamily="34" charset="0"/>
-                <a:ea typeface="Pretendard" pitchFamily="34" charset="-122"/>
-                <a:cs typeface="Pretendard" pitchFamily="34" charset="-120"/>
-              </a:rPr>
-              <a:t>한 편씩 소개</a:t>
-            </a:r>
-            <a:endParaRPr lang="en-US" sz="900" dirty="0"/>
-          </a:p>
-        </p:txBody>
-      </p:sp>
-      <p:sp>
-        <p:nvSpPr>
-          <p:cNvPr id="14" name="Text 12"/>
-          <p:cNvSpPr/>
-          <p:nvPr/>
-        </p:nvSpPr>
-        <p:spPr>
-          <a:xfrm>
-            <a:off x="1042416" y="2688336"/>
-            <a:ext cx="4449928" cy="329184"/>
-          </a:xfrm>
-          <a:prstGeom prst="rect">
-            <a:avLst/>
-          </a:prstGeom>
-          <a:noFill/>
-          <a:ln/>
-        </p:spPr>
-        <p:txBody>
-          <a:bodyPr wrap="square" lIns="0" tIns="0" rIns="0" bIns="0" rtlCol="0" anchor="t"/>
-          <a:lstStyle/>
-          <a:p>
-            <a:pPr indent="0" marL="0">
-              <a:lnSpc>
-                <a:spcPct val="120000"/>
-              </a:lnSpc>
-              <a:buNone/>
-            </a:pPr>
-            <a:r>
-              <a:rPr lang="en-US" sz="1150" dirty="0">
-                <a:solidFill>
-                  <a:srgbClr val="1F1F1F"/>
-                </a:solidFill>
-                <a:latin typeface="Pretendard" pitchFamily="34" charset="0"/>
-                <a:ea typeface="Pretendard" pitchFamily="34" charset="-122"/>
-                <a:cs typeface="Pretendard" pitchFamily="34" charset="-120"/>
-              </a:rPr>
-              <a:t>김○○(2019)은 가독성을, 이○○(2021)은 시장 환경을 다뤘다</a:t>
-            </a:r>
-            <a:endParaRPr lang="en-US" sz="1150" dirty="0"/>
-          </a:p>
-        </p:txBody>
-      </p:sp>
-      <p:sp>
-        <p:nvSpPr>
-          <p:cNvPr id="15" name="Text 13"/>
-          <p:cNvSpPr/>
-          <p:nvPr/>
-        </p:nvSpPr>
-        <p:spPr>
-          <a:xfrm>
-            <a:off x="6699352" y="2450592"/>
-            <a:ext cx="2011680" cy="274320"/>
-          </a:xfrm>
-          <a:prstGeom prst="rect">
-            <a:avLst/>
-          </a:prstGeom>
-          <a:noFill/>
-          <a:ln/>
-        </p:spPr>
-        <p:txBody>
-          <a:bodyPr wrap="square" lIns="0" tIns="0" rIns="0" bIns="0" rtlCol="0" anchor="ctr"/>
-          <a:lstStyle/>
-          <a:p>
-            <a:pPr indent="0" marL="0">
-              <a:buNone/>
-            </a:pPr>
-            <a:r>
-              <a:rPr lang="en-US" sz="900" b="1" spc="160" kern="0" dirty="0">
-                <a:solidFill>
-                  <a:srgbClr val="9B9B9B"/>
-                </a:solidFill>
-                <a:latin typeface="Pretendard" pitchFamily="34" charset="0"/>
-                <a:ea typeface="Pretendard" pitchFamily="34" charset="-122"/>
-                <a:cs typeface="Pretendard" pitchFamily="34" charset="-120"/>
-              </a:rPr>
-              <a:t>한 편씩 소개</a:t>
-            </a:r>
-            <a:endParaRPr lang="en-US" sz="900" dirty="0"/>
-          </a:p>
-        </p:txBody>
-      </p:sp>
-      <p:sp>
-        <p:nvSpPr>
-          <p:cNvPr id="16" name="Text 14"/>
-          <p:cNvSpPr/>
-          <p:nvPr/>
-        </p:nvSpPr>
-        <p:spPr>
-          <a:xfrm>
-            <a:off x="6699352" y="2688336"/>
-            <a:ext cx="4449928" cy="329184"/>
-          </a:xfrm>
-          <a:prstGeom prst="rect">
-            <a:avLst/>
-          </a:prstGeom>
-          <a:noFill/>
-          <a:ln/>
-        </p:spPr>
-        <p:txBody>
-          <a:bodyPr wrap="square" lIns="0" tIns="0" rIns="0" bIns="0" rtlCol="0" anchor="t"/>
-          <a:lstStyle/>
-          <a:p>
-            <a:pPr indent="0" marL="0">
-              <a:lnSpc>
-                <a:spcPct val="120000"/>
-              </a:lnSpc>
-              <a:buNone/>
-            </a:pPr>
-            <a:r>
-              <a:rPr lang="en-US" sz="1150" dirty="0">
-                <a:solidFill>
-                  <a:srgbClr val="6E6E6E"/>
-                </a:solidFill>
-                <a:latin typeface="Pretendard" pitchFamily="34" charset="0"/>
-                <a:ea typeface="Pretendard" pitchFamily="34" charset="-122"/>
-                <a:cs typeface="Pretendard" pitchFamily="34" charset="-120"/>
-              </a:rPr>
-              <a:t>간판 연구는 가독성에 몰려 있고 업종 구별은 비어 있다</a:t>
-            </a:r>
-            <a:endParaRPr lang="en-US" sz="1150" dirty="0"/>
-          </a:p>
-        </p:txBody>
-      </p:sp>
-      <p:sp>
-        <p:nvSpPr>
-          <p:cNvPr id="17" name="Shape 15"/>
-          <p:cNvSpPr/>
-          <p:nvPr/>
-        </p:nvSpPr>
-        <p:spPr>
-          <a:xfrm>
-            <a:off x="1042416" y="2980944"/>
+          <p:cNvPr id="19" name="Shape 17"/>
+          <p:cNvSpPr/>
+          <p:nvPr/>
+        </p:nvSpPr>
+        <p:spPr>
+          <a:xfrm>
+            <a:off x="6699352" y="2980944"/>
             <a:ext cx="4449928" cy="7315"/>
           </a:xfrm>
           <a:prstGeom prst="rect">
@@ -7943,13 +8043,175 @@
       </p:sp>
       <p:sp>
         <p:nvSpPr>
-          <p:cNvPr id="18" name="Shape 16"/>
-          <p:cNvSpPr/>
-          <p:nvPr/>
-        </p:nvSpPr>
-        <p:spPr>
-          <a:xfrm>
-            <a:off x="6699352" y="2980944"/>
+          <p:cNvPr id="20" name="Text 18"/>
+          <p:cNvSpPr/>
+          <p:nvPr/>
+        </p:nvSpPr>
+        <p:spPr>
+          <a:xfrm>
+            <a:off x="1042416" y="3035808"/>
+            <a:ext cx="2011680" cy="274320"/>
+          </a:xfrm>
+          <a:prstGeom prst="rect">
+            <a:avLst/>
+          </a:prstGeom>
+          <a:noFill/>
+          <a:ln/>
+        </p:spPr>
+        <p:txBody>
+          <a:bodyPr wrap="square" lIns="0" tIns="0" rIns="0" bIns="0" rtlCol="0" anchor="ctr"/>
+          <a:lstStyle/>
+          <a:p>
+            <a:pPr indent="0" marL="0">
+              <a:buNone/>
+            </a:pPr>
+            <a:r>
+              <a:rPr lang="en-US" sz="900" b="1" spc="160" kern="0" dirty="0">
+                <a:solidFill>
+                  <a:srgbClr val="9B9B9B"/>
+                </a:solidFill>
+                <a:latin typeface="Pretendard" pitchFamily="34" charset="0"/>
+                <a:ea typeface="Pretendard" pitchFamily="34" charset="-122"/>
+                <a:cs typeface="Pretendard" pitchFamily="34" charset="-120"/>
+              </a:rPr>
+              <a:t>세지 않음</a:t>
+            </a:r>
+            <a:endParaRPr lang="en-US" sz="900" dirty="0"/>
+          </a:p>
+        </p:txBody>
+      </p:sp>
+      <p:sp>
+        <p:nvSpPr>
+          <p:cNvPr id="21" name="Text 19"/>
+          <p:cNvSpPr/>
+          <p:nvPr/>
+        </p:nvSpPr>
+        <p:spPr>
+          <a:xfrm>
+            <a:off x="1042416" y="3273552"/>
+            <a:ext cx="4449928" cy="329184"/>
+          </a:xfrm>
+          <a:prstGeom prst="rect">
+            <a:avLst/>
+          </a:prstGeom>
+          <a:noFill/>
+          <a:ln/>
+        </p:spPr>
+        <p:txBody>
+          <a:bodyPr wrap="square" lIns="0" tIns="0" rIns="0" bIns="0" rtlCol="0" anchor="t"/>
+          <a:lstStyle/>
+          <a:p>
+            <a:pPr indent="0" marL="0">
+              <a:lnSpc>
+                <a:spcPct val="120000"/>
+              </a:lnSpc>
+              <a:buNone/>
+            </a:pPr>
+            <a:r>
+              <a:rPr lang="en-US" sz="1150" dirty="0">
+                <a:solidFill>
+                  <a:srgbClr val="6E6E6E"/>
+                </a:solidFill>
+                <a:latin typeface="Pretendard" pitchFamily="34" charset="0"/>
+                <a:ea typeface="Pretendard" pitchFamily="34" charset="-122"/>
+                <a:cs typeface="Pretendard" pitchFamily="34" charset="-120"/>
+              </a:rPr>
+              <a:t>많은 연구가 있다</a:t>
+            </a:r>
+            <a:endParaRPr lang="en-US" sz="1150" dirty="0"/>
+          </a:p>
+        </p:txBody>
+      </p:sp>
+      <p:sp>
+        <p:nvSpPr>
+          <p:cNvPr id="22" name="Text 20"/>
+          <p:cNvSpPr/>
+          <p:nvPr/>
+        </p:nvSpPr>
+        <p:spPr>
+          <a:xfrm>
+            <a:off x="6699352" y="3035808"/>
+            <a:ext cx="2011680" cy="274320"/>
+          </a:xfrm>
+          <a:prstGeom prst="rect">
+            <a:avLst/>
+          </a:prstGeom>
+          <a:noFill/>
+          <a:ln/>
+        </p:spPr>
+        <p:txBody>
+          <a:bodyPr wrap="square" lIns="0" tIns="0" rIns="0" bIns="0" rtlCol="0" anchor="ctr"/>
+          <a:lstStyle/>
+          <a:p>
+            <a:pPr indent="0" marL="0">
+              <a:buNone/>
+            </a:pPr>
+            <a:r>
+              <a:rPr lang="en-US" sz="900" b="1" spc="160" kern="0" dirty="0">
+                <a:solidFill>
+                  <a:srgbClr val="111111"/>
+                </a:solidFill>
+                <a:latin typeface="Pretendard" pitchFamily="34" charset="0"/>
+                <a:ea typeface="Pretendard" pitchFamily="34" charset="-122"/>
+                <a:cs typeface="Pretendard" pitchFamily="34" charset="-120"/>
+              </a:rPr>
+              <a:t>세지 않음</a:t>
+            </a:r>
+            <a:endParaRPr lang="en-US" sz="900" dirty="0"/>
+          </a:p>
+        </p:txBody>
+      </p:sp>
+      <p:sp>
+        <p:nvSpPr>
+          <p:cNvPr id="23" name="Text 21"/>
+          <p:cNvSpPr/>
+          <p:nvPr/>
+        </p:nvSpPr>
+        <p:spPr>
+          <a:xfrm>
+            <a:off x="6699352" y="3273552"/>
+            <a:ext cx="4449928" cy="329184"/>
+          </a:xfrm>
+          <a:prstGeom prst="rect">
+            <a:avLst/>
+          </a:prstGeom>
+          <a:noFill/>
+          <a:ln/>
+        </p:spPr>
+        <p:txBody>
+          <a:bodyPr wrap="square" lIns="0" tIns="0" rIns="0" bIns="0" rtlCol="0" anchor="t"/>
+          <a:lstStyle/>
+          <a:p>
+            <a:pPr indent="0" marL="0">
+              <a:lnSpc>
+                <a:spcPct val="120000"/>
+              </a:lnSpc>
+              <a:buNone/>
+            </a:pPr>
+            <a:r>
+              <a:rPr lang="en-US" sz="1150" b="1" dirty="0">
+                <a:solidFill>
+                  <a:srgbClr val="1F1F1F"/>
+                </a:solidFill>
+                <a:latin typeface="Pretendard" pitchFamily="34" charset="0"/>
+                <a:ea typeface="Pretendard" pitchFamily="34" charset="-122"/>
+                <a:cs typeface="Pretendard" pitchFamily="34" charset="-120"/>
+              </a:rPr>
+              <a:t>다섯 편 중 넷이 글자 크기를, 하나가 색을 다뤘다</a:t>
+            </a:r>
+            <a:endParaRPr lang="en-US" sz="1150" dirty="0"/>
+          </a:p>
+        </p:txBody>
+      </p:sp>
+      <p:sp>
+        <p:nvSpPr>
+          <p:cNvPr id="24" name="Shape 22"/>
+          <p:cNvSpPr/>
+          <p:nvPr/>
+        </p:nvSpPr>
+        <p:spPr>
+          <a:xfrm>
+            <a:off x="1042416" y="3566160"/>
             <a:ext cx="4449928" cy="7315"/>
           </a:xfrm>
           <a:prstGeom prst="rect">
@@ -7968,175 +8230,13 @@
       </p:sp>
       <p:sp>
         <p:nvSpPr>
-          <p:cNvPr id="19" name="Text 17"/>
-          <p:cNvSpPr/>
-          <p:nvPr/>
-        </p:nvSpPr>
-        <p:spPr>
-          <a:xfrm>
-            <a:off x="1042416" y="3035808"/>
-            <a:ext cx="2011680" cy="274320"/>
-          </a:xfrm>
-          <a:prstGeom prst="rect">
-            <a:avLst/>
-          </a:prstGeom>
-          <a:noFill/>
-          <a:ln/>
-        </p:spPr>
-        <p:txBody>
-          <a:bodyPr wrap="square" lIns="0" tIns="0" rIns="0" bIns="0" rtlCol="0" anchor="ctr"/>
-          <a:lstStyle/>
-          <a:p>
-            <a:pPr indent="0" marL="0">
-              <a:buNone/>
-            </a:pPr>
-            <a:r>
-              <a:rPr lang="en-US" sz="900" b="1" spc="160" kern="0" dirty="0">
-                <a:solidFill>
-                  <a:srgbClr val="111111"/>
-                </a:solidFill>
-                <a:latin typeface="Pretendard" pitchFamily="34" charset="0"/>
-                <a:ea typeface="Pretendard" pitchFamily="34" charset="-122"/>
-                <a:cs typeface="Pretendard" pitchFamily="34" charset="-120"/>
-              </a:rPr>
-              <a:t>세지 않음</a:t>
-            </a:r>
-            <a:endParaRPr lang="en-US" sz="900" dirty="0"/>
-          </a:p>
-        </p:txBody>
-      </p:sp>
-      <p:sp>
-        <p:nvSpPr>
-          <p:cNvPr id="20" name="Text 18"/>
-          <p:cNvSpPr/>
-          <p:nvPr/>
-        </p:nvSpPr>
-        <p:spPr>
-          <a:xfrm>
-            <a:off x="1042416" y="3273552"/>
-            <a:ext cx="4449928" cy="329184"/>
-          </a:xfrm>
-          <a:prstGeom prst="rect">
-            <a:avLst/>
-          </a:prstGeom>
-          <a:noFill/>
-          <a:ln/>
-        </p:spPr>
-        <p:txBody>
-          <a:bodyPr wrap="square" lIns="0" tIns="0" rIns="0" bIns="0" rtlCol="0" anchor="t"/>
-          <a:lstStyle/>
-          <a:p>
-            <a:pPr indent="0" marL="0">
-              <a:lnSpc>
-                <a:spcPct val="120000"/>
-              </a:lnSpc>
-              <a:buNone/>
-            </a:pPr>
-            <a:r>
-              <a:rPr lang="en-US" sz="1150" dirty="0">
-                <a:solidFill>
-                  <a:srgbClr val="1F1F1F"/>
-                </a:solidFill>
-                <a:latin typeface="Pretendard" pitchFamily="34" charset="0"/>
-                <a:ea typeface="Pretendard" pitchFamily="34" charset="-122"/>
-                <a:cs typeface="Pretendard" pitchFamily="34" charset="-120"/>
-              </a:rPr>
-              <a:t>많은 연구가 있다</a:t>
-            </a:r>
-            <a:endParaRPr lang="en-US" sz="1150" dirty="0"/>
-          </a:p>
-        </p:txBody>
-      </p:sp>
-      <p:sp>
-        <p:nvSpPr>
-          <p:cNvPr id="21" name="Text 19"/>
-          <p:cNvSpPr/>
-          <p:nvPr/>
-        </p:nvSpPr>
-        <p:spPr>
-          <a:xfrm>
-            <a:off x="6699352" y="3035808"/>
-            <a:ext cx="2011680" cy="274320"/>
-          </a:xfrm>
-          <a:prstGeom prst="rect">
-            <a:avLst/>
-          </a:prstGeom>
-          <a:noFill/>
-          <a:ln/>
-        </p:spPr>
-        <p:txBody>
-          <a:bodyPr wrap="square" lIns="0" tIns="0" rIns="0" bIns="0" rtlCol="0" anchor="ctr"/>
-          <a:lstStyle/>
-          <a:p>
-            <a:pPr indent="0" marL="0">
-              <a:buNone/>
-            </a:pPr>
-            <a:r>
-              <a:rPr lang="en-US" sz="900" b="1" spc="160" kern="0" dirty="0">
-                <a:solidFill>
-                  <a:srgbClr val="9B9B9B"/>
-                </a:solidFill>
-                <a:latin typeface="Pretendard" pitchFamily="34" charset="0"/>
-                <a:ea typeface="Pretendard" pitchFamily="34" charset="-122"/>
-                <a:cs typeface="Pretendard" pitchFamily="34" charset="-120"/>
-              </a:rPr>
-              <a:t>세지 않음</a:t>
-            </a:r>
-            <a:endParaRPr lang="en-US" sz="900" dirty="0"/>
-          </a:p>
-        </p:txBody>
-      </p:sp>
-      <p:sp>
-        <p:nvSpPr>
-          <p:cNvPr id="22" name="Text 20"/>
-          <p:cNvSpPr/>
-          <p:nvPr/>
-        </p:nvSpPr>
-        <p:spPr>
-          <a:xfrm>
-            <a:off x="6699352" y="3273552"/>
-            <a:ext cx="4449928" cy="329184"/>
-          </a:xfrm>
-          <a:prstGeom prst="rect">
-            <a:avLst/>
-          </a:prstGeom>
-          <a:noFill/>
-          <a:ln/>
-        </p:spPr>
-        <p:txBody>
-          <a:bodyPr wrap="square" lIns="0" tIns="0" rIns="0" bIns="0" rtlCol="0" anchor="t"/>
-          <a:lstStyle/>
-          <a:p>
-            <a:pPr indent="0" marL="0">
-              <a:lnSpc>
-                <a:spcPct val="120000"/>
-              </a:lnSpc>
-              <a:buNone/>
-            </a:pPr>
-            <a:r>
-              <a:rPr lang="en-US" sz="1150" dirty="0">
-                <a:solidFill>
-                  <a:srgbClr val="6E6E6E"/>
-                </a:solidFill>
-                <a:latin typeface="Pretendard" pitchFamily="34" charset="0"/>
-                <a:ea typeface="Pretendard" pitchFamily="34" charset="-122"/>
-                <a:cs typeface="Pretendard" pitchFamily="34" charset="-120"/>
-              </a:rPr>
-              <a:t>다섯 편 중 넷이 글자 크기를, 하나가 색을 다뤘다</a:t>
-            </a:r>
-            <a:endParaRPr lang="en-US" sz="1150" dirty="0"/>
-          </a:p>
-        </p:txBody>
-      </p:sp>
-      <p:sp>
-        <p:nvSpPr>
-          <p:cNvPr id="23" name="Shape 21"/>
-          <p:cNvSpPr/>
-          <p:nvPr/>
-        </p:nvSpPr>
-        <p:spPr>
-          <a:xfrm>
-            <a:off x="1042416" y="3566160"/>
+          <p:cNvPr id="25" name="Shape 23"/>
+          <p:cNvSpPr/>
+          <p:nvPr/>
+        </p:nvSpPr>
+        <p:spPr>
+          <a:xfrm>
+            <a:off x="6699352" y="3566160"/>
             <a:ext cx="4449928" cy="7315"/>
           </a:xfrm>
           <a:prstGeom prst="rect">
@@ -8155,13 +8255,175 @@
       </p:sp>
       <p:sp>
         <p:nvSpPr>
-          <p:cNvPr id="24" name="Shape 22"/>
-          <p:cNvSpPr/>
-          <p:nvPr/>
-        </p:nvSpPr>
-        <p:spPr>
-          <a:xfrm>
-            <a:off x="6699352" y="3566160"/>
+          <p:cNvPr id="26" name="Text 24"/>
+          <p:cNvSpPr/>
+          <p:nvPr/>
+        </p:nvSpPr>
+        <p:spPr>
+          <a:xfrm>
+            <a:off x="1042416" y="3621024"/>
+            <a:ext cx="2011680" cy="274320"/>
+          </a:xfrm>
+          <a:prstGeom prst="rect">
+            <a:avLst/>
+          </a:prstGeom>
+          <a:noFill/>
+          <a:ln/>
+        </p:spPr>
+        <p:txBody>
+          <a:bodyPr wrap="square" lIns="0" tIns="0" rIns="0" bIns="0" rtlCol="0" anchor="ctr"/>
+          <a:lstStyle/>
+          <a:p>
+            <a:pPr indent="0" marL="0">
+              <a:buNone/>
+            </a:pPr>
+            <a:r>
+              <a:rPr lang="en-US" sz="900" b="1" spc="160" kern="0" dirty="0">
+                <a:solidFill>
+                  <a:srgbClr val="9B9B9B"/>
+                </a:solidFill>
+                <a:latin typeface="Pretendard" pitchFamily="34" charset="0"/>
+                <a:ea typeface="Pretendard" pitchFamily="34" charset="-122"/>
+                <a:cs typeface="Pretendard" pitchFamily="34" charset="-120"/>
+              </a:rPr>
+              <a:t>내 자리가 없음</a:t>
+            </a:r>
+            <a:endParaRPr lang="en-US" sz="900" dirty="0"/>
+          </a:p>
+        </p:txBody>
+      </p:sp>
+      <p:sp>
+        <p:nvSpPr>
+          <p:cNvPr id="27" name="Text 25"/>
+          <p:cNvSpPr/>
+          <p:nvPr/>
+        </p:nvSpPr>
+        <p:spPr>
+          <a:xfrm>
+            <a:off x="1042416" y="3858768"/>
+            <a:ext cx="4449928" cy="329184"/>
+          </a:xfrm>
+          <a:prstGeom prst="rect">
+            <a:avLst/>
+          </a:prstGeom>
+          <a:noFill/>
+          <a:ln/>
+        </p:spPr>
+        <p:txBody>
+          <a:bodyPr wrap="square" lIns="0" tIns="0" rIns="0" bIns="0" rtlCol="0" anchor="t"/>
+          <a:lstStyle/>
+          <a:p>
+            <a:pPr indent="0" marL="0">
+              <a:lnSpc>
+                <a:spcPct val="120000"/>
+              </a:lnSpc>
+              <a:buNone/>
+            </a:pPr>
+            <a:r>
+              <a:rPr lang="en-US" sz="1150" dirty="0">
+                <a:solidFill>
+                  <a:srgbClr val="6E6E6E"/>
+                </a:solidFill>
+                <a:latin typeface="Pretendard" pitchFamily="34" charset="0"/>
+                <a:ea typeface="Pretendard" pitchFamily="34" charset="-122"/>
+                <a:cs typeface="Pretendard" pitchFamily="34" charset="-120"/>
+              </a:rPr>
+              <a:t>(선행연구를 쓰고 끝)</a:t>
+            </a:r>
+            <a:endParaRPr lang="en-US" sz="1150" dirty="0"/>
+          </a:p>
+        </p:txBody>
+      </p:sp>
+      <p:sp>
+        <p:nvSpPr>
+          <p:cNvPr id="28" name="Text 26"/>
+          <p:cNvSpPr/>
+          <p:nvPr/>
+        </p:nvSpPr>
+        <p:spPr>
+          <a:xfrm>
+            <a:off x="6699352" y="3621024"/>
+            <a:ext cx="2011680" cy="274320"/>
+          </a:xfrm>
+          <a:prstGeom prst="rect">
+            <a:avLst/>
+          </a:prstGeom>
+          <a:noFill/>
+          <a:ln/>
+        </p:spPr>
+        <p:txBody>
+          <a:bodyPr wrap="square" lIns="0" tIns="0" rIns="0" bIns="0" rtlCol="0" anchor="ctr"/>
+          <a:lstStyle/>
+          <a:p>
+            <a:pPr indent="0" marL="0">
+              <a:buNone/>
+            </a:pPr>
+            <a:r>
+              <a:rPr lang="en-US" sz="900" b="1" spc="160" kern="0" dirty="0">
+                <a:solidFill>
+                  <a:srgbClr val="111111"/>
+                </a:solidFill>
+                <a:latin typeface="Pretendard" pitchFamily="34" charset="0"/>
+                <a:ea typeface="Pretendard" pitchFamily="34" charset="-122"/>
+                <a:cs typeface="Pretendard" pitchFamily="34" charset="-120"/>
+              </a:rPr>
+              <a:t>내 자리가 없음</a:t>
+            </a:r>
+            <a:endParaRPr lang="en-US" sz="900" dirty="0"/>
+          </a:p>
+        </p:txBody>
+      </p:sp>
+      <p:sp>
+        <p:nvSpPr>
+          <p:cNvPr id="29" name="Text 27"/>
+          <p:cNvSpPr/>
+          <p:nvPr/>
+        </p:nvSpPr>
+        <p:spPr>
+          <a:xfrm>
+            <a:off x="6699352" y="3858768"/>
+            <a:ext cx="4449928" cy="329184"/>
+          </a:xfrm>
+          <a:prstGeom prst="rect">
+            <a:avLst/>
+          </a:prstGeom>
+          <a:noFill/>
+          <a:ln/>
+        </p:spPr>
+        <p:txBody>
+          <a:bodyPr wrap="square" lIns="0" tIns="0" rIns="0" bIns="0" rtlCol="0" anchor="t"/>
+          <a:lstStyle/>
+          <a:p>
+            <a:pPr indent="0" marL="0">
+              <a:lnSpc>
+                <a:spcPct val="120000"/>
+              </a:lnSpc>
+              <a:buNone/>
+            </a:pPr>
+            <a:r>
+              <a:rPr lang="en-US" sz="1150" b="1" dirty="0">
+                <a:solidFill>
+                  <a:srgbClr val="1F1F1F"/>
+                </a:solidFill>
+                <a:latin typeface="Pretendard" pitchFamily="34" charset="0"/>
+                <a:ea typeface="Pretendard" pitchFamily="34" charset="-122"/>
+                <a:cs typeface="Pretendard" pitchFamily="34" charset="-120"/>
+              </a:rPr>
+              <a:t>그래서 이 연구는 색으로 업종을 구분하는 경우를 본다</a:t>
+            </a:r>
+            <a:endParaRPr lang="en-US" sz="1150" dirty="0"/>
+          </a:p>
+        </p:txBody>
+      </p:sp>
+      <p:sp>
+        <p:nvSpPr>
+          <p:cNvPr id="30" name="Shape 28"/>
+          <p:cNvSpPr/>
+          <p:nvPr/>
+        </p:nvSpPr>
+        <p:spPr>
+          <a:xfrm>
+            <a:off x="1042416" y="4151376"/>
             <a:ext cx="4449928" cy="7315"/>
           </a:xfrm>
           <a:prstGeom prst="rect">
@@ -8180,175 +8442,13 @@
       </p:sp>
       <p:sp>
         <p:nvSpPr>
-          <p:cNvPr id="25" name="Text 23"/>
-          <p:cNvSpPr/>
-          <p:nvPr/>
-        </p:nvSpPr>
-        <p:spPr>
-          <a:xfrm>
-            <a:off x="1042416" y="3621024"/>
-            <a:ext cx="2011680" cy="274320"/>
-          </a:xfrm>
-          <a:prstGeom prst="rect">
-            <a:avLst/>
-          </a:prstGeom>
-          <a:noFill/>
-          <a:ln/>
-        </p:spPr>
-        <p:txBody>
-          <a:bodyPr wrap="square" lIns="0" tIns="0" rIns="0" bIns="0" rtlCol="0" anchor="ctr"/>
-          <a:lstStyle/>
-          <a:p>
-            <a:pPr indent="0" marL="0">
-              <a:buNone/>
-            </a:pPr>
-            <a:r>
-              <a:rPr lang="en-US" sz="900" b="1" spc="160" kern="0" dirty="0">
-                <a:solidFill>
-                  <a:srgbClr val="111111"/>
-                </a:solidFill>
-                <a:latin typeface="Pretendard" pitchFamily="34" charset="0"/>
-                <a:ea typeface="Pretendard" pitchFamily="34" charset="-122"/>
-                <a:cs typeface="Pretendard" pitchFamily="34" charset="-120"/>
-              </a:rPr>
-              <a:t>내 자리가 없음</a:t>
-            </a:r>
-            <a:endParaRPr lang="en-US" sz="900" dirty="0"/>
-          </a:p>
-        </p:txBody>
-      </p:sp>
-      <p:sp>
-        <p:nvSpPr>
-          <p:cNvPr id="26" name="Text 24"/>
-          <p:cNvSpPr/>
-          <p:nvPr/>
-        </p:nvSpPr>
-        <p:spPr>
-          <a:xfrm>
-            <a:off x="1042416" y="3858768"/>
-            <a:ext cx="4449928" cy="329184"/>
-          </a:xfrm>
-          <a:prstGeom prst="rect">
-            <a:avLst/>
-          </a:prstGeom>
-          <a:noFill/>
-          <a:ln/>
-        </p:spPr>
-        <p:txBody>
-          <a:bodyPr wrap="square" lIns="0" tIns="0" rIns="0" bIns="0" rtlCol="0" anchor="t"/>
-          <a:lstStyle/>
-          <a:p>
-            <a:pPr indent="0" marL="0">
-              <a:lnSpc>
-                <a:spcPct val="120000"/>
-              </a:lnSpc>
-              <a:buNone/>
-            </a:pPr>
-            <a:r>
-              <a:rPr lang="en-US" sz="1150" dirty="0">
-                <a:solidFill>
-                  <a:srgbClr val="1F1F1F"/>
-                </a:solidFill>
-                <a:latin typeface="Pretendard" pitchFamily="34" charset="0"/>
-                <a:ea typeface="Pretendard" pitchFamily="34" charset="-122"/>
-                <a:cs typeface="Pretendard" pitchFamily="34" charset="-120"/>
-              </a:rPr>
-              <a:t>(선행연구를 쓰고 끝)</a:t>
-            </a:r>
-            <a:endParaRPr lang="en-US" sz="1150" dirty="0"/>
-          </a:p>
-        </p:txBody>
-      </p:sp>
-      <p:sp>
-        <p:nvSpPr>
-          <p:cNvPr id="27" name="Text 25"/>
-          <p:cNvSpPr/>
-          <p:nvPr/>
-        </p:nvSpPr>
-        <p:spPr>
-          <a:xfrm>
-            <a:off x="6699352" y="3621024"/>
-            <a:ext cx="2011680" cy="274320"/>
-          </a:xfrm>
-          <a:prstGeom prst="rect">
-            <a:avLst/>
-          </a:prstGeom>
-          <a:noFill/>
-          <a:ln/>
-        </p:spPr>
-        <p:txBody>
-          <a:bodyPr wrap="square" lIns="0" tIns="0" rIns="0" bIns="0" rtlCol="0" anchor="ctr"/>
-          <a:lstStyle/>
-          <a:p>
-            <a:pPr indent="0" marL="0">
-              <a:buNone/>
-            </a:pPr>
-            <a:r>
-              <a:rPr lang="en-US" sz="900" b="1" spc="160" kern="0" dirty="0">
-                <a:solidFill>
-                  <a:srgbClr val="9B9B9B"/>
-                </a:solidFill>
-                <a:latin typeface="Pretendard" pitchFamily="34" charset="0"/>
-                <a:ea typeface="Pretendard" pitchFamily="34" charset="-122"/>
-                <a:cs typeface="Pretendard" pitchFamily="34" charset="-120"/>
-              </a:rPr>
-              <a:t>내 자리가 없음</a:t>
-            </a:r>
-            <a:endParaRPr lang="en-US" sz="900" dirty="0"/>
-          </a:p>
-        </p:txBody>
-      </p:sp>
-      <p:sp>
-        <p:nvSpPr>
-          <p:cNvPr id="28" name="Text 26"/>
-          <p:cNvSpPr/>
-          <p:nvPr/>
-        </p:nvSpPr>
-        <p:spPr>
-          <a:xfrm>
-            <a:off x="6699352" y="3858768"/>
-            <a:ext cx="4449928" cy="329184"/>
-          </a:xfrm>
-          <a:prstGeom prst="rect">
-            <a:avLst/>
-          </a:prstGeom>
-          <a:noFill/>
-          <a:ln/>
-        </p:spPr>
-        <p:txBody>
-          <a:bodyPr wrap="square" lIns="0" tIns="0" rIns="0" bIns="0" rtlCol="0" anchor="t"/>
-          <a:lstStyle/>
-          <a:p>
-            <a:pPr indent="0" marL="0">
-              <a:lnSpc>
-                <a:spcPct val="120000"/>
-              </a:lnSpc>
-              <a:buNone/>
-            </a:pPr>
-            <a:r>
-              <a:rPr lang="en-US" sz="1150" dirty="0">
-                <a:solidFill>
-                  <a:srgbClr val="6E6E6E"/>
-                </a:solidFill>
-                <a:latin typeface="Pretendard" pitchFamily="34" charset="0"/>
-                <a:ea typeface="Pretendard" pitchFamily="34" charset="-122"/>
-                <a:cs typeface="Pretendard" pitchFamily="34" charset="-120"/>
-              </a:rPr>
-              <a:t>그래서 이 연구는 색으로 업종을 구분하는 경우를 본다</a:t>
-            </a:r>
-            <a:endParaRPr lang="en-US" sz="1150" dirty="0"/>
-          </a:p>
-        </p:txBody>
-      </p:sp>
-      <p:sp>
-        <p:nvSpPr>
-          <p:cNvPr id="29" name="Shape 27"/>
-          <p:cNvSpPr/>
-          <p:nvPr/>
-        </p:nvSpPr>
-        <p:spPr>
-          <a:xfrm>
-            <a:off x="1042416" y="4151376"/>
+          <p:cNvPr id="31" name="Shape 29"/>
+          <p:cNvSpPr/>
+          <p:nvPr/>
+        </p:nvSpPr>
+        <p:spPr>
+          <a:xfrm>
+            <a:off x="6699352" y="4151376"/>
             <a:ext cx="4449928" cy="7315"/>
           </a:xfrm>
           <a:prstGeom prst="rect">
@@ -8367,14 +8467,243 @@
       </p:sp>
       <p:sp>
         <p:nvSpPr>
-          <p:cNvPr id="30" name="Shape 28"/>
-          <p:cNvSpPr/>
-          <p:nvPr/>
-        </p:nvSpPr>
-        <p:spPr>
-          <a:xfrm>
-            <a:off x="6699352" y="4151376"/>
-            <a:ext cx="4449928" cy="7315"/>
+          <p:cNvPr id="32" name="Text 30"/>
+          <p:cNvSpPr/>
+          <p:nvPr/>
+        </p:nvSpPr>
+        <p:spPr>
+          <a:xfrm>
+            <a:off x="1042416" y="4206240"/>
+            <a:ext cx="2011680" cy="274320"/>
+          </a:xfrm>
+          <a:prstGeom prst="rect">
+            <a:avLst/>
+          </a:prstGeom>
+          <a:noFill/>
+          <a:ln/>
+        </p:spPr>
+        <p:txBody>
+          <a:bodyPr wrap="square" lIns="0" tIns="0" rIns="0" bIns="0" rtlCol="0" anchor="ctr"/>
+          <a:lstStyle/>
+          <a:p>
+            <a:pPr indent="0" marL="0">
+              <a:buNone/>
+            </a:pPr>
+            <a:r>
+              <a:rPr lang="en-US" sz="900" b="1" spc="160" kern="0" dirty="0">
+                <a:solidFill>
+                  <a:srgbClr val="9B9B9B"/>
+                </a:solidFill>
+                <a:latin typeface="Pretendard" pitchFamily="34" charset="0"/>
+                <a:ea typeface="Pretendard" pitchFamily="34" charset="-122"/>
+                <a:cs typeface="Pretendard" pitchFamily="34" charset="-120"/>
+              </a:rPr>
+              <a:t>뒤에서 안 씀</a:t>
+            </a:r>
+            <a:endParaRPr lang="en-US" sz="900" dirty="0"/>
+          </a:p>
+        </p:txBody>
+      </p:sp>
+      <p:sp>
+        <p:nvSpPr>
+          <p:cNvPr id="33" name="Text 31"/>
+          <p:cNvSpPr/>
+          <p:nvPr/>
+        </p:nvSpPr>
+        <p:spPr>
+          <a:xfrm>
+            <a:off x="1042416" y="4443984"/>
+            <a:ext cx="4449928" cy="329184"/>
+          </a:xfrm>
+          <a:prstGeom prst="rect">
+            <a:avLst/>
+          </a:prstGeom>
+          <a:noFill/>
+          <a:ln/>
+        </p:spPr>
+        <p:txBody>
+          <a:bodyPr wrap="square" lIns="0" tIns="0" rIns="0" bIns="0" rtlCol="0" anchor="t"/>
+          <a:lstStyle/>
+          <a:p>
+            <a:pPr indent="0" marL="0">
+              <a:lnSpc>
+                <a:spcPct val="120000"/>
+              </a:lnSpc>
+              <a:buNone/>
+            </a:pPr>
+            <a:r>
+              <a:rPr lang="en-US" sz="1150" dirty="0">
+                <a:solidFill>
+                  <a:srgbClr val="6E6E6E"/>
+                </a:solidFill>
+                <a:latin typeface="Pretendard" pitchFamily="34" charset="0"/>
+                <a:ea typeface="Pretendard" pitchFamily="34" charset="-122"/>
+                <a:cs typeface="Pretendard" pitchFamily="34" charset="-120"/>
+              </a:rPr>
+              <a:t>(다시 언급 없음)</a:t>
+            </a:r>
+            <a:endParaRPr lang="en-US" sz="1150" dirty="0"/>
+          </a:p>
+        </p:txBody>
+      </p:sp>
+      <p:sp>
+        <p:nvSpPr>
+          <p:cNvPr id="34" name="Text 32"/>
+          <p:cNvSpPr/>
+          <p:nvPr/>
+        </p:nvSpPr>
+        <p:spPr>
+          <a:xfrm>
+            <a:off x="6699352" y="4206240"/>
+            <a:ext cx="2011680" cy="274320"/>
+          </a:xfrm>
+          <a:prstGeom prst="rect">
+            <a:avLst/>
+          </a:prstGeom>
+          <a:noFill/>
+          <a:ln/>
+        </p:spPr>
+        <p:txBody>
+          <a:bodyPr wrap="square" lIns="0" tIns="0" rIns="0" bIns="0" rtlCol="0" anchor="ctr"/>
+          <a:lstStyle/>
+          <a:p>
+            <a:pPr indent="0" marL="0">
+              <a:buNone/>
+            </a:pPr>
+            <a:r>
+              <a:rPr lang="en-US" sz="900" b="1" spc="160" kern="0" dirty="0">
+                <a:solidFill>
+                  <a:srgbClr val="111111"/>
+                </a:solidFill>
+                <a:latin typeface="Pretendard" pitchFamily="34" charset="0"/>
+                <a:ea typeface="Pretendard" pitchFamily="34" charset="-122"/>
+                <a:cs typeface="Pretendard" pitchFamily="34" charset="-120"/>
+              </a:rPr>
+              <a:t>뒤에서 안 씀</a:t>
+            </a:r>
+            <a:endParaRPr lang="en-US" sz="900" dirty="0"/>
+          </a:p>
+        </p:txBody>
+      </p:sp>
+      <p:sp>
+        <p:nvSpPr>
+          <p:cNvPr id="35" name="Text 33"/>
+          <p:cNvSpPr/>
+          <p:nvPr/>
+        </p:nvSpPr>
+        <p:spPr>
+          <a:xfrm>
+            <a:off x="6699352" y="4443984"/>
+            <a:ext cx="4449928" cy="329184"/>
+          </a:xfrm>
+          <a:prstGeom prst="rect">
+            <a:avLst/>
+          </a:prstGeom>
+          <a:noFill/>
+          <a:ln/>
+        </p:spPr>
+        <p:txBody>
+          <a:bodyPr wrap="square" lIns="0" tIns="0" rIns="0" bIns="0" rtlCol="0" anchor="t"/>
+          <a:lstStyle/>
+          <a:p>
+            <a:pPr indent="0" marL="0">
+              <a:lnSpc>
+                <a:spcPct val="120000"/>
+              </a:lnSpc>
+              <a:buNone/>
+            </a:pPr>
+            <a:r>
+              <a:rPr lang="en-US" sz="1150" b="1" dirty="0">
+                <a:solidFill>
+                  <a:srgbClr val="1F1F1F"/>
+                </a:solidFill>
+                <a:latin typeface="Pretendard" pitchFamily="34" charset="0"/>
+                <a:ea typeface="Pretendard" pitchFamily="34" charset="-122"/>
+                <a:cs typeface="Pretendard" pitchFamily="34" charset="-120"/>
+              </a:rPr>
+              <a:t>방법 절에서 '김○○(2019)의 측정을 고쳐 썼다'로 다시 꺼냄</a:t>
+            </a:r>
+            <a:endParaRPr lang="en-US" sz="1150" dirty="0"/>
+          </a:p>
+        </p:txBody>
+      </p:sp>
+      <p:sp>
+        <p:nvSpPr>
+          <p:cNvPr id="36" name="Shape 34"/>
+          <p:cNvSpPr/>
+          <p:nvPr/>
+        </p:nvSpPr>
+        <p:spPr>
+          <a:xfrm>
+            <a:off x="640080" y="5010912"/>
+            <a:ext cx="10911535" cy="7315"/>
+          </a:xfrm>
+          <a:prstGeom prst="rect">
+            <a:avLst/>
+          </a:prstGeom>
+          <a:solidFill>
+            <a:srgbClr val="111111"/>
+          </a:solidFill>
+          <a:ln w="12700">
+            <a:solidFill>
+              <a:srgbClr val="111111"/>
+            </a:solidFill>
+            <a:prstDash val="solid"/>
+          </a:ln>
+        </p:spPr>
+      </p:sp>
+      <p:sp>
+        <p:nvSpPr>
+          <p:cNvPr id="37" name="Text 35"/>
+          <p:cNvSpPr/>
+          <p:nvPr/>
+        </p:nvSpPr>
+        <p:spPr>
+          <a:xfrm>
+            <a:off x="640080" y="5120640"/>
+            <a:ext cx="10911535" cy="402336"/>
+          </a:xfrm>
+          <a:prstGeom prst="rect">
+            <a:avLst/>
+          </a:prstGeom>
+          <a:noFill/>
+          <a:ln/>
+        </p:spPr>
+        <p:txBody>
+          <a:bodyPr wrap="square" lIns="0" tIns="0" rIns="0" bIns="0" rtlCol="0" anchor="t"/>
+          <a:lstStyle/>
+          <a:p>
+            <a:pPr indent="0" marL="0">
+              <a:lnSpc>
+                <a:spcPct val="120000"/>
+              </a:lnSpc>
+              <a:buNone/>
+            </a:pPr>
+            <a:r>
+              <a:rPr lang="en-US" sz="1300" b="1" dirty="0">
+                <a:solidFill>
+                  <a:srgbClr val="111111"/>
+                </a:solidFill>
+                <a:latin typeface="Pretendard" pitchFamily="34" charset="0"/>
+                <a:ea typeface="Pretendard" pitchFamily="34" charset="-122"/>
+                <a:cs typeface="Pretendard" pitchFamily="34" charset="-120"/>
+              </a:rPr>
+              <a:t>셋째 줄이 없으면 선행연구 절이 떠 있게 됩니다. '그래서 이 연구는'으로 끝냅니다.</a:t>
+            </a:r>
+            <a:endParaRPr lang="en-US" sz="1300" dirty="0"/>
+          </a:p>
+        </p:txBody>
+      </p:sp>
+      <p:sp>
+        <p:nvSpPr>
+          <p:cNvPr id="38" name="Shape 36"/>
+          <p:cNvSpPr/>
+          <p:nvPr/>
+        </p:nvSpPr>
+        <p:spPr>
+          <a:xfrm>
+            <a:off x="640080" y="6291072"/>
+            <a:ext cx="10911535" cy="7315"/>
           </a:xfrm>
           <a:prstGeom prst="rect">
             <a:avLst/>
@@ -8392,261 +8721,7 @@
       </p:sp>
       <p:sp>
         <p:nvSpPr>
-          <p:cNvPr id="31" name="Text 29"/>
-          <p:cNvSpPr/>
-          <p:nvPr/>
-        </p:nvSpPr>
-        <p:spPr>
-          <a:xfrm>
-            <a:off x="1042416" y="4206240"/>
-            <a:ext cx="2011680" cy="274320"/>
-          </a:xfrm>
-          <a:prstGeom prst="rect">
-            <a:avLst/>
-          </a:prstGeom>
-          <a:noFill/>
-          <a:ln/>
-        </p:spPr>
-        <p:txBody>
-          <a:bodyPr wrap="square" lIns="0" tIns="0" rIns="0" bIns="0" rtlCol="0" anchor="ctr"/>
-          <a:lstStyle/>
-          <a:p>
-            <a:pPr indent="0" marL="0">
-              <a:buNone/>
-            </a:pPr>
-            <a:r>
-              <a:rPr lang="en-US" sz="900" b="1" spc="160" kern="0" dirty="0">
-                <a:solidFill>
-                  <a:srgbClr val="111111"/>
-                </a:solidFill>
-                <a:latin typeface="Pretendard" pitchFamily="34" charset="0"/>
-                <a:ea typeface="Pretendard" pitchFamily="34" charset="-122"/>
-                <a:cs typeface="Pretendard" pitchFamily="34" charset="-120"/>
-              </a:rPr>
-              <a:t>뒤에서 안 씀</a:t>
-            </a:r>
-            <a:endParaRPr lang="en-US" sz="900" dirty="0"/>
-          </a:p>
-        </p:txBody>
-      </p:sp>
-      <p:sp>
-        <p:nvSpPr>
-          <p:cNvPr id="32" name="Text 30"/>
-          <p:cNvSpPr/>
-          <p:nvPr/>
-        </p:nvSpPr>
-        <p:spPr>
-          <a:xfrm>
-            <a:off x="1042416" y="4443984"/>
-            <a:ext cx="4449928" cy="329184"/>
-          </a:xfrm>
-          <a:prstGeom prst="rect">
-            <a:avLst/>
-          </a:prstGeom>
-          <a:noFill/>
-          <a:ln/>
-        </p:spPr>
-        <p:txBody>
-          <a:bodyPr wrap="square" lIns="0" tIns="0" rIns="0" bIns="0" rtlCol="0" anchor="t"/>
-          <a:lstStyle/>
-          <a:p>
-            <a:pPr indent="0" marL="0">
-              <a:lnSpc>
-                <a:spcPct val="120000"/>
-              </a:lnSpc>
-              <a:buNone/>
-            </a:pPr>
-            <a:r>
-              <a:rPr lang="en-US" sz="1150" dirty="0">
-                <a:solidFill>
-                  <a:srgbClr val="1F1F1F"/>
-                </a:solidFill>
-                <a:latin typeface="Pretendard" pitchFamily="34" charset="0"/>
-                <a:ea typeface="Pretendard" pitchFamily="34" charset="-122"/>
-                <a:cs typeface="Pretendard" pitchFamily="34" charset="-120"/>
-              </a:rPr>
-              <a:t>(다시 언급 없음)</a:t>
-            </a:r>
-            <a:endParaRPr lang="en-US" sz="1150" dirty="0"/>
-          </a:p>
-        </p:txBody>
-      </p:sp>
-      <p:sp>
-        <p:nvSpPr>
-          <p:cNvPr id="33" name="Text 31"/>
-          <p:cNvSpPr/>
-          <p:nvPr/>
-        </p:nvSpPr>
-        <p:spPr>
-          <a:xfrm>
-            <a:off x="6699352" y="4206240"/>
-            <a:ext cx="2011680" cy="274320"/>
-          </a:xfrm>
-          <a:prstGeom prst="rect">
-            <a:avLst/>
-          </a:prstGeom>
-          <a:noFill/>
-          <a:ln/>
-        </p:spPr>
-        <p:txBody>
-          <a:bodyPr wrap="square" lIns="0" tIns="0" rIns="0" bIns="0" rtlCol="0" anchor="ctr"/>
-          <a:lstStyle/>
-          <a:p>
-            <a:pPr indent="0" marL="0">
-              <a:buNone/>
-            </a:pPr>
-            <a:r>
-              <a:rPr lang="en-US" sz="900" b="1" spc="160" kern="0" dirty="0">
-                <a:solidFill>
-                  <a:srgbClr val="9B9B9B"/>
-                </a:solidFill>
-                <a:latin typeface="Pretendard" pitchFamily="34" charset="0"/>
-                <a:ea typeface="Pretendard" pitchFamily="34" charset="-122"/>
-                <a:cs typeface="Pretendard" pitchFamily="34" charset="-120"/>
-              </a:rPr>
-              <a:t>뒤에서 안 씀</a:t>
-            </a:r>
-            <a:endParaRPr lang="en-US" sz="900" dirty="0"/>
-          </a:p>
-        </p:txBody>
-      </p:sp>
-      <p:sp>
-        <p:nvSpPr>
-          <p:cNvPr id="34" name="Text 32"/>
-          <p:cNvSpPr/>
-          <p:nvPr/>
-        </p:nvSpPr>
-        <p:spPr>
-          <a:xfrm>
-            <a:off x="6699352" y="4443984"/>
-            <a:ext cx="4449928" cy="329184"/>
-          </a:xfrm>
-          <a:prstGeom prst="rect">
-            <a:avLst/>
-          </a:prstGeom>
-          <a:noFill/>
-          <a:ln/>
-        </p:spPr>
-        <p:txBody>
-          <a:bodyPr wrap="square" lIns="0" tIns="0" rIns="0" bIns="0" rtlCol="0" anchor="t"/>
-          <a:lstStyle/>
-          <a:p>
-            <a:pPr indent="0" marL="0">
-              <a:lnSpc>
-                <a:spcPct val="120000"/>
-              </a:lnSpc>
-              <a:buNone/>
-            </a:pPr>
-            <a:r>
-              <a:rPr lang="en-US" sz="1150" dirty="0">
-                <a:solidFill>
-                  <a:srgbClr val="6E6E6E"/>
-                </a:solidFill>
-                <a:latin typeface="Pretendard" pitchFamily="34" charset="0"/>
-                <a:ea typeface="Pretendard" pitchFamily="34" charset="-122"/>
-                <a:cs typeface="Pretendard" pitchFamily="34" charset="-120"/>
-              </a:rPr>
-              <a:t>방법 절에서 '김○○(2019)의 측정을 고쳐 썼다'로 다시 꺼냄</a:t>
-            </a:r>
-            <a:endParaRPr lang="en-US" sz="1150" dirty="0"/>
-          </a:p>
-        </p:txBody>
-      </p:sp>
-      <p:sp>
-        <p:nvSpPr>
-          <p:cNvPr id="35" name="Shape 33"/>
-          <p:cNvSpPr/>
-          <p:nvPr/>
-        </p:nvSpPr>
-        <p:spPr>
-          <a:xfrm>
-            <a:off x="640080" y="5010912"/>
-            <a:ext cx="10911535" cy="7315"/>
-          </a:xfrm>
-          <a:prstGeom prst="rect">
-            <a:avLst/>
-          </a:prstGeom>
-          <a:solidFill>
-            <a:srgbClr val="111111"/>
-          </a:solidFill>
-          <a:ln w="12700">
-            <a:solidFill>
-              <a:srgbClr val="111111"/>
-            </a:solidFill>
-            <a:prstDash val="solid"/>
-          </a:ln>
-        </p:spPr>
-      </p:sp>
-      <p:sp>
-        <p:nvSpPr>
-          <p:cNvPr id="36" name="Text 34"/>
-          <p:cNvSpPr/>
-          <p:nvPr/>
-        </p:nvSpPr>
-        <p:spPr>
-          <a:xfrm>
-            <a:off x="640080" y="5120640"/>
-            <a:ext cx="10911535" cy="402336"/>
-          </a:xfrm>
-          <a:prstGeom prst="rect">
-            <a:avLst/>
-          </a:prstGeom>
-          <a:noFill/>
-          <a:ln/>
-        </p:spPr>
-        <p:txBody>
-          <a:bodyPr wrap="square" lIns="0" tIns="0" rIns="0" bIns="0" rtlCol="0" anchor="t"/>
-          <a:lstStyle/>
-          <a:p>
-            <a:pPr indent="0" marL="0">
-              <a:lnSpc>
-                <a:spcPct val="120000"/>
-              </a:lnSpc>
-              <a:buNone/>
-            </a:pPr>
-            <a:r>
-              <a:rPr lang="en-US" sz="1300" b="1" dirty="0">
-                <a:solidFill>
-                  <a:srgbClr val="111111"/>
-                </a:solidFill>
-                <a:latin typeface="Pretendard" pitchFamily="34" charset="0"/>
-                <a:ea typeface="Pretendard" pitchFamily="34" charset="-122"/>
-                <a:cs typeface="Pretendard" pitchFamily="34" charset="-120"/>
-              </a:rPr>
-              <a:t>셋째 줄이 없으면 선행연구 절이 떠 있게 됩니다. '그래서 이 연구는'으로 끝냅니다.</a:t>
-            </a:r>
-            <a:endParaRPr lang="en-US" sz="1300" dirty="0"/>
-          </a:p>
-        </p:txBody>
-      </p:sp>
-      <p:sp>
-        <p:nvSpPr>
-          <p:cNvPr id="37" name="Shape 35"/>
-          <p:cNvSpPr/>
-          <p:nvPr/>
-        </p:nvSpPr>
-        <p:spPr>
-          <a:xfrm>
-            <a:off x="640080" y="6291072"/>
-            <a:ext cx="10911535" cy="7315"/>
-          </a:xfrm>
-          <a:prstGeom prst="rect">
-            <a:avLst/>
-          </a:prstGeom>
-          <a:solidFill>
-            <a:srgbClr val="DCDCDC"/>
-          </a:solidFill>
-          <a:ln w="12700">
-            <a:solidFill>
-              <a:srgbClr val="DCDCDC"/>
-            </a:solidFill>
-            <a:prstDash val="solid"/>
-          </a:ln>
-        </p:spPr>
-      </p:sp>
-      <p:sp>
-        <p:nvSpPr>
-          <p:cNvPr id="38" name="Text 36"/>
+          <p:cNvPr id="39" name="Text 37"/>
           <p:cNvSpPr/>
           <p:nvPr/>
         </p:nvSpPr>
@@ -8685,7 +8760,7 @@
       </p:sp>
       <p:sp>
         <p:nvSpPr>
-          <p:cNvPr id="39" name="Text 37"/>
+          <p:cNvPr id="40" name="Text 38"/>
           <p:cNvSpPr/>
           <p:nvPr/>
         </p:nvSpPr>
@@ -9531,7 +9606,7 @@
             <a:r>
               <a:rPr lang="en-US" sz="1700" dirty="0">
                 <a:solidFill>
-                  <a:srgbClr val="111111"/>
+                  <a:srgbClr val="9B9B9B"/>
                 </a:solidFill>
                 <a:latin typeface="Pretendard SemiBold" pitchFamily="34" charset="0"/>
                 <a:ea typeface="Pretendard SemiBold" pitchFamily="34" charset="-122"/>
@@ -9559,6 +9634,257 @@
           </a:prstGeom>
           <a:solidFill>
             <a:srgbClr val="FFFFFF"/>
+          </a:solidFill>
+          <a:ln w="12700">
+            <a:solidFill>
+              <a:srgbClr val="111111"/>
+            </a:solidFill>
+            <a:prstDash val="solid"/>
+          </a:ln>
+        </p:spPr>
+      </p:sp>
+      <p:sp>
+        <p:nvSpPr>
+          <p:cNvPr id="12" name="Shape 10"/>
+          <p:cNvSpPr/>
+          <p:nvPr/>
+        </p:nvSpPr>
+        <p:spPr>
+          <a:xfrm>
+            <a:off x="6297016" y="1627632"/>
+            <a:ext cx="5254600" cy="64008"/>
+          </a:xfrm>
+          <a:prstGeom prst="rect">
+            <a:avLst/>
+          </a:prstGeom>
+          <a:solidFill>
+            <a:srgbClr val="111111"/>
+          </a:solidFill>
+          <a:ln w="12700">
+            <a:solidFill>
+              <a:srgbClr val="111111"/>
+            </a:solidFill>
+            <a:prstDash val="solid"/>
+          </a:ln>
+        </p:spPr>
+      </p:sp>
+      <p:sp>
+        <p:nvSpPr>
+          <p:cNvPr id="13" name="Text 11"/>
+          <p:cNvSpPr/>
+          <p:nvPr/>
+        </p:nvSpPr>
+        <p:spPr>
+          <a:xfrm>
+            <a:off x="6699352" y="1901952"/>
+            <a:ext cx="4449928" cy="365760"/>
+          </a:xfrm>
+          <a:prstGeom prst="rect">
+            <a:avLst/>
+          </a:prstGeom>
+          <a:noFill/>
+          <a:ln/>
+        </p:spPr>
+        <p:txBody>
+          <a:bodyPr wrap="square" lIns="0" tIns="0" rIns="0" bIns="0" rtlCol="0" anchor="ctr"/>
+          <a:lstStyle/>
+          <a:p>
+            <a:pPr indent="0" marL="0">
+              <a:buNone/>
+            </a:pPr>
+            <a:r>
+              <a:rPr lang="en-US" sz="1700" dirty="0">
+                <a:solidFill>
+                  <a:srgbClr val="111111"/>
+                </a:solidFill>
+                <a:latin typeface="Pretendard SemiBold" pitchFamily="34" charset="0"/>
+                <a:ea typeface="Pretendard SemiBold" pitchFamily="34" charset="-122"/>
+                <a:cs typeface="Pretendard SemiBold" pitchFamily="34" charset="-120"/>
+              </a:rPr>
+              <a:t>이렇게 씁니다</a:t>
+            </a:r>
+            <a:endParaRPr lang="en-US" sz="1700" dirty="0"/>
+          </a:p>
+        </p:txBody>
+      </p:sp>
+      <p:sp>
+        <p:nvSpPr>
+          <p:cNvPr id="14" name="Text 12"/>
+          <p:cNvSpPr/>
+          <p:nvPr/>
+        </p:nvSpPr>
+        <p:spPr>
+          <a:xfrm>
+            <a:off x="1042416" y="2450592"/>
+            <a:ext cx="2011680" cy="274320"/>
+          </a:xfrm>
+          <a:prstGeom prst="rect">
+            <a:avLst/>
+          </a:prstGeom>
+          <a:noFill/>
+          <a:ln/>
+        </p:spPr>
+        <p:txBody>
+          <a:bodyPr wrap="square" lIns="0" tIns="0" rIns="0" bIns="0" rtlCol="0" anchor="ctr"/>
+          <a:lstStyle/>
+          <a:p>
+            <a:pPr indent="0" marL="0">
+              <a:buNone/>
+            </a:pPr>
+            <a:r>
+              <a:rPr lang="en-US" sz="900" b="1" spc="160" kern="0" dirty="0">
+                <a:solidFill>
+                  <a:srgbClr val="9B9B9B"/>
+                </a:solidFill>
+                <a:latin typeface="Pretendard" pitchFamily="34" charset="0"/>
+                <a:ea typeface="Pretendard" pitchFamily="34" charset="-122"/>
+                <a:cs typeface="Pretendard" pitchFamily="34" charset="-120"/>
+              </a:rPr>
+              <a:t>무엇을 하는지만</a:t>
+            </a:r>
+            <a:endParaRPr lang="en-US" sz="900" dirty="0"/>
+          </a:p>
+        </p:txBody>
+      </p:sp>
+      <p:sp>
+        <p:nvSpPr>
+          <p:cNvPr id="15" name="Text 13"/>
+          <p:cNvSpPr/>
+          <p:nvPr/>
+        </p:nvSpPr>
+        <p:spPr>
+          <a:xfrm>
+            <a:off x="1042416" y="2688336"/>
+            <a:ext cx="4449928" cy="329184"/>
+          </a:xfrm>
+          <a:prstGeom prst="rect">
+            <a:avLst/>
+          </a:prstGeom>
+          <a:noFill/>
+          <a:ln/>
+        </p:spPr>
+        <p:txBody>
+          <a:bodyPr wrap="square" lIns="0" tIns="0" rIns="0" bIns="0" rtlCol="0" anchor="t"/>
+          <a:lstStyle/>
+          <a:p>
+            <a:pPr indent="0" marL="0">
+              <a:lnSpc>
+                <a:spcPct val="120000"/>
+              </a:lnSpc>
+              <a:buNone/>
+            </a:pPr>
+            <a:r>
+              <a:rPr lang="en-US" sz="1150" dirty="0">
+                <a:solidFill>
+                  <a:srgbClr val="6E6E6E"/>
+                </a:solidFill>
+                <a:latin typeface="Pretendard" pitchFamily="34" charset="0"/>
+                <a:ea typeface="Pretendard" pitchFamily="34" charset="-122"/>
+                <a:cs typeface="Pretendard" pitchFamily="34" charset="-120"/>
+              </a:rPr>
+              <a:t>인터뷰와 설문을 진행한다</a:t>
+            </a:r>
+            <a:endParaRPr lang="en-US" sz="1150" dirty="0"/>
+          </a:p>
+        </p:txBody>
+      </p:sp>
+      <p:sp>
+        <p:nvSpPr>
+          <p:cNvPr id="16" name="Text 14"/>
+          <p:cNvSpPr/>
+          <p:nvPr/>
+        </p:nvSpPr>
+        <p:spPr>
+          <a:xfrm>
+            <a:off x="6699352" y="2450592"/>
+            <a:ext cx="2011680" cy="274320"/>
+          </a:xfrm>
+          <a:prstGeom prst="rect">
+            <a:avLst/>
+          </a:prstGeom>
+          <a:noFill/>
+          <a:ln/>
+        </p:spPr>
+        <p:txBody>
+          <a:bodyPr wrap="square" lIns="0" tIns="0" rIns="0" bIns="0" rtlCol="0" anchor="ctr"/>
+          <a:lstStyle/>
+          <a:p>
+            <a:pPr indent="0" marL="0">
+              <a:buNone/>
+            </a:pPr>
+            <a:r>
+              <a:rPr lang="en-US" sz="900" b="1" spc="160" kern="0" dirty="0">
+                <a:solidFill>
+                  <a:srgbClr val="111111"/>
+                </a:solidFill>
+                <a:latin typeface="Pretendard" pitchFamily="34" charset="0"/>
+                <a:ea typeface="Pretendard" pitchFamily="34" charset="-122"/>
+                <a:cs typeface="Pretendard" pitchFamily="34" charset="-120"/>
+              </a:rPr>
+              <a:t>무엇을 하는지만</a:t>
+            </a:r>
+            <a:endParaRPr lang="en-US" sz="900" dirty="0"/>
+          </a:p>
+        </p:txBody>
+      </p:sp>
+      <p:sp>
+        <p:nvSpPr>
+          <p:cNvPr id="17" name="Text 15"/>
+          <p:cNvSpPr/>
+          <p:nvPr/>
+        </p:nvSpPr>
+        <p:spPr>
+          <a:xfrm>
+            <a:off x="6699352" y="2688336"/>
+            <a:ext cx="4449928" cy="329184"/>
+          </a:xfrm>
+          <a:prstGeom prst="rect">
+            <a:avLst/>
+          </a:prstGeom>
+          <a:noFill/>
+          <a:ln/>
+        </p:spPr>
+        <p:txBody>
+          <a:bodyPr wrap="square" lIns="0" tIns="0" rIns="0" bIns="0" rtlCol="0" anchor="t"/>
+          <a:lstStyle/>
+          <a:p>
+            <a:pPr indent="0" marL="0">
+              <a:lnSpc>
+                <a:spcPct val="120000"/>
+              </a:lnSpc>
+              <a:buNone/>
+            </a:pPr>
+            <a:r>
+              <a:rPr lang="en-US" sz="1150" b="1" dirty="0">
+                <a:solidFill>
+                  <a:srgbClr val="1F1F1F"/>
+                </a:solidFill>
+                <a:latin typeface="Pretendard" pitchFamily="34" charset="0"/>
+                <a:ea typeface="Pretendard" pitchFamily="34" charset="-122"/>
+                <a:cs typeface="Pretendard" pitchFamily="34" charset="-120"/>
+              </a:rPr>
+              <a:t>방문객 30명에게 간판 사진 12장을 보여 주고 시간을 잰다</a:t>
+            </a:r>
+            <a:endParaRPr lang="en-US" sz="1150" dirty="0"/>
+          </a:p>
+        </p:txBody>
+      </p:sp>
+      <p:sp>
+        <p:nvSpPr>
+          <p:cNvPr id="18" name="Shape 16"/>
+          <p:cNvSpPr/>
+          <p:nvPr/>
+        </p:nvSpPr>
+        <p:spPr>
+          <a:xfrm>
+            <a:off x="1042416" y="2980944"/>
+            <a:ext cx="4449928" cy="7315"/>
+          </a:xfrm>
+          <a:prstGeom prst="rect">
+            <a:avLst/>
+          </a:prstGeom>
+          <a:solidFill>
+            <a:srgbClr val="DCDCDC"/>
           </a:solidFill>
           <a:ln w="12700">
             <a:solidFill>
@@ -9570,214 +9896,13 @@
       </p:sp>
       <p:sp>
         <p:nvSpPr>
-          <p:cNvPr id="12" name="Text 10"/>
-          <p:cNvSpPr/>
-          <p:nvPr/>
-        </p:nvSpPr>
-        <p:spPr>
-          <a:xfrm>
-            <a:off x="6699352" y="1901952"/>
-            <a:ext cx="4449928" cy="365760"/>
-          </a:xfrm>
-          <a:prstGeom prst="rect">
-            <a:avLst/>
-          </a:prstGeom>
-          <a:noFill/>
-          <a:ln/>
-        </p:spPr>
-        <p:txBody>
-          <a:bodyPr wrap="square" lIns="0" tIns="0" rIns="0" bIns="0" rtlCol="0" anchor="ctr"/>
-          <a:lstStyle/>
-          <a:p>
-            <a:pPr indent="0" marL="0">
-              <a:buNone/>
-            </a:pPr>
-            <a:r>
-              <a:rPr lang="en-US" sz="1700" dirty="0">
-                <a:solidFill>
-                  <a:srgbClr val="9B9B9B"/>
-                </a:solidFill>
-                <a:latin typeface="Pretendard SemiBold" pitchFamily="34" charset="0"/>
-                <a:ea typeface="Pretendard SemiBold" pitchFamily="34" charset="-122"/>
-                <a:cs typeface="Pretendard SemiBold" pitchFamily="34" charset="-120"/>
-              </a:rPr>
-              <a:t>이렇게 씁니다</a:t>
-            </a:r>
-            <a:endParaRPr lang="en-US" sz="1700" dirty="0"/>
-          </a:p>
-        </p:txBody>
-      </p:sp>
-      <p:sp>
-        <p:nvSpPr>
-          <p:cNvPr id="13" name="Text 11"/>
-          <p:cNvSpPr/>
-          <p:nvPr/>
-        </p:nvSpPr>
-        <p:spPr>
-          <a:xfrm>
-            <a:off x="1042416" y="2450592"/>
-            <a:ext cx="2011680" cy="274320"/>
-          </a:xfrm>
-          <a:prstGeom prst="rect">
-            <a:avLst/>
-          </a:prstGeom>
-          <a:noFill/>
-          <a:ln/>
-        </p:spPr>
-        <p:txBody>
-          <a:bodyPr wrap="square" lIns="0" tIns="0" rIns="0" bIns="0" rtlCol="0" anchor="ctr"/>
-          <a:lstStyle/>
-          <a:p>
-            <a:pPr indent="0" marL="0">
-              <a:buNone/>
-            </a:pPr>
-            <a:r>
-              <a:rPr lang="en-US" sz="900" b="1" spc="160" kern="0" dirty="0">
-                <a:solidFill>
-                  <a:srgbClr val="111111"/>
-                </a:solidFill>
-                <a:latin typeface="Pretendard" pitchFamily="34" charset="0"/>
-                <a:ea typeface="Pretendard" pitchFamily="34" charset="-122"/>
-                <a:cs typeface="Pretendard" pitchFamily="34" charset="-120"/>
-              </a:rPr>
-              <a:t>무엇을 하는지만</a:t>
-            </a:r>
-            <a:endParaRPr lang="en-US" sz="900" dirty="0"/>
-          </a:p>
-        </p:txBody>
-      </p:sp>
-      <p:sp>
-        <p:nvSpPr>
-          <p:cNvPr id="14" name="Text 12"/>
-          <p:cNvSpPr/>
-          <p:nvPr/>
-        </p:nvSpPr>
-        <p:spPr>
-          <a:xfrm>
-            <a:off x="1042416" y="2688336"/>
-            <a:ext cx="4449928" cy="329184"/>
-          </a:xfrm>
-          <a:prstGeom prst="rect">
-            <a:avLst/>
-          </a:prstGeom>
-          <a:noFill/>
-          <a:ln/>
-        </p:spPr>
-        <p:txBody>
-          <a:bodyPr wrap="square" lIns="0" tIns="0" rIns="0" bIns="0" rtlCol="0" anchor="t"/>
-          <a:lstStyle/>
-          <a:p>
-            <a:pPr indent="0" marL="0">
-              <a:lnSpc>
-                <a:spcPct val="120000"/>
-              </a:lnSpc>
-              <a:buNone/>
-            </a:pPr>
-            <a:r>
-              <a:rPr lang="en-US" sz="1150" dirty="0">
-                <a:solidFill>
-                  <a:srgbClr val="1F1F1F"/>
-                </a:solidFill>
-                <a:latin typeface="Pretendard" pitchFamily="34" charset="0"/>
-                <a:ea typeface="Pretendard" pitchFamily="34" charset="-122"/>
-                <a:cs typeface="Pretendard" pitchFamily="34" charset="-120"/>
-              </a:rPr>
-              <a:t>인터뷰와 설문을 진행한다</a:t>
-            </a:r>
-            <a:endParaRPr lang="en-US" sz="1150" dirty="0"/>
-          </a:p>
-        </p:txBody>
-      </p:sp>
-      <p:sp>
-        <p:nvSpPr>
-          <p:cNvPr id="15" name="Text 13"/>
-          <p:cNvSpPr/>
-          <p:nvPr/>
-        </p:nvSpPr>
-        <p:spPr>
-          <a:xfrm>
-            <a:off x="6699352" y="2450592"/>
-            <a:ext cx="2011680" cy="274320"/>
-          </a:xfrm>
-          <a:prstGeom prst="rect">
-            <a:avLst/>
-          </a:prstGeom>
-          <a:noFill/>
-          <a:ln/>
-        </p:spPr>
-        <p:txBody>
-          <a:bodyPr wrap="square" lIns="0" tIns="0" rIns="0" bIns="0" rtlCol="0" anchor="ctr"/>
-          <a:lstStyle/>
-          <a:p>
-            <a:pPr indent="0" marL="0">
-              <a:buNone/>
-            </a:pPr>
-            <a:r>
-              <a:rPr lang="en-US" sz="900" b="1" spc="160" kern="0" dirty="0">
-                <a:solidFill>
-                  <a:srgbClr val="9B9B9B"/>
-                </a:solidFill>
-                <a:latin typeface="Pretendard" pitchFamily="34" charset="0"/>
-                <a:ea typeface="Pretendard" pitchFamily="34" charset="-122"/>
-                <a:cs typeface="Pretendard" pitchFamily="34" charset="-120"/>
-              </a:rPr>
-              <a:t>무엇을 하는지만</a:t>
-            </a:r>
-            <a:endParaRPr lang="en-US" sz="900" dirty="0"/>
-          </a:p>
-        </p:txBody>
-      </p:sp>
-      <p:sp>
-        <p:nvSpPr>
-          <p:cNvPr id="16" name="Text 14"/>
-          <p:cNvSpPr/>
-          <p:nvPr/>
-        </p:nvSpPr>
-        <p:spPr>
-          <a:xfrm>
-            <a:off x="6699352" y="2688336"/>
-            <a:ext cx="4449928" cy="329184"/>
-          </a:xfrm>
-          <a:prstGeom prst="rect">
-            <a:avLst/>
-          </a:prstGeom>
-          <a:noFill/>
-          <a:ln/>
-        </p:spPr>
-        <p:txBody>
-          <a:bodyPr wrap="square" lIns="0" tIns="0" rIns="0" bIns="0" rtlCol="0" anchor="t"/>
-          <a:lstStyle/>
-          <a:p>
-            <a:pPr indent="0" marL="0">
-              <a:lnSpc>
-                <a:spcPct val="120000"/>
-              </a:lnSpc>
-              <a:buNone/>
-            </a:pPr>
-            <a:r>
-              <a:rPr lang="en-US" sz="1150" dirty="0">
-                <a:solidFill>
-                  <a:srgbClr val="6E6E6E"/>
-                </a:solidFill>
-                <a:latin typeface="Pretendard" pitchFamily="34" charset="0"/>
-                <a:ea typeface="Pretendard" pitchFamily="34" charset="-122"/>
-                <a:cs typeface="Pretendard" pitchFamily="34" charset="-120"/>
-              </a:rPr>
-              <a:t>방문객 30명에게 간판 사진 12장을 보여 주고 시간을 잰다</a:t>
-            </a:r>
-            <a:endParaRPr lang="en-US" sz="1150" dirty="0"/>
-          </a:p>
-        </p:txBody>
-      </p:sp>
-      <p:sp>
-        <p:nvSpPr>
-          <p:cNvPr id="17" name="Shape 15"/>
-          <p:cNvSpPr/>
-          <p:nvPr/>
-        </p:nvSpPr>
-        <p:spPr>
-          <a:xfrm>
-            <a:off x="1042416" y="2980944"/>
+          <p:cNvPr id="19" name="Shape 17"/>
+          <p:cNvSpPr/>
+          <p:nvPr/>
+        </p:nvSpPr>
+        <p:spPr>
+          <a:xfrm>
+            <a:off x="6699352" y="2980944"/>
             <a:ext cx="4449928" cy="7315"/>
           </a:xfrm>
           <a:prstGeom prst="rect">
@@ -9796,13 +9921,175 @@
       </p:sp>
       <p:sp>
         <p:nvSpPr>
-          <p:cNvPr id="18" name="Shape 16"/>
-          <p:cNvSpPr/>
-          <p:nvPr/>
-        </p:nvSpPr>
-        <p:spPr>
-          <a:xfrm>
-            <a:off x="6699352" y="2980944"/>
+          <p:cNvPr id="20" name="Text 18"/>
+          <p:cNvSpPr/>
+          <p:nvPr/>
+        </p:nvSpPr>
+        <p:spPr>
+          <a:xfrm>
+            <a:off x="1042416" y="3035808"/>
+            <a:ext cx="2011680" cy="274320"/>
+          </a:xfrm>
+          <a:prstGeom prst="rect">
+            <a:avLst/>
+          </a:prstGeom>
+          <a:noFill/>
+          <a:ln/>
+        </p:spPr>
+        <p:txBody>
+          <a:bodyPr wrap="square" lIns="0" tIns="0" rIns="0" bIns="0" rtlCol="0" anchor="ctr"/>
+          <a:lstStyle/>
+          <a:p>
+            <a:pPr indent="0" marL="0">
+              <a:buNone/>
+            </a:pPr>
+            <a:r>
+              <a:rPr lang="en-US" sz="900" b="1" spc="160" kern="0" dirty="0">
+                <a:solidFill>
+                  <a:srgbClr val="9B9B9B"/>
+                </a:solidFill>
+                <a:latin typeface="Pretendard" pitchFamily="34" charset="0"/>
+                <a:ea typeface="Pretendard" pitchFamily="34" charset="-122"/>
+                <a:cs typeface="Pretendard" pitchFamily="34" charset="-120"/>
+              </a:rPr>
+              <a:t>대상이 흐림</a:t>
+            </a:r>
+            <a:endParaRPr lang="en-US" sz="900" dirty="0"/>
+          </a:p>
+        </p:txBody>
+      </p:sp>
+      <p:sp>
+        <p:nvSpPr>
+          <p:cNvPr id="21" name="Text 19"/>
+          <p:cNvSpPr/>
+          <p:nvPr/>
+        </p:nvSpPr>
+        <p:spPr>
+          <a:xfrm>
+            <a:off x="1042416" y="3273552"/>
+            <a:ext cx="4449928" cy="329184"/>
+          </a:xfrm>
+          <a:prstGeom prst="rect">
+            <a:avLst/>
+          </a:prstGeom>
+          <a:noFill/>
+          <a:ln/>
+        </p:spPr>
+        <p:txBody>
+          <a:bodyPr wrap="square" lIns="0" tIns="0" rIns="0" bIns="0" rtlCol="0" anchor="t"/>
+          <a:lstStyle/>
+          <a:p>
+            <a:pPr indent="0" marL="0">
+              <a:lnSpc>
+                <a:spcPct val="120000"/>
+              </a:lnSpc>
+              <a:buNone/>
+            </a:pPr>
+            <a:r>
+              <a:rPr lang="en-US" sz="1150" dirty="0">
+                <a:solidFill>
+                  <a:srgbClr val="6E6E6E"/>
+                </a:solidFill>
+                <a:latin typeface="Pretendard" pitchFamily="34" charset="0"/>
+                <a:ea typeface="Pretendard" pitchFamily="34" charset="-122"/>
+                <a:cs typeface="Pretendard" pitchFamily="34" charset="-120"/>
+              </a:rPr>
+              <a:t>적절한 수의 대상자를 선정한다</a:t>
+            </a:r>
+            <a:endParaRPr lang="en-US" sz="1150" dirty="0"/>
+          </a:p>
+        </p:txBody>
+      </p:sp>
+      <p:sp>
+        <p:nvSpPr>
+          <p:cNvPr id="22" name="Text 20"/>
+          <p:cNvSpPr/>
+          <p:nvPr/>
+        </p:nvSpPr>
+        <p:spPr>
+          <a:xfrm>
+            <a:off x="6699352" y="3035808"/>
+            <a:ext cx="2011680" cy="274320"/>
+          </a:xfrm>
+          <a:prstGeom prst="rect">
+            <a:avLst/>
+          </a:prstGeom>
+          <a:noFill/>
+          <a:ln/>
+        </p:spPr>
+        <p:txBody>
+          <a:bodyPr wrap="square" lIns="0" tIns="0" rIns="0" bIns="0" rtlCol="0" anchor="ctr"/>
+          <a:lstStyle/>
+          <a:p>
+            <a:pPr indent="0" marL="0">
+              <a:buNone/>
+            </a:pPr>
+            <a:r>
+              <a:rPr lang="en-US" sz="900" b="1" spc="160" kern="0" dirty="0">
+                <a:solidFill>
+                  <a:srgbClr val="111111"/>
+                </a:solidFill>
+                <a:latin typeface="Pretendard" pitchFamily="34" charset="0"/>
+                <a:ea typeface="Pretendard" pitchFamily="34" charset="-122"/>
+                <a:cs typeface="Pretendard" pitchFamily="34" charset="-120"/>
+              </a:rPr>
+              <a:t>대상이 흐림</a:t>
+            </a:r>
+            <a:endParaRPr lang="en-US" sz="900" dirty="0"/>
+          </a:p>
+        </p:txBody>
+      </p:sp>
+      <p:sp>
+        <p:nvSpPr>
+          <p:cNvPr id="23" name="Text 21"/>
+          <p:cNvSpPr/>
+          <p:nvPr/>
+        </p:nvSpPr>
+        <p:spPr>
+          <a:xfrm>
+            <a:off x="6699352" y="3273552"/>
+            <a:ext cx="4449928" cy="329184"/>
+          </a:xfrm>
+          <a:prstGeom prst="rect">
+            <a:avLst/>
+          </a:prstGeom>
+          <a:noFill/>
+          <a:ln/>
+        </p:spPr>
+        <p:txBody>
+          <a:bodyPr wrap="square" lIns="0" tIns="0" rIns="0" bIns="0" rtlCol="0" anchor="t"/>
+          <a:lstStyle/>
+          <a:p>
+            <a:pPr indent="0" marL="0">
+              <a:lnSpc>
+                <a:spcPct val="120000"/>
+              </a:lnSpc>
+              <a:buNone/>
+            </a:pPr>
+            <a:r>
+              <a:rPr lang="en-US" sz="1150" b="1" dirty="0">
+                <a:solidFill>
+                  <a:srgbClr val="1F1F1F"/>
+                </a:solidFill>
+                <a:latin typeface="Pretendard" pitchFamily="34" charset="0"/>
+                <a:ea typeface="Pretendard" pitchFamily="34" charset="-122"/>
+                <a:cs typeface="Pretendard" pitchFamily="34" charset="-120"/>
+              </a:rPr>
+              <a:t>30명 — 처음 온 방문객 15, 단골 15</a:t>
+            </a:r>
+            <a:endParaRPr lang="en-US" sz="1150" dirty="0"/>
+          </a:p>
+        </p:txBody>
+      </p:sp>
+      <p:sp>
+        <p:nvSpPr>
+          <p:cNvPr id="24" name="Shape 22"/>
+          <p:cNvSpPr/>
+          <p:nvPr/>
+        </p:nvSpPr>
+        <p:spPr>
+          <a:xfrm>
+            <a:off x="1042416" y="3566160"/>
             <a:ext cx="4449928" cy="7315"/>
           </a:xfrm>
           <a:prstGeom prst="rect">
@@ -9821,175 +10108,13 @@
       </p:sp>
       <p:sp>
         <p:nvSpPr>
-          <p:cNvPr id="19" name="Text 17"/>
-          <p:cNvSpPr/>
-          <p:nvPr/>
-        </p:nvSpPr>
-        <p:spPr>
-          <a:xfrm>
-            <a:off x="1042416" y="3035808"/>
-            <a:ext cx="2011680" cy="274320"/>
-          </a:xfrm>
-          <a:prstGeom prst="rect">
-            <a:avLst/>
-          </a:prstGeom>
-          <a:noFill/>
-          <a:ln/>
-        </p:spPr>
-        <p:txBody>
-          <a:bodyPr wrap="square" lIns="0" tIns="0" rIns="0" bIns="0" rtlCol="0" anchor="ctr"/>
-          <a:lstStyle/>
-          <a:p>
-            <a:pPr indent="0" marL="0">
-              <a:buNone/>
-            </a:pPr>
-            <a:r>
-              <a:rPr lang="en-US" sz="900" b="1" spc="160" kern="0" dirty="0">
-                <a:solidFill>
-                  <a:srgbClr val="111111"/>
-                </a:solidFill>
-                <a:latin typeface="Pretendard" pitchFamily="34" charset="0"/>
-                <a:ea typeface="Pretendard" pitchFamily="34" charset="-122"/>
-                <a:cs typeface="Pretendard" pitchFamily="34" charset="-120"/>
-              </a:rPr>
-              <a:t>대상이 흐림</a:t>
-            </a:r>
-            <a:endParaRPr lang="en-US" sz="900" dirty="0"/>
-          </a:p>
-        </p:txBody>
-      </p:sp>
-      <p:sp>
-        <p:nvSpPr>
-          <p:cNvPr id="20" name="Text 18"/>
-          <p:cNvSpPr/>
-          <p:nvPr/>
-        </p:nvSpPr>
-        <p:spPr>
-          <a:xfrm>
-            <a:off x="1042416" y="3273552"/>
-            <a:ext cx="4449928" cy="329184"/>
-          </a:xfrm>
-          <a:prstGeom prst="rect">
-            <a:avLst/>
-          </a:prstGeom>
-          <a:noFill/>
-          <a:ln/>
-        </p:spPr>
-        <p:txBody>
-          <a:bodyPr wrap="square" lIns="0" tIns="0" rIns="0" bIns="0" rtlCol="0" anchor="t"/>
-          <a:lstStyle/>
-          <a:p>
-            <a:pPr indent="0" marL="0">
-              <a:lnSpc>
-                <a:spcPct val="120000"/>
-              </a:lnSpc>
-              <a:buNone/>
-            </a:pPr>
-            <a:r>
-              <a:rPr lang="en-US" sz="1150" dirty="0">
-                <a:solidFill>
-                  <a:srgbClr val="1F1F1F"/>
-                </a:solidFill>
-                <a:latin typeface="Pretendard" pitchFamily="34" charset="0"/>
-                <a:ea typeface="Pretendard" pitchFamily="34" charset="-122"/>
-                <a:cs typeface="Pretendard" pitchFamily="34" charset="-120"/>
-              </a:rPr>
-              <a:t>적절한 수의 대상자를 선정한다</a:t>
-            </a:r>
-            <a:endParaRPr lang="en-US" sz="1150" dirty="0"/>
-          </a:p>
-        </p:txBody>
-      </p:sp>
-      <p:sp>
-        <p:nvSpPr>
-          <p:cNvPr id="21" name="Text 19"/>
-          <p:cNvSpPr/>
-          <p:nvPr/>
-        </p:nvSpPr>
-        <p:spPr>
-          <a:xfrm>
-            <a:off x="6699352" y="3035808"/>
-            <a:ext cx="2011680" cy="274320"/>
-          </a:xfrm>
-          <a:prstGeom prst="rect">
-            <a:avLst/>
-          </a:prstGeom>
-          <a:noFill/>
-          <a:ln/>
-        </p:spPr>
-        <p:txBody>
-          <a:bodyPr wrap="square" lIns="0" tIns="0" rIns="0" bIns="0" rtlCol="0" anchor="ctr"/>
-          <a:lstStyle/>
-          <a:p>
-            <a:pPr indent="0" marL="0">
-              <a:buNone/>
-            </a:pPr>
-            <a:r>
-              <a:rPr lang="en-US" sz="900" b="1" spc="160" kern="0" dirty="0">
-                <a:solidFill>
-                  <a:srgbClr val="9B9B9B"/>
-                </a:solidFill>
-                <a:latin typeface="Pretendard" pitchFamily="34" charset="0"/>
-                <a:ea typeface="Pretendard" pitchFamily="34" charset="-122"/>
-                <a:cs typeface="Pretendard" pitchFamily="34" charset="-120"/>
-              </a:rPr>
-              <a:t>대상이 흐림</a:t>
-            </a:r>
-            <a:endParaRPr lang="en-US" sz="900" dirty="0"/>
-          </a:p>
-        </p:txBody>
-      </p:sp>
-      <p:sp>
-        <p:nvSpPr>
-          <p:cNvPr id="22" name="Text 20"/>
-          <p:cNvSpPr/>
-          <p:nvPr/>
-        </p:nvSpPr>
-        <p:spPr>
-          <a:xfrm>
-            <a:off x="6699352" y="3273552"/>
-            <a:ext cx="4449928" cy="329184"/>
-          </a:xfrm>
-          <a:prstGeom prst="rect">
-            <a:avLst/>
-          </a:prstGeom>
-          <a:noFill/>
-          <a:ln/>
-        </p:spPr>
-        <p:txBody>
-          <a:bodyPr wrap="square" lIns="0" tIns="0" rIns="0" bIns="0" rtlCol="0" anchor="t"/>
-          <a:lstStyle/>
-          <a:p>
-            <a:pPr indent="0" marL="0">
-              <a:lnSpc>
-                <a:spcPct val="120000"/>
-              </a:lnSpc>
-              <a:buNone/>
-            </a:pPr>
-            <a:r>
-              <a:rPr lang="en-US" sz="1150" dirty="0">
-                <a:solidFill>
-                  <a:srgbClr val="6E6E6E"/>
-                </a:solidFill>
-                <a:latin typeface="Pretendard" pitchFamily="34" charset="0"/>
-                <a:ea typeface="Pretendard" pitchFamily="34" charset="-122"/>
-                <a:cs typeface="Pretendard" pitchFamily="34" charset="-120"/>
-              </a:rPr>
-              <a:t>30명 — 처음 온 방문객 15, 단골 15</a:t>
-            </a:r>
-            <a:endParaRPr lang="en-US" sz="1150" dirty="0"/>
-          </a:p>
-        </p:txBody>
-      </p:sp>
-      <p:sp>
-        <p:nvSpPr>
-          <p:cNvPr id="23" name="Shape 21"/>
-          <p:cNvSpPr/>
-          <p:nvPr/>
-        </p:nvSpPr>
-        <p:spPr>
-          <a:xfrm>
-            <a:off x="1042416" y="3566160"/>
+          <p:cNvPr id="25" name="Shape 23"/>
+          <p:cNvSpPr/>
+          <p:nvPr/>
+        </p:nvSpPr>
+        <p:spPr>
+          <a:xfrm>
+            <a:off x="6699352" y="3566160"/>
             <a:ext cx="4449928" cy="7315"/>
           </a:xfrm>
           <a:prstGeom prst="rect">
@@ -10008,13 +10133,175 @@
       </p:sp>
       <p:sp>
         <p:nvSpPr>
-          <p:cNvPr id="24" name="Shape 22"/>
-          <p:cNvSpPr/>
-          <p:nvPr/>
-        </p:nvSpPr>
-        <p:spPr>
-          <a:xfrm>
-            <a:off x="6699352" y="3566160"/>
+          <p:cNvPr id="26" name="Text 24"/>
+          <p:cNvSpPr/>
+          <p:nvPr/>
+        </p:nvSpPr>
+        <p:spPr>
+          <a:xfrm>
+            <a:off x="1042416" y="3621024"/>
+            <a:ext cx="2011680" cy="274320"/>
+          </a:xfrm>
+          <a:prstGeom prst="rect">
+            <a:avLst/>
+          </a:prstGeom>
+          <a:noFill/>
+          <a:ln/>
+        </p:spPr>
+        <p:txBody>
+          <a:bodyPr wrap="square" lIns="0" tIns="0" rIns="0" bIns="0" rtlCol="0" anchor="ctr"/>
+          <a:lstStyle/>
+          <a:p>
+            <a:pPr indent="0" marL="0">
+              <a:buNone/>
+            </a:pPr>
+            <a:r>
+              <a:rPr lang="en-US" sz="900" b="1" spc="160" kern="0" dirty="0">
+                <a:solidFill>
+                  <a:srgbClr val="9B9B9B"/>
+                </a:solidFill>
+                <a:latin typeface="Pretendard" pitchFamily="34" charset="0"/>
+                <a:ea typeface="Pretendard" pitchFamily="34" charset="-122"/>
+                <a:cs typeface="Pretendard" pitchFamily="34" charset="-120"/>
+              </a:rPr>
+              <a:t>예비조사 없음</a:t>
+            </a:r>
+            <a:endParaRPr lang="en-US" sz="900" dirty="0"/>
+          </a:p>
+        </p:txBody>
+      </p:sp>
+      <p:sp>
+        <p:nvSpPr>
+          <p:cNvPr id="27" name="Text 25"/>
+          <p:cNvSpPr/>
+          <p:nvPr/>
+        </p:nvSpPr>
+        <p:spPr>
+          <a:xfrm>
+            <a:off x="1042416" y="3858768"/>
+            <a:ext cx="4449928" cy="329184"/>
+          </a:xfrm>
+          <a:prstGeom prst="rect">
+            <a:avLst/>
+          </a:prstGeom>
+          <a:noFill/>
+          <a:ln/>
+        </p:spPr>
+        <p:txBody>
+          <a:bodyPr wrap="square" lIns="0" tIns="0" rIns="0" bIns="0" rtlCol="0" anchor="t"/>
+          <a:lstStyle/>
+          <a:p>
+            <a:pPr indent="0" marL="0">
+              <a:lnSpc>
+                <a:spcPct val="120000"/>
+              </a:lnSpc>
+              <a:buNone/>
+            </a:pPr>
+            <a:r>
+              <a:rPr lang="en-US" sz="1150" dirty="0">
+                <a:solidFill>
+                  <a:srgbClr val="6E6E6E"/>
+                </a:solidFill>
+                <a:latin typeface="Pretendard" pitchFamily="34" charset="0"/>
+                <a:ea typeface="Pretendard" pitchFamily="34" charset="-122"/>
+                <a:cs typeface="Pretendard" pitchFamily="34" charset="-120"/>
+              </a:rPr>
+              <a:t>(없음)</a:t>
+            </a:r>
+            <a:endParaRPr lang="en-US" sz="1150" dirty="0"/>
+          </a:p>
+        </p:txBody>
+      </p:sp>
+      <p:sp>
+        <p:nvSpPr>
+          <p:cNvPr id="28" name="Text 26"/>
+          <p:cNvSpPr/>
+          <p:nvPr/>
+        </p:nvSpPr>
+        <p:spPr>
+          <a:xfrm>
+            <a:off x="6699352" y="3621024"/>
+            <a:ext cx="2011680" cy="274320"/>
+          </a:xfrm>
+          <a:prstGeom prst="rect">
+            <a:avLst/>
+          </a:prstGeom>
+          <a:noFill/>
+          <a:ln/>
+        </p:spPr>
+        <p:txBody>
+          <a:bodyPr wrap="square" lIns="0" tIns="0" rIns="0" bIns="0" rtlCol="0" anchor="ctr"/>
+          <a:lstStyle/>
+          <a:p>
+            <a:pPr indent="0" marL="0">
+              <a:buNone/>
+            </a:pPr>
+            <a:r>
+              <a:rPr lang="en-US" sz="900" b="1" spc="160" kern="0" dirty="0">
+                <a:solidFill>
+                  <a:srgbClr val="111111"/>
+                </a:solidFill>
+                <a:latin typeface="Pretendard" pitchFamily="34" charset="0"/>
+                <a:ea typeface="Pretendard" pitchFamily="34" charset="-122"/>
+                <a:cs typeface="Pretendard" pitchFamily="34" charset="-120"/>
+              </a:rPr>
+              <a:t>예비조사 없음</a:t>
+            </a:r>
+            <a:endParaRPr lang="en-US" sz="900" dirty="0"/>
+          </a:p>
+        </p:txBody>
+      </p:sp>
+      <p:sp>
+        <p:nvSpPr>
+          <p:cNvPr id="29" name="Text 27"/>
+          <p:cNvSpPr/>
+          <p:nvPr/>
+        </p:nvSpPr>
+        <p:spPr>
+          <a:xfrm>
+            <a:off x="6699352" y="3858768"/>
+            <a:ext cx="4449928" cy="329184"/>
+          </a:xfrm>
+          <a:prstGeom prst="rect">
+            <a:avLst/>
+          </a:prstGeom>
+          <a:noFill/>
+          <a:ln/>
+        </p:spPr>
+        <p:txBody>
+          <a:bodyPr wrap="square" lIns="0" tIns="0" rIns="0" bIns="0" rtlCol="0" anchor="t"/>
+          <a:lstStyle/>
+          <a:p>
+            <a:pPr indent="0" marL="0">
+              <a:lnSpc>
+                <a:spcPct val="120000"/>
+              </a:lnSpc>
+              <a:buNone/>
+            </a:pPr>
+            <a:r>
+              <a:rPr lang="en-US" sz="1150" b="1" dirty="0">
+                <a:solidFill>
+                  <a:srgbClr val="1F1F1F"/>
+                </a:solidFill>
+                <a:latin typeface="Pretendard" pitchFamily="34" charset="0"/>
+                <a:ea typeface="Pretendard" pitchFamily="34" charset="-122"/>
+                <a:cs typeface="Pretendard" pitchFamily="34" charset="-120"/>
+              </a:rPr>
+              <a:t>먼저 5명에게 해 보고 사진 수와 질문을 고친다</a:t>
+            </a:r>
+            <a:endParaRPr lang="en-US" sz="1150" dirty="0"/>
+          </a:p>
+        </p:txBody>
+      </p:sp>
+      <p:sp>
+        <p:nvSpPr>
+          <p:cNvPr id="30" name="Shape 28"/>
+          <p:cNvSpPr/>
+          <p:nvPr/>
+        </p:nvSpPr>
+        <p:spPr>
+          <a:xfrm>
+            <a:off x="1042416" y="4151376"/>
             <a:ext cx="4449928" cy="7315"/>
           </a:xfrm>
           <a:prstGeom prst="rect">
@@ -10033,175 +10320,13 @@
       </p:sp>
       <p:sp>
         <p:nvSpPr>
-          <p:cNvPr id="25" name="Text 23"/>
-          <p:cNvSpPr/>
-          <p:nvPr/>
-        </p:nvSpPr>
-        <p:spPr>
-          <a:xfrm>
-            <a:off x="1042416" y="3621024"/>
-            <a:ext cx="2011680" cy="274320"/>
-          </a:xfrm>
-          <a:prstGeom prst="rect">
-            <a:avLst/>
-          </a:prstGeom>
-          <a:noFill/>
-          <a:ln/>
-        </p:spPr>
-        <p:txBody>
-          <a:bodyPr wrap="square" lIns="0" tIns="0" rIns="0" bIns="0" rtlCol="0" anchor="ctr"/>
-          <a:lstStyle/>
-          <a:p>
-            <a:pPr indent="0" marL="0">
-              <a:buNone/>
-            </a:pPr>
-            <a:r>
-              <a:rPr lang="en-US" sz="900" b="1" spc="160" kern="0" dirty="0">
-                <a:solidFill>
-                  <a:srgbClr val="111111"/>
-                </a:solidFill>
-                <a:latin typeface="Pretendard" pitchFamily="34" charset="0"/>
-                <a:ea typeface="Pretendard" pitchFamily="34" charset="-122"/>
-                <a:cs typeface="Pretendard" pitchFamily="34" charset="-120"/>
-              </a:rPr>
-              <a:t>예비조사 없음</a:t>
-            </a:r>
-            <a:endParaRPr lang="en-US" sz="900" dirty="0"/>
-          </a:p>
-        </p:txBody>
-      </p:sp>
-      <p:sp>
-        <p:nvSpPr>
-          <p:cNvPr id="26" name="Text 24"/>
-          <p:cNvSpPr/>
-          <p:nvPr/>
-        </p:nvSpPr>
-        <p:spPr>
-          <a:xfrm>
-            <a:off x="1042416" y="3858768"/>
-            <a:ext cx="4449928" cy="329184"/>
-          </a:xfrm>
-          <a:prstGeom prst="rect">
-            <a:avLst/>
-          </a:prstGeom>
-          <a:noFill/>
-          <a:ln/>
-        </p:spPr>
-        <p:txBody>
-          <a:bodyPr wrap="square" lIns="0" tIns="0" rIns="0" bIns="0" rtlCol="0" anchor="t"/>
-          <a:lstStyle/>
-          <a:p>
-            <a:pPr indent="0" marL="0">
-              <a:lnSpc>
-                <a:spcPct val="120000"/>
-              </a:lnSpc>
-              <a:buNone/>
-            </a:pPr>
-            <a:r>
-              <a:rPr lang="en-US" sz="1150" dirty="0">
-                <a:solidFill>
-                  <a:srgbClr val="1F1F1F"/>
-                </a:solidFill>
-                <a:latin typeface="Pretendard" pitchFamily="34" charset="0"/>
-                <a:ea typeface="Pretendard" pitchFamily="34" charset="-122"/>
-                <a:cs typeface="Pretendard" pitchFamily="34" charset="-120"/>
-              </a:rPr>
-              <a:t>(없음)</a:t>
-            </a:r>
-            <a:endParaRPr lang="en-US" sz="1150" dirty="0"/>
-          </a:p>
-        </p:txBody>
-      </p:sp>
-      <p:sp>
-        <p:nvSpPr>
-          <p:cNvPr id="27" name="Text 25"/>
-          <p:cNvSpPr/>
-          <p:nvPr/>
-        </p:nvSpPr>
-        <p:spPr>
-          <a:xfrm>
-            <a:off x="6699352" y="3621024"/>
-            <a:ext cx="2011680" cy="274320"/>
-          </a:xfrm>
-          <a:prstGeom prst="rect">
-            <a:avLst/>
-          </a:prstGeom>
-          <a:noFill/>
-          <a:ln/>
-        </p:spPr>
-        <p:txBody>
-          <a:bodyPr wrap="square" lIns="0" tIns="0" rIns="0" bIns="0" rtlCol="0" anchor="ctr"/>
-          <a:lstStyle/>
-          <a:p>
-            <a:pPr indent="0" marL="0">
-              <a:buNone/>
-            </a:pPr>
-            <a:r>
-              <a:rPr lang="en-US" sz="900" b="1" spc="160" kern="0" dirty="0">
-                <a:solidFill>
-                  <a:srgbClr val="9B9B9B"/>
-                </a:solidFill>
-                <a:latin typeface="Pretendard" pitchFamily="34" charset="0"/>
-                <a:ea typeface="Pretendard" pitchFamily="34" charset="-122"/>
-                <a:cs typeface="Pretendard" pitchFamily="34" charset="-120"/>
-              </a:rPr>
-              <a:t>예비조사 없음</a:t>
-            </a:r>
-            <a:endParaRPr lang="en-US" sz="900" dirty="0"/>
-          </a:p>
-        </p:txBody>
-      </p:sp>
-      <p:sp>
-        <p:nvSpPr>
-          <p:cNvPr id="28" name="Text 26"/>
-          <p:cNvSpPr/>
-          <p:nvPr/>
-        </p:nvSpPr>
-        <p:spPr>
-          <a:xfrm>
-            <a:off x="6699352" y="3858768"/>
-            <a:ext cx="4449928" cy="329184"/>
-          </a:xfrm>
-          <a:prstGeom prst="rect">
-            <a:avLst/>
-          </a:prstGeom>
-          <a:noFill/>
-          <a:ln/>
-        </p:spPr>
-        <p:txBody>
-          <a:bodyPr wrap="square" lIns="0" tIns="0" rIns="0" bIns="0" rtlCol="0" anchor="t"/>
-          <a:lstStyle/>
-          <a:p>
-            <a:pPr indent="0" marL="0">
-              <a:lnSpc>
-                <a:spcPct val="120000"/>
-              </a:lnSpc>
-              <a:buNone/>
-            </a:pPr>
-            <a:r>
-              <a:rPr lang="en-US" sz="1150" dirty="0">
-                <a:solidFill>
-                  <a:srgbClr val="6E6E6E"/>
-                </a:solidFill>
-                <a:latin typeface="Pretendard" pitchFamily="34" charset="0"/>
-                <a:ea typeface="Pretendard" pitchFamily="34" charset="-122"/>
-                <a:cs typeface="Pretendard" pitchFamily="34" charset="-120"/>
-              </a:rPr>
-              <a:t>먼저 5명에게 해 보고 사진 수와 질문을 고친다</a:t>
-            </a:r>
-            <a:endParaRPr lang="en-US" sz="1150" dirty="0"/>
-          </a:p>
-        </p:txBody>
-      </p:sp>
-      <p:sp>
-        <p:nvSpPr>
-          <p:cNvPr id="29" name="Shape 27"/>
-          <p:cNvSpPr/>
-          <p:nvPr/>
-        </p:nvSpPr>
-        <p:spPr>
-          <a:xfrm>
-            <a:off x="1042416" y="4151376"/>
+          <p:cNvPr id="31" name="Shape 29"/>
+          <p:cNvSpPr/>
+          <p:nvPr/>
+        </p:nvSpPr>
+        <p:spPr>
+          <a:xfrm>
+            <a:off x="6699352" y="4151376"/>
             <a:ext cx="4449928" cy="7315"/>
           </a:xfrm>
           <a:prstGeom prst="rect">
@@ -10220,14 +10345,243 @@
       </p:sp>
       <p:sp>
         <p:nvSpPr>
-          <p:cNvPr id="30" name="Shape 28"/>
-          <p:cNvSpPr/>
-          <p:nvPr/>
-        </p:nvSpPr>
-        <p:spPr>
-          <a:xfrm>
-            <a:off x="6699352" y="4151376"/>
-            <a:ext cx="4449928" cy="7315"/>
+          <p:cNvPr id="32" name="Text 30"/>
+          <p:cNvSpPr/>
+          <p:nvPr/>
+        </p:nvSpPr>
+        <p:spPr>
+          <a:xfrm>
+            <a:off x="1042416" y="4206240"/>
+            <a:ext cx="2011680" cy="274320"/>
+          </a:xfrm>
+          <a:prstGeom prst="rect">
+            <a:avLst/>
+          </a:prstGeom>
+          <a:noFill/>
+          <a:ln/>
+        </p:spPr>
+        <p:txBody>
+          <a:bodyPr wrap="square" lIns="0" tIns="0" rIns="0" bIns="0" rtlCol="0" anchor="ctr"/>
+          <a:lstStyle/>
+          <a:p>
+            <a:pPr indent="0" marL="0">
+              <a:buNone/>
+            </a:pPr>
+            <a:r>
+              <a:rPr lang="en-US" sz="900" b="1" spc="160" kern="0" dirty="0">
+                <a:solidFill>
+                  <a:srgbClr val="9B9B9B"/>
+                </a:solidFill>
+                <a:latin typeface="Pretendard" pitchFamily="34" charset="0"/>
+                <a:ea typeface="Pretendard" pitchFamily="34" charset="-122"/>
+                <a:cs typeface="Pretendard" pitchFamily="34" charset="-120"/>
+              </a:rPr>
+              <a:t>분석이 흐림</a:t>
+            </a:r>
+            <a:endParaRPr lang="en-US" sz="900" dirty="0"/>
+          </a:p>
+        </p:txBody>
+      </p:sp>
+      <p:sp>
+        <p:nvSpPr>
+          <p:cNvPr id="33" name="Text 31"/>
+          <p:cNvSpPr/>
+          <p:nvPr/>
+        </p:nvSpPr>
+        <p:spPr>
+          <a:xfrm>
+            <a:off x="1042416" y="4443984"/>
+            <a:ext cx="4449928" cy="329184"/>
+          </a:xfrm>
+          <a:prstGeom prst="rect">
+            <a:avLst/>
+          </a:prstGeom>
+          <a:noFill/>
+          <a:ln/>
+        </p:spPr>
+        <p:txBody>
+          <a:bodyPr wrap="square" lIns="0" tIns="0" rIns="0" bIns="0" rtlCol="0" anchor="t"/>
+          <a:lstStyle/>
+          <a:p>
+            <a:pPr indent="0" marL="0">
+              <a:lnSpc>
+                <a:spcPct val="120000"/>
+              </a:lnSpc>
+              <a:buNone/>
+            </a:pPr>
+            <a:r>
+              <a:rPr lang="en-US" sz="1150" dirty="0">
+                <a:solidFill>
+                  <a:srgbClr val="6E6E6E"/>
+                </a:solidFill>
+                <a:latin typeface="Pretendard" pitchFamily="34" charset="0"/>
+                <a:ea typeface="Pretendard" pitchFamily="34" charset="-122"/>
+                <a:cs typeface="Pretendard" pitchFamily="34" charset="-120"/>
+              </a:rPr>
+              <a:t>수집된 자료를 분석한다</a:t>
+            </a:r>
+            <a:endParaRPr lang="en-US" sz="1150" dirty="0"/>
+          </a:p>
+        </p:txBody>
+      </p:sp>
+      <p:sp>
+        <p:nvSpPr>
+          <p:cNvPr id="34" name="Text 32"/>
+          <p:cNvSpPr/>
+          <p:nvPr/>
+        </p:nvSpPr>
+        <p:spPr>
+          <a:xfrm>
+            <a:off x="6699352" y="4206240"/>
+            <a:ext cx="2011680" cy="274320"/>
+          </a:xfrm>
+          <a:prstGeom prst="rect">
+            <a:avLst/>
+          </a:prstGeom>
+          <a:noFill/>
+          <a:ln/>
+        </p:spPr>
+        <p:txBody>
+          <a:bodyPr wrap="square" lIns="0" tIns="0" rIns="0" bIns="0" rtlCol="0" anchor="ctr"/>
+          <a:lstStyle/>
+          <a:p>
+            <a:pPr indent="0" marL="0">
+              <a:buNone/>
+            </a:pPr>
+            <a:r>
+              <a:rPr lang="en-US" sz="900" b="1" spc="160" kern="0" dirty="0">
+                <a:solidFill>
+                  <a:srgbClr val="111111"/>
+                </a:solidFill>
+                <a:latin typeface="Pretendard" pitchFamily="34" charset="0"/>
+                <a:ea typeface="Pretendard" pitchFamily="34" charset="-122"/>
+                <a:cs typeface="Pretendard" pitchFamily="34" charset="-120"/>
+              </a:rPr>
+              <a:t>분석이 흐림</a:t>
+            </a:r>
+            <a:endParaRPr lang="en-US" sz="900" dirty="0"/>
+          </a:p>
+        </p:txBody>
+      </p:sp>
+      <p:sp>
+        <p:nvSpPr>
+          <p:cNvPr id="35" name="Text 33"/>
+          <p:cNvSpPr/>
+          <p:nvPr/>
+        </p:nvSpPr>
+        <p:spPr>
+          <a:xfrm>
+            <a:off x="6699352" y="4443984"/>
+            <a:ext cx="4449928" cy="329184"/>
+          </a:xfrm>
+          <a:prstGeom prst="rect">
+            <a:avLst/>
+          </a:prstGeom>
+          <a:noFill/>
+          <a:ln/>
+        </p:spPr>
+        <p:txBody>
+          <a:bodyPr wrap="square" lIns="0" tIns="0" rIns="0" bIns="0" rtlCol="0" anchor="t"/>
+          <a:lstStyle/>
+          <a:p>
+            <a:pPr indent="0" marL="0">
+              <a:lnSpc>
+                <a:spcPct val="120000"/>
+              </a:lnSpc>
+              <a:buNone/>
+            </a:pPr>
+            <a:r>
+              <a:rPr lang="en-US" sz="1150" b="1" dirty="0">
+                <a:solidFill>
+                  <a:srgbClr val="1F1F1F"/>
+                </a:solidFill>
+                <a:latin typeface="Pretendard" pitchFamily="34" charset="0"/>
+                <a:ea typeface="Pretendard" pitchFamily="34" charset="-122"/>
+                <a:cs typeface="Pretendard" pitchFamily="34" charset="-120"/>
+              </a:rPr>
+              <a:t>두 집단 평균 시간을 비교하고 틀린 답이 많은 사진을 본다</a:t>
+            </a:r>
+            <a:endParaRPr lang="en-US" sz="1150" dirty="0"/>
+          </a:p>
+        </p:txBody>
+      </p:sp>
+      <p:sp>
+        <p:nvSpPr>
+          <p:cNvPr id="36" name="Shape 34"/>
+          <p:cNvSpPr/>
+          <p:nvPr/>
+        </p:nvSpPr>
+        <p:spPr>
+          <a:xfrm>
+            <a:off x="640080" y="5010912"/>
+            <a:ext cx="10911535" cy="7315"/>
+          </a:xfrm>
+          <a:prstGeom prst="rect">
+            <a:avLst/>
+          </a:prstGeom>
+          <a:solidFill>
+            <a:srgbClr val="111111"/>
+          </a:solidFill>
+          <a:ln w="12700">
+            <a:solidFill>
+              <a:srgbClr val="111111"/>
+            </a:solidFill>
+            <a:prstDash val="solid"/>
+          </a:ln>
+        </p:spPr>
+      </p:sp>
+      <p:sp>
+        <p:nvSpPr>
+          <p:cNvPr id="37" name="Text 35"/>
+          <p:cNvSpPr/>
+          <p:nvPr/>
+        </p:nvSpPr>
+        <p:spPr>
+          <a:xfrm>
+            <a:off x="640080" y="5120640"/>
+            <a:ext cx="10911535" cy="402336"/>
+          </a:xfrm>
+          <a:prstGeom prst="rect">
+            <a:avLst/>
+          </a:prstGeom>
+          <a:noFill/>
+          <a:ln/>
+        </p:spPr>
+        <p:txBody>
+          <a:bodyPr wrap="square" lIns="0" tIns="0" rIns="0" bIns="0" rtlCol="0" anchor="t"/>
+          <a:lstStyle/>
+          <a:p>
+            <a:pPr indent="0" marL="0">
+              <a:lnSpc>
+                <a:spcPct val="120000"/>
+              </a:lnSpc>
+              <a:buNone/>
+            </a:pPr>
+            <a:r>
+              <a:rPr lang="en-US" sz="1300" b="1" dirty="0">
+                <a:solidFill>
+                  <a:srgbClr val="111111"/>
+                </a:solidFill>
+                <a:latin typeface="Pretendard" pitchFamily="34" charset="0"/>
+                <a:ea typeface="Pretendard" pitchFamily="34" charset="-122"/>
+                <a:cs typeface="Pretendard" pitchFamily="34" charset="-120"/>
+              </a:rPr>
+              <a:t>질적 연구도 같습니다 — '인터뷰한다'가 아니라 '열 명을 한 사람당 40분씩, 녹취를 세 번 읽어 반복되는 말을 묶는다'.</a:t>
+            </a:r>
+            <a:endParaRPr lang="en-US" sz="1300" dirty="0"/>
+          </a:p>
+        </p:txBody>
+      </p:sp>
+      <p:sp>
+        <p:nvSpPr>
+          <p:cNvPr id="38" name="Shape 36"/>
+          <p:cNvSpPr/>
+          <p:nvPr/>
+        </p:nvSpPr>
+        <p:spPr>
+          <a:xfrm>
+            <a:off x="640080" y="6291072"/>
+            <a:ext cx="10911535" cy="7315"/>
           </a:xfrm>
           <a:prstGeom prst="rect">
             <a:avLst/>
@@ -10245,261 +10599,7 @@
       </p:sp>
       <p:sp>
         <p:nvSpPr>
-          <p:cNvPr id="31" name="Text 29"/>
-          <p:cNvSpPr/>
-          <p:nvPr/>
-        </p:nvSpPr>
-        <p:spPr>
-          <a:xfrm>
-            <a:off x="1042416" y="4206240"/>
-            <a:ext cx="2011680" cy="274320"/>
-          </a:xfrm>
-          <a:prstGeom prst="rect">
-            <a:avLst/>
-          </a:prstGeom>
-          <a:noFill/>
-          <a:ln/>
-        </p:spPr>
-        <p:txBody>
-          <a:bodyPr wrap="square" lIns="0" tIns="0" rIns="0" bIns="0" rtlCol="0" anchor="ctr"/>
-          <a:lstStyle/>
-          <a:p>
-            <a:pPr indent="0" marL="0">
-              <a:buNone/>
-            </a:pPr>
-            <a:r>
-              <a:rPr lang="en-US" sz="900" b="1" spc="160" kern="0" dirty="0">
-                <a:solidFill>
-                  <a:srgbClr val="111111"/>
-                </a:solidFill>
-                <a:latin typeface="Pretendard" pitchFamily="34" charset="0"/>
-                <a:ea typeface="Pretendard" pitchFamily="34" charset="-122"/>
-                <a:cs typeface="Pretendard" pitchFamily="34" charset="-120"/>
-              </a:rPr>
-              <a:t>분석이 흐림</a:t>
-            </a:r>
-            <a:endParaRPr lang="en-US" sz="900" dirty="0"/>
-          </a:p>
-        </p:txBody>
-      </p:sp>
-      <p:sp>
-        <p:nvSpPr>
-          <p:cNvPr id="32" name="Text 30"/>
-          <p:cNvSpPr/>
-          <p:nvPr/>
-        </p:nvSpPr>
-        <p:spPr>
-          <a:xfrm>
-            <a:off x="1042416" y="4443984"/>
-            <a:ext cx="4449928" cy="329184"/>
-          </a:xfrm>
-          <a:prstGeom prst="rect">
-            <a:avLst/>
-          </a:prstGeom>
-          <a:noFill/>
-          <a:ln/>
-        </p:spPr>
-        <p:txBody>
-          <a:bodyPr wrap="square" lIns="0" tIns="0" rIns="0" bIns="0" rtlCol="0" anchor="t"/>
-          <a:lstStyle/>
-          <a:p>
-            <a:pPr indent="0" marL="0">
-              <a:lnSpc>
-                <a:spcPct val="120000"/>
-              </a:lnSpc>
-              <a:buNone/>
-            </a:pPr>
-            <a:r>
-              <a:rPr lang="en-US" sz="1150" dirty="0">
-                <a:solidFill>
-                  <a:srgbClr val="1F1F1F"/>
-                </a:solidFill>
-                <a:latin typeface="Pretendard" pitchFamily="34" charset="0"/>
-                <a:ea typeface="Pretendard" pitchFamily="34" charset="-122"/>
-                <a:cs typeface="Pretendard" pitchFamily="34" charset="-120"/>
-              </a:rPr>
-              <a:t>수집된 자료를 분석한다</a:t>
-            </a:r>
-            <a:endParaRPr lang="en-US" sz="1150" dirty="0"/>
-          </a:p>
-        </p:txBody>
-      </p:sp>
-      <p:sp>
-        <p:nvSpPr>
-          <p:cNvPr id="33" name="Text 31"/>
-          <p:cNvSpPr/>
-          <p:nvPr/>
-        </p:nvSpPr>
-        <p:spPr>
-          <a:xfrm>
-            <a:off x="6699352" y="4206240"/>
-            <a:ext cx="2011680" cy="274320"/>
-          </a:xfrm>
-          <a:prstGeom prst="rect">
-            <a:avLst/>
-          </a:prstGeom>
-          <a:noFill/>
-          <a:ln/>
-        </p:spPr>
-        <p:txBody>
-          <a:bodyPr wrap="square" lIns="0" tIns="0" rIns="0" bIns="0" rtlCol="0" anchor="ctr"/>
-          <a:lstStyle/>
-          <a:p>
-            <a:pPr indent="0" marL="0">
-              <a:buNone/>
-            </a:pPr>
-            <a:r>
-              <a:rPr lang="en-US" sz="900" b="1" spc="160" kern="0" dirty="0">
-                <a:solidFill>
-                  <a:srgbClr val="9B9B9B"/>
-                </a:solidFill>
-                <a:latin typeface="Pretendard" pitchFamily="34" charset="0"/>
-                <a:ea typeface="Pretendard" pitchFamily="34" charset="-122"/>
-                <a:cs typeface="Pretendard" pitchFamily="34" charset="-120"/>
-              </a:rPr>
-              <a:t>분석이 흐림</a:t>
-            </a:r>
-            <a:endParaRPr lang="en-US" sz="900" dirty="0"/>
-          </a:p>
-        </p:txBody>
-      </p:sp>
-      <p:sp>
-        <p:nvSpPr>
-          <p:cNvPr id="34" name="Text 32"/>
-          <p:cNvSpPr/>
-          <p:nvPr/>
-        </p:nvSpPr>
-        <p:spPr>
-          <a:xfrm>
-            <a:off x="6699352" y="4443984"/>
-            <a:ext cx="4449928" cy="329184"/>
-          </a:xfrm>
-          <a:prstGeom prst="rect">
-            <a:avLst/>
-          </a:prstGeom>
-          <a:noFill/>
-          <a:ln/>
-        </p:spPr>
-        <p:txBody>
-          <a:bodyPr wrap="square" lIns="0" tIns="0" rIns="0" bIns="0" rtlCol="0" anchor="t"/>
-          <a:lstStyle/>
-          <a:p>
-            <a:pPr indent="0" marL="0">
-              <a:lnSpc>
-                <a:spcPct val="120000"/>
-              </a:lnSpc>
-              <a:buNone/>
-            </a:pPr>
-            <a:r>
-              <a:rPr lang="en-US" sz="1150" dirty="0">
-                <a:solidFill>
-                  <a:srgbClr val="6E6E6E"/>
-                </a:solidFill>
-                <a:latin typeface="Pretendard" pitchFamily="34" charset="0"/>
-                <a:ea typeface="Pretendard" pitchFamily="34" charset="-122"/>
-                <a:cs typeface="Pretendard" pitchFamily="34" charset="-120"/>
-              </a:rPr>
-              <a:t>두 집단 평균 시간을 비교하고 틀린 답이 많은 사진을 본다</a:t>
-            </a:r>
-            <a:endParaRPr lang="en-US" sz="1150" dirty="0"/>
-          </a:p>
-        </p:txBody>
-      </p:sp>
-      <p:sp>
-        <p:nvSpPr>
-          <p:cNvPr id="35" name="Shape 33"/>
-          <p:cNvSpPr/>
-          <p:nvPr/>
-        </p:nvSpPr>
-        <p:spPr>
-          <a:xfrm>
-            <a:off x="640080" y="5010912"/>
-            <a:ext cx="10911535" cy="7315"/>
-          </a:xfrm>
-          <a:prstGeom prst="rect">
-            <a:avLst/>
-          </a:prstGeom>
-          <a:solidFill>
-            <a:srgbClr val="111111"/>
-          </a:solidFill>
-          <a:ln w="12700">
-            <a:solidFill>
-              <a:srgbClr val="111111"/>
-            </a:solidFill>
-            <a:prstDash val="solid"/>
-          </a:ln>
-        </p:spPr>
-      </p:sp>
-      <p:sp>
-        <p:nvSpPr>
-          <p:cNvPr id="36" name="Text 34"/>
-          <p:cNvSpPr/>
-          <p:nvPr/>
-        </p:nvSpPr>
-        <p:spPr>
-          <a:xfrm>
-            <a:off x="640080" y="5120640"/>
-            <a:ext cx="10911535" cy="402336"/>
-          </a:xfrm>
-          <a:prstGeom prst="rect">
-            <a:avLst/>
-          </a:prstGeom>
-          <a:noFill/>
-          <a:ln/>
-        </p:spPr>
-        <p:txBody>
-          <a:bodyPr wrap="square" lIns="0" tIns="0" rIns="0" bIns="0" rtlCol="0" anchor="t"/>
-          <a:lstStyle/>
-          <a:p>
-            <a:pPr indent="0" marL="0">
-              <a:lnSpc>
-                <a:spcPct val="120000"/>
-              </a:lnSpc>
-              <a:buNone/>
-            </a:pPr>
-            <a:r>
-              <a:rPr lang="en-US" sz="1300" b="1" dirty="0">
-                <a:solidFill>
-                  <a:srgbClr val="111111"/>
-                </a:solidFill>
-                <a:latin typeface="Pretendard" pitchFamily="34" charset="0"/>
-                <a:ea typeface="Pretendard" pitchFamily="34" charset="-122"/>
-                <a:cs typeface="Pretendard" pitchFamily="34" charset="-120"/>
-              </a:rPr>
-              <a:t>질적 연구도 같습니다 — '인터뷰한다'가 아니라 '열 명을 한 사람당 40분씩, 녹취를 세 번 읽어 반복되는 말을 묶는다'.</a:t>
-            </a:r>
-            <a:endParaRPr lang="en-US" sz="1300" dirty="0"/>
-          </a:p>
-        </p:txBody>
-      </p:sp>
-      <p:sp>
-        <p:nvSpPr>
-          <p:cNvPr id="37" name="Shape 35"/>
-          <p:cNvSpPr/>
-          <p:nvPr/>
-        </p:nvSpPr>
-        <p:spPr>
-          <a:xfrm>
-            <a:off x="640080" y="6291072"/>
-            <a:ext cx="10911535" cy="7315"/>
-          </a:xfrm>
-          <a:prstGeom prst="rect">
-            <a:avLst/>
-          </a:prstGeom>
-          <a:solidFill>
-            <a:srgbClr val="DCDCDC"/>
-          </a:solidFill>
-          <a:ln w="12700">
-            <a:solidFill>
-              <a:srgbClr val="DCDCDC"/>
-            </a:solidFill>
-            <a:prstDash val="solid"/>
-          </a:ln>
-        </p:spPr>
-      </p:sp>
-      <p:sp>
-        <p:nvSpPr>
-          <p:cNvPr id="38" name="Text 36"/>
+          <p:cNvPr id="39" name="Text 37"/>
           <p:cNvSpPr/>
           <p:nvPr/>
         </p:nvSpPr>
@@ -10538,7 +10638,7 @@
       </p:sp>
       <p:sp>
         <p:nvSpPr>
-          <p:cNvPr id="39" name="Text 37"/>
+          <p:cNvPr id="40" name="Text 38"/>
           <p:cNvSpPr/>
           <p:nvPr/>
         </p:nvSpPr>
@@ -20859,7 +20959,7 @@
             <a:r>
               <a:rPr lang="en-US" sz="1700" dirty="0">
                 <a:solidFill>
-                  <a:srgbClr val="111111"/>
+                  <a:srgbClr val="9B9B9B"/>
                 </a:solidFill>
                 <a:latin typeface="Pretendard SemiBold" pitchFamily="34" charset="0"/>
                 <a:ea typeface="Pretendard SemiBold" pitchFamily="34" charset="-122"/>
@@ -20887,6 +20987,257 @@
           </a:prstGeom>
           <a:solidFill>
             <a:srgbClr val="FFFFFF"/>
+          </a:solidFill>
+          <a:ln w="12700">
+            <a:solidFill>
+              <a:srgbClr val="111111"/>
+            </a:solidFill>
+            <a:prstDash val="solid"/>
+          </a:ln>
+        </p:spPr>
+      </p:sp>
+      <p:sp>
+        <p:nvSpPr>
+          <p:cNvPr id="12" name="Shape 10"/>
+          <p:cNvSpPr/>
+          <p:nvPr/>
+        </p:nvSpPr>
+        <p:spPr>
+          <a:xfrm>
+            <a:off x="6297016" y="1627632"/>
+            <a:ext cx="5254600" cy="64008"/>
+          </a:xfrm>
+          <a:prstGeom prst="rect">
+            <a:avLst/>
+          </a:prstGeom>
+          <a:solidFill>
+            <a:srgbClr val="111111"/>
+          </a:solidFill>
+          <a:ln w="12700">
+            <a:solidFill>
+              <a:srgbClr val="111111"/>
+            </a:solidFill>
+            <a:prstDash val="solid"/>
+          </a:ln>
+        </p:spPr>
+      </p:sp>
+      <p:sp>
+        <p:nvSpPr>
+          <p:cNvPr id="13" name="Text 11"/>
+          <p:cNvSpPr/>
+          <p:nvPr/>
+        </p:nvSpPr>
+        <p:spPr>
+          <a:xfrm>
+            <a:off x="6699352" y="1901952"/>
+            <a:ext cx="4449928" cy="365760"/>
+          </a:xfrm>
+          <a:prstGeom prst="rect">
+            <a:avLst/>
+          </a:prstGeom>
+          <a:noFill/>
+          <a:ln/>
+        </p:spPr>
+        <p:txBody>
+          <a:bodyPr wrap="square" lIns="0" tIns="0" rIns="0" bIns="0" rtlCol="0" anchor="ctr"/>
+          <a:lstStyle/>
+          <a:p>
+            <a:pPr indent="0" marL="0">
+              <a:buNone/>
+            </a:pPr>
+            <a:r>
+              <a:rPr lang="en-US" sz="1700" dirty="0">
+                <a:solidFill>
+                  <a:srgbClr val="111111"/>
+                </a:solidFill>
+                <a:latin typeface="Pretendard SemiBold" pitchFamily="34" charset="0"/>
+                <a:ea typeface="Pretendard SemiBold" pitchFamily="34" charset="-122"/>
+                <a:cs typeface="Pretendard SemiBold" pitchFamily="34" charset="-120"/>
+              </a:rPr>
+              <a:t>이렇게 씁니다</a:t>
+            </a:r>
+            <a:endParaRPr lang="en-US" sz="1700" dirty="0"/>
+          </a:p>
+        </p:txBody>
+      </p:sp>
+      <p:sp>
+        <p:nvSpPr>
+          <p:cNvPr id="14" name="Text 12"/>
+          <p:cNvSpPr/>
+          <p:nvPr/>
+        </p:nvSpPr>
+        <p:spPr>
+          <a:xfrm>
+            <a:off x="1042416" y="2450592"/>
+            <a:ext cx="2011680" cy="274320"/>
+          </a:xfrm>
+          <a:prstGeom prst="rect">
+            <a:avLst/>
+          </a:prstGeom>
+          <a:noFill/>
+          <a:ln/>
+        </p:spPr>
+        <p:txBody>
+          <a:bodyPr wrap="square" lIns="0" tIns="0" rIns="0" bIns="0" rtlCol="0" anchor="ctr"/>
+          <a:lstStyle/>
+          <a:p>
+            <a:pPr indent="0" marL="0">
+              <a:buNone/>
+            </a:pPr>
+            <a:r>
+              <a:rPr lang="en-US" sz="900" b="1" spc="160" kern="0" dirty="0">
+                <a:solidFill>
+                  <a:srgbClr val="9B9B9B"/>
+                </a:solidFill>
+                <a:latin typeface="Pretendard" pitchFamily="34" charset="0"/>
+                <a:ea typeface="Pretendard" pitchFamily="34" charset="-122"/>
+                <a:cs typeface="Pretendard" pitchFamily="34" charset="-120"/>
+              </a:rPr>
+              <a:t>너무 큰 문제</a:t>
+            </a:r>
+            <a:endParaRPr lang="en-US" sz="900" dirty="0"/>
+          </a:p>
+        </p:txBody>
+      </p:sp>
+      <p:sp>
+        <p:nvSpPr>
+          <p:cNvPr id="15" name="Text 13"/>
+          <p:cNvSpPr/>
+          <p:nvPr/>
+        </p:nvSpPr>
+        <p:spPr>
+          <a:xfrm>
+            <a:off x="1042416" y="2688336"/>
+            <a:ext cx="4449928" cy="329184"/>
+          </a:xfrm>
+          <a:prstGeom prst="rect">
+            <a:avLst/>
+          </a:prstGeom>
+          <a:noFill/>
+          <a:ln/>
+        </p:spPr>
+        <p:txBody>
+          <a:bodyPr wrap="square" lIns="0" tIns="0" rIns="0" bIns="0" rtlCol="0" anchor="t"/>
+          <a:lstStyle/>
+          <a:p>
+            <a:pPr indent="0" marL="0">
+              <a:lnSpc>
+                <a:spcPct val="120000"/>
+              </a:lnSpc>
+              <a:buNone/>
+            </a:pPr>
+            <a:r>
+              <a:rPr lang="en-US" sz="1150" dirty="0">
+                <a:solidFill>
+                  <a:srgbClr val="6E6E6E"/>
+                </a:solidFill>
+                <a:latin typeface="Pretendard" pitchFamily="34" charset="0"/>
+                <a:ea typeface="Pretendard" pitchFamily="34" charset="-122"/>
+                <a:cs typeface="Pretendard" pitchFamily="34" charset="-120"/>
+              </a:rPr>
+              <a:t>전통시장이 쇠퇴하고 있다</a:t>
+            </a:r>
+            <a:endParaRPr lang="en-US" sz="1150" dirty="0"/>
+          </a:p>
+        </p:txBody>
+      </p:sp>
+      <p:sp>
+        <p:nvSpPr>
+          <p:cNvPr id="16" name="Text 14"/>
+          <p:cNvSpPr/>
+          <p:nvPr/>
+        </p:nvSpPr>
+        <p:spPr>
+          <a:xfrm>
+            <a:off x="6699352" y="2450592"/>
+            <a:ext cx="2011680" cy="274320"/>
+          </a:xfrm>
+          <a:prstGeom prst="rect">
+            <a:avLst/>
+          </a:prstGeom>
+          <a:noFill/>
+          <a:ln/>
+        </p:spPr>
+        <p:txBody>
+          <a:bodyPr wrap="square" lIns="0" tIns="0" rIns="0" bIns="0" rtlCol="0" anchor="ctr"/>
+          <a:lstStyle/>
+          <a:p>
+            <a:pPr indent="0" marL="0">
+              <a:buNone/>
+            </a:pPr>
+            <a:r>
+              <a:rPr lang="en-US" sz="900" b="1" spc="160" kern="0" dirty="0">
+                <a:solidFill>
+                  <a:srgbClr val="111111"/>
+                </a:solidFill>
+                <a:latin typeface="Pretendard" pitchFamily="34" charset="0"/>
+                <a:ea typeface="Pretendard" pitchFamily="34" charset="-122"/>
+                <a:cs typeface="Pretendard" pitchFamily="34" charset="-120"/>
+              </a:rPr>
+              <a:t>너무 큰 문제</a:t>
+            </a:r>
+            <a:endParaRPr lang="en-US" sz="900" dirty="0"/>
+          </a:p>
+        </p:txBody>
+      </p:sp>
+      <p:sp>
+        <p:nvSpPr>
+          <p:cNvPr id="17" name="Text 15"/>
+          <p:cNvSpPr/>
+          <p:nvPr/>
+        </p:nvSpPr>
+        <p:spPr>
+          <a:xfrm>
+            <a:off x="6699352" y="2688336"/>
+            <a:ext cx="4449928" cy="329184"/>
+          </a:xfrm>
+          <a:prstGeom prst="rect">
+            <a:avLst/>
+          </a:prstGeom>
+          <a:noFill/>
+          <a:ln/>
+        </p:spPr>
+        <p:txBody>
+          <a:bodyPr wrap="square" lIns="0" tIns="0" rIns="0" bIns="0" rtlCol="0" anchor="t"/>
+          <a:lstStyle/>
+          <a:p>
+            <a:pPr indent="0" marL="0">
+              <a:lnSpc>
+                <a:spcPct val="120000"/>
+              </a:lnSpc>
+              <a:buNone/>
+            </a:pPr>
+            <a:r>
+              <a:rPr lang="en-US" sz="1150" b="1" dirty="0">
+                <a:solidFill>
+                  <a:srgbClr val="1F1F1F"/>
+                </a:solidFill>
+                <a:latin typeface="Pretendard" pitchFamily="34" charset="0"/>
+                <a:ea typeface="Pretendard" pitchFamily="34" charset="-122"/>
+                <a:cs typeface="Pretendard" pitchFamily="34" charset="-120"/>
+              </a:rPr>
+              <a:t>방문객이 원하는 가게를 못 찾고 되돌아 나온다</a:t>
+            </a:r>
+            <a:endParaRPr lang="en-US" sz="1150" dirty="0"/>
+          </a:p>
+        </p:txBody>
+      </p:sp>
+      <p:sp>
+        <p:nvSpPr>
+          <p:cNvPr id="18" name="Shape 16"/>
+          <p:cNvSpPr/>
+          <p:nvPr/>
+        </p:nvSpPr>
+        <p:spPr>
+          <a:xfrm>
+            <a:off x="1042416" y="2980944"/>
+            <a:ext cx="4449928" cy="7315"/>
+          </a:xfrm>
+          <a:prstGeom prst="rect">
+            <a:avLst/>
+          </a:prstGeom>
+          <a:solidFill>
+            <a:srgbClr val="DCDCDC"/>
           </a:solidFill>
           <a:ln w="12700">
             <a:solidFill>
@@ -20898,214 +21249,13 @@
       </p:sp>
       <p:sp>
         <p:nvSpPr>
-          <p:cNvPr id="12" name="Text 10"/>
-          <p:cNvSpPr/>
-          <p:nvPr/>
-        </p:nvSpPr>
-        <p:spPr>
-          <a:xfrm>
-            <a:off x="6699352" y="1901952"/>
-            <a:ext cx="4449928" cy="365760"/>
-          </a:xfrm>
-          <a:prstGeom prst="rect">
-            <a:avLst/>
-          </a:prstGeom>
-          <a:noFill/>
-          <a:ln/>
-        </p:spPr>
-        <p:txBody>
-          <a:bodyPr wrap="square" lIns="0" tIns="0" rIns="0" bIns="0" rtlCol="0" anchor="ctr"/>
-          <a:lstStyle/>
-          <a:p>
-            <a:pPr indent="0" marL="0">
-              <a:buNone/>
-            </a:pPr>
-            <a:r>
-              <a:rPr lang="en-US" sz="1700" dirty="0">
-                <a:solidFill>
-                  <a:srgbClr val="9B9B9B"/>
-                </a:solidFill>
-                <a:latin typeface="Pretendard SemiBold" pitchFamily="34" charset="0"/>
-                <a:ea typeface="Pretendard SemiBold" pitchFamily="34" charset="-122"/>
-                <a:cs typeface="Pretendard SemiBold" pitchFamily="34" charset="-120"/>
-              </a:rPr>
-              <a:t>이렇게 씁니다</a:t>
-            </a:r>
-            <a:endParaRPr lang="en-US" sz="1700" dirty="0"/>
-          </a:p>
-        </p:txBody>
-      </p:sp>
-      <p:sp>
-        <p:nvSpPr>
-          <p:cNvPr id="13" name="Text 11"/>
-          <p:cNvSpPr/>
-          <p:nvPr/>
-        </p:nvSpPr>
-        <p:spPr>
-          <a:xfrm>
-            <a:off x="1042416" y="2450592"/>
-            <a:ext cx="2011680" cy="274320"/>
-          </a:xfrm>
-          <a:prstGeom prst="rect">
-            <a:avLst/>
-          </a:prstGeom>
-          <a:noFill/>
-          <a:ln/>
-        </p:spPr>
-        <p:txBody>
-          <a:bodyPr wrap="square" lIns="0" tIns="0" rIns="0" bIns="0" rtlCol="0" anchor="ctr"/>
-          <a:lstStyle/>
-          <a:p>
-            <a:pPr indent="0" marL="0">
-              <a:buNone/>
-            </a:pPr>
-            <a:r>
-              <a:rPr lang="en-US" sz="900" b="1" spc="160" kern="0" dirty="0">
-                <a:solidFill>
-                  <a:srgbClr val="111111"/>
-                </a:solidFill>
-                <a:latin typeface="Pretendard" pitchFamily="34" charset="0"/>
-                <a:ea typeface="Pretendard" pitchFamily="34" charset="-122"/>
-                <a:cs typeface="Pretendard" pitchFamily="34" charset="-120"/>
-              </a:rPr>
-              <a:t>너무 큰 문제</a:t>
-            </a:r>
-            <a:endParaRPr lang="en-US" sz="900" dirty="0"/>
-          </a:p>
-        </p:txBody>
-      </p:sp>
-      <p:sp>
-        <p:nvSpPr>
-          <p:cNvPr id="14" name="Text 12"/>
-          <p:cNvSpPr/>
-          <p:nvPr/>
-        </p:nvSpPr>
-        <p:spPr>
-          <a:xfrm>
-            <a:off x="1042416" y="2688336"/>
-            <a:ext cx="4449928" cy="329184"/>
-          </a:xfrm>
-          <a:prstGeom prst="rect">
-            <a:avLst/>
-          </a:prstGeom>
-          <a:noFill/>
-          <a:ln/>
-        </p:spPr>
-        <p:txBody>
-          <a:bodyPr wrap="square" lIns="0" tIns="0" rIns="0" bIns="0" rtlCol="0" anchor="t"/>
-          <a:lstStyle/>
-          <a:p>
-            <a:pPr indent="0" marL="0">
-              <a:lnSpc>
-                <a:spcPct val="120000"/>
-              </a:lnSpc>
-              <a:buNone/>
-            </a:pPr>
-            <a:r>
-              <a:rPr lang="en-US" sz="1150" dirty="0">
-                <a:solidFill>
-                  <a:srgbClr val="1F1F1F"/>
-                </a:solidFill>
-                <a:latin typeface="Pretendard" pitchFamily="34" charset="0"/>
-                <a:ea typeface="Pretendard" pitchFamily="34" charset="-122"/>
-                <a:cs typeface="Pretendard" pitchFamily="34" charset="-120"/>
-              </a:rPr>
-              <a:t>전통시장이 쇠퇴하고 있다</a:t>
-            </a:r>
-            <a:endParaRPr lang="en-US" sz="1150" dirty="0"/>
-          </a:p>
-        </p:txBody>
-      </p:sp>
-      <p:sp>
-        <p:nvSpPr>
-          <p:cNvPr id="15" name="Text 13"/>
-          <p:cNvSpPr/>
-          <p:nvPr/>
-        </p:nvSpPr>
-        <p:spPr>
-          <a:xfrm>
-            <a:off x="6699352" y="2450592"/>
-            <a:ext cx="2011680" cy="274320"/>
-          </a:xfrm>
-          <a:prstGeom prst="rect">
-            <a:avLst/>
-          </a:prstGeom>
-          <a:noFill/>
-          <a:ln/>
-        </p:spPr>
-        <p:txBody>
-          <a:bodyPr wrap="square" lIns="0" tIns="0" rIns="0" bIns="0" rtlCol="0" anchor="ctr"/>
-          <a:lstStyle/>
-          <a:p>
-            <a:pPr indent="0" marL="0">
-              <a:buNone/>
-            </a:pPr>
-            <a:r>
-              <a:rPr lang="en-US" sz="900" b="1" spc="160" kern="0" dirty="0">
-                <a:solidFill>
-                  <a:srgbClr val="9B9B9B"/>
-                </a:solidFill>
-                <a:latin typeface="Pretendard" pitchFamily="34" charset="0"/>
-                <a:ea typeface="Pretendard" pitchFamily="34" charset="-122"/>
-                <a:cs typeface="Pretendard" pitchFamily="34" charset="-120"/>
-              </a:rPr>
-              <a:t>너무 큰 문제</a:t>
-            </a:r>
-            <a:endParaRPr lang="en-US" sz="900" dirty="0"/>
-          </a:p>
-        </p:txBody>
-      </p:sp>
-      <p:sp>
-        <p:nvSpPr>
-          <p:cNvPr id="16" name="Text 14"/>
-          <p:cNvSpPr/>
-          <p:nvPr/>
-        </p:nvSpPr>
-        <p:spPr>
-          <a:xfrm>
-            <a:off x="6699352" y="2688336"/>
-            <a:ext cx="4449928" cy="329184"/>
-          </a:xfrm>
-          <a:prstGeom prst="rect">
-            <a:avLst/>
-          </a:prstGeom>
-          <a:noFill/>
-          <a:ln/>
-        </p:spPr>
-        <p:txBody>
-          <a:bodyPr wrap="square" lIns="0" tIns="0" rIns="0" bIns="0" rtlCol="0" anchor="t"/>
-          <a:lstStyle/>
-          <a:p>
-            <a:pPr indent="0" marL="0">
-              <a:lnSpc>
-                <a:spcPct val="120000"/>
-              </a:lnSpc>
-              <a:buNone/>
-            </a:pPr>
-            <a:r>
-              <a:rPr lang="en-US" sz="1150" dirty="0">
-                <a:solidFill>
-                  <a:srgbClr val="6E6E6E"/>
-                </a:solidFill>
-                <a:latin typeface="Pretendard" pitchFamily="34" charset="0"/>
-                <a:ea typeface="Pretendard" pitchFamily="34" charset="-122"/>
-                <a:cs typeface="Pretendard" pitchFamily="34" charset="-120"/>
-              </a:rPr>
-              <a:t>방문객이 원하는 가게를 못 찾고 되돌아 나온다</a:t>
-            </a:r>
-            <a:endParaRPr lang="en-US" sz="1150" dirty="0"/>
-          </a:p>
-        </p:txBody>
-      </p:sp>
-      <p:sp>
-        <p:nvSpPr>
-          <p:cNvPr id="17" name="Shape 15"/>
-          <p:cNvSpPr/>
-          <p:nvPr/>
-        </p:nvSpPr>
-        <p:spPr>
-          <a:xfrm>
-            <a:off x="1042416" y="2980944"/>
+          <p:cNvPr id="19" name="Shape 17"/>
+          <p:cNvSpPr/>
+          <p:nvPr/>
+        </p:nvSpPr>
+        <p:spPr>
+          <a:xfrm>
+            <a:off x="6699352" y="2980944"/>
             <a:ext cx="4449928" cy="7315"/>
           </a:xfrm>
           <a:prstGeom prst="rect">
@@ -21124,13 +21274,175 @@
       </p:sp>
       <p:sp>
         <p:nvSpPr>
-          <p:cNvPr id="18" name="Shape 16"/>
-          <p:cNvSpPr/>
-          <p:nvPr/>
-        </p:nvSpPr>
-        <p:spPr>
-          <a:xfrm>
-            <a:off x="6699352" y="2980944"/>
+          <p:cNvPr id="20" name="Text 18"/>
+          <p:cNvSpPr/>
+          <p:nvPr/>
+        </p:nvSpPr>
+        <p:spPr>
+          <a:xfrm>
+            <a:off x="1042416" y="3035808"/>
+            <a:ext cx="2011680" cy="274320"/>
+          </a:xfrm>
+          <a:prstGeom prst="rect">
+            <a:avLst/>
+          </a:prstGeom>
+          <a:noFill/>
+          <a:ln/>
+        </p:spPr>
+        <p:txBody>
+          <a:bodyPr wrap="square" lIns="0" tIns="0" rIns="0" bIns="0" rtlCol="0" anchor="ctr"/>
+          <a:lstStyle/>
+          <a:p>
+            <a:pPr indent="0" marL="0">
+              <a:buNone/>
+            </a:pPr>
+            <a:r>
+              <a:rPr lang="en-US" sz="900" b="1" spc="160" kern="0" dirty="0">
+                <a:solidFill>
+                  <a:srgbClr val="9B9B9B"/>
+                </a:solidFill>
+                <a:latin typeface="Pretendard" pitchFamily="34" charset="0"/>
+                <a:ea typeface="Pretendard" pitchFamily="34" charset="-122"/>
+                <a:cs typeface="Pretendard" pitchFamily="34" charset="-120"/>
+              </a:rPr>
+              <a:t>막연한 필요</a:t>
+            </a:r>
+            <a:endParaRPr lang="en-US" sz="900" dirty="0"/>
+          </a:p>
+        </p:txBody>
+      </p:sp>
+      <p:sp>
+        <p:nvSpPr>
+          <p:cNvPr id="21" name="Text 19"/>
+          <p:cNvSpPr/>
+          <p:nvPr/>
+        </p:nvSpPr>
+        <p:spPr>
+          <a:xfrm>
+            <a:off x="1042416" y="3273552"/>
+            <a:ext cx="4449928" cy="329184"/>
+          </a:xfrm>
+          <a:prstGeom prst="rect">
+            <a:avLst/>
+          </a:prstGeom>
+          <a:noFill/>
+          <a:ln/>
+        </p:spPr>
+        <p:txBody>
+          <a:bodyPr wrap="square" lIns="0" tIns="0" rIns="0" bIns="0" rtlCol="0" anchor="t"/>
+          <a:lstStyle/>
+          <a:p>
+            <a:pPr indent="0" marL="0">
+              <a:lnSpc>
+                <a:spcPct val="120000"/>
+              </a:lnSpc>
+              <a:buNone/>
+            </a:pPr>
+            <a:r>
+              <a:rPr lang="en-US" sz="1150" dirty="0">
+                <a:solidFill>
+                  <a:srgbClr val="6E6E6E"/>
+                </a:solidFill>
+                <a:latin typeface="Pretendard" pitchFamily="34" charset="0"/>
+                <a:ea typeface="Pretendard" pitchFamily="34" charset="-122"/>
+                <a:cs typeface="Pretendard" pitchFamily="34" charset="-120"/>
+              </a:rPr>
+              <a:t>디자인이 필요하다</a:t>
+            </a:r>
+            <a:endParaRPr lang="en-US" sz="1150" dirty="0"/>
+          </a:p>
+        </p:txBody>
+      </p:sp>
+      <p:sp>
+        <p:nvSpPr>
+          <p:cNvPr id="22" name="Text 20"/>
+          <p:cNvSpPr/>
+          <p:nvPr/>
+        </p:nvSpPr>
+        <p:spPr>
+          <a:xfrm>
+            <a:off x="6699352" y="3035808"/>
+            <a:ext cx="2011680" cy="274320"/>
+          </a:xfrm>
+          <a:prstGeom prst="rect">
+            <a:avLst/>
+          </a:prstGeom>
+          <a:noFill/>
+          <a:ln/>
+        </p:spPr>
+        <p:txBody>
+          <a:bodyPr wrap="square" lIns="0" tIns="0" rIns="0" bIns="0" rtlCol="0" anchor="ctr"/>
+          <a:lstStyle/>
+          <a:p>
+            <a:pPr indent="0" marL="0">
+              <a:buNone/>
+            </a:pPr>
+            <a:r>
+              <a:rPr lang="en-US" sz="900" b="1" spc="160" kern="0" dirty="0">
+                <a:solidFill>
+                  <a:srgbClr val="111111"/>
+                </a:solidFill>
+                <a:latin typeface="Pretendard" pitchFamily="34" charset="0"/>
+                <a:ea typeface="Pretendard" pitchFamily="34" charset="-122"/>
+                <a:cs typeface="Pretendard" pitchFamily="34" charset="-120"/>
+              </a:rPr>
+              <a:t>막연한 필요</a:t>
+            </a:r>
+            <a:endParaRPr lang="en-US" sz="900" dirty="0"/>
+          </a:p>
+        </p:txBody>
+      </p:sp>
+      <p:sp>
+        <p:nvSpPr>
+          <p:cNvPr id="23" name="Text 21"/>
+          <p:cNvSpPr/>
+          <p:nvPr/>
+        </p:nvSpPr>
+        <p:spPr>
+          <a:xfrm>
+            <a:off x="6699352" y="3273552"/>
+            <a:ext cx="4449928" cy="329184"/>
+          </a:xfrm>
+          <a:prstGeom prst="rect">
+            <a:avLst/>
+          </a:prstGeom>
+          <a:noFill/>
+          <a:ln/>
+        </p:spPr>
+        <p:txBody>
+          <a:bodyPr wrap="square" lIns="0" tIns="0" rIns="0" bIns="0" rtlCol="0" anchor="t"/>
+          <a:lstStyle/>
+          <a:p>
+            <a:pPr indent="0" marL="0">
+              <a:lnSpc>
+                <a:spcPct val="120000"/>
+              </a:lnSpc>
+              <a:buNone/>
+            </a:pPr>
+            <a:r>
+              <a:rPr lang="en-US" sz="1150" b="1" dirty="0">
+                <a:solidFill>
+                  <a:srgbClr val="1F1F1F"/>
+                </a:solidFill>
+                <a:latin typeface="Pretendard" pitchFamily="34" charset="0"/>
+                <a:ea typeface="Pretendard" pitchFamily="34" charset="-122"/>
+                <a:cs typeface="Pretendard" pitchFamily="34" charset="-120"/>
+              </a:rPr>
+              <a:t>간판 크기와 글자가 제각각이라 멀리서 업종이 구별되지 않는다</a:t>
+            </a:r>
+            <a:endParaRPr lang="en-US" sz="1150" dirty="0"/>
+          </a:p>
+        </p:txBody>
+      </p:sp>
+      <p:sp>
+        <p:nvSpPr>
+          <p:cNvPr id="24" name="Shape 22"/>
+          <p:cNvSpPr/>
+          <p:nvPr/>
+        </p:nvSpPr>
+        <p:spPr>
+          <a:xfrm>
+            <a:off x="1042416" y="3566160"/>
             <a:ext cx="4449928" cy="7315"/>
           </a:xfrm>
           <a:prstGeom prst="rect">
@@ -21149,175 +21461,13 @@
       </p:sp>
       <p:sp>
         <p:nvSpPr>
-          <p:cNvPr id="19" name="Text 17"/>
-          <p:cNvSpPr/>
-          <p:nvPr/>
-        </p:nvSpPr>
-        <p:spPr>
-          <a:xfrm>
-            <a:off x="1042416" y="3035808"/>
-            <a:ext cx="2011680" cy="274320"/>
-          </a:xfrm>
-          <a:prstGeom prst="rect">
-            <a:avLst/>
-          </a:prstGeom>
-          <a:noFill/>
-          <a:ln/>
-        </p:spPr>
-        <p:txBody>
-          <a:bodyPr wrap="square" lIns="0" tIns="0" rIns="0" bIns="0" rtlCol="0" anchor="ctr"/>
-          <a:lstStyle/>
-          <a:p>
-            <a:pPr indent="0" marL="0">
-              <a:buNone/>
-            </a:pPr>
-            <a:r>
-              <a:rPr lang="en-US" sz="900" b="1" spc="160" kern="0" dirty="0">
-                <a:solidFill>
-                  <a:srgbClr val="111111"/>
-                </a:solidFill>
-                <a:latin typeface="Pretendard" pitchFamily="34" charset="0"/>
-                <a:ea typeface="Pretendard" pitchFamily="34" charset="-122"/>
-                <a:cs typeface="Pretendard" pitchFamily="34" charset="-120"/>
-              </a:rPr>
-              <a:t>막연한 필요</a:t>
-            </a:r>
-            <a:endParaRPr lang="en-US" sz="900" dirty="0"/>
-          </a:p>
-        </p:txBody>
-      </p:sp>
-      <p:sp>
-        <p:nvSpPr>
-          <p:cNvPr id="20" name="Text 18"/>
-          <p:cNvSpPr/>
-          <p:nvPr/>
-        </p:nvSpPr>
-        <p:spPr>
-          <a:xfrm>
-            <a:off x="1042416" y="3273552"/>
-            <a:ext cx="4449928" cy="329184"/>
-          </a:xfrm>
-          <a:prstGeom prst="rect">
-            <a:avLst/>
-          </a:prstGeom>
-          <a:noFill/>
-          <a:ln/>
-        </p:spPr>
-        <p:txBody>
-          <a:bodyPr wrap="square" lIns="0" tIns="0" rIns="0" bIns="0" rtlCol="0" anchor="t"/>
-          <a:lstStyle/>
-          <a:p>
-            <a:pPr indent="0" marL="0">
-              <a:lnSpc>
-                <a:spcPct val="120000"/>
-              </a:lnSpc>
-              <a:buNone/>
-            </a:pPr>
-            <a:r>
-              <a:rPr lang="en-US" sz="1150" dirty="0">
-                <a:solidFill>
-                  <a:srgbClr val="1F1F1F"/>
-                </a:solidFill>
-                <a:latin typeface="Pretendard" pitchFamily="34" charset="0"/>
-                <a:ea typeface="Pretendard" pitchFamily="34" charset="-122"/>
-                <a:cs typeface="Pretendard" pitchFamily="34" charset="-120"/>
-              </a:rPr>
-              <a:t>디자인이 필요하다</a:t>
-            </a:r>
-            <a:endParaRPr lang="en-US" sz="1150" dirty="0"/>
-          </a:p>
-        </p:txBody>
-      </p:sp>
-      <p:sp>
-        <p:nvSpPr>
-          <p:cNvPr id="21" name="Text 19"/>
-          <p:cNvSpPr/>
-          <p:nvPr/>
-        </p:nvSpPr>
-        <p:spPr>
-          <a:xfrm>
-            <a:off x="6699352" y="3035808"/>
-            <a:ext cx="2011680" cy="274320"/>
-          </a:xfrm>
-          <a:prstGeom prst="rect">
-            <a:avLst/>
-          </a:prstGeom>
-          <a:noFill/>
-          <a:ln/>
-        </p:spPr>
-        <p:txBody>
-          <a:bodyPr wrap="square" lIns="0" tIns="0" rIns="0" bIns="0" rtlCol="0" anchor="ctr"/>
-          <a:lstStyle/>
-          <a:p>
-            <a:pPr indent="0" marL="0">
-              <a:buNone/>
-            </a:pPr>
-            <a:r>
-              <a:rPr lang="en-US" sz="900" b="1" spc="160" kern="0" dirty="0">
-                <a:solidFill>
-                  <a:srgbClr val="9B9B9B"/>
-                </a:solidFill>
-                <a:latin typeface="Pretendard" pitchFamily="34" charset="0"/>
-                <a:ea typeface="Pretendard" pitchFamily="34" charset="-122"/>
-                <a:cs typeface="Pretendard" pitchFamily="34" charset="-120"/>
-              </a:rPr>
-              <a:t>막연한 필요</a:t>
-            </a:r>
-            <a:endParaRPr lang="en-US" sz="900" dirty="0"/>
-          </a:p>
-        </p:txBody>
-      </p:sp>
-      <p:sp>
-        <p:nvSpPr>
-          <p:cNvPr id="22" name="Text 20"/>
-          <p:cNvSpPr/>
-          <p:nvPr/>
-        </p:nvSpPr>
-        <p:spPr>
-          <a:xfrm>
-            <a:off x="6699352" y="3273552"/>
-            <a:ext cx="4449928" cy="329184"/>
-          </a:xfrm>
-          <a:prstGeom prst="rect">
-            <a:avLst/>
-          </a:prstGeom>
-          <a:noFill/>
-          <a:ln/>
-        </p:spPr>
-        <p:txBody>
-          <a:bodyPr wrap="square" lIns="0" tIns="0" rIns="0" bIns="0" rtlCol="0" anchor="t"/>
-          <a:lstStyle/>
-          <a:p>
-            <a:pPr indent="0" marL="0">
-              <a:lnSpc>
-                <a:spcPct val="120000"/>
-              </a:lnSpc>
-              <a:buNone/>
-            </a:pPr>
-            <a:r>
-              <a:rPr lang="en-US" sz="1150" dirty="0">
-                <a:solidFill>
-                  <a:srgbClr val="6E6E6E"/>
-                </a:solidFill>
-                <a:latin typeface="Pretendard" pitchFamily="34" charset="0"/>
-                <a:ea typeface="Pretendard" pitchFamily="34" charset="-122"/>
-                <a:cs typeface="Pretendard" pitchFamily="34" charset="-120"/>
-              </a:rPr>
-              <a:t>간판 크기와 글자가 제각각이라 멀리서 업종이 구별되지 않는다</a:t>
-            </a:r>
-            <a:endParaRPr lang="en-US" sz="1150" dirty="0"/>
-          </a:p>
-        </p:txBody>
-      </p:sp>
-      <p:sp>
-        <p:nvSpPr>
-          <p:cNvPr id="23" name="Shape 21"/>
-          <p:cNvSpPr/>
-          <p:nvPr/>
-        </p:nvSpPr>
-        <p:spPr>
-          <a:xfrm>
-            <a:off x="1042416" y="3566160"/>
+          <p:cNvPr id="25" name="Shape 23"/>
+          <p:cNvSpPr/>
+          <p:nvPr/>
+        </p:nvSpPr>
+        <p:spPr>
+          <a:xfrm>
+            <a:off x="6699352" y="3566160"/>
             <a:ext cx="4449928" cy="7315"/>
           </a:xfrm>
           <a:prstGeom prst="rect">
@@ -21336,13 +21486,175 @@
       </p:sp>
       <p:sp>
         <p:nvSpPr>
-          <p:cNvPr id="24" name="Shape 22"/>
-          <p:cNvSpPr/>
-          <p:nvPr/>
-        </p:nvSpPr>
-        <p:spPr>
-          <a:xfrm>
-            <a:off x="6699352" y="3566160"/>
+          <p:cNvPr id="26" name="Text 24"/>
+          <p:cNvSpPr/>
+          <p:nvPr/>
+        </p:nvSpPr>
+        <p:spPr>
+          <a:xfrm>
+            <a:off x="1042416" y="3621024"/>
+            <a:ext cx="2011680" cy="274320"/>
+          </a:xfrm>
+          <a:prstGeom prst="rect">
+            <a:avLst/>
+          </a:prstGeom>
+          <a:noFill/>
+          <a:ln/>
+        </p:spPr>
+        <p:txBody>
+          <a:bodyPr wrap="square" lIns="0" tIns="0" rIns="0" bIns="0" rtlCol="0" anchor="ctr"/>
+          <a:lstStyle/>
+          <a:p>
+            <a:pPr indent="0" marL="0">
+              <a:buNone/>
+            </a:pPr>
+            <a:r>
+              <a:rPr lang="en-US" sz="900" b="1" spc="160" kern="0" dirty="0">
+                <a:solidFill>
+                  <a:srgbClr val="9B9B9B"/>
+                </a:solidFill>
+                <a:latin typeface="Pretendard" pitchFamily="34" charset="0"/>
+                <a:ea typeface="Pretendard" pitchFamily="34" charset="-122"/>
+                <a:cs typeface="Pretendard" pitchFamily="34" charset="-120"/>
+              </a:rPr>
+              <a:t>내 관심</a:t>
+            </a:r>
+            <a:endParaRPr lang="en-US" sz="900" dirty="0"/>
+          </a:p>
+        </p:txBody>
+      </p:sp>
+      <p:sp>
+        <p:nvSpPr>
+          <p:cNvPr id="27" name="Text 25"/>
+          <p:cNvSpPr/>
+          <p:nvPr/>
+        </p:nvSpPr>
+        <p:spPr>
+          <a:xfrm>
+            <a:off x="1042416" y="3858768"/>
+            <a:ext cx="4449928" cy="329184"/>
+          </a:xfrm>
+          <a:prstGeom prst="rect">
+            <a:avLst/>
+          </a:prstGeom>
+          <a:noFill/>
+          <a:ln/>
+        </p:spPr>
+        <p:txBody>
+          <a:bodyPr wrap="square" lIns="0" tIns="0" rIns="0" bIns="0" rtlCol="0" anchor="t"/>
+          <a:lstStyle/>
+          <a:p>
+            <a:pPr indent="0" marL="0">
+              <a:lnSpc>
+                <a:spcPct val="120000"/>
+              </a:lnSpc>
+              <a:buNone/>
+            </a:pPr>
+            <a:r>
+              <a:rPr lang="en-US" sz="1150" dirty="0">
+                <a:solidFill>
+                  <a:srgbClr val="6E6E6E"/>
+                </a:solidFill>
+                <a:latin typeface="Pretendard" pitchFamily="34" charset="0"/>
+                <a:ea typeface="Pretendard" pitchFamily="34" charset="-122"/>
+                <a:cs typeface="Pretendard" pitchFamily="34" charset="-120"/>
+              </a:rPr>
+              <a:t>본 연구자는 이 주제에 관심이 있다</a:t>
+            </a:r>
+            <a:endParaRPr lang="en-US" sz="1150" dirty="0"/>
+          </a:p>
+        </p:txBody>
+      </p:sp>
+      <p:sp>
+        <p:nvSpPr>
+          <p:cNvPr id="28" name="Text 26"/>
+          <p:cNvSpPr/>
+          <p:nvPr/>
+        </p:nvSpPr>
+        <p:spPr>
+          <a:xfrm>
+            <a:off x="6699352" y="3621024"/>
+            <a:ext cx="2011680" cy="274320"/>
+          </a:xfrm>
+          <a:prstGeom prst="rect">
+            <a:avLst/>
+          </a:prstGeom>
+          <a:noFill/>
+          <a:ln/>
+        </p:spPr>
+        <p:txBody>
+          <a:bodyPr wrap="square" lIns="0" tIns="0" rIns="0" bIns="0" rtlCol="0" anchor="ctr"/>
+          <a:lstStyle/>
+          <a:p>
+            <a:pPr indent="0" marL="0">
+              <a:buNone/>
+            </a:pPr>
+            <a:r>
+              <a:rPr lang="en-US" sz="900" b="1" spc="160" kern="0" dirty="0">
+                <a:solidFill>
+                  <a:srgbClr val="111111"/>
+                </a:solidFill>
+                <a:latin typeface="Pretendard" pitchFamily="34" charset="0"/>
+                <a:ea typeface="Pretendard" pitchFamily="34" charset="-122"/>
+                <a:cs typeface="Pretendard" pitchFamily="34" charset="-120"/>
+              </a:rPr>
+              <a:t>내 관심</a:t>
+            </a:r>
+            <a:endParaRPr lang="en-US" sz="900" dirty="0"/>
+          </a:p>
+        </p:txBody>
+      </p:sp>
+      <p:sp>
+        <p:nvSpPr>
+          <p:cNvPr id="29" name="Text 27"/>
+          <p:cNvSpPr/>
+          <p:nvPr/>
+        </p:nvSpPr>
+        <p:spPr>
+          <a:xfrm>
+            <a:off x="6699352" y="3858768"/>
+            <a:ext cx="4449928" cy="329184"/>
+          </a:xfrm>
+          <a:prstGeom prst="rect">
+            <a:avLst/>
+          </a:prstGeom>
+          <a:noFill/>
+          <a:ln/>
+        </p:spPr>
+        <p:txBody>
+          <a:bodyPr wrap="square" lIns="0" tIns="0" rIns="0" bIns="0" rtlCol="0" anchor="t"/>
+          <a:lstStyle/>
+          <a:p>
+            <a:pPr indent="0" marL="0">
+              <a:lnSpc>
+                <a:spcPct val="120000"/>
+              </a:lnSpc>
+              <a:buNone/>
+            </a:pPr>
+            <a:r>
+              <a:rPr lang="en-US" sz="1150" b="1" dirty="0">
+                <a:solidFill>
+                  <a:srgbClr val="1F1F1F"/>
+                </a:solidFill>
+                <a:latin typeface="Pretendard" pitchFamily="34" charset="0"/>
+                <a:ea typeface="Pretendard" pitchFamily="34" charset="-122"/>
+                <a:cs typeface="Pretendard" pitchFamily="34" charset="-120"/>
+              </a:rPr>
+              <a:t>상인 10분 중 7분이 같은 불편을 말했다</a:t>
+            </a:r>
+            <a:endParaRPr lang="en-US" sz="1150" dirty="0"/>
+          </a:p>
+        </p:txBody>
+      </p:sp>
+      <p:sp>
+        <p:nvSpPr>
+          <p:cNvPr id="30" name="Shape 28"/>
+          <p:cNvSpPr/>
+          <p:nvPr/>
+        </p:nvSpPr>
+        <p:spPr>
+          <a:xfrm>
+            <a:off x="1042416" y="4151376"/>
             <a:ext cx="4449928" cy="7315"/>
           </a:xfrm>
           <a:prstGeom prst="rect">
@@ -21361,175 +21673,13 @@
       </p:sp>
       <p:sp>
         <p:nvSpPr>
-          <p:cNvPr id="25" name="Text 23"/>
-          <p:cNvSpPr/>
-          <p:nvPr/>
-        </p:nvSpPr>
-        <p:spPr>
-          <a:xfrm>
-            <a:off x="1042416" y="3621024"/>
-            <a:ext cx="2011680" cy="274320"/>
-          </a:xfrm>
-          <a:prstGeom prst="rect">
-            <a:avLst/>
-          </a:prstGeom>
-          <a:noFill/>
-          <a:ln/>
-        </p:spPr>
-        <p:txBody>
-          <a:bodyPr wrap="square" lIns="0" tIns="0" rIns="0" bIns="0" rtlCol="0" anchor="ctr"/>
-          <a:lstStyle/>
-          <a:p>
-            <a:pPr indent="0" marL="0">
-              <a:buNone/>
-            </a:pPr>
-            <a:r>
-              <a:rPr lang="en-US" sz="900" b="1" spc="160" kern="0" dirty="0">
-                <a:solidFill>
-                  <a:srgbClr val="111111"/>
-                </a:solidFill>
-                <a:latin typeface="Pretendard" pitchFamily="34" charset="0"/>
-                <a:ea typeface="Pretendard" pitchFamily="34" charset="-122"/>
-                <a:cs typeface="Pretendard" pitchFamily="34" charset="-120"/>
-              </a:rPr>
-              <a:t>내 관심</a:t>
-            </a:r>
-            <a:endParaRPr lang="en-US" sz="900" dirty="0"/>
-          </a:p>
-        </p:txBody>
-      </p:sp>
-      <p:sp>
-        <p:nvSpPr>
-          <p:cNvPr id="26" name="Text 24"/>
-          <p:cNvSpPr/>
-          <p:nvPr/>
-        </p:nvSpPr>
-        <p:spPr>
-          <a:xfrm>
-            <a:off x="1042416" y="3858768"/>
-            <a:ext cx="4449928" cy="329184"/>
-          </a:xfrm>
-          <a:prstGeom prst="rect">
-            <a:avLst/>
-          </a:prstGeom>
-          <a:noFill/>
-          <a:ln/>
-        </p:spPr>
-        <p:txBody>
-          <a:bodyPr wrap="square" lIns="0" tIns="0" rIns="0" bIns="0" rtlCol="0" anchor="t"/>
-          <a:lstStyle/>
-          <a:p>
-            <a:pPr indent="0" marL="0">
-              <a:lnSpc>
-                <a:spcPct val="120000"/>
-              </a:lnSpc>
-              <a:buNone/>
-            </a:pPr>
-            <a:r>
-              <a:rPr lang="en-US" sz="1150" dirty="0">
-                <a:solidFill>
-                  <a:srgbClr val="1F1F1F"/>
-                </a:solidFill>
-                <a:latin typeface="Pretendard" pitchFamily="34" charset="0"/>
-                <a:ea typeface="Pretendard" pitchFamily="34" charset="-122"/>
-                <a:cs typeface="Pretendard" pitchFamily="34" charset="-120"/>
-              </a:rPr>
-              <a:t>본 연구자는 이 주제에 관심이 있다</a:t>
-            </a:r>
-            <a:endParaRPr lang="en-US" sz="1150" dirty="0"/>
-          </a:p>
-        </p:txBody>
-      </p:sp>
-      <p:sp>
-        <p:nvSpPr>
-          <p:cNvPr id="27" name="Text 25"/>
-          <p:cNvSpPr/>
-          <p:nvPr/>
-        </p:nvSpPr>
-        <p:spPr>
-          <a:xfrm>
-            <a:off x="6699352" y="3621024"/>
-            <a:ext cx="2011680" cy="274320"/>
-          </a:xfrm>
-          <a:prstGeom prst="rect">
-            <a:avLst/>
-          </a:prstGeom>
-          <a:noFill/>
-          <a:ln/>
-        </p:spPr>
-        <p:txBody>
-          <a:bodyPr wrap="square" lIns="0" tIns="0" rIns="0" bIns="0" rtlCol="0" anchor="ctr"/>
-          <a:lstStyle/>
-          <a:p>
-            <a:pPr indent="0" marL="0">
-              <a:buNone/>
-            </a:pPr>
-            <a:r>
-              <a:rPr lang="en-US" sz="900" b="1" spc="160" kern="0" dirty="0">
-                <a:solidFill>
-                  <a:srgbClr val="9B9B9B"/>
-                </a:solidFill>
-                <a:latin typeface="Pretendard" pitchFamily="34" charset="0"/>
-                <a:ea typeface="Pretendard" pitchFamily="34" charset="-122"/>
-                <a:cs typeface="Pretendard" pitchFamily="34" charset="-120"/>
-              </a:rPr>
-              <a:t>내 관심</a:t>
-            </a:r>
-            <a:endParaRPr lang="en-US" sz="900" dirty="0"/>
-          </a:p>
-        </p:txBody>
-      </p:sp>
-      <p:sp>
-        <p:nvSpPr>
-          <p:cNvPr id="28" name="Text 26"/>
-          <p:cNvSpPr/>
-          <p:nvPr/>
-        </p:nvSpPr>
-        <p:spPr>
-          <a:xfrm>
-            <a:off x="6699352" y="3858768"/>
-            <a:ext cx="4449928" cy="329184"/>
-          </a:xfrm>
-          <a:prstGeom prst="rect">
-            <a:avLst/>
-          </a:prstGeom>
-          <a:noFill/>
-          <a:ln/>
-        </p:spPr>
-        <p:txBody>
-          <a:bodyPr wrap="square" lIns="0" tIns="0" rIns="0" bIns="0" rtlCol="0" anchor="t"/>
-          <a:lstStyle/>
-          <a:p>
-            <a:pPr indent="0" marL="0">
-              <a:lnSpc>
-                <a:spcPct val="120000"/>
-              </a:lnSpc>
-              <a:buNone/>
-            </a:pPr>
-            <a:r>
-              <a:rPr lang="en-US" sz="1150" dirty="0">
-                <a:solidFill>
-                  <a:srgbClr val="6E6E6E"/>
-                </a:solidFill>
-                <a:latin typeface="Pretendard" pitchFamily="34" charset="0"/>
-                <a:ea typeface="Pretendard" pitchFamily="34" charset="-122"/>
-                <a:cs typeface="Pretendard" pitchFamily="34" charset="-120"/>
-              </a:rPr>
-              <a:t>상인 10분 중 7분이 같은 불편을 말했다</a:t>
-            </a:r>
-            <a:endParaRPr lang="en-US" sz="1150" dirty="0"/>
-          </a:p>
-        </p:txBody>
-      </p:sp>
-      <p:sp>
-        <p:nvSpPr>
-          <p:cNvPr id="29" name="Shape 27"/>
-          <p:cNvSpPr/>
-          <p:nvPr/>
-        </p:nvSpPr>
-        <p:spPr>
-          <a:xfrm>
-            <a:off x="1042416" y="4151376"/>
+          <p:cNvPr id="31" name="Shape 29"/>
+          <p:cNvSpPr/>
+          <p:nvPr/>
+        </p:nvSpPr>
+        <p:spPr>
+          <a:xfrm>
+            <a:off x="6699352" y="4151376"/>
             <a:ext cx="4449928" cy="7315"/>
           </a:xfrm>
           <a:prstGeom prst="rect">
@@ -21548,14 +21698,243 @@
       </p:sp>
       <p:sp>
         <p:nvSpPr>
-          <p:cNvPr id="30" name="Shape 28"/>
-          <p:cNvSpPr/>
-          <p:nvPr/>
-        </p:nvSpPr>
-        <p:spPr>
-          <a:xfrm>
-            <a:off x="6699352" y="4151376"/>
-            <a:ext cx="4449928" cy="7315"/>
+          <p:cNvPr id="32" name="Text 30"/>
+          <p:cNvSpPr/>
+          <p:nvPr/>
+        </p:nvSpPr>
+        <p:spPr>
+          <a:xfrm>
+            <a:off x="1042416" y="4206240"/>
+            <a:ext cx="2011680" cy="274320"/>
+          </a:xfrm>
+          <a:prstGeom prst="rect">
+            <a:avLst/>
+          </a:prstGeom>
+          <a:noFill/>
+          <a:ln/>
+        </p:spPr>
+        <p:txBody>
+          <a:bodyPr wrap="square" lIns="0" tIns="0" rIns="0" bIns="0" rtlCol="0" anchor="ctr"/>
+          <a:lstStyle/>
+          <a:p>
+            <a:pPr indent="0" marL="0">
+              <a:buNone/>
+            </a:pPr>
+            <a:r>
+              <a:rPr lang="en-US" sz="900" b="1" spc="160" kern="0" dirty="0">
+                <a:solidFill>
+                  <a:srgbClr val="9B9B9B"/>
+                </a:solidFill>
+                <a:latin typeface="Pretendard" pitchFamily="34" charset="0"/>
+                <a:ea typeface="Pretendard" pitchFamily="34" charset="-122"/>
+                <a:cs typeface="Pretendard" pitchFamily="34" charset="-120"/>
+              </a:rPr>
+              <a:t>근거 없는 단정</a:t>
+            </a:r>
+            <a:endParaRPr lang="en-US" sz="900" dirty="0"/>
+          </a:p>
+        </p:txBody>
+      </p:sp>
+      <p:sp>
+        <p:nvSpPr>
+          <p:cNvPr id="33" name="Text 31"/>
+          <p:cNvSpPr/>
+          <p:nvPr/>
+        </p:nvSpPr>
+        <p:spPr>
+          <a:xfrm>
+            <a:off x="1042416" y="4443984"/>
+            <a:ext cx="4449928" cy="329184"/>
+          </a:xfrm>
+          <a:prstGeom prst="rect">
+            <a:avLst/>
+          </a:prstGeom>
+          <a:noFill/>
+          <a:ln/>
+        </p:spPr>
+        <p:txBody>
+          <a:bodyPr wrap="square" lIns="0" tIns="0" rIns="0" bIns="0" rtlCol="0" anchor="t"/>
+          <a:lstStyle/>
+          <a:p>
+            <a:pPr indent="0" marL="0">
+              <a:lnSpc>
+                <a:spcPct val="120000"/>
+              </a:lnSpc>
+              <a:buNone/>
+            </a:pPr>
+            <a:r>
+              <a:rPr lang="en-US" sz="1150" dirty="0">
+                <a:solidFill>
+                  <a:srgbClr val="6E6E6E"/>
+                </a:solidFill>
+                <a:latin typeface="Pretendard" pitchFamily="34" charset="0"/>
+                <a:ea typeface="Pretendard" pitchFamily="34" charset="-122"/>
+                <a:cs typeface="Pretendard" pitchFamily="34" charset="-120"/>
+              </a:rPr>
+              <a:t>아무도 연구하지 않았다</a:t>
+            </a:r>
+            <a:endParaRPr lang="en-US" sz="1150" dirty="0"/>
+          </a:p>
+        </p:txBody>
+      </p:sp>
+      <p:sp>
+        <p:nvSpPr>
+          <p:cNvPr id="34" name="Text 32"/>
+          <p:cNvSpPr/>
+          <p:nvPr/>
+        </p:nvSpPr>
+        <p:spPr>
+          <a:xfrm>
+            <a:off x="6699352" y="4206240"/>
+            <a:ext cx="2011680" cy="274320"/>
+          </a:xfrm>
+          <a:prstGeom prst="rect">
+            <a:avLst/>
+          </a:prstGeom>
+          <a:noFill/>
+          <a:ln/>
+        </p:spPr>
+        <p:txBody>
+          <a:bodyPr wrap="square" lIns="0" tIns="0" rIns="0" bIns="0" rtlCol="0" anchor="ctr"/>
+          <a:lstStyle/>
+          <a:p>
+            <a:pPr indent="0" marL="0">
+              <a:buNone/>
+            </a:pPr>
+            <a:r>
+              <a:rPr lang="en-US" sz="900" b="1" spc="160" kern="0" dirty="0">
+                <a:solidFill>
+                  <a:srgbClr val="111111"/>
+                </a:solidFill>
+                <a:latin typeface="Pretendard" pitchFamily="34" charset="0"/>
+                <a:ea typeface="Pretendard" pitchFamily="34" charset="-122"/>
+                <a:cs typeface="Pretendard" pitchFamily="34" charset="-120"/>
+              </a:rPr>
+              <a:t>근거 없는 단정</a:t>
+            </a:r>
+            <a:endParaRPr lang="en-US" sz="900" dirty="0"/>
+          </a:p>
+        </p:txBody>
+      </p:sp>
+      <p:sp>
+        <p:nvSpPr>
+          <p:cNvPr id="35" name="Text 33"/>
+          <p:cNvSpPr/>
+          <p:nvPr/>
+        </p:nvSpPr>
+        <p:spPr>
+          <a:xfrm>
+            <a:off x="6699352" y="4443984"/>
+            <a:ext cx="4449928" cy="329184"/>
+          </a:xfrm>
+          <a:prstGeom prst="rect">
+            <a:avLst/>
+          </a:prstGeom>
+          <a:noFill/>
+          <a:ln/>
+        </p:spPr>
+        <p:txBody>
+          <a:bodyPr wrap="square" lIns="0" tIns="0" rIns="0" bIns="0" rtlCol="0" anchor="t"/>
+          <a:lstStyle/>
+          <a:p>
+            <a:pPr indent="0" marL="0">
+              <a:lnSpc>
+                <a:spcPct val="120000"/>
+              </a:lnSpc>
+              <a:buNone/>
+            </a:pPr>
+            <a:r>
+              <a:rPr lang="en-US" sz="1150" b="1" dirty="0">
+                <a:solidFill>
+                  <a:srgbClr val="1F1F1F"/>
+                </a:solidFill>
+                <a:latin typeface="Pretendard" pitchFamily="34" charset="0"/>
+                <a:ea typeface="Pretendard" pitchFamily="34" charset="-122"/>
+                <a:cs typeface="Pretendard" pitchFamily="34" charset="-120"/>
+              </a:rPr>
+              <a:t>간판 연구는 가독성 중심이고 업종 구별은 찾지 못했다</a:t>
+            </a:r>
+            <a:endParaRPr lang="en-US" sz="1150" dirty="0"/>
+          </a:p>
+        </p:txBody>
+      </p:sp>
+      <p:sp>
+        <p:nvSpPr>
+          <p:cNvPr id="36" name="Shape 34"/>
+          <p:cNvSpPr/>
+          <p:nvPr/>
+        </p:nvSpPr>
+        <p:spPr>
+          <a:xfrm>
+            <a:off x="640080" y="5010912"/>
+            <a:ext cx="10911535" cy="7315"/>
+          </a:xfrm>
+          <a:prstGeom prst="rect">
+            <a:avLst/>
+          </a:prstGeom>
+          <a:solidFill>
+            <a:srgbClr val="111111"/>
+          </a:solidFill>
+          <a:ln w="12700">
+            <a:solidFill>
+              <a:srgbClr val="111111"/>
+            </a:solidFill>
+            <a:prstDash val="solid"/>
+          </a:ln>
+        </p:spPr>
+      </p:sp>
+      <p:sp>
+        <p:nvSpPr>
+          <p:cNvPr id="37" name="Text 35"/>
+          <p:cNvSpPr/>
+          <p:nvPr/>
+        </p:nvSpPr>
+        <p:spPr>
+          <a:xfrm>
+            <a:off x="640080" y="5120640"/>
+            <a:ext cx="10911535" cy="402336"/>
+          </a:xfrm>
+          <a:prstGeom prst="rect">
+            <a:avLst/>
+          </a:prstGeom>
+          <a:noFill/>
+          <a:ln/>
+        </p:spPr>
+        <p:txBody>
+          <a:bodyPr wrap="square" lIns="0" tIns="0" rIns="0" bIns="0" rtlCol="0" anchor="t"/>
+          <a:lstStyle/>
+          <a:p>
+            <a:pPr indent="0" marL="0">
+              <a:lnSpc>
+                <a:spcPct val="120000"/>
+              </a:lnSpc>
+              <a:buNone/>
+            </a:pPr>
+            <a:r>
+              <a:rPr lang="en-US" sz="1300" b="1" dirty="0">
+                <a:solidFill>
+                  <a:srgbClr val="111111"/>
+                </a:solidFill>
+                <a:latin typeface="Pretendard" pitchFamily="34" charset="0"/>
+                <a:ea typeface="Pretendard" pitchFamily="34" charset="-122"/>
+                <a:cs typeface="Pretendard" pitchFamily="34" charset="-120"/>
+              </a:rPr>
+              <a:t>네 줄 다 같은 이야기입니다. 연구자의 판단이 아니라 외부에서 확인되는 것을 기술한다.</a:t>
+            </a:r>
+            <a:endParaRPr lang="en-US" sz="1300" dirty="0"/>
+          </a:p>
+        </p:txBody>
+      </p:sp>
+      <p:sp>
+        <p:nvSpPr>
+          <p:cNvPr id="38" name="Shape 36"/>
+          <p:cNvSpPr/>
+          <p:nvPr/>
+        </p:nvSpPr>
+        <p:spPr>
+          <a:xfrm>
+            <a:off x="640080" y="6291072"/>
+            <a:ext cx="10911535" cy="7315"/>
           </a:xfrm>
           <a:prstGeom prst="rect">
             <a:avLst/>
@@ -21573,261 +21952,7 @@
       </p:sp>
       <p:sp>
         <p:nvSpPr>
-          <p:cNvPr id="31" name="Text 29"/>
-          <p:cNvSpPr/>
-          <p:nvPr/>
-        </p:nvSpPr>
-        <p:spPr>
-          <a:xfrm>
-            <a:off x="1042416" y="4206240"/>
-            <a:ext cx="2011680" cy="274320"/>
-          </a:xfrm>
-          <a:prstGeom prst="rect">
-            <a:avLst/>
-          </a:prstGeom>
-          <a:noFill/>
-          <a:ln/>
-        </p:spPr>
-        <p:txBody>
-          <a:bodyPr wrap="square" lIns="0" tIns="0" rIns="0" bIns="0" rtlCol="0" anchor="ctr"/>
-          <a:lstStyle/>
-          <a:p>
-            <a:pPr indent="0" marL="0">
-              <a:buNone/>
-            </a:pPr>
-            <a:r>
-              <a:rPr lang="en-US" sz="900" b="1" spc="160" kern="0" dirty="0">
-                <a:solidFill>
-                  <a:srgbClr val="111111"/>
-                </a:solidFill>
-                <a:latin typeface="Pretendard" pitchFamily="34" charset="0"/>
-                <a:ea typeface="Pretendard" pitchFamily="34" charset="-122"/>
-                <a:cs typeface="Pretendard" pitchFamily="34" charset="-120"/>
-              </a:rPr>
-              <a:t>근거 없는 단정</a:t>
-            </a:r>
-            <a:endParaRPr lang="en-US" sz="900" dirty="0"/>
-          </a:p>
-        </p:txBody>
-      </p:sp>
-      <p:sp>
-        <p:nvSpPr>
-          <p:cNvPr id="32" name="Text 30"/>
-          <p:cNvSpPr/>
-          <p:nvPr/>
-        </p:nvSpPr>
-        <p:spPr>
-          <a:xfrm>
-            <a:off x="1042416" y="4443984"/>
-            <a:ext cx="4449928" cy="329184"/>
-          </a:xfrm>
-          <a:prstGeom prst="rect">
-            <a:avLst/>
-          </a:prstGeom>
-          <a:noFill/>
-          <a:ln/>
-        </p:spPr>
-        <p:txBody>
-          <a:bodyPr wrap="square" lIns="0" tIns="0" rIns="0" bIns="0" rtlCol="0" anchor="t"/>
-          <a:lstStyle/>
-          <a:p>
-            <a:pPr indent="0" marL="0">
-              <a:lnSpc>
-                <a:spcPct val="120000"/>
-              </a:lnSpc>
-              <a:buNone/>
-            </a:pPr>
-            <a:r>
-              <a:rPr lang="en-US" sz="1150" dirty="0">
-                <a:solidFill>
-                  <a:srgbClr val="1F1F1F"/>
-                </a:solidFill>
-                <a:latin typeface="Pretendard" pitchFamily="34" charset="0"/>
-                <a:ea typeface="Pretendard" pitchFamily="34" charset="-122"/>
-                <a:cs typeface="Pretendard" pitchFamily="34" charset="-120"/>
-              </a:rPr>
-              <a:t>아무도 연구하지 않았다</a:t>
-            </a:r>
-            <a:endParaRPr lang="en-US" sz="1150" dirty="0"/>
-          </a:p>
-        </p:txBody>
-      </p:sp>
-      <p:sp>
-        <p:nvSpPr>
-          <p:cNvPr id="33" name="Text 31"/>
-          <p:cNvSpPr/>
-          <p:nvPr/>
-        </p:nvSpPr>
-        <p:spPr>
-          <a:xfrm>
-            <a:off x="6699352" y="4206240"/>
-            <a:ext cx="2011680" cy="274320"/>
-          </a:xfrm>
-          <a:prstGeom prst="rect">
-            <a:avLst/>
-          </a:prstGeom>
-          <a:noFill/>
-          <a:ln/>
-        </p:spPr>
-        <p:txBody>
-          <a:bodyPr wrap="square" lIns="0" tIns="0" rIns="0" bIns="0" rtlCol="0" anchor="ctr"/>
-          <a:lstStyle/>
-          <a:p>
-            <a:pPr indent="0" marL="0">
-              <a:buNone/>
-            </a:pPr>
-            <a:r>
-              <a:rPr lang="en-US" sz="900" b="1" spc="160" kern="0" dirty="0">
-                <a:solidFill>
-                  <a:srgbClr val="9B9B9B"/>
-                </a:solidFill>
-                <a:latin typeface="Pretendard" pitchFamily="34" charset="0"/>
-                <a:ea typeface="Pretendard" pitchFamily="34" charset="-122"/>
-                <a:cs typeface="Pretendard" pitchFamily="34" charset="-120"/>
-              </a:rPr>
-              <a:t>근거 없는 단정</a:t>
-            </a:r>
-            <a:endParaRPr lang="en-US" sz="900" dirty="0"/>
-          </a:p>
-        </p:txBody>
-      </p:sp>
-      <p:sp>
-        <p:nvSpPr>
-          <p:cNvPr id="34" name="Text 32"/>
-          <p:cNvSpPr/>
-          <p:nvPr/>
-        </p:nvSpPr>
-        <p:spPr>
-          <a:xfrm>
-            <a:off x="6699352" y="4443984"/>
-            <a:ext cx="4449928" cy="329184"/>
-          </a:xfrm>
-          <a:prstGeom prst="rect">
-            <a:avLst/>
-          </a:prstGeom>
-          <a:noFill/>
-          <a:ln/>
-        </p:spPr>
-        <p:txBody>
-          <a:bodyPr wrap="square" lIns="0" tIns="0" rIns="0" bIns="0" rtlCol="0" anchor="t"/>
-          <a:lstStyle/>
-          <a:p>
-            <a:pPr indent="0" marL="0">
-              <a:lnSpc>
-                <a:spcPct val="120000"/>
-              </a:lnSpc>
-              <a:buNone/>
-            </a:pPr>
-            <a:r>
-              <a:rPr lang="en-US" sz="1150" dirty="0">
-                <a:solidFill>
-                  <a:srgbClr val="6E6E6E"/>
-                </a:solidFill>
-                <a:latin typeface="Pretendard" pitchFamily="34" charset="0"/>
-                <a:ea typeface="Pretendard" pitchFamily="34" charset="-122"/>
-                <a:cs typeface="Pretendard" pitchFamily="34" charset="-120"/>
-              </a:rPr>
-              <a:t>간판 연구는 가독성 중심이고 업종 구별은 찾지 못했다</a:t>
-            </a:r>
-            <a:endParaRPr lang="en-US" sz="1150" dirty="0"/>
-          </a:p>
-        </p:txBody>
-      </p:sp>
-      <p:sp>
-        <p:nvSpPr>
-          <p:cNvPr id="35" name="Shape 33"/>
-          <p:cNvSpPr/>
-          <p:nvPr/>
-        </p:nvSpPr>
-        <p:spPr>
-          <a:xfrm>
-            <a:off x="640080" y="5010912"/>
-            <a:ext cx="10911535" cy="7315"/>
-          </a:xfrm>
-          <a:prstGeom prst="rect">
-            <a:avLst/>
-          </a:prstGeom>
-          <a:solidFill>
-            <a:srgbClr val="111111"/>
-          </a:solidFill>
-          <a:ln w="12700">
-            <a:solidFill>
-              <a:srgbClr val="111111"/>
-            </a:solidFill>
-            <a:prstDash val="solid"/>
-          </a:ln>
-        </p:spPr>
-      </p:sp>
-      <p:sp>
-        <p:nvSpPr>
-          <p:cNvPr id="36" name="Text 34"/>
-          <p:cNvSpPr/>
-          <p:nvPr/>
-        </p:nvSpPr>
-        <p:spPr>
-          <a:xfrm>
-            <a:off x="640080" y="5120640"/>
-            <a:ext cx="10911535" cy="402336"/>
-          </a:xfrm>
-          <a:prstGeom prst="rect">
-            <a:avLst/>
-          </a:prstGeom>
-          <a:noFill/>
-          <a:ln/>
-        </p:spPr>
-        <p:txBody>
-          <a:bodyPr wrap="square" lIns="0" tIns="0" rIns="0" bIns="0" rtlCol="0" anchor="t"/>
-          <a:lstStyle/>
-          <a:p>
-            <a:pPr indent="0" marL="0">
-              <a:lnSpc>
-                <a:spcPct val="120000"/>
-              </a:lnSpc>
-              <a:buNone/>
-            </a:pPr>
-            <a:r>
-              <a:rPr lang="en-US" sz="1300" b="1" dirty="0">
-                <a:solidFill>
-                  <a:srgbClr val="111111"/>
-                </a:solidFill>
-                <a:latin typeface="Pretendard" pitchFamily="34" charset="0"/>
-                <a:ea typeface="Pretendard" pitchFamily="34" charset="-122"/>
-                <a:cs typeface="Pretendard" pitchFamily="34" charset="-120"/>
-              </a:rPr>
-              <a:t>네 줄 다 같은 이야기입니다. 연구자의 판단이 아니라 외부에서 확인되는 것을 기술한다.</a:t>
-            </a:r>
-            <a:endParaRPr lang="en-US" sz="1300" dirty="0"/>
-          </a:p>
-        </p:txBody>
-      </p:sp>
-      <p:sp>
-        <p:nvSpPr>
-          <p:cNvPr id="37" name="Shape 35"/>
-          <p:cNvSpPr/>
-          <p:nvPr/>
-        </p:nvSpPr>
-        <p:spPr>
-          <a:xfrm>
-            <a:off x="640080" y="6291072"/>
-            <a:ext cx="10911535" cy="7315"/>
-          </a:xfrm>
-          <a:prstGeom prst="rect">
-            <a:avLst/>
-          </a:prstGeom>
-          <a:solidFill>
-            <a:srgbClr val="DCDCDC"/>
-          </a:solidFill>
-          <a:ln w="12700">
-            <a:solidFill>
-              <a:srgbClr val="DCDCDC"/>
-            </a:solidFill>
-            <a:prstDash val="solid"/>
-          </a:ln>
-        </p:spPr>
-      </p:sp>
-      <p:sp>
-        <p:nvSpPr>
-          <p:cNvPr id="38" name="Text 36"/>
+          <p:cNvPr id="39" name="Text 37"/>
           <p:cNvSpPr/>
           <p:nvPr/>
         </p:nvSpPr>
@@ -21866,7 +21991,7 @@
       </p:sp>
       <p:sp>
         <p:nvSpPr>
-          <p:cNvPr id="39" name="Text 37"/>
+          <p:cNvPr id="40" name="Text 38"/>
           <p:cNvSpPr/>
           <p:nvPr/>
         </p:nvSpPr>

--- a/dist/weeks-대학원/컨셉트와프로세스_07주차_프로포절쓰기.pptx
+++ b/dist/weeks-대학원/컨셉트와프로세스_07주차_프로포절쓰기.pptx
@@ -528,11 +528,11 @@
 프로포절을 처음 쓰시는 분이 대부분일 겁니다. 당연한 겁니다. 박사과정에 들어오기 전에 이런 글을 쓸 일이 없었으니까요.
 그런데 아무도 안 가르쳐 줍니다. 다들 쓸 줄 안다고 전제하고 넘어가요. 그러다 보니 남의 논문을 흉내 내서 쓰게 되고, 흉내 낸 글은 심사에서 바로 티가 납니다.
 오늘은 처음부터 하겠습니다.
-프로포절이 뭔지, 몇 개 절로 되어 있는지, 각 절에 뭘 쓰는지. 그리고 각 절마다 제가 나쁜 문장 하나와 좋은 문장 하나를 보여 드릴 거예요. 그 차이를 보시고 바로 자기 주제로 한 문장씩 써 보시면 됩니다.
-오늘 끝나면 여섯 문장이 손에 있을 겁니다. 그게 프로포절의 뼈대예요. 거기에 살을 붙이시면 됩니다.
-노트북이나 종이, 쓸 것 준비해 주세요. 오늘은 계속 쓰실 겁니다.
+프로포절이 뭔지, 몇 개 절로 되어 있는지, 각 절에 뭘 쓰는지. 그리고 각 절마다 나쁜 문장 하나와 좋은 문장 하나를 나란히 보여 드리겠습니다. 그 차이가 설명보다 빠릅니다.
+각 절마다 '이렇게 채웁니다' 하는 틀도 같이 보여 드립니다. 과제로 쓰실 때 그 틀대로 채우시면 됩니다.
+오늘 들으신 것으로 여섯 문장을 쓰시는 게 과제입니다. 그 여섯 문장이 프로포절의 뼈대가 되고, 거기에 살을 붙이시면 드래프트가 됩니다.
 [운영 메모]
-참석자들이 논문 쓰기에 익숙하지 않다는 전제에서 다시 짠 회차다(2026-10-06 교수님 지시). '모르는 게 당연하다'를 표지에서 말해 두어야 질문이 나온다. 강의와 작성을 5분씩 번갈아 간다 — 설명만 20분 하면 아무것도 안 남는다.</a:t>
+참석자들이 논문 쓰기에 익숙하지 않다는 전제에서 짠 회차다(2026-10-06 교수님 지시). '모르는 게 당연하다'를 표지에서 말해 두어야 질문이 나온다. 수업은 강의로만 진행하고 작성은 전부 과제로 넘긴다 — 장표의 '과제 ①②③' 은 쓰는 시간이 아니라 채우는 법을 보여 주는 자리다.</a:t>
             </a:r>
             <a:endParaRPr lang="en-US" dirty="0"/>
           </a:p>
@@ -822,15 +822,15 @@
             <a:r>
               <a:rPr lang="en-US" dirty="0"/>
               <a:t>[말할 내용]
-10분 드리겠습니다. 두 개를 쓰실 거예요.
-먼저 질문 하나. 왼쪽 틀에 넣어 보세요. 무엇과 무엇을 비교하거나, 무엇이 무엇에 어떻게 작용하는지.
-다 쓰시면 네 가지를 확인하세요. 물음표로 끝나는가. 삼 년 안에 답할 수 있는 크기인가. 답이 뻔하지 않은가. 어떻게 확인할지 보이는가.
-그다음 가설. 아까 드린 틀에 넣으시면 됩니다. A가 B보다 C할 것이다, 왜냐하면 D 때문이다.
-왜냐하면 뒤가 중요해요. 거기가 비면 그냥 찍은 겁니다. 선행연구에서 가져오셔도 되고 본인 관찰에서 가져오셔도 됩니다.
-가설이 하나일 필요는 없어요. 둘이나 셋이어도 됩니다. 다만 각각 확인할 수 있어야 합니다.
-10분 뒤에 몇 분 읽어 주시고, 제가 그 자리에서 같이 고쳐 보겠습니다.
+과제로 두 개를 쓰십니다. 질문 하나와 가설 하나요.
+먼저 질문. 왼쪽 틀에 넣으시면 됩니다. 무엇과 무엇을 비교하거나, 무엇이 무엇에 어떻게 작용하는지.
+쓰신 다음에 아래 네 가지로 확인하세요. 물음표로 끝나는가. 연구 기간 안에 답할 수 있는가. 답이 자명하지 않은가. 무엇으로 확인할지 드러나는가.
+그다음 가설. 오른쪽 틀입니다. A가 B보다 C할 것이다, 왜냐하면 D 때문이다.
+'왜냐하면' 뒤가 중요해요. 거기가 비면 근거 없는 추측입니다. 선행연구에서 가져오시거나 직접 관찰하신 것으로 채우세요.
+가설이 하나일 필요는 없습니다. 둘이나 셋이어도 돼요. 다만 각각 확인할 수 있어야 합니다.
+다음 회차에 이 두 문장을 먼저 보겠습니다. 여기가 흐리면 나머지가 다 흐려지거든요.
 [운영 메모]
-'왜냐하면' 뒤를 반드시 쓰게 할 것. 여기가 비어 있으면 4절(선행연구)과 연결되지 않는다. 읽게 하고 교수가 한 명만 그 자리에서 고쳐 보이면 나머지가 따라 고친다.</a:t>
+'왜냐하면' 뒤를 반드시 쓰게 할 것. 여기가 비어 있으면 4절(선행연구)과 연결되지 않는다. 쓰는 시간이 없으므로 전통시장 예시로 질문 하나와 가설 하나를 교수가 그 자리에서 만들어 보일 것 — 그 시연이 과제 품질을 가른다.</a:t>
             </a:r>
             <a:endParaRPr lang="en-US" dirty="0"/>
           </a:p>
@@ -1303,14 +1303,14 @@
             <a:r>
               <a:rPr lang="en-US" dirty="0"/>
               <a:t>[말할 내용]
-마지막 작성입니다. 10분이요.
-왼쪽 네 칸을 채우세요. 누구에게, 무엇을, 어떻게, 그리고 어떻게 판단하는지.
+마지막 두 절입니다.
+왼쪽 네 칸을 채우시면 연구 방법이 됩니다. 대상, 자료, 절차, 판단 기준.
 네 칸을 이으면 다섯째 절의 첫 문장이 됩니다.
-그다음 기여는 쉽습니다. 오른쪽 틀 하나면 돼요.
-'이 연구가 끝나면 ~를 알게 된다.' 여기에 아까 쓰신 연구 질문의 답 모양을 넣으시면 됩니다.
+기여는 쉽습니다. 오른쪽 틀 하나예요.
+'이 연구가 끝나면 ~를 알게 된다.' 여기에 연구 질문의 답에 해당하는 내용을 넣으시면 됩니다.
 질문이 '색이 빠른가'였으면 기여는 '색과 글자 중 어느 쪽이 업종을 빨리 알아보게 하는지 알게 된다'가 되는 거죠.
-그러니까 기여를 못 쓰시겠다면 질문이 흐린 겁니다. 돌아가서 질문을 고치세요.
-그리고 하나 더. 기여를 너무 크게 쓰지 마세요. '전통시장을 살린다'는 안 됩니다. 이 연구 하나로 시장이 살지 않습니다.
+그러니까 기여를 못 쓰시겠다면 질문이 분명하지 않은 겁니다. 돌아가서 질문부터 고치세요.
+하나 더. 기여를 너무 크게 쓰지 마십시오. '전통시장을 살린다'는 성립하지 않습니다. 이 연구 하나로 시장이 살지 않아요.
 [운영 메모]
 기여와 질문이 짝이라는 점이 이 장표의 핵심이다. 기여를 못 쓰는 학생은 질문이 흐린 것이므로 질문부터 고치게 할 것.</a:t>
             </a:r>
@@ -1499,7 +1499,8 @@
             <a:r>
               <a:rPr lang="en-US" dirty="0"/>
               <a:t>[말할 내용]
-마지막입니다. 쓰신 여섯 문장을 나란히 놓고 위에서 아래로 읽어 보세요.
+과제를 올리시기 전에 확인하실 것들입니다.
+여섯 문장을 나란히 놓고 위에서 아래로 읽어 보세요.
 읽다가 걸리는 데가 있으면 거기가 안 맞는 자리입니다.
 왼쪽 항목을 보시죠.
 첫 번째. 문제와 질문이 같은 것을 가리키는가. 문제는 간판 이야기인데 질문은 상권 이야기면 안 맞는 겁니다.
@@ -1507,10 +1508,10 @@
 세 번째가 제일 중요합니다. 그 방법으로 그 질문에 답할 수 있는가. 아까 말씀드린 거예요. 질문은 큰데 방법이 작은 경우가 가장 흔합니다.
 네 번째. 선행연구가 내 질문 쪽을 향하는가.
 다섯 번째. 기여가 질문의 답 모양인가.
-다섯 개 중에 하나라도 걸리면 그 자리를 적어 두세요. 2주 동안 거기부터 고치시면 됩니다.
-다 맞물린다고 느껴지셔도 짝과 바꿔 읽어 보세요. 본인 글은 본인이 제일 못 봅니다.
+하나라도 걸리면 그 자리부터 고치세요. 2주 있습니다.
+그리고 가능하면 다른 분과 바꿔 읽어 보십시오. 본인 글의 어긋남은 본인이 제일 못 봅니다. 다음 회차에 서로 읽으실 거니까 미리 한 번 해 보셔도 좋습니다.
 [운영 메모]
-짝과 바꿔 읽게 할 것. 본인 글의 어긋남은 본인이 못 본다. 여섯째 항목에서 걸린 학생에게는 '방법을 키우지 말고 질문을 줄여라'를 분명히 말할 것.</a:t>
+과제 제출 전 점검표다. 수업에서는 읽어 주기만 하고, 여섯째 항목에서 걸린 학생에게는 '방법을 키우지 말고 질문을 줄여라'를 분명히 말할 것. 과제 확인 때 이 열두 항목으로 본다.</a:t>
             </a:r>
             <a:endParaRPr lang="en-US" dirty="0"/>
           </a:p>
@@ -1702,18 +1703,19 @@
               <a:rPr lang="en-US" dirty="0"/>
               <a:t>[말할 내용]
 정리하겠습니다.
-과제는 두 가지입니다.
-첫째, 프로포절 드래프트. 오늘 쓰신 여섯 문장이 각 절의 첫 문장입니다. 그 아래에 설명을 붙이시면 돼요.
+과제는 세 가지인데 첫째와 둘째가 이어집니다.
+먼저 여섯 문장. 오늘 본 틀에 맞춰 절마다 한 문장씩 쓰시는 겁니다. 이걸 먼저 하세요. 한 시간이면 됩니다.
+둘째, 그 여섯 문장을 각 절의 첫 문장으로 두고 아래에 설명을 붙이면 드래프트가 됩니다.
 한 절에 한두 쪽이면 충분합니다. 길게 쓰는 게 목적이 아닙니다.
 대신 한 가지만 확인하세요. 여섯 절이 서로 맞물리는가. 두 번째 절에서 물은 걸 다섯 번째 절에서 답할 수 있는가. 그게 안 맞으면 분량이 아무리 많아도 소용없습니다.
-둘째, 동료 드래프트를 읽고 질문을 두 개씩 준비해 오세요. 다음 회차는 상호 리뷰가 절반입니다.
+셋째, 동료 드래프트를 읽고 질문을 두 개씩 준비해 오세요. 다음 회차는 상호 리뷰가 절반입니다.
 드래프트는 48시간 전까지 올려 주셔야 다른 분들이 읽고 옵니다.
 그리고 말씀드리고 싶은 게 있어요.
-오늘 쓰신 게 마음에 안 드실 겁니다. 당연합니다. 처음 쓰신 거니까요.
+쓰고 나면 마음에 안 드실 겁니다. 당연합니다. 처음 쓰시는 거니까요.
 그런데 아무것도 없는 것보다 어설픈 여섯 문장이 훨씬 낫습니다. 고칠 게 있으니까요. 백지는 고칠 수가 없습니다.
 2주 있습니다. 이번 주 안에 절반은 써 두세요.
 [운영 메모]
-'처음이라 못 쓰는 게 당연하다, 어설픈 것이 백지보다 낫다'를 반드시 말할 것. 이 말이 없으면 완벽하게 쓰려다 아무것도 못 내는 학생이 나온다. 분량보다 여섯 절의 정합성을 보겠다고 미리 못 박는다.</a:t>
+실습 시간이 없으므로 과제 안내에 시간을 충분히 쓸 것. '여섯 문장을 먼저, 한 시간이면 된다'를 말해 두어야 착수한다. '처음이라 못 쓰는 게 당연하다, 어설픈 것이 백지보다 낫다'도 반드시 말할 것 — 이 말이 없으면 완벽하게 쓰려다 아무것도 못 내는 학생이 나온다.</a:t>
             </a:r>
             <a:endParaRPr lang="en-US" dirty="0"/>
           </a:p>
@@ -2298,17 +2300,17 @@
             <a:r>
               <a:rPr lang="en-US" dirty="0"/>
               <a:t>[말할 내용]
-이제 쓰실 차례입니다. 5분 드리겠습니다.
-왼쪽 빈칸 세 개를 채우세요. 문장으로 쓰지 마시고 칸만 채우시면 됩니다.
+과제로 쓰실 때 이렇게 채우시면 됩니다.
+왼쪽 빈칸 세 개입니다. 처음부터 문장으로 쓰려 하지 마시고 칸부터 채우세요.
 누가 — 어떤 사람이 겪는 일인지.
 언제 — 어떤 상황에서 생기는지.
 무엇이 안 되는지 — 구체적으로.
 세 칸을 채운 다음에 한 문장으로 이으시면 그게 첫 절의 첫 문장입니다.
-오른쪽이 예시입니다. 아까 본 전통시장으로 채워 봤어요.
-막히시면 손 드세요. 제일 많이 막히는 데가 '무엇이 안 되는지'입니다. 거기서 '잘 안 된다'고 쓰시면 안 돼요. 무엇이 어떻게 안 되는지를 쓰셔야 합니다.
-5분 뒤에 두세 분 읽어 주시면 같이 보겠습니다.
+오른쪽이 예시예요. 아까 본 전통시장으로 채워 봤습니다.
+제일 많이 막히는 데가 세 번째 칸입니다. 거기에 '잘 안 된다'고 쓰시면 안 돼요. 무엇이 어떻게 안 되는지를 쓰셔야 합니다.
+지금 머릿속으로 한번 해 보세요. 여러분 주제에서 누가, 언제, 무엇이 안 됩니까.
 [운영 메모]
-5분을 지킬 것. 순회하며 '무엇이 안 되는지' 칸을 집중해서 볼 것 — 여기가 추상적이면 뒤의 다섯 절이 전부 흐려진다. 두세 명을 읽게 하고 교수가 그 자리에서 한 군데만 고쳐 보일 것.</a:t>
+쓰는 시간을 주지 않으므로, 교수가 전통시장 예시로 세 칸을 채워 한 문장을 만드는 과정을 말로 한 번 보여 줄 것. 세 번째 칸이 추상적이면 뒤의 다섯 절이 전부 흐려진다 — 과제 확인 때 여기를 먼저 볼 것.</a:t>
             </a:r>
             <a:endParaRPr lang="en-US" dirty="0"/>
           </a:p>
@@ -3342,7 +3344,7 @@
                 <a:ea typeface="Pretendard" pitchFamily="34" charset="-122"/>
                 <a:cs typeface="Pretendard" pitchFamily="34" charset="-120"/>
               </a:rPr>
-              <a:t>프로포절 드래프트 — 여섯 절</a:t>
+              <a:t>여섯 문장 · 프로포절 드래프트</a:t>
             </a:r>
             <a:endParaRPr lang="en-US" sz="1200" dirty="0"/>
           </a:p>
@@ -6231,7 +6233,7 @@
                 <a:ea typeface="Pretendard" pitchFamily="34" charset="-122"/>
                 <a:cs typeface="Pretendard" pitchFamily="34" charset="-120"/>
               </a:rPr>
-              <a:t>WRITE-2</a:t>
+              <a:t>TASK-2</a:t>
             </a:r>
             <a:endParaRPr lang="en-US" sz="950" dirty="0"/>
           </a:p>
@@ -6270,7 +6272,7 @@
                 <a:ea typeface="Pretendard SemiBold" pitchFamily="34" charset="-122"/>
                 <a:cs typeface="Pretendard SemiBold" pitchFamily="34" charset="-120"/>
               </a:rPr>
-              <a:t>직접 써 보기 ② — 질문과 가설</a:t>
+              <a:t>과제 ② — 질문과 가설 채우기</a:t>
             </a:r>
             <a:endParaRPr lang="en-US" sz="3000" dirty="0"/>
           </a:p>
@@ -6309,7 +6311,7 @@
                 <a:ea typeface="Pretendard" pitchFamily="34" charset="-122"/>
                 <a:cs typeface="Pretendard" pitchFamily="34" charset="-120"/>
               </a:rPr>
-              <a:t>앞으로 쓸 논문의 주제와 관련하여 질문 하나와 가설 하나를 써 봅니다. 10분.</a:t>
+              <a:t>과제로 씁니다. 질문 하나와 가설 하나를 틀에 넣어 채웁니다.</a:t>
             </a:r>
             <a:endParaRPr lang="en-US" sz="1150" dirty="0"/>
           </a:p>
@@ -6810,7 +6812,7 @@
                 <a:ea typeface="Pretendard" pitchFamily="34" charset="-122"/>
                 <a:cs typeface="Pretendard" pitchFamily="34" charset="-120"/>
               </a:rPr>
-              <a:t>질문과 가설을 나란히 놓고 읽어 봅니다. 가설은 질문에 대한 답의 모양입니다.</a:t>
+              <a:t>과제를 내시기 전에 질문과 가설을 나란히 놓고 읽어 봅니다. 가설은 질문에 대한 답의 모양입니다.</a:t>
             </a:r>
             <a:endParaRPr lang="en-US" sz="1200" dirty="0"/>
           </a:p>
@@ -10882,7 +10884,7 @@
                 <a:ea typeface="Pretendard" pitchFamily="34" charset="-122"/>
                 <a:cs typeface="Pretendard" pitchFamily="34" charset="-120"/>
               </a:rPr>
-              <a:t>WRITE-3</a:t>
+              <a:t>TASK-3</a:t>
             </a:r>
             <a:endParaRPr lang="en-US" sz="950" dirty="0"/>
           </a:p>
@@ -10921,7 +10923,7 @@
                 <a:ea typeface="Pretendard SemiBold" pitchFamily="34" charset="-122"/>
                 <a:cs typeface="Pretendard SemiBold" pitchFamily="34" charset="-120"/>
               </a:rPr>
-              <a:t>직접 써 보기 ③ — 방법과 기여</a:t>
+              <a:t>과제 ③ — 방법과 기여 채우기</a:t>
             </a:r>
             <a:endParaRPr lang="en-US" sz="3000" dirty="0"/>
           </a:p>
@@ -10960,7 +10962,7 @@
                 <a:ea typeface="Pretendard" pitchFamily="34" charset="-122"/>
                 <a:cs typeface="Pretendard" pitchFamily="34" charset="-120"/>
               </a:rPr>
-              <a:t>방법 네 칸을 채우고 기여를 한 문장으로 써 봅니다. 10분.</a:t>
+              <a:t>과제로 씁니다. 방법 네 칸을 채우고 기여를 한 문장으로 맺습니다.</a:t>
             </a:r>
             <a:endParaRPr lang="en-US" sz="1150" dirty="0"/>
           </a:p>
@@ -11413,7 +11415,7 @@
                 <a:ea typeface="Pretendard" pitchFamily="34" charset="-122"/>
                 <a:cs typeface="Pretendard" pitchFamily="34" charset="-120"/>
               </a:rPr>
-              <a:t>기여가 써지지 않으면 질문으로 돌아갑니다. 둘은 같은 것을 앞뒤로 말한 것입니다.</a:t>
+              <a:t>과제를 쓰다 기여가 써지지 않으면 질문으로 돌아갑니다. 둘은 같은 것을 앞뒤로 말한 것입니다.</a:t>
             </a:r>
             <a:endParaRPr lang="en-US" sz="1200" dirty="0"/>
           </a:p>
@@ -12552,7 +12554,7 @@
                 <a:ea typeface="Pretendard" pitchFamily="34" charset="-122"/>
                 <a:cs typeface="Pretendard" pitchFamily="34" charset="-120"/>
               </a:rPr>
-              <a:t>VERIFY</a:t>
+              <a:t>CHECK</a:t>
             </a:r>
             <a:endParaRPr lang="en-US" sz="950" dirty="0"/>
           </a:p>
@@ -12591,7 +12593,7 @@
                 <a:ea typeface="Pretendard SemiBold" pitchFamily="34" charset="-122"/>
                 <a:cs typeface="Pretendard SemiBold" pitchFamily="34" charset="-120"/>
               </a:rPr>
-              <a:t>여섯 문장이 맞물리는가</a:t>
+              <a:t>과제를 내기 전에 — 여섯 문장이 맞물리는가</a:t>
             </a:r>
             <a:endParaRPr lang="en-US" sz="3000" dirty="0"/>
           </a:p>
@@ -12630,7 +12632,7 @@
                 <a:ea typeface="Pretendard" pitchFamily="34" charset="-122"/>
                 <a:cs typeface="Pretendard" pitchFamily="34" charset="-120"/>
               </a:rPr>
-              <a:t>여섯 문장을 나란히 놓고 위에서 아래로 읽어 봅니다.</a:t>
+              <a:t>과제를 올리기 전에 여섯 문장을 나란히 놓고 위에서 아래로 읽어 봅니다.</a:t>
             </a:r>
             <a:endParaRPr lang="en-US" sz="1150" dirty="0"/>
           </a:p>
@@ -15986,7 +15988,7 @@
                 <a:ea typeface="Pretendard SemiBold" pitchFamily="34" charset="-122"/>
                 <a:cs typeface="Pretendard SemiBold" pitchFamily="34" charset="-120"/>
               </a:rPr>
-              <a:t>프로포절 드래프트 — 여섯 절</a:t>
+              <a:t>여섯 문장 — 절마다 한 문장</a:t>
             </a:r>
             <a:endParaRPr lang="en-US" sz="1400" dirty="0"/>
           </a:p>
@@ -16028,7 +16030,7 @@
                 <a:ea typeface="Pretendard" pitchFamily="34" charset="-122"/>
                 <a:cs typeface="Pretendard" pitchFamily="34" charset="-120"/>
               </a:rPr>
-              <a:t>오늘 쓴 여섯 문장이 각 절의 첫 문장입니다. 그 아래에 설명을 붙여 절마다 한두 쪽으로 만듭니다. 분량보다 여섯 절이 서로 맞물리는지가 중요합니다.</a:t>
+              <a:t>오늘 본 틀에 맞춰 앞으로 쓸 논문의 주제로 한 문장씩 씁니다. 문제 · 질문 · 가설 · 선행연구 · 방법 · 기여 여섯입니다. 이것부터 먼저 하십시오.</a:t>
             </a:r>
             <a:endParaRPr lang="en-US" sz="1100" dirty="0"/>
           </a:p>
@@ -16156,7 +16158,7 @@
                 <a:ea typeface="Pretendard SemiBold" pitchFamily="34" charset="-122"/>
                 <a:cs typeface="Pretendard SemiBold" pitchFamily="34" charset="-120"/>
               </a:rPr>
-              <a:t>동료 프로포절 읽고 질문 두 개</a:t>
+              <a:t>프로포절 드래프트 — 여섯 절</a:t>
             </a:r>
             <a:endParaRPr lang="en-US" sz="1400" dirty="0"/>
           </a:p>
@@ -16198,7 +16200,7 @@
                 <a:ea typeface="Pretendard" pitchFamily="34" charset="-122"/>
                 <a:cs typeface="Pretendard" pitchFamily="34" charset="-120"/>
               </a:rPr>
-              <a:t>올라온 드래프트를 읽고 각 사람에게 질문을 두 개씩 준비해 옵니다. 8회차는 상호 리뷰가 절반입니다.</a:t>
+              <a:t>위 여섯 문장을 각 절의 첫 문장으로 두고 그 아래에 설명을 붙여 절마다 한두 쪽으로 만듭니다. 분량보다 여섯 절이 서로 맞물리는지가 중요합니다.</a:t>
             </a:r>
             <a:endParaRPr lang="en-US" sz="1100" dirty="0"/>
           </a:p>
@@ -16212,10 +16214,35 @@
         </p:nvSpPr>
         <p:spPr>
           <a:xfrm>
-            <a:off x="640080" y="3785616"/>
-            <a:ext cx="6309360" cy="7315"/>
-          </a:xfrm>
-          <a:prstGeom prst="rect">
+            <a:off x="640080" y="3767328"/>
+            <a:ext cx="6309360" cy="896112"/>
+          </a:xfrm>
+          <a:prstGeom prst="rect">
+            <a:avLst/>
+          </a:prstGeom>
+          <a:solidFill>
+            <a:srgbClr val="FFFFFF"/>
+          </a:solidFill>
+          <a:ln w="12700">
+            <a:solidFill>
+              <a:srgbClr val="DCDCDC"/>
+            </a:solidFill>
+            <a:prstDash val="solid"/>
+          </a:ln>
+        </p:spPr>
+      </p:sp>
+      <p:sp>
+        <p:nvSpPr>
+          <p:cNvPr id="20" name="Shape 18"/>
+          <p:cNvSpPr/>
+          <p:nvPr/>
+        </p:nvSpPr>
+        <p:spPr>
+          <a:xfrm>
+            <a:off x="969264" y="4041648"/>
+            <a:ext cx="329184" cy="329184"/>
+          </a:xfrm>
+          <a:prstGeom prst="ellipse">
             <a:avLst/>
           </a:prstGeom>
           <a:solidFill>
@@ -16231,53 +16258,134 @@
       </p:sp>
       <p:sp>
         <p:nvSpPr>
-          <p:cNvPr id="20" name="Text 18"/>
-          <p:cNvSpPr/>
-          <p:nvPr/>
-        </p:nvSpPr>
-        <p:spPr>
-          <a:xfrm>
-            <a:off x="640080" y="3877056"/>
-            <a:ext cx="6309360" cy="329184"/>
-          </a:xfrm>
-          <a:prstGeom prst="rect">
-            <a:avLst/>
-          </a:prstGeom>
-          <a:noFill/>
-          <a:ln/>
-        </p:spPr>
-        <p:txBody>
-          <a:bodyPr wrap="square" lIns="0" tIns="0" rIns="0" bIns="0" rtlCol="0" anchor="ctr"/>
-          <a:lstStyle/>
-          <a:p>
-            <a:pPr indent="0" marL="0">
-              <a:buNone/>
-            </a:pPr>
-            <a:r>
-              <a:rPr lang="en-US" sz="1200" b="1" dirty="0">
+          <p:cNvPr id="21" name="Text 19"/>
+          <p:cNvSpPr/>
+          <p:nvPr/>
+        </p:nvSpPr>
+        <p:spPr>
+          <a:xfrm>
+            <a:off x="969264" y="4041648"/>
+            <a:ext cx="329184" cy="329184"/>
+          </a:xfrm>
+          <a:prstGeom prst="rect">
+            <a:avLst/>
+          </a:prstGeom>
+          <a:noFill/>
+          <a:ln/>
+        </p:spPr>
+        <p:txBody>
+          <a:bodyPr wrap="square" lIns="0" tIns="0" rIns="0" bIns="0" rtlCol="0" anchor="ctr"/>
+          <a:lstStyle/>
+          <a:p>
+            <a:pPr algn="ctr" indent="0" marL="0">
+              <a:buNone/>
+            </a:pPr>
+            <a:r>
+              <a:rPr lang="en-US" sz="1100" b="1" dirty="0">
+                <a:solidFill>
+                  <a:srgbClr val="FFFFFF"/>
+                </a:solidFill>
+                <a:latin typeface="Pretendard" pitchFamily="34" charset="0"/>
+                <a:ea typeface="Pretendard" pitchFamily="34" charset="-122"/>
+                <a:cs typeface="Pretendard" pitchFamily="34" charset="-120"/>
+              </a:rPr>
+              <a:t>3</a:t>
+            </a:r>
+            <a:endParaRPr lang="en-US" sz="1100" dirty="0"/>
+          </a:p>
+        </p:txBody>
+      </p:sp>
+      <p:sp>
+        <p:nvSpPr>
+          <p:cNvPr id="22" name="Text 20"/>
+          <p:cNvSpPr/>
+          <p:nvPr/>
+        </p:nvSpPr>
+        <p:spPr>
+          <a:xfrm>
+            <a:off x="1426464" y="3858768"/>
+            <a:ext cx="5175504" cy="329184"/>
+          </a:xfrm>
+          <a:prstGeom prst="rect">
+            <a:avLst/>
+          </a:prstGeom>
+          <a:noFill/>
+          <a:ln/>
+        </p:spPr>
+        <p:txBody>
+          <a:bodyPr wrap="square" lIns="0" tIns="0" rIns="0" bIns="0" rtlCol="0" anchor="ctr"/>
+          <a:lstStyle/>
+          <a:p>
+            <a:pPr indent="0" marL="0">
+              <a:buNone/>
+            </a:pPr>
+            <a:r>
+              <a:rPr lang="en-US" sz="1400" dirty="0">
                 <a:solidFill>
                   <a:srgbClr val="111111"/>
                 </a:solidFill>
-                <a:latin typeface="Pretendard" pitchFamily="34" charset="0"/>
-                <a:ea typeface="Pretendard" pitchFamily="34" charset="-122"/>
-                <a:cs typeface="Pretendard" pitchFamily="34" charset="-120"/>
-              </a:rPr>
-              <a:t>제출 — 8회차 세션 48시간 전까지 · 공유 폴더 업로드</a:t>
-            </a:r>
-            <a:endParaRPr lang="en-US" sz="1200" dirty="0"/>
-          </a:p>
-        </p:txBody>
-      </p:sp>
-      <p:sp>
-        <p:nvSpPr>
-          <p:cNvPr id="21" name="Shape 19"/>
-          <p:cNvSpPr/>
-          <p:nvPr/>
-        </p:nvSpPr>
-        <p:spPr>
-          <a:xfrm>
-            <a:off x="7351776" y="1719072"/>
-            <a:ext cx="4199839" cy="3803904"/>
+                <a:latin typeface="Pretendard SemiBold" pitchFamily="34" charset="0"/>
+                <a:ea typeface="Pretendard SemiBold" pitchFamily="34" charset="-122"/>
+                <a:cs typeface="Pretendard SemiBold" pitchFamily="34" charset="-120"/>
+              </a:rPr>
+              <a:t>동료 프로포절 읽고 질문 두 개</a:t>
+            </a:r>
+            <a:endParaRPr lang="en-US" sz="1400" dirty="0"/>
+          </a:p>
+        </p:txBody>
+      </p:sp>
+      <p:sp>
+        <p:nvSpPr>
+          <p:cNvPr id="23" name="Text 21"/>
+          <p:cNvSpPr/>
+          <p:nvPr/>
+        </p:nvSpPr>
+        <p:spPr>
+          <a:xfrm>
+            <a:off x="1426464" y="4169664"/>
+            <a:ext cx="5175504" cy="420624"/>
+          </a:xfrm>
+          <a:prstGeom prst="rect">
+            <a:avLst/>
+          </a:prstGeom>
+          <a:noFill/>
+          <a:ln/>
+        </p:spPr>
+        <p:txBody>
+          <a:bodyPr wrap="square" lIns="0" tIns="0" rIns="0" bIns="0" rtlCol="0" anchor="t"/>
+          <a:lstStyle/>
+          <a:p>
+            <a:pPr indent="0" marL="0">
+              <a:lnSpc>
+                <a:spcPct val="122000"/>
+              </a:lnSpc>
+              <a:buNone/>
+            </a:pPr>
+            <a:r>
+              <a:rPr lang="en-US" sz="1100" dirty="0">
+                <a:solidFill>
+                  <a:srgbClr val="6E6E6E"/>
+                </a:solidFill>
+                <a:latin typeface="Pretendard" pitchFamily="34" charset="0"/>
+                <a:ea typeface="Pretendard" pitchFamily="34" charset="-122"/>
+                <a:cs typeface="Pretendard" pitchFamily="34" charset="-120"/>
+              </a:rPr>
+              <a:t>올라온 드래프트를 읽고 각 사람에게 질문을 두 개씩 준비해 옵니다. 8회차는 상호 리뷰가 절반입니다.</a:t>
+            </a:r>
+            <a:endParaRPr lang="en-US" sz="1100" dirty="0"/>
+          </a:p>
+        </p:txBody>
+      </p:sp>
+      <p:sp>
+        <p:nvSpPr>
+          <p:cNvPr id="24" name="Shape 22"/>
+          <p:cNvSpPr/>
+          <p:nvPr/>
+        </p:nvSpPr>
+        <p:spPr>
+          <a:xfrm>
+            <a:off x="640080" y="4809744"/>
+            <a:ext cx="6309360" cy="7315"/>
           </a:xfrm>
           <a:prstGeom prst="rect">
             <a:avLst/>
@@ -16295,7 +16403,71 @@
       </p:sp>
       <p:sp>
         <p:nvSpPr>
-          <p:cNvPr id="22" name="Text 20"/>
+          <p:cNvPr id="25" name="Text 23"/>
+          <p:cNvSpPr/>
+          <p:nvPr/>
+        </p:nvSpPr>
+        <p:spPr>
+          <a:xfrm>
+            <a:off x="640080" y="4901184"/>
+            <a:ext cx="6309360" cy="329184"/>
+          </a:xfrm>
+          <a:prstGeom prst="rect">
+            <a:avLst/>
+          </a:prstGeom>
+          <a:noFill/>
+          <a:ln/>
+        </p:spPr>
+        <p:txBody>
+          <a:bodyPr wrap="square" lIns="0" tIns="0" rIns="0" bIns="0" rtlCol="0" anchor="ctr"/>
+          <a:lstStyle/>
+          <a:p>
+            <a:pPr indent="0" marL="0">
+              <a:buNone/>
+            </a:pPr>
+            <a:r>
+              <a:rPr lang="en-US" sz="1200" b="1" dirty="0">
+                <a:solidFill>
+                  <a:srgbClr val="111111"/>
+                </a:solidFill>
+                <a:latin typeface="Pretendard" pitchFamily="34" charset="0"/>
+                <a:ea typeface="Pretendard" pitchFamily="34" charset="-122"/>
+                <a:cs typeface="Pretendard" pitchFamily="34" charset="-120"/>
+              </a:rPr>
+              <a:t>제출 — 8회차 세션 48시간 전까지 · 공유 폴더 업로드</a:t>
+            </a:r>
+            <a:endParaRPr lang="en-US" sz="1200" dirty="0"/>
+          </a:p>
+        </p:txBody>
+      </p:sp>
+      <p:sp>
+        <p:nvSpPr>
+          <p:cNvPr id="26" name="Shape 24"/>
+          <p:cNvSpPr/>
+          <p:nvPr/>
+        </p:nvSpPr>
+        <p:spPr>
+          <a:xfrm>
+            <a:off x="7351776" y="1719072"/>
+            <a:ext cx="4199839" cy="3803904"/>
+          </a:xfrm>
+          <a:prstGeom prst="rect">
+            <a:avLst/>
+          </a:prstGeom>
+          <a:solidFill>
+            <a:srgbClr val="111111"/>
+          </a:solidFill>
+          <a:ln w="12700">
+            <a:solidFill>
+              <a:srgbClr val="111111"/>
+            </a:solidFill>
+            <a:prstDash val="solid"/>
+          </a:ln>
+        </p:spPr>
+      </p:sp>
+      <p:sp>
+        <p:nvSpPr>
+          <p:cNvPr id="27" name="Text 25"/>
           <p:cNvSpPr/>
           <p:nvPr/>
         </p:nvSpPr>
@@ -16334,7 +16506,7 @@
       </p:sp>
       <p:sp>
         <p:nvSpPr>
-          <p:cNvPr id="23" name="Text 21"/>
+          <p:cNvPr id="28" name="Text 26"/>
           <p:cNvSpPr/>
           <p:nvPr/>
         </p:nvSpPr>
@@ -16373,7 +16545,7 @@
       </p:sp>
       <p:sp>
         <p:nvSpPr>
-          <p:cNvPr id="24" name="Text 22"/>
+          <p:cNvPr id="29" name="Text 27"/>
           <p:cNvSpPr/>
           <p:nvPr/>
         </p:nvSpPr>
@@ -16415,7 +16587,7 @@
       </p:sp>
       <p:sp>
         <p:nvSpPr>
-          <p:cNvPr id="25" name="Shape 23"/>
+          <p:cNvPr id="30" name="Shape 28"/>
           <p:cNvSpPr/>
           <p:nvPr/>
         </p:nvSpPr>
@@ -16440,7 +16612,7 @@
       </p:sp>
       <p:sp>
         <p:nvSpPr>
-          <p:cNvPr id="26" name="Text 24"/>
+          <p:cNvPr id="31" name="Text 29"/>
           <p:cNvSpPr/>
           <p:nvPr/>
         </p:nvSpPr>
@@ -16558,7 +16730,7 @@
       </p:sp>
       <p:sp>
         <p:nvSpPr>
-          <p:cNvPr id="27" name="Shape 25"/>
+          <p:cNvPr id="32" name="Shape 30"/>
           <p:cNvSpPr/>
           <p:nvPr/>
         </p:nvSpPr>
@@ -16583,7 +16755,7 @@
       </p:sp>
       <p:sp>
         <p:nvSpPr>
-          <p:cNvPr id="28" name="Text 26"/>
+          <p:cNvPr id="33" name="Text 31"/>
           <p:cNvSpPr/>
           <p:nvPr/>
         </p:nvSpPr>
@@ -16622,7 +16794,7 @@
       </p:sp>
       <p:sp>
         <p:nvSpPr>
-          <p:cNvPr id="29" name="Text 27"/>
+          <p:cNvPr id="34" name="Text 32"/>
           <p:cNvSpPr/>
           <p:nvPr/>
         </p:nvSpPr>
@@ -16664,7 +16836,7 @@
       </p:sp>
       <p:sp>
         <p:nvSpPr>
-          <p:cNvPr id="30" name="Shape 28"/>
+          <p:cNvPr id="35" name="Shape 33"/>
           <p:cNvSpPr/>
           <p:nvPr/>
         </p:nvSpPr>
@@ -16689,7 +16861,7 @@
       </p:sp>
       <p:sp>
         <p:nvSpPr>
-          <p:cNvPr id="31" name="Text 29"/>
+          <p:cNvPr id="36" name="Text 34"/>
           <p:cNvSpPr/>
           <p:nvPr/>
         </p:nvSpPr>
@@ -16728,7 +16900,7 @@
       </p:sp>
       <p:sp>
         <p:nvSpPr>
-          <p:cNvPr id="32" name="Text 30"/>
+          <p:cNvPr id="37" name="Text 35"/>
           <p:cNvSpPr/>
           <p:nvPr/>
         </p:nvSpPr>
@@ -18944,7 +19116,7 @@
                 <a:ea typeface="Pretendard" pitchFamily="34" charset="-122"/>
                 <a:cs typeface="Pretendard" pitchFamily="34" charset="-120"/>
               </a:rPr>
-              <a:t>오늘은 완성하는 자리가 아니라 여섯 문장을 꺼내 놓는 자리입니다.</a:t>
+              <a:t>완성하려 하지 마십시오. 여섯 문장을 꺼내 놓는 것이 과제입니다.</a:t>
             </a:r>
             <a:endParaRPr lang="en-US" sz="1200" dirty="0"/>
           </a:p>
@@ -22235,7 +22407,7 @@
                 <a:ea typeface="Pretendard" pitchFamily="34" charset="-122"/>
                 <a:cs typeface="Pretendard" pitchFamily="34" charset="-120"/>
               </a:rPr>
-              <a:t>WRITE-1</a:t>
+              <a:t>TASK-1</a:t>
             </a:r>
             <a:endParaRPr lang="en-US" sz="950" dirty="0"/>
           </a:p>
@@ -22274,7 +22446,7 @@
                 <a:ea typeface="Pretendard SemiBold" pitchFamily="34" charset="-122"/>
                 <a:cs typeface="Pretendard SemiBold" pitchFamily="34" charset="-120"/>
               </a:rPr>
-              <a:t>직접 써 보기 ① — 문제</a:t>
+              <a:t>과제 ① — 문제 문장 채우기</a:t>
             </a:r>
             <a:endParaRPr lang="en-US" sz="3000" dirty="0"/>
           </a:p>
@@ -22313,7 +22485,7 @@
                 <a:ea typeface="Pretendard" pitchFamily="34" charset="-122"/>
                 <a:cs typeface="Pretendard" pitchFamily="34" charset="-120"/>
               </a:rPr>
-              <a:t>앞으로 쓸 논문의 주제와 관련하여 첫 문장을 써 봅니다. 5분.</a:t>
+              <a:t>과제로 씁니다. 왼쪽 세 칸을 채우고 한 문장으로 잇습니다.</a:t>
             </a:r>
             <a:endParaRPr lang="en-US" sz="1150" dirty="0"/>
           </a:p>
@@ -22766,7 +22938,7 @@
                 <a:ea typeface="Pretendard" pitchFamily="34" charset="-122"/>
                 <a:cs typeface="Pretendard" pitchFamily="34" charset="-120"/>
               </a:rPr>
-              <a:t>쓴 문장을 소리 내어 읽어 봅니다. 어색한 곳이 고칠 곳입니다.</a:t>
+              <a:t>과제로 쓰신 뒤 소리 내어 읽어 봅니다. 어색한 곳이 고칠 곳입니다.</a:t>
             </a:r>
             <a:endParaRPr lang="en-US" sz="1200" dirty="0"/>
           </a:p>
